--- a/docs/pptx/whole/jx-linsubhr-ratio-throm3.pptx
+++ b/docs/pptx/whole/jx-linsubhr-ratio-throm3.pptx
@@ -2271,7 +2271,7 @@
           </p:nvSpPr>
           <p:spPr>
             <a:xfrm>
-              <a:off x="817517" y="5114368"/>
+              <a:off x="817517" y="5142518"/>
               <a:ext cx="7799693" cy="0"/>
             </a:xfrm>
             <a:custGeom>
@@ -2314,7 +2314,7 @@
           </p:nvSpPr>
           <p:spPr>
             <a:xfrm>
-              <a:off x="817517" y="4244691"/>
+              <a:off x="817517" y="4313054"/>
               <a:ext cx="7799693" cy="0"/>
             </a:xfrm>
             <a:custGeom>
@@ -2357,7 +2357,7 @@
           </p:nvSpPr>
           <p:spPr>
             <a:xfrm>
-              <a:off x="817517" y="3375014"/>
+              <a:off x="817517" y="3483591"/>
               <a:ext cx="7799693" cy="0"/>
             </a:xfrm>
             <a:custGeom>
@@ -2400,7 +2400,7 @@
           </p:nvSpPr>
           <p:spPr>
             <a:xfrm>
-              <a:off x="817517" y="2505337"/>
+              <a:off x="817517" y="2654127"/>
               <a:ext cx="7799693" cy="0"/>
             </a:xfrm>
             <a:custGeom>
@@ -2443,15 +2443,15 @@
           </p:nvSpPr>
           <p:spPr>
             <a:xfrm>
-              <a:off x="1615213" y="1896563"/>
-              <a:ext cx="0" cy="3826579"/>
+              <a:off x="1615213" y="2073503"/>
+              <a:ext cx="0" cy="3649639"/>
             </a:xfrm>
             <a:custGeom>
               <a:avLst/>
               <a:pathLst>
-                <a:path w="0" h="3826579">
+                <a:path w="0" h="3649639">
                   <a:moveTo>
-                    <a:pt x="0" y="3826579"/>
+                    <a:pt x="0" y="3649639"/>
                   </a:moveTo>
                   <a:lnTo>
                     <a:pt x="0" y="0"/>
@@ -2486,15 +2486,15 @@
           </p:nvSpPr>
           <p:spPr>
             <a:xfrm>
-              <a:off x="3387871" y="1896563"/>
-              <a:ext cx="0" cy="3826579"/>
+              <a:off x="3387871" y="2073503"/>
+              <a:ext cx="0" cy="3649639"/>
             </a:xfrm>
             <a:custGeom>
               <a:avLst/>
               <a:pathLst>
-                <a:path w="0" h="3826579">
+                <a:path w="0" h="3649639">
                   <a:moveTo>
-                    <a:pt x="0" y="3826579"/>
+                    <a:pt x="0" y="3649639"/>
                   </a:moveTo>
                   <a:lnTo>
                     <a:pt x="0" y="0"/>
@@ -2529,15 +2529,15 @@
           </p:nvSpPr>
           <p:spPr>
             <a:xfrm>
-              <a:off x="5160528" y="1896563"/>
-              <a:ext cx="0" cy="3826579"/>
+              <a:off x="5160528" y="2073503"/>
+              <a:ext cx="0" cy="3649639"/>
             </a:xfrm>
             <a:custGeom>
               <a:avLst/>
               <a:pathLst>
-                <a:path w="0" h="3826579">
+                <a:path w="0" h="3649639">
                   <a:moveTo>
-                    <a:pt x="0" y="3826579"/>
+                    <a:pt x="0" y="3649639"/>
                   </a:moveTo>
                   <a:lnTo>
                     <a:pt x="0" y="0"/>
@@ -2572,15 +2572,15 @@
           </p:nvSpPr>
           <p:spPr>
             <a:xfrm>
-              <a:off x="6933186" y="1896563"/>
-              <a:ext cx="0" cy="3826579"/>
+              <a:off x="6933186" y="2073503"/>
+              <a:ext cx="0" cy="3649639"/>
             </a:xfrm>
             <a:custGeom>
               <a:avLst/>
               <a:pathLst>
-                <a:path w="0" h="3826579">
+                <a:path w="0" h="3649639">
                   <a:moveTo>
-                    <a:pt x="0" y="3826579"/>
+                    <a:pt x="0" y="3649639"/>
                   </a:moveTo>
                   <a:lnTo>
                     <a:pt x="0" y="0"/>
@@ -2615,7 +2615,7 @@
           </p:nvSpPr>
           <p:spPr>
             <a:xfrm>
-              <a:off x="817517" y="5549207"/>
+              <a:off x="817517" y="5557249"/>
               <a:ext cx="7799693" cy="0"/>
             </a:xfrm>
             <a:custGeom>
@@ -2658,7 +2658,7 @@
           </p:nvSpPr>
           <p:spPr>
             <a:xfrm>
-              <a:off x="817517" y="4679530"/>
+              <a:off x="817517" y="4727786"/>
               <a:ext cx="7799693" cy="0"/>
             </a:xfrm>
             <a:custGeom>
@@ -2701,7 +2701,7 @@
           </p:nvSpPr>
           <p:spPr>
             <a:xfrm>
-              <a:off x="817517" y="3809853"/>
+              <a:off x="817517" y="3898322"/>
               <a:ext cx="7799693" cy="0"/>
             </a:xfrm>
             <a:custGeom>
@@ -2744,7 +2744,7 @@
           </p:nvSpPr>
           <p:spPr>
             <a:xfrm>
-              <a:off x="817517" y="2940175"/>
+              <a:off x="817517" y="3068859"/>
               <a:ext cx="7799693" cy="0"/>
             </a:xfrm>
             <a:custGeom>
@@ -2787,7 +2787,7 @@
           </p:nvSpPr>
           <p:spPr>
             <a:xfrm>
-              <a:off x="817517" y="2070498"/>
+              <a:off x="817517" y="2239395"/>
               <a:ext cx="7799693" cy="0"/>
             </a:xfrm>
             <a:custGeom>
@@ -2830,15 +2830,15 @@
           </p:nvSpPr>
           <p:spPr>
             <a:xfrm>
-              <a:off x="2501542" y="1896563"/>
-              <a:ext cx="0" cy="3826579"/>
+              <a:off x="2501542" y="2073503"/>
+              <a:ext cx="0" cy="3649639"/>
             </a:xfrm>
             <a:custGeom>
               <a:avLst/>
               <a:pathLst>
-                <a:path w="0" h="3826579">
+                <a:path w="0" h="3649639">
                   <a:moveTo>
-                    <a:pt x="0" y="3826579"/>
+                    <a:pt x="0" y="3649639"/>
                   </a:moveTo>
                   <a:lnTo>
                     <a:pt x="0" y="0"/>
@@ -2873,15 +2873,15 @@
           </p:nvSpPr>
           <p:spPr>
             <a:xfrm>
-              <a:off x="4274200" y="1896563"/>
-              <a:ext cx="0" cy="3826579"/>
+              <a:off x="4274200" y="2073503"/>
+              <a:ext cx="0" cy="3649639"/>
             </a:xfrm>
             <a:custGeom>
               <a:avLst/>
               <a:pathLst>
-                <a:path w="0" h="3826579">
+                <a:path w="0" h="3649639">
                   <a:moveTo>
-                    <a:pt x="0" y="3826579"/>
+                    <a:pt x="0" y="3649639"/>
                   </a:moveTo>
                   <a:lnTo>
                     <a:pt x="0" y="0"/>
@@ -2916,15 +2916,15 @@
           </p:nvSpPr>
           <p:spPr>
             <a:xfrm>
-              <a:off x="6046857" y="1896563"/>
-              <a:ext cx="0" cy="3826579"/>
+              <a:off x="6046857" y="2073503"/>
+              <a:ext cx="0" cy="3649639"/>
             </a:xfrm>
             <a:custGeom>
               <a:avLst/>
               <a:pathLst>
-                <a:path w="0" h="3826579">
+                <a:path w="0" h="3649639">
                   <a:moveTo>
-                    <a:pt x="0" y="3826579"/>
+                    <a:pt x="0" y="3649639"/>
                   </a:moveTo>
                   <a:lnTo>
                     <a:pt x="0" y="0"/>
@@ -2959,15 +2959,15 @@
           </p:nvSpPr>
           <p:spPr>
             <a:xfrm>
-              <a:off x="7819515" y="1896563"/>
-              <a:ext cx="0" cy="3826579"/>
+              <a:off x="7819515" y="2073503"/>
+              <a:ext cx="0" cy="3649639"/>
             </a:xfrm>
             <a:custGeom>
               <a:avLst/>
               <a:pathLst>
-                <a:path w="0" h="3826579">
+                <a:path w="0" h="3649639">
                   <a:moveTo>
-                    <a:pt x="0" y="3826579"/>
+                    <a:pt x="0" y="3649639"/>
                   </a:moveTo>
                   <a:lnTo>
                     <a:pt x="0" y="0"/>
@@ -3002,549 +3002,549 @@
           </p:nvSpPr>
           <p:spPr>
             <a:xfrm>
-              <a:off x="817517" y="1896563"/>
-              <a:ext cx="7235830" cy="3598959"/>
+              <a:off x="817517" y="2073503"/>
+              <a:ext cx="7235830" cy="3432544"/>
             </a:xfrm>
             <a:custGeom>
               <a:avLst/>
               <a:pathLst>
-                <a:path w="7235830" h="3598959">
+                <a:path w="7235830" h="3432544">
                   <a:moveTo>
                     <a:pt x="1502065" y="0"/>
                   </a:moveTo>
                   <a:lnTo>
-                    <a:pt x="1556308" y="143938"/>
-                  </a:lnTo>
-                  <a:lnTo>
-                    <a:pt x="1630068" y="329328"/>
-                  </a:lnTo>
-                  <a:lnTo>
-                    <a:pt x="1703828" y="504922"/>
-                  </a:lnTo>
-                  <a:lnTo>
-                    <a:pt x="1777588" y="671238"/>
-                  </a:lnTo>
-                  <a:lnTo>
-                    <a:pt x="1851348" y="828767"/>
-                  </a:lnTo>
-                  <a:lnTo>
-                    <a:pt x="1925108" y="977972"/>
-                  </a:lnTo>
-                  <a:lnTo>
-                    <a:pt x="1998868" y="1119294"/>
-                  </a:lnTo>
-                  <a:lnTo>
-                    <a:pt x="2072628" y="1253149"/>
-                  </a:lnTo>
-                  <a:lnTo>
-                    <a:pt x="2146388" y="1379931"/>
-                  </a:lnTo>
-                  <a:lnTo>
-                    <a:pt x="2220148" y="1500014"/>
-                  </a:lnTo>
-                  <a:lnTo>
-                    <a:pt x="2293908" y="1613753"/>
-                  </a:lnTo>
-                  <a:lnTo>
-                    <a:pt x="2367668" y="1721482"/>
-                  </a:lnTo>
-                  <a:lnTo>
-                    <a:pt x="2441428" y="1823518"/>
-                  </a:lnTo>
-                  <a:lnTo>
-                    <a:pt x="2515188" y="1920164"/>
-                  </a:lnTo>
-                  <a:lnTo>
-                    <a:pt x="2588948" y="2011703"/>
-                  </a:lnTo>
-                  <a:lnTo>
-                    <a:pt x="2662708" y="2098406"/>
-                  </a:lnTo>
-                  <a:lnTo>
-                    <a:pt x="2736468" y="2180527"/>
-                  </a:lnTo>
-                  <a:lnTo>
-                    <a:pt x="2810228" y="2258309"/>
-                  </a:lnTo>
-                  <a:lnTo>
-                    <a:pt x="2883988" y="2331982"/>
-                  </a:lnTo>
-                  <a:lnTo>
-                    <a:pt x="2957748" y="2401761"/>
-                  </a:lnTo>
-                  <a:lnTo>
-                    <a:pt x="3031508" y="2467854"/>
-                  </a:lnTo>
-                  <a:lnTo>
-                    <a:pt x="3105268" y="2530455"/>
-                  </a:lnTo>
-                  <a:lnTo>
-                    <a:pt x="3179028" y="2589748"/>
-                  </a:lnTo>
-                  <a:lnTo>
-                    <a:pt x="3252788" y="2645908"/>
-                  </a:lnTo>
-                  <a:lnTo>
-                    <a:pt x="3326548" y="2699101"/>
-                  </a:lnTo>
-                  <a:lnTo>
-                    <a:pt x="3400308" y="2749484"/>
-                  </a:lnTo>
-                  <a:lnTo>
-                    <a:pt x="3474068" y="2788355"/>
-                  </a:lnTo>
-                  <a:lnTo>
-                    <a:pt x="3547828" y="2805841"/>
-                  </a:lnTo>
-                  <a:lnTo>
-                    <a:pt x="3621588" y="2822974"/>
-                  </a:lnTo>
-                  <a:lnTo>
-                    <a:pt x="3695348" y="2839760"/>
-                  </a:lnTo>
-                  <a:lnTo>
-                    <a:pt x="3769108" y="2856206"/>
-                  </a:lnTo>
-                  <a:lnTo>
-                    <a:pt x="3842868" y="2872320"/>
-                  </a:lnTo>
-                  <a:lnTo>
-                    <a:pt x="3916628" y="2888107"/>
-                  </a:lnTo>
-                  <a:lnTo>
-                    <a:pt x="3990388" y="2903575"/>
-                  </a:lnTo>
-                  <a:lnTo>
-                    <a:pt x="4064149" y="2918730"/>
-                  </a:lnTo>
-                  <a:lnTo>
-                    <a:pt x="4137909" y="2933579"/>
-                  </a:lnTo>
-                  <a:lnTo>
-                    <a:pt x="4211669" y="2948127"/>
-                  </a:lnTo>
-                  <a:lnTo>
-                    <a:pt x="4285429" y="2962381"/>
-                  </a:lnTo>
-                  <a:lnTo>
-                    <a:pt x="4359189" y="2976347"/>
-                  </a:lnTo>
-                  <a:lnTo>
-                    <a:pt x="4432949" y="2990029"/>
-                  </a:lnTo>
-                  <a:lnTo>
-                    <a:pt x="4506709" y="3003435"/>
-                  </a:lnTo>
-                  <a:lnTo>
-                    <a:pt x="4580469" y="3016570"/>
-                  </a:lnTo>
-                  <a:lnTo>
-                    <a:pt x="4654229" y="3029439"/>
-                  </a:lnTo>
-                  <a:lnTo>
-                    <a:pt x="4727989" y="3042048"/>
-                  </a:lnTo>
-                  <a:lnTo>
-                    <a:pt x="4801749" y="3054402"/>
-                  </a:lnTo>
-                  <a:lnTo>
-                    <a:pt x="4875509" y="3066505"/>
-                  </a:lnTo>
-                  <a:lnTo>
-                    <a:pt x="4949269" y="3078364"/>
-                  </a:lnTo>
-                  <a:lnTo>
-                    <a:pt x="5023029" y="3089983"/>
-                  </a:lnTo>
-                  <a:lnTo>
-                    <a:pt x="5096789" y="3101367"/>
-                  </a:lnTo>
-                  <a:lnTo>
-                    <a:pt x="5170549" y="3112520"/>
-                  </a:lnTo>
-                  <a:lnTo>
-                    <a:pt x="5244309" y="3123448"/>
-                  </a:lnTo>
-                  <a:lnTo>
-                    <a:pt x="5318069" y="3134155"/>
-                  </a:lnTo>
-                  <a:lnTo>
-                    <a:pt x="5391829" y="3144645"/>
-                  </a:lnTo>
-                  <a:lnTo>
-                    <a:pt x="5465589" y="3154923"/>
-                  </a:lnTo>
-                  <a:lnTo>
-                    <a:pt x="5539349" y="3164993"/>
-                  </a:lnTo>
-                  <a:lnTo>
-                    <a:pt x="5613109" y="3174859"/>
-                  </a:lnTo>
-                  <a:lnTo>
-                    <a:pt x="5686869" y="3184526"/>
-                  </a:lnTo>
-                  <a:lnTo>
-                    <a:pt x="5760629" y="3193997"/>
-                  </a:lnTo>
-                  <a:lnTo>
-                    <a:pt x="5834389" y="3203276"/>
-                  </a:lnTo>
-                  <a:lnTo>
-                    <a:pt x="5908149" y="3212368"/>
-                  </a:lnTo>
-                  <a:lnTo>
-                    <a:pt x="5981909" y="3221275"/>
-                  </a:lnTo>
-                  <a:lnTo>
-                    <a:pt x="6055669" y="3230003"/>
-                  </a:lnTo>
-                  <a:lnTo>
-                    <a:pt x="6129429" y="3238554"/>
-                  </a:lnTo>
-                  <a:lnTo>
-                    <a:pt x="6203189" y="3246932"/>
-                  </a:lnTo>
-                  <a:lnTo>
-                    <a:pt x="6276949" y="3255140"/>
-                  </a:lnTo>
-                  <a:lnTo>
-                    <a:pt x="6350709" y="3263182"/>
-                  </a:lnTo>
-                  <a:lnTo>
-                    <a:pt x="6424469" y="3271062"/>
-                  </a:lnTo>
-                  <a:lnTo>
-                    <a:pt x="6498229" y="3278782"/>
-                  </a:lnTo>
-                  <a:lnTo>
-                    <a:pt x="6571989" y="3286346"/>
-                  </a:lnTo>
-                  <a:lnTo>
-                    <a:pt x="6645749" y="3293757"/>
-                  </a:lnTo>
-                  <a:lnTo>
-                    <a:pt x="6719509" y="3301018"/>
-                  </a:lnTo>
-                  <a:lnTo>
-                    <a:pt x="6793269" y="3308132"/>
-                  </a:lnTo>
-                  <a:lnTo>
-                    <a:pt x="6867029" y="3315102"/>
-                  </a:lnTo>
-                  <a:lnTo>
-                    <a:pt x="6940789" y="3321931"/>
-                  </a:lnTo>
-                  <a:lnTo>
-                    <a:pt x="7014550" y="3328622"/>
-                  </a:lnTo>
-                  <a:lnTo>
-                    <a:pt x="7088310" y="3335178"/>
-                  </a:lnTo>
-                  <a:lnTo>
-                    <a:pt x="7162070" y="3341601"/>
-                  </a:lnTo>
-                  <a:lnTo>
-                    <a:pt x="7235830" y="3347894"/>
-                  </a:lnTo>
-                  <a:lnTo>
-                    <a:pt x="7235830" y="3598959"/>
-                  </a:lnTo>
-                  <a:lnTo>
-                    <a:pt x="7162070" y="3595964"/>
-                  </a:lnTo>
-                  <a:lnTo>
-                    <a:pt x="7088310" y="3592802"/>
-                  </a:lnTo>
-                  <a:lnTo>
-                    <a:pt x="7014550" y="3589464"/>
-                  </a:lnTo>
-                  <a:lnTo>
-                    <a:pt x="6940789" y="3585940"/>
-                  </a:lnTo>
-                  <a:lnTo>
-                    <a:pt x="6867029" y="3582218"/>
-                  </a:lnTo>
-                  <a:lnTo>
-                    <a:pt x="6793269" y="3578290"/>
-                  </a:lnTo>
-                  <a:lnTo>
-                    <a:pt x="6719509" y="3574142"/>
-                  </a:lnTo>
-                  <a:lnTo>
-                    <a:pt x="6645749" y="3569763"/>
-                  </a:lnTo>
-                  <a:lnTo>
-                    <a:pt x="6571989" y="3565139"/>
-                  </a:lnTo>
-                  <a:lnTo>
-                    <a:pt x="6498229" y="3560258"/>
-                  </a:lnTo>
-                  <a:lnTo>
-                    <a:pt x="6424469" y="3555104"/>
-                  </a:lnTo>
-                  <a:lnTo>
-                    <a:pt x="6350709" y="3549663"/>
-                  </a:lnTo>
-                  <a:lnTo>
-                    <a:pt x="6276949" y="3543919"/>
-                  </a:lnTo>
-                  <a:lnTo>
-                    <a:pt x="6203189" y="3537853"/>
-                  </a:lnTo>
-                  <a:lnTo>
-                    <a:pt x="6129429" y="3531450"/>
-                  </a:lnTo>
-                  <a:lnTo>
-                    <a:pt x="6055669" y="3524689"/>
-                  </a:lnTo>
-                  <a:lnTo>
-                    <a:pt x="5981909" y="3517551"/>
-                  </a:lnTo>
-                  <a:lnTo>
-                    <a:pt x="5908149" y="3510015"/>
-                  </a:lnTo>
-                  <a:lnTo>
-                    <a:pt x="5834389" y="3502059"/>
-                  </a:lnTo>
-                  <a:lnTo>
-                    <a:pt x="5760629" y="3493659"/>
-                  </a:lnTo>
-                  <a:lnTo>
-                    <a:pt x="5686869" y="3484790"/>
-                  </a:lnTo>
-                  <a:lnTo>
-                    <a:pt x="5613109" y="3475426"/>
-                  </a:lnTo>
-                  <a:lnTo>
-                    <a:pt x="5539349" y="3465540"/>
-                  </a:lnTo>
-                  <a:lnTo>
-                    <a:pt x="5465589" y="3455103"/>
-                  </a:lnTo>
-                  <a:lnTo>
-                    <a:pt x="5391829" y="3444083"/>
-                  </a:lnTo>
-                  <a:lnTo>
-                    <a:pt x="5318069" y="3432449"/>
-                  </a:lnTo>
-                  <a:lnTo>
-                    <a:pt x="5244309" y="3420165"/>
-                  </a:lnTo>
-                  <a:lnTo>
-                    <a:pt x="5170549" y="3407196"/>
-                  </a:lnTo>
-                  <a:lnTo>
-                    <a:pt x="5096789" y="3393504"/>
-                  </a:lnTo>
-                  <a:lnTo>
-                    <a:pt x="5023029" y="3379048"/>
-                  </a:lnTo>
-                  <a:lnTo>
-                    <a:pt x="4949269" y="3363786"/>
-                  </a:lnTo>
-                  <a:lnTo>
-                    <a:pt x="4875509" y="3347672"/>
-                  </a:lnTo>
-                  <a:lnTo>
-                    <a:pt x="4801749" y="3330660"/>
-                  </a:lnTo>
-                  <a:lnTo>
-                    <a:pt x="4727989" y="3312698"/>
-                  </a:lnTo>
-                  <a:lnTo>
-                    <a:pt x="4654229" y="3293734"/>
-                  </a:lnTo>
-                  <a:lnTo>
-                    <a:pt x="4580469" y="3273713"/>
-                  </a:lnTo>
-                  <a:lnTo>
-                    <a:pt x="4506709" y="3252574"/>
-                  </a:lnTo>
-                  <a:lnTo>
-                    <a:pt x="4432949" y="3230256"/>
-                  </a:lnTo>
-                  <a:lnTo>
-                    <a:pt x="4359189" y="3206694"/>
-                  </a:lnTo>
-                  <a:lnTo>
-                    <a:pt x="4285429" y="3181817"/>
-                  </a:lnTo>
-                  <a:lnTo>
-                    <a:pt x="4211669" y="3155552"/>
-                  </a:lnTo>
-                  <a:lnTo>
-                    <a:pt x="4137909" y="3127822"/>
-                  </a:lnTo>
-                  <a:lnTo>
-                    <a:pt x="4064149" y="3098545"/>
-                  </a:lnTo>
-                  <a:lnTo>
-                    <a:pt x="3990388" y="3067635"/>
-                  </a:lnTo>
-                  <a:lnTo>
-                    <a:pt x="3916628" y="3035000"/>
-                  </a:lnTo>
-                  <a:lnTo>
-                    <a:pt x="3842868" y="3000545"/>
-                  </a:lnTo>
-                  <a:lnTo>
-                    <a:pt x="3769108" y="2964168"/>
-                  </a:lnTo>
-                  <a:lnTo>
-                    <a:pt x="3695348" y="2925762"/>
-                  </a:lnTo>
-                  <a:lnTo>
-                    <a:pt x="3621588" y="2885213"/>
-                  </a:lnTo>
-                  <a:lnTo>
-                    <a:pt x="3547828" y="2842403"/>
-                  </a:lnTo>
-                  <a:lnTo>
-                    <a:pt x="3474068" y="2797204"/>
-                  </a:lnTo>
-                  <a:lnTo>
-                    <a:pt x="3400308" y="2770507"/>
-                  </a:lnTo>
-                  <a:lnTo>
-                    <a:pt x="3326548" y="2752291"/>
-                  </a:lnTo>
-                  <a:lnTo>
-                    <a:pt x="3252788" y="2733699"/>
-                  </a:lnTo>
-                  <a:lnTo>
-                    <a:pt x="3179028" y="2714723"/>
-                  </a:lnTo>
-                  <a:lnTo>
-                    <a:pt x="3105268" y="2695355"/>
-                  </a:lnTo>
-                  <a:lnTo>
-                    <a:pt x="3031508" y="2675587"/>
-                  </a:lnTo>
-                  <a:lnTo>
-                    <a:pt x="2957748" y="2655411"/>
-                  </a:lnTo>
-                  <a:lnTo>
-                    <a:pt x="2883988" y="2634818"/>
-                  </a:lnTo>
-                  <a:lnTo>
-                    <a:pt x="2810228" y="2613800"/>
-                  </a:lnTo>
-                  <a:lnTo>
-                    <a:pt x="2736468" y="2592348"/>
-                  </a:lnTo>
-                  <a:lnTo>
-                    <a:pt x="2662708" y="2570453"/>
-                  </a:lnTo>
-                  <a:lnTo>
-                    <a:pt x="2588948" y="2548106"/>
-                  </a:lnTo>
-                  <a:lnTo>
-                    <a:pt x="2515188" y="2525298"/>
-                  </a:lnTo>
-                  <a:lnTo>
-                    <a:pt x="2441428" y="2502018"/>
-                  </a:lnTo>
-                  <a:lnTo>
-                    <a:pt x="2367668" y="2478258"/>
-                  </a:lnTo>
-                  <a:lnTo>
-                    <a:pt x="2293908" y="2454007"/>
-                  </a:lnTo>
-                  <a:lnTo>
-                    <a:pt x="2220148" y="2429255"/>
-                  </a:lnTo>
-                  <a:lnTo>
-                    <a:pt x="2146388" y="2403993"/>
-                  </a:lnTo>
-                  <a:lnTo>
-                    <a:pt x="2072628" y="2378208"/>
-                  </a:lnTo>
-                  <a:lnTo>
-                    <a:pt x="1998868" y="2351891"/>
-                  </a:lnTo>
-                  <a:lnTo>
-                    <a:pt x="1925108" y="2325031"/>
-                  </a:lnTo>
-                  <a:lnTo>
-                    <a:pt x="1851348" y="2297616"/>
-                  </a:lnTo>
-                  <a:lnTo>
-                    <a:pt x="1777588" y="2269635"/>
-                  </a:lnTo>
-                  <a:lnTo>
-                    <a:pt x="1703828" y="2241076"/>
-                  </a:lnTo>
-                  <a:lnTo>
-                    <a:pt x="1630068" y="2211927"/>
-                  </a:lnTo>
-                  <a:lnTo>
-                    <a:pt x="1556308" y="2182176"/>
-                  </a:lnTo>
-                  <a:lnTo>
-                    <a:pt x="1482548" y="2151811"/>
-                  </a:lnTo>
-                  <a:lnTo>
-                    <a:pt x="1408788" y="2120819"/>
-                  </a:lnTo>
-                  <a:lnTo>
-                    <a:pt x="1335028" y="2089187"/>
-                  </a:lnTo>
-                  <a:lnTo>
-                    <a:pt x="1261268" y="2056902"/>
-                  </a:lnTo>
-                  <a:lnTo>
-                    <a:pt x="1187508" y="2023950"/>
-                  </a:lnTo>
-                  <a:lnTo>
-                    <a:pt x="1113747" y="1990318"/>
-                  </a:lnTo>
-                  <a:lnTo>
-                    <a:pt x="1039987" y="1955991"/>
-                  </a:lnTo>
-                  <a:lnTo>
-                    <a:pt x="966227" y="1920955"/>
-                  </a:lnTo>
-                  <a:lnTo>
-                    <a:pt x="892467" y="1885196"/>
-                  </a:lnTo>
-                  <a:lnTo>
-                    <a:pt x="818707" y="1848699"/>
-                  </a:lnTo>
-                  <a:lnTo>
-                    <a:pt x="744947" y="1811448"/>
-                  </a:lnTo>
-                  <a:lnTo>
-                    <a:pt x="671187" y="1773427"/>
-                  </a:lnTo>
-                  <a:lnTo>
-                    <a:pt x="597427" y="1734621"/>
-                  </a:lnTo>
-                  <a:lnTo>
-                    <a:pt x="523667" y="1695015"/>
-                  </a:lnTo>
-                  <a:lnTo>
-                    <a:pt x="449907" y="1654590"/>
-                  </a:lnTo>
-                  <a:lnTo>
-                    <a:pt x="376147" y="1613330"/>
-                  </a:lnTo>
-                  <a:lnTo>
-                    <a:pt x="302387" y="1571219"/>
-                  </a:lnTo>
-                  <a:lnTo>
-                    <a:pt x="228627" y="1528237"/>
-                  </a:lnTo>
-                  <a:lnTo>
-                    <a:pt x="154867" y="1484369"/>
-                  </a:lnTo>
-                  <a:lnTo>
-                    <a:pt x="81107" y="1439594"/>
-                  </a:lnTo>
-                  <a:lnTo>
-                    <a:pt x="7347" y="1393895"/>
-                  </a:lnTo>
-                  <a:lnTo>
-                    <a:pt x="0" y="1389249"/>
+                    <a:pt x="1556308" y="137283"/>
+                  </a:lnTo>
+                  <a:lnTo>
+                    <a:pt x="1630068" y="314100"/>
+                  </a:lnTo>
+                  <a:lnTo>
+                    <a:pt x="1703828" y="481575"/>
+                  </a:lnTo>
+                  <a:lnTo>
+                    <a:pt x="1777588" y="640201"/>
+                  </a:lnTo>
+                  <a:lnTo>
+                    <a:pt x="1851348" y="790445"/>
+                  </a:lnTo>
+                  <a:lnTo>
+                    <a:pt x="1925108" y="932751"/>
+                  </a:lnTo>
+                  <a:lnTo>
+                    <a:pt x="1998868" y="1067538"/>
+                  </a:lnTo>
+                  <a:lnTo>
+                    <a:pt x="2072628" y="1195203"/>
+                  </a:lnTo>
+                  <a:lnTo>
+                    <a:pt x="2146388" y="1316123"/>
+                  </a:lnTo>
+                  <a:lnTo>
+                    <a:pt x="2220148" y="1430654"/>
+                  </a:lnTo>
+                  <a:lnTo>
+                    <a:pt x="2293908" y="1539133"/>
+                  </a:lnTo>
+                  <a:lnTo>
+                    <a:pt x="2367668" y="1641881"/>
+                  </a:lnTo>
+                  <a:lnTo>
+                    <a:pt x="2441428" y="1739200"/>
+                  </a:lnTo>
+                  <a:lnTo>
+                    <a:pt x="2515188" y="1831376"/>
+                  </a:lnTo>
+                  <a:lnTo>
+                    <a:pt x="2588948" y="1918683"/>
+                  </a:lnTo>
+                  <a:lnTo>
+                    <a:pt x="2662708" y="2001376"/>
+                  </a:lnTo>
+                  <a:lnTo>
+                    <a:pt x="2736468" y="2079700"/>
+                  </a:lnTo>
+                  <a:lnTo>
+                    <a:pt x="2810228" y="2153886"/>
+                  </a:lnTo>
+                  <a:lnTo>
+                    <a:pt x="2883988" y="2224152"/>
+                  </a:lnTo>
+                  <a:lnTo>
+                    <a:pt x="2957748" y="2290705"/>
+                  </a:lnTo>
+                  <a:lnTo>
+                    <a:pt x="3031508" y="2353742"/>
+                  </a:lnTo>
+                  <a:lnTo>
+                    <a:pt x="3105268" y="2413448"/>
+                  </a:lnTo>
+                  <a:lnTo>
+                    <a:pt x="3179028" y="2469999"/>
+                  </a:lnTo>
+                  <a:lnTo>
+                    <a:pt x="3252788" y="2523563"/>
+                  </a:lnTo>
+                  <a:lnTo>
+                    <a:pt x="3326548" y="2574296"/>
+                  </a:lnTo>
+                  <a:lnTo>
+                    <a:pt x="3400308" y="2622348"/>
+                  </a:lnTo>
+                  <a:lnTo>
+                    <a:pt x="3474068" y="2659422"/>
+                  </a:lnTo>
+                  <a:lnTo>
+                    <a:pt x="3547828" y="2676100"/>
+                  </a:lnTo>
+                  <a:lnTo>
+                    <a:pt x="3621588" y="2692440"/>
+                  </a:lnTo>
+                  <a:lnTo>
+                    <a:pt x="3695348" y="2708450"/>
+                  </a:lnTo>
+                  <a:lnTo>
+                    <a:pt x="3769108" y="2724136"/>
+                  </a:lnTo>
+                  <a:lnTo>
+                    <a:pt x="3842868" y="2739505"/>
+                  </a:lnTo>
+                  <a:lnTo>
+                    <a:pt x="3916628" y="2754562"/>
+                  </a:lnTo>
+                  <a:lnTo>
+                    <a:pt x="3990388" y="2769315"/>
+                  </a:lnTo>
+                  <a:lnTo>
+                    <a:pt x="4064149" y="2783769"/>
+                  </a:lnTo>
+                  <a:lnTo>
+                    <a:pt x="4137909" y="2797931"/>
+                  </a:lnTo>
+                  <a:lnTo>
+                    <a:pt x="4211669" y="2811807"/>
+                  </a:lnTo>
+                  <a:lnTo>
+                    <a:pt x="4285429" y="2825402"/>
+                  </a:lnTo>
+                  <a:lnTo>
+                    <a:pt x="4359189" y="2838721"/>
+                  </a:lnTo>
+                  <a:lnTo>
+                    <a:pt x="4432949" y="2851772"/>
+                  </a:lnTo>
+                  <a:lnTo>
+                    <a:pt x="4506709" y="2864558"/>
+                  </a:lnTo>
+                  <a:lnTo>
+                    <a:pt x="4580469" y="2877085"/>
+                  </a:lnTo>
+                  <a:lnTo>
+                    <a:pt x="4654229" y="2889359"/>
+                  </a:lnTo>
+                  <a:lnTo>
+                    <a:pt x="4727989" y="2901385"/>
+                  </a:lnTo>
+                  <a:lnTo>
+                    <a:pt x="4801749" y="2913167"/>
+                  </a:lnTo>
+                  <a:lnTo>
+                    <a:pt x="4875509" y="2924711"/>
+                  </a:lnTo>
+                  <a:lnTo>
+                    <a:pt x="4949269" y="2936022"/>
+                  </a:lnTo>
+                  <a:lnTo>
+                    <a:pt x="5023029" y="2947103"/>
+                  </a:lnTo>
+                  <a:lnTo>
+                    <a:pt x="5096789" y="2957961"/>
+                  </a:lnTo>
+                  <a:lnTo>
+                    <a:pt x="5170549" y="2968599"/>
+                  </a:lnTo>
+                  <a:lnTo>
+                    <a:pt x="5244309" y="2979021"/>
+                  </a:lnTo>
+                  <a:lnTo>
+                    <a:pt x="5318069" y="2989233"/>
+                  </a:lnTo>
+                  <a:lnTo>
+                    <a:pt x="5391829" y="2999238"/>
+                  </a:lnTo>
+                  <a:lnTo>
+                    <a:pt x="5465589" y="3009040"/>
+                  </a:lnTo>
+                  <a:lnTo>
+                    <a:pt x="5539349" y="3018645"/>
+                  </a:lnTo>
+                  <a:lnTo>
+                    <a:pt x="5613109" y="3028055"/>
+                  </a:lnTo>
+                  <a:lnTo>
+                    <a:pt x="5686869" y="3037274"/>
+                  </a:lnTo>
+                  <a:lnTo>
+                    <a:pt x="5760629" y="3046307"/>
+                  </a:lnTo>
+                  <a:lnTo>
+                    <a:pt x="5834389" y="3055158"/>
+                  </a:lnTo>
+                  <a:lnTo>
+                    <a:pt x="5908149" y="3063829"/>
+                  </a:lnTo>
+                  <a:lnTo>
+                    <a:pt x="5981909" y="3072325"/>
+                  </a:lnTo>
+                  <a:lnTo>
+                    <a:pt x="6055669" y="3080649"/>
+                  </a:lnTo>
+                  <a:lnTo>
+                    <a:pt x="6129429" y="3088804"/>
+                  </a:lnTo>
+                  <a:lnTo>
+                    <a:pt x="6203189" y="3096795"/>
+                  </a:lnTo>
+                  <a:lnTo>
+                    <a:pt x="6276949" y="3104623"/>
+                  </a:lnTo>
+                  <a:lnTo>
+                    <a:pt x="6350709" y="3112294"/>
+                  </a:lnTo>
+                  <a:lnTo>
+                    <a:pt x="6424469" y="3119809"/>
+                  </a:lnTo>
+                  <a:lnTo>
+                    <a:pt x="6498229" y="3127172"/>
+                  </a:lnTo>
+                  <a:lnTo>
+                    <a:pt x="6571989" y="3134387"/>
+                  </a:lnTo>
+                  <a:lnTo>
+                    <a:pt x="6645749" y="3141455"/>
+                  </a:lnTo>
+                  <a:lnTo>
+                    <a:pt x="6719509" y="3148380"/>
+                  </a:lnTo>
+                  <a:lnTo>
+                    <a:pt x="6793269" y="3155165"/>
+                  </a:lnTo>
+                  <a:lnTo>
+                    <a:pt x="6867029" y="3161813"/>
+                  </a:lnTo>
+                  <a:lnTo>
+                    <a:pt x="6940789" y="3168327"/>
+                  </a:lnTo>
+                  <a:lnTo>
+                    <a:pt x="7014550" y="3174708"/>
+                  </a:lnTo>
+                  <a:lnTo>
+                    <a:pt x="7088310" y="3180961"/>
+                  </a:lnTo>
+                  <a:lnTo>
+                    <a:pt x="7162070" y="3187087"/>
+                  </a:lnTo>
+                  <a:lnTo>
+                    <a:pt x="7235830" y="3193089"/>
+                  </a:lnTo>
+                  <a:lnTo>
+                    <a:pt x="7235830" y="3432544"/>
+                  </a:lnTo>
+                  <a:lnTo>
+                    <a:pt x="7162070" y="3429688"/>
+                  </a:lnTo>
+                  <a:lnTo>
+                    <a:pt x="7088310" y="3426672"/>
+                  </a:lnTo>
+                  <a:lnTo>
+                    <a:pt x="7014550" y="3423488"/>
+                  </a:lnTo>
+                  <a:lnTo>
+                    <a:pt x="6940789" y="3420127"/>
+                  </a:lnTo>
+                  <a:lnTo>
+                    <a:pt x="6867029" y="3416578"/>
+                  </a:lnTo>
+                  <a:lnTo>
+                    <a:pt x="6793269" y="3412831"/>
+                  </a:lnTo>
+                  <a:lnTo>
+                    <a:pt x="6719509" y="3408875"/>
+                  </a:lnTo>
+                  <a:lnTo>
+                    <a:pt x="6645749" y="3404698"/>
+                  </a:lnTo>
+                  <a:lnTo>
+                    <a:pt x="6571989" y="3400289"/>
+                  </a:lnTo>
+                  <a:lnTo>
+                    <a:pt x="6498229" y="3395633"/>
+                  </a:lnTo>
+                  <a:lnTo>
+                    <a:pt x="6424469" y="3390718"/>
+                  </a:lnTo>
+                  <a:lnTo>
+                    <a:pt x="6350709" y="3385528"/>
+                  </a:lnTo>
+                  <a:lnTo>
+                    <a:pt x="6276949" y="3380049"/>
+                  </a:lnTo>
+                  <a:lnTo>
+                    <a:pt x="6203189" y="3374264"/>
+                  </a:lnTo>
+                  <a:lnTo>
+                    <a:pt x="6129429" y="3368157"/>
+                  </a:lnTo>
+                  <a:lnTo>
+                    <a:pt x="6055669" y="3361709"/>
+                  </a:lnTo>
+                  <a:lnTo>
+                    <a:pt x="5981909" y="3354901"/>
+                  </a:lnTo>
+                  <a:lnTo>
+                    <a:pt x="5908149" y="3347714"/>
+                  </a:lnTo>
+                  <a:lnTo>
+                    <a:pt x="5834389" y="3340125"/>
+                  </a:lnTo>
+                  <a:lnTo>
+                    <a:pt x="5760629" y="3332113"/>
+                  </a:lnTo>
+                  <a:lnTo>
+                    <a:pt x="5686869" y="3323654"/>
+                  </a:lnTo>
+                  <a:lnTo>
+                    <a:pt x="5613109" y="3314724"/>
+                  </a:lnTo>
+                  <a:lnTo>
+                    <a:pt x="5539349" y="3305295"/>
+                  </a:lnTo>
+                  <a:lnTo>
+                    <a:pt x="5465589" y="3295340"/>
+                  </a:lnTo>
+                  <a:lnTo>
+                    <a:pt x="5391829" y="3284830"/>
+                  </a:lnTo>
+                  <a:lnTo>
+                    <a:pt x="5318069" y="3273733"/>
+                  </a:lnTo>
+                  <a:lnTo>
+                    <a:pt x="5244309" y="3262018"/>
+                  </a:lnTo>
+                  <a:lnTo>
+                    <a:pt x="5170549" y="3249649"/>
+                  </a:lnTo>
+                  <a:lnTo>
+                    <a:pt x="5096789" y="3236590"/>
+                  </a:lnTo>
+                  <a:lnTo>
+                    <a:pt x="5023029" y="3222802"/>
+                  </a:lnTo>
+                  <a:lnTo>
+                    <a:pt x="4949269" y="3208246"/>
+                  </a:lnTo>
+                  <a:lnTo>
+                    <a:pt x="4875509" y="3192877"/>
+                  </a:lnTo>
+                  <a:lnTo>
+                    <a:pt x="4801749" y="3176651"/>
+                  </a:lnTo>
+                  <a:lnTo>
+                    <a:pt x="4727989" y="3159520"/>
+                  </a:lnTo>
+                  <a:lnTo>
+                    <a:pt x="4654229" y="3141433"/>
+                  </a:lnTo>
+                  <a:lnTo>
+                    <a:pt x="4580469" y="3122337"/>
+                  </a:lnTo>
+                  <a:lnTo>
+                    <a:pt x="4506709" y="3102176"/>
+                  </a:lnTo>
+                  <a:lnTo>
+                    <a:pt x="4432949" y="3080891"/>
+                  </a:lnTo>
+                  <a:lnTo>
+                    <a:pt x="4359189" y="3058417"/>
+                  </a:lnTo>
+                  <a:lnTo>
+                    <a:pt x="4285429" y="3034691"/>
+                  </a:lnTo>
+                  <a:lnTo>
+                    <a:pt x="4211669" y="3009640"/>
+                  </a:lnTo>
+                  <a:lnTo>
+                    <a:pt x="4137909" y="2983192"/>
+                  </a:lnTo>
+                  <a:lnTo>
+                    <a:pt x="4064149" y="2955269"/>
+                  </a:lnTo>
+                  <a:lnTo>
+                    <a:pt x="3990388" y="2925788"/>
+                  </a:lnTo>
+                  <a:lnTo>
+                    <a:pt x="3916628" y="2894663"/>
+                  </a:lnTo>
+                  <a:lnTo>
+                    <a:pt x="3842868" y="2861801"/>
+                  </a:lnTo>
+                  <a:lnTo>
+                    <a:pt x="3769108" y="2827106"/>
+                  </a:lnTo>
+                  <a:lnTo>
+                    <a:pt x="3695348" y="2790476"/>
+                  </a:lnTo>
+                  <a:lnTo>
+                    <a:pt x="3621588" y="2751802"/>
+                  </a:lnTo>
+                  <a:lnTo>
+                    <a:pt x="3547828" y="2710971"/>
+                  </a:lnTo>
+                  <a:lnTo>
+                    <a:pt x="3474068" y="2667862"/>
+                  </a:lnTo>
+                  <a:lnTo>
+                    <a:pt x="3400308" y="2642400"/>
+                  </a:lnTo>
+                  <a:lnTo>
+                    <a:pt x="3326548" y="2625026"/>
+                  </a:lnTo>
+                  <a:lnTo>
+                    <a:pt x="3252788" y="2607294"/>
+                  </a:lnTo>
+                  <a:lnTo>
+                    <a:pt x="3179028" y="2589195"/>
+                  </a:lnTo>
+                  <a:lnTo>
+                    <a:pt x="3105268" y="2570723"/>
+                  </a:lnTo>
+                  <a:lnTo>
+                    <a:pt x="3031508" y="2551869"/>
+                  </a:lnTo>
+                  <a:lnTo>
+                    <a:pt x="2957748" y="2532626"/>
+                  </a:lnTo>
+                  <a:lnTo>
+                    <a:pt x="2883988" y="2512985"/>
+                  </a:lnTo>
+                  <a:lnTo>
+                    <a:pt x="2810228" y="2492939"/>
+                  </a:lnTo>
+                  <a:lnTo>
+                    <a:pt x="2736468" y="2472479"/>
+                  </a:lnTo>
+                  <a:lnTo>
+                    <a:pt x="2662708" y="2451597"/>
+                  </a:lnTo>
+                  <a:lnTo>
+                    <a:pt x="2588948" y="2430283"/>
+                  </a:lnTo>
+                  <a:lnTo>
+                    <a:pt x="2515188" y="2408529"/>
+                  </a:lnTo>
+                  <a:lnTo>
+                    <a:pt x="2441428" y="2386326"/>
+                  </a:lnTo>
+                  <a:lnTo>
+                    <a:pt x="2367668" y="2363664"/>
+                  </a:lnTo>
+                  <a:lnTo>
+                    <a:pt x="2293908" y="2340535"/>
+                  </a:lnTo>
+                  <a:lnTo>
+                    <a:pt x="2220148" y="2316927"/>
+                  </a:lnTo>
+                  <a:lnTo>
+                    <a:pt x="2146388" y="2292833"/>
+                  </a:lnTo>
+                  <a:lnTo>
+                    <a:pt x="2072628" y="2268241"/>
+                  </a:lnTo>
+                  <a:lnTo>
+                    <a:pt x="1998868" y="2243141"/>
+                  </a:lnTo>
+                  <a:lnTo>
+                    <a:pt x="1925108" y="2217522"/>
+                  </a:lnTo>
+                  <a:lnTo>
+                    <a:pt x="1851348" y="2191375"/>
+                  </a:lnTo>
+                  <a:lnTo>
+                    <a:pt x="1777588" y="2164687"/>
+                  </a:lnTo>
+                  <a:lnTo>
+                    <a:pt x="1703828" y="2137449"/>
+                  </a:lnTo>
+                  <a:lnTo>
+                    <a:pt x="1630068" y="2109648"/>
+                  </a:lnTo>
+                  <a:lnTo>
+                    <a:pt x="1556308" y="2081273"/>
+                  </a:lnTo>
+                  <a:lnTo>
+                    <a:pt x="1482548" y="2052312"/>
+                  </a:lnTo>
+                  <a:lnTo>
+                    <a:pt x="1408788" y="2022753"/>
+                  </a:lnTo>
+                  <a:lnTo>
+                    <a:pt x="1335028" y="1992584"/>
+                  </a:lnTo>
+                  <a:lnTo>
+                    <a:pt x="1261268" y="1961792"/>
+                  </a:lnTo>
+                  <a:lnTo>
+                    <a:pt x="1187508" y="1930364"/>
+                  </a:lnTo>
+                  <a:lnTo>
+                    <a:pt x="1113747" y="1898286"/>
+                  </a:lnTo>
+                  <a:lnTo>
+                    <a:pt x="1039987" y="1865547"/>
+                  </a:lnTo>
+                  <a:lnTo>
+                    <a:pt x="966227" y="1832131"/>
+                  </a:lnTo>
+                  <a:lnTo>
+                    <a:pt x="892467" y="1798026"/>
+                  </a:lnTo>
+                  <a:lnTo>
+                    <a:pt x="818707" y="1763216"/>
+                  </a:lnTo>
+                  <a:lnTo>
+                    <a:pt x="744947" y="1727687"/>
+                  </a:lnTo>
+                  <a:lnTo>
+                    <a:pt x="671187" y="1691424"/>
+                  </a:lnTo>
+                  <a:lnTo>
+                    <a:pt x="597427" y="1654413"/>
+                  </a:lnTo>
+                  <a:lnTo>
+                    <a:pt x="523667" y="1616638"/>
+                  </a:lnTo>
+                  <a:lnTo>
+                    <a:pt x="449907" y="1578082"/>
+                  </a:lnTo>
+                  <a:lnTo>
+                    <a:pt x="376147" y="1538730"/>
+                  </a:lnTo>
+                  <a:lnTo>
+                    <a:pt x="302387" y="1498566"/>
+                  </a:lnTo>
+                  <a:lnTo>
+                    <a:pt x="228627" y="1457572"/>
+                  </a:lnTo>
+                  <a:lnTo>
+                    <a:pt x="154867" y="1415732"/>
+                  </a:lnTo>
+                  <a:lnTo>
+                    <a:pt x="81107" y="1373028"/>
+                  </a:lnTo>
+                  <a:lnTo>
+                    <a:pt x="7347" y="1329442"/>
+                  </a:lnTo>
+                  <a:lnTo>
+                    <a:pt x="0" y="1325010"/>
                   </a:lnTo>
                   <a:close/>
                 </a:path>
@@ -3570,249 +3570,249 @@
           </p:nvSpPr>
           <p:spPr>
             <a:xfrm>
-              <a:off x="2319583" y="1896563"/>
-              <a:ext cx="5733764" cy="3347894"/>
+              <a:off x="2319583" y="2073503"/>
+              <a:ext cx="5733764" cy="3193089"/>
             </a:xfrm>
             <a:custGeom>
               <a:avLst/>
               <a:pathLst>
-                <a:path w="5733764" h="3347894">
+                <a:path w="5733764" h="3193089">
                   <a:moveTo>
                     <a:pt x="0" y="0"/>
                   </a:moveTo>
                   <a:lnTo>
-                    <a:pt x="54242" y="143938"/>
-                  </a:lnTo>
-                  <a:lnTo>
-                    <a:pt x="128002" y="329328"/>
-                  </a:lnTo>
-                  <a:lnTo>
-                    <a:pt x="201762" y="504922"/>
-                  </a:lnTo>
-                  <a:lnTo>
-                    <a:pt x="275522" y="671238"/>
-                  </a:lnTo>
-                  <a:lnTo>
-                    <a:pt x="349282" y="828767"/>
-                  </a:lnTo>
-                  <a:lnTo>
-                    <a:pt x="423042" y="977972"/>
-                  </a:lnTo>
-                  <a:lnTo>
-                    <a:pt x="496802" y="1119294"/>
-                  </a:lnTo>
-                  <a:lnTo>
-                    <a:pt x="570562" y="1253149"/>
-                  </a:lnTo>
-                  <a:lnTo>
-                    <a:pt x="644322" y="1379931"/>
-                  </a:lnTo>
-                  <a:lnTo>
-                    <a:pt x="718082" y="1500014"/>
-                  </a:lnTo>
-                  <a:lnTo>
-                    <a:pt x="791842" y="1613753"/>
-                  </a:lnTo>
-                  <a:lnTo>
-                    <a:pt x="865602" y="1721482"/>
-                  </a:lnTo>
-                  <a:lnTo>
-                    <a:pt x="939362" y="1823518"/>
-                  </a:lnTo>
-                  <a:lnTo>
-                    <a:pt x="1013122" y="1920164"/>
-                  </a:lnTo>
-                  <a:lnTo>
-                    <a:pt x="1086882" y="2011703"/>
-                  </a:lnTo>
-                  <a:lnTo>
-                    <a:pt x="1160642" y="2098406"/>
-                  </a:lnTo>
-                  <a:lnTo>
-                    <a:pt x="1234402" y="2180527"/>
-                  </a:lnTo>
-                  <a:lnTo>
-                    <a:pt x="1308162" y="2258309"/>
-                  </a:lnTo>
-                  <a:lnTo>
-                    <a:pt x="1381922" y="2331982"/>
-                  </a:lnTo>
-                  <a:lnTo>
-                    <a:pt x="1455682" y="2401761"/>
-                  </a:lnTo>
-                  <a:lnTo>
-                    <a:pt x="1529442" y="2467854"/>
-                  </a:lnTo>
-                  <a:lnTo>
-                    <a:pt x="1603202" y="2530455"/>
-                  </a:lnTo>
-                  <a:lnTo>
-                    <a:pt x="1676962" y="2589748"/>
-                  </a:lnTo>
-                  <a:lnTo>
-                    <a:pt x="1750722" y="2645908"/>
-                  </a:lnTo>
-                  <a:lnTo>
-                    <a:pt x="1824482" y="2699101"/>
-                  </a:lnTo>
-                  <a:lnTo>
-                    <a:pt x="1898242" y="2749484"/>
-                  </a:lnTo>
-                  <a:lnTo>
-                    <a:pt x="1972003" y="2788355"/>
-                  </a:lnTo>
-                  <a:lnTo>
-                    <a:pt x="2045763" y="2805841"/>
-                  </a:lnTo>
-                  <a:lnTo>
-                    <a:pt x="2119523" y="2822974"/>
-                  </a:lnTo>
-                  <a:lnTo>
-                    <a:pt x="2193283" y="2839760"/>
-                  </a:lnTo>
-                  <a:lnTo>
-                    <a:pt x="2267043" y="2856206"/>
-                  </a:lnTo>
-                  <a:lnTo>
-                    <a:pt x="2340803" y="2872320"/>
-                  </a:lnTo>
-                  <a:lnTo>
-                    <a:pt x="2414563" y="2888107"/>
-                  </a:lnTo>
-                  <a:lnTo>
-                    <a:pt x="2488323" y="2903575"/>
-                  </a:lnTo>
-                  <a:lnTo>
-                    <a:pt x="2562083" y="2918730"/>
-                  </a:lnTo>
-                  <a:lnTo>
-                    <a:pt x="2635843" y="2933579"/>
-                  </a:lnTo>
-                  <a:lnTo>
-                    <a:pt x="2709603" y="2948127"/>
-                  </a:lnTo>
-                  <a:lnTo>
-                    <a:pt x="2783363" y="2962381"/>
-                  </a:lnTo>
-                  <a:lnTo>
-                    <a:pt x="2857123" y="2976347"/>
-                  </a:lnTo>
-                  <a:lnTo>
-                    <a:pt x="2930883" y="2990029"/>
-                  </a:lnTo>
-                  <a:lnTo>
-                    <a:pt x="3004643" y="3003435"/>
-                  </a:lnTo>
-                  <a:lnTo>
-                    <a:pt x="3078403" y="3016570"/>
-                  </a:lnTo>
-                  <a:lnTo>
-                    <a:pt x="3152163" y="3029439"/>
-                  </a:lnTo>
-                  <a:lnTo>
-                    <a:pt x="3225923" y="3042048"/>
-                  </a:lnTo>
-                  <a:lnTo>
-                    <a:pt x="3299683" y="3054402"/>
-                  </a:lnTo>
-                  <a:lnTo>
-                    <a:pt x="3373443" y="3066505"/>
-                  </a:lnTo>
-                  <a:lnTo>
-                    <a:pt x="3447203" y="3078364"/>
-                  </a:lnTo>
-                  <a:lnTo>
-                    <a:pt x="3520963" y="3089983"/>
-                  </a:lnTo>
-                  <a:lnTo>
-                    <a:pt x="3594723" y="3101367"/>
-                  </a:lnTo>
-                  <a:lnTo>
-                    <a:pt x="3668483" y="3112520"/>
-                  </a:lnTo>
-                  <a:lnTo>
-                    <a:pt x="3742243" y="3123448"/>
-                  </a:lnTo>
-                  <a:lnTo>
-                    <a:pt x="3816003" y="3134155"/>
-                  </a:lnTo>
-                  <a:lnTo>
-                    <a:pt x="3889763" y="3144645"/>
-                  </a:lnTo>
-                  <a:lnTo>
-                    <a:pt x="3963523" y="3154923"/>
-                  </a:lnTo>
-                  <a:lnTo>
-                    <a:pt x="4037283" y="3164993"/>
-                  </a:lnTo>
-                  <a:lnTo>
-                    <a:pt x="4111043" y="3174859"/>
-                  </a:lnTo>
-                  <a:lnTo>
-                    <a:pt x="4184803" y="3184526"/>
-                  </a:lnTo>
-                  <a:lnTo>
-                    <a:pt x="4258563" y="3193997"/>
-                  </a:lnTo>
-                  <a:lnTo>
-                    <a:pt x="4332323" y="3203276"/>
-                  </a:lnTo>
-                  <a:lnTo>
-                    <a:pt x="4406083" y="3212368"/>
-                  </a:lnTo>
-                  <a:lnTo>
-                    <a:pt x="4479843" y="3221275"/>
-                  </a:lnTo>
-                  <a:lnTo>
-                    <a:pt x="4553603" y="3230003"/>
-                  </a:lnTo>
-                  <a:lnTo>
-                    <a:pt x="4627363" y="3238554"/>
-                  </a:lnTo>
-                  <a:lnTo>
-                    <a:pt x="4701123" y="3246932"/>
-                  </a:lnTo>
-                  <a:lnTo>
-                    <a:pt x="4774883" y="3255140"/>
-                  </a:lnTo>
-                  <a:lnTo>
-                    <a:pt x="4848644" y="3263182"/>
-                  </a:lnTo>
-                  <a:lnTo>
-                    <a:pt x="4922404" y="3271062"/>
-                  </a:lnTo>
-                  <a:lnTo>
-                    <a:pt x="4996164" y="3278782"/>
-                  </a:lnTo>
-                  <a:lnTo>
-                    <a:pt x="5069924" y="3286346"/>
-                  </a:lnTo>
-                  <a:lnTo>
-                    <a:pt x="5143684" y="3293757"/>
-                  </a:lnTo>
-                  <a:lnTo>
-                    <a:pt x="5217444" y="3301018"/>
-                  </a:lnTo>
-                  <a:lnTo>
-                    <a:pt x="5291204" y="3308132"/>
-                  </a:lnTo>
-                  <a:lnTo>
-                    <a:pt x="5364964" y="3315102"/>
-                  </a:lnTo>
-                  <a:lnTo>
-                    <a:pt x="5438724" y="3321931"/>
-                  </a:lnTo>
-                  <a:lnTo>
-                    <a:pt x="5512484" y="3328622"/>
-                  </a:lnTo>
-                  <a:lnTo>
-                    <a:pt x="5586244" y="3335178"/>
-                  </a:lnTo>
-                  <a:lnTo>
-                    <a:pt x="5660004" y="3341601"/>
-                  </a:lnTo>
-                  <a:lnTo>
-                    <a:pt x="5733764" y="3347894"/>
+                    <a:pt x="54242" y="137283"/>
+                  </a:lnTo>
+                  <a:lnTo>
+                    <a:pt x="128002" y="314100"/>
+                  </a:lnTo>
+                  <a:lnTo>
+                    <a:pt x="201762" y="481575"/>
+                  </a:lnTo>
+                  <a:lnTo>
+                    <a:pt x="275522" y="640201"/>
+                  </a:lnTo>
+                  <a:lnTo>
+                    <a:pt x="349282" y="790445"/>
+                  </a:lnTo>
+                  <a:lnTo>
+                    <a:pt x="423042" y="932751"/>
+                  </a:lnTo>
+                  <a:lnTo>
+                    <a:pt x="496802" y="1067538"/>
+                  </a:lnTo>
+                  <a:lnTo>
+                    <a:pt x="570562" y="1195203"/>
+                  </a:lnTo>
+                  <a:lnTo>
+                    <a:pt x="644322" y="1316123"/>
+                  </a:lnTo>
+                  <a:lnTo>
+                    <a:pt x="718082" y="1430654"/>
+                  </a:lnTo>
+                  <a:lnTo>
+                    <a:pt x="791842" y="1539133"/>
+                  </a:lnTo>
+                  <a:lnTo>
+                    <a:pt x="865602" y="1641881"/>
+                  </a:lnTo>
+                  <a:lnTo>
+                    <a:pt x="939362" y="1739200"/>
+                  </a:lnTo>
+                  <a:lnTo>
+                    <a:pt x="1013122" y="1831376"/>
+                  </a:lnTo>
+                  <a:lnTo>
+                    <a:pt x="1086882" y="1918683"/>
+                  </a:lnTo>
+                  <a:lnTo>
+                    <a:pt x="1160642" y="2001376"/>
+                  </a:lnTo>
+                  <a:lnTo>
+                    <a:pt x="1234402" y="2079700"/>
+                  </a:lnTo>
+                  <a:lnTo>
+                    <a:pt x="1308162" y="2153886"/>
+                  </a:lnTo>
+                  <a:lnTo>
+                    <a:pt x="1381922" y="2224152"/>
+                  </a:lnTo>
+                  <a:lnTo>
+                    <a:pt x="1455682" y="2290705"/>
+                  </a:lnTo>
+                  <a:lnTo>
+                    <a:pt x="1529442" y="2353742"/>
+                  </a:lnTo>
+                  <a:lnTo>
+                    <a:pt x="1603202" y="2413448"/>
+                  </a:lnTo>
+                  <a:lnTo>
+                    <a:pt x="1676962" y="2469999"/>
+                  </a:lnTo>
+                  <a:lnTo>
+                    <a:pt x="1750722" y="2523563"/>
+                  </a:lnTo>
+                  <a:lnTo>
+                    <a:pt x="1824482" y="2574296"/>
+                  </a:lnTo>
+                  <a:lnTo>
+                    <a:pt x="1898242" y="2622348"/>
+                  </a:lnTo>
+                  <a:lnTo>
+                    <a:pt x="1972003" y="2659422"/>
+                  </a:lnTo>
+                  <a:lnTo>
+                    <a:pt x="2045763" y="2676100"/>
+                  </a:lnTo>
+                  <a:lnTo>
+                    <a:pt x="2119523" y="2692440"/>
+                  </a:lnTo>
+                  <a:lnTo>
+                    <a:pt x="2193283" y="2708450"/>
+                  </a:lnTo>
+                  <a:lnTo>
+                    <a:pt x="2267043" y="2724136"/>
+                  </a:lnTo>
+                  <a:lnTo>
+                    <a:pt x="2340803" y="2739505"/>
+                  </a:lnTo>
+                  <a:lnTo>
+                    <a:pt x="2414563" y="2754562"/>
+                  </a:lnTo>
+                  <a:lnTo>
+                    <a:pt x="2488323" y="2769315"/>
+                  </a:lnTo>
+                  <a:lnTo>
+                    <a:pt x="2562083" y="2783769"/>
+                  </a:lnTo>
+                  <a:lnTo>
+                    <a:pt x="2635843" y="2797931"/>
+                  </a:lnTo>
+                  <a:lnTo>
+                    <a:pt x="2709603" y="2811807"/>
+                  </a:lnTo>
+                  <a:lnTo>
+                    <a:pt x="2783363" y="2825402"/>
+                  </a:lnTo>
+                  <a:lnTo>
+                    <a:pt x="2857123" y="2838721"/>
+                  </a:lnTo>
+                  <a:lnTo>
+                    <a:pt x="2930883" y="2851772"/>
+                  </a:lnTo>
+                  <a:lnTo>
+                    <a:pt x="3004643" y="2864558"/>
+                  </a:lnTo>
+                  <a:lnTo>
+                    <a:pt x="3078403" y="2877085"/>
+                  </a:lnTo>
+                  <a:lnTo>
+                    <a:pt x="3152163" y="2889359"/>
+                  </a:lnTo>
+                  <a:lnTo>
+                    <a:pt x="3225923" y="2901385"/>
+                  </a:lnTo>
+                  <a:lnTo>
+                    <a:pt x="3299683" y="2913167"/>
+                  </a:lnTo>
+                  <a:lnTo>
+                    <a:pt x="3373443" y="2924711"/>
+                  </a:lnTo>
+                  <a:lnTo>
+                    <a:pt x="3447203" y="2936022"/>
+                  </a:lnTo>
+                  <a:lnTo>
+                    <a:pt x="3520963" y="2947103"/>
+                  </a:lnTo>
+                  <a:lnTo>
+                    <a:pt x="3594723" y="2957961"/>
+                  </a:lnTo>
+                  <a:lnTo>
+                    <a:pt x="3668483" y="2968599"/>
+                  </a:lnTo>
+                  <a:lnTo>
+                    <a:pt x="3742243" y="2979021"/>
+                  </a:lnTo>
+                  <a:lnTo>
+                    <a:pt x="3816003" y="2989233"/>
+                  </a:lnTo>
+                  <a:lnTo>
+                    <a:pt x="3889763" y="2999238"/>
+                  </a:lnTo>
+                  <a:lnTo>
+                    <a:pt x="3963523" y="3009040"/>
+                  </a:lnTo>
+                  <a:lnTo>
+                    <a:pt x="4037283" y="3018645"/>
+                  </a:lnTo>
+                  <a:lnTo>
+                    <a:pt x="4111043" y="3028055"/>
+                  </a:lnTo>
+                  <a:lnTo>
+                    <a:pt x="4184803" y="3037274"/>
+                  </a:lnTo>
+                  <a:lnTo>
+                    <a:pt x="4258563" y="3046307"/>
+                  </a:lnTo>
+                  <a:lnTo>
+                    <a:pt x="4332323" y="3055158"/>
+                  </a:lnTo>
+                  <a:lnTo>
+                    <a:pt x="4406083" y="3063829"/>
+                  </a:lnTo>
+                  <a:lnTo>
+                    <a:pt x="4479843" y="3072325"/>
+                  </a:lnTo>
+                  <a:lnTo>
+                    <a:pt x="4553603" y="3080649"/>
+                  </a:lnTo>
+                  <a:lnTo>
+                    <a:pt x="4627363" y="3088804"/>
+                  </a:lnTo>
+                  <a:lnTo>
+                    <a:pt x="4701123" y="3096795"/>
+                  </a:lnTo>
+                  <a:lnTo>
+                    <a:pt x="4774883" y="3104623"/>
+                  </a:lnTo>
+                  <a:lnTo>
+                    <a:pt x="4848644" y="3112294"/>
+                  </a:lnTo>
+                  <a:lnTo>
+                    <a:pt x="4922404" y="3119809"/>
+                  </a:lnTo>
+                  <a:lnTo>
+                    <a:pt x="4996164" y="3127172"/>
+                  </a:lnTo>
+                  <a:lnTo>
+                    <a:pt x="5069924" y="3134387"/>
+                  </a:lnTo>
+                  <a:lnTo>
+                    <a:pt x="5143684" y="3141455"/>
+                  </a:lnTo>
+                  <a:lnTo>
+                    <a:pt x="5217444" y="3148380"/>
+                  </a:lnTo>
+                  <a:lnTo>
+                    <a:pt x="5291204" y="3155165"/>
+                  </a:lnTo>
+                  <a:lnTo>
+                    <a:pt x="5364964" y="3161813"/>
+                  </a:lnTo>
+                  <a:lnTo>
+                    <a:pt x="5438724" y="3168327"/>
+                  </a:lnTo>
+                  <a:lnTo>
+                    <a:pt x="5512484" y="3174708"/>
+                  </a:lnTo>
+                  <a:lnTo>
+                    <a:pt x="5586244" y="3180961"/>
+                  </a:lnTo>
+                  <a:lnTo>
+                    <a:pt x="5660004" y="3187087"/>
+                  </a:lnTo>
+                  <a:lnTo>
+                    <a:pt x="5733764" y="3193089"/>
                   </a:lnTo>
                 </a:path>
               </a:pathLst>
@@ -3832,309 +3832,309 @@
           </p:nvSpPr>
           <p:spPr>
             <a:xfrm>
-              <a:off x="817517" y="3285812"/>
-              <a:ext cx="7235830" cy="2209710"/>
+              <a:off x="817517" y="3398513"/>
+              <a:ext cx="7235830" cy="2107533"/>
             </a:xfrm>
             <a:custGeom>
               <a:avLst/>
               <a:pathLst>
-                <a:path w="7235830" h="2209710">
+                <a:path w="7235830" h="2107533">
                   <a:moveTo>
-                    <a:pt x="7235830" y="2209710"/>
+                    <a:pt x="7235830" y="2107533"/>
                   </a:moveTo>
                   <a:lnTo>
-                    <a:pt x="7162070" y="2206715"/>
-                  </a:lnTo>
-                  <a:lnTo>
-                    <a:pt x="7088310" y="2203553"/>
-                  </a:lnTo>
-                  <a:lnTo>
-                    <a:pt x="7014550" y="2200215"/>
-                  </a:lnTo>
-                  <a:lnTo>
-                    <a:pt x="6940789" y="2196690"/>
-                  </a:lnTo>
-                  <a:lnTo>
-                    <a:pt x="6867029" y="2192969"/>
-                  </a:lnTo>
-                  <a:lnTo>
-                    <a:pt x="6793269" y="2189041"/>
-                  </a:lnTo>
-                  <a:lnTo>
-                    <a:pt x="6719509" y="2184893"/>
-                  </a:lnTo>
-                  <a:lnTo>
-                    <a:pt x="6645749" y="2180514"/>
-                  </a:lnTo>
-                  <a:lnTo>
-                    <a:pt x="6571989" y="2175890"/>
-                  </a:lnTo>
-                  <a:lnTo>
-                    <a:pt x="6498229" y="2171009"/>
-                  </a:lnTo>
-                  <a:lnTo>
-                    <a:pt x="6424469" y="2165855"/>
-                  </a:lnTo>
-                  <a:lnTo>
-                    <a:pt x="6350709" y="2160414"/>
-                  </a:lnTo>
-                  <a:lnTo>
-                    <a:pt x="6276949" y="2154670"/>
-                  </a:lnTo>
-                  <a:lnTo>
-                    <a:pt x="6203189" y="2148604"/>
-                  </a:lnTo>
-                  <a:lnTo>
-                    <a:pt x="6129429" y="2142201"/>
-                  </a:lnTo>
-                  <a:lnTo>
-                    <a:pt x="6055669" y="2135440"/>
-                  </a:lnTo>
-                  <a:lnTo>
-                    <a:pt x="5981909" y="2128302"/>
-                  </a:lnTo>
-                  <a:lnTo>
-                    <a:pt x="5908149" y="2120766"/>
-                  </a:lnTo>
-                  <a:lnTo>
-                    <a:pt x="5834389" y="2112810"/>
-                  </a:lnTo>
-                  <a:lnTo>
-                    <a:pt x="5760629" y="2104410"/>
-                  </a:lnTo>
-                  <a:lnTo>
-                    <a:pt x="5686869" y="2095541"/>
-                  </a:lnTo>
-                  <a:lnTo>
-                    <a:pt x="5613109" y="2086177"/>
-                  </a:lnTo>
-                  <a:lnTo>
-                    <a:pt x="5539349" y="2076291"/>
-                  </a:lnTo>
-                  <a:lnTo>
-                    <a:pt x="5465589" y="2065854"/>
-                  </a:lnTo>
-                  <a:lnTo>
-                    <a:pt x="5391829" y="2054834"/>
-                  </a:lnTo>
-                  <a:lnTo>
-                    <a:pt x="5318069" y="2043199"/>
-                  </a:lnTo>
-                  <a:lnTo>
-                    <a:pt x="5244309" y="2030916"/>
-                  </a:lnTo>
-                  <a:lnTo>
-                    <a:pt x="5170549" y="2017947"/>
-                  </a:lnTo>
-                  <a:lnTo>
-                    <a:pt x="5096789" y="2004255"/>
-                  </a:lnTo>
-                  <a:lnTo>
-                    <a:pt x="5023029" y="1989799"/>
-                  </a:lnTo>
-                  <a:lnTo>
-                    <a:pt x="4949269" y="1974537"/>
-                  </a:lnTo>
-                  <a:lnTo>
-                    <a:pt x="4875509" y="1958423"/>
-                  </a:lnTo>
-                  <a:lnTo>
-                    <a:pt x="4801749" y="1941410"/>
-                  </a:lnTo>
-                  <a:lnTo>
-                    <a:pt x="4727989" y="1923449"/>
-                  </a:lnTo>
-                  <a:lnTo>
-                    <a:pt x="4654229" y="1904485"/>
-                  </a:lnTo>
-                  <a:lnTo>
-                    <a:pt x="4580469" y="1884463"/>
-                  </a:lnTo>
-                  <a:lnTo>
-                    <a:pt x="4506709" y="1863325"/>
-                  </a:lnTo>
-                  <a:lnTo>
-                    <a:pt x="4432949" y="1841007"/>
-                  </a:lnTo>
-                  <a:lnTo>
-                    <a:pt x="4359189" y="1817445"/>
-                  </a:lnTo>
-                  <a:lnTo>
-                    <a:pt x="4285429" y="1792568"/>
-                  </a:lnTo>
-                  <a:lnTo>
-                    <a:pt x="4211669" y="1766303"/>
-                  </a:lnTo>
-                  <a:lnTo>
-                    <a:pt x="4137909" y="1738573"/>
-                  </a:lnTo>
-                  <a:lnTo>
-                    <a:pt x="4064149" y="1709296"/>
-                  </a:lnTo>
-                  <a:lnTo>
-                    <a:pt x="3990388" y="1678386"/>
-                  </a:lnTo>
-                  <a:lnTo>
-                    <a:pt x="3916628" y="1645751"/>
-                  </a:lnTo>
-                  <a:lnTo>
-                    <a:pt x="3842868" y="1611296"/>
-                  </a:lnTo>
-                  <a:lnTo>
-                    <a:pt x="3769108" y="1574919"/>
-                  </a:lnTo>
-                  <a:lnTo>
-                    <a:pt x="3695348" y="1536513"/>
-                  </a:lnTo>
-                  <a:lnTo>
-                    <a:pt x="3621588" y="1495964"/>
-                  </a:lnTo>
-                  <a:lnTo>
-                    <a:pt x="3547828" y="1453154"/>
-                  </a:lnTo>
-                  <a:lnTo>
-                    <a:pt x="3474068" y="1407955"/>
-                  </a:lnTo>
-                  <a:lnTo>
-                    <a:pt x="3400308" y="1381258"/>
-                  </a:lnTo>
-                  <a:lnTo>
-                    <a:pt x="3326548" y="1363042"/>
-                  </a:lnTo>
-                  <a:lnTo>
-                    <a:pt x="3252788" y="1344450"/>
-                  </a:lnTo>
-                  <a:lnTo>
-                    <a:pt x="3179028" y="1325474"/>
-                  </a:lnTo>
-                  <a:lnTo>
-                    <a:pt x="3105268" y="1306106"/>
-                  </a:lnTo>
-                  <a:lnTo>
-                    <a:pt x="3031508" y="1286338"/>
-                  </a:lnTo>
-                  <a:lnTo>
-                    <a:pt x="2957748" y="1266162"/>
-                  </a:lnTo>
-                  <a:lnTo>
-                    <a:pt x="2883988" y="1245569"/>
-                  </a:lnTo>
-                  <a:lnTo>
-                    <a:pt x="2810228" y="1224551"/>
-                  </a:lnTo>
-                  <a:lnTo>
-                    <a:pt x="2736468" y="1203099"/>
-                  </a:lnTo>
-                  <a:lnTo>
-                    <a:pt x="2662708" y="1181204"/>
-                  </a:lnTo>
-                  <a:lnTo>
-                    <a:pt x="2588948" y="1158857"/>
-                  </a:lnTo>
-                  <a:lnTo>
-                    <a:pt x="2515188" y="1136049"/>
-                  </a:lnTo>
-                  <a:lnTo>
-                    <a:pt x="2441428" y="1112769"/>
-                  </a:lnTo>
-                  <a:lnTo>
-                    <a:pt x="2367668" y="1089009"/>
-                  </a:lnTo>
-                  <a:lnTo>
-                    <a:pt x="2293908" y="1064758"/>
-                  </a:lnTo>
-                  <a:lnTo>
-                    <a:pt x="2220148" y="1040006"/>
-                  </a:lnTo>
-                  <a:lnTo>
-                    <a:pt x="2146388" y="1014743"/>
-                  </a:lnTo>
-                  <a:lnTo>
-                    <a:pt x="2072628" y="988959"/>
-                  </a:lnTo>
-                  <a:lnTo>
-                    <a:pt x="1998868" y="962642"/>
-                  </a:lnTo>
-                  <a:lnTo>
-                    <a:pt x="1925108" y="935782"/>
-                  </a:lnTo>
-                  <a:lnTo>
-                    <a:pt x="1851348" y="908367"/>
-                  </a:lnTo>
-                  <a:lnTo>
-                    <a:pt x="1777588" y="880385"/>
-                  </a:lnTo>
-                  <a:lnTo>
-                    <a:pt x="1703828" y="851827"/>
-                  </a:lnTo>
-                  <a:lnTo>
-                    <a:pt x="1630068" y="822678"/>
-                  </a:lnTo>
-                  <a:lnTo>
-                    <a:pt x="1556308" y="792927"/>
-                  </a:lnTo>
-                  <a:lnTo>
-                    <a:pt x="1482548" y="762562"/>
-                  </a:lnTo>
-                  <a:lnTo>
-                    <a:pt x="1408788" y="731570"/>
-                  </a:lnTo>
-                  <a:lnTo>
-                    <a:pt x="1335028" y="699938"/>
-                  </a:lnTo>
-                  <a:lnTo>
-                    <a:pt x="1261268" y="667653"/>
-                  </a:lnTo>
-                  <a:lnTo>
-                    <a:pt x="1187508" y="634701"/>
-                  </a:lnTo>
-                  <a:lnTo>
-                    <a:pt x="1113747" y="601069"/>
-                  </a:lnTo>
-                  <a:lnTo>
-                    <a:pt x="1039987" y="566742"/>
-                  </a:lnTo>
-                  <a:lnTo>
-                    <a:pt x="966227" y="531706"/>
-                  </a:lnTo>
-                  <a:lnTo>
-                    <a:pt x="892467" y="495947"/>
-                  </a:lnTo>
-                  <a:lnTo>
-                    <a:pt x="818707" y="459450"/>
-                  </a:lnTo>
-                  <a:lnTo>
-                    <a:pt x="744947" y="422198"/>
-                  </a:lnTo>
-                  <a:lnTo>
-                    <a:pt x="671187" y="384178"/>
-                  </a:lnTo>
-                  <a:lnTo>
-                    <a:pt x="597427" y="345372"/>
-                  </a:lnTo>
-                  <a:lnTo>
-                    <a:pt x="523667" y="305765"/>
-                  </a:lnTo>
-                  <a:lnTo>
-                    <a:pt x="449907" y="265341"/>
-                  </a:lnTo>
-                  <a:lnTo>
-                    <a:pt x="376147" y="224081"/>
-                  </a:lnTo>
-                  <a:lnTo>
-                    <a:pt x="302387" y="181970"/>
-                  </a:lnTo>
-                  <a:lnTo>
-                    <a:pt x="228627" y="138988"/>
-                  </a:lnTo>
-                  <a:lnTo>
-                    <a:pt x="154867" y="95120"/>
-                  </a:lnTo>
-                  <a:lnTo>
-                    <a:pt x="81107" y="50345"/>
-                  </a:lnTo>
-                  <a:lnTo>
-                    <a:pt x="7347" y="4646"/>
+                    <a:pt x="7162070" y="2104677"/>
+                  </a:lnTo>
+                  <a:lnTo>
+                    <a:pt x="7088310" y="2101662"/>
+                  </a:lnTo>
+                  <a:lnTo>
+                    <a:pt x="7014550" y="2098478"/>
+                  </a:lnTo>
+                  <a:lnTo>
+                    <a:pt x="6940789" y="2095116"/>
+                  </a:lnTo>
+                  <a:lnTo>
+                    <a:pt x="6867029" y="2091567"/>
+                  </a:lnTo>
+                  <a:lnTo>
+                    <a:pt x="6793269" y="2087820"/>
+                  </a:lnTo>
+                  <a:lnTo>
+                    <a:pt x="6719509" y="2083864"/>
+                  </a:lnTo>
+                  <a:lnTo>
+                    <a:pt x="6645749" y="2079688"/>
+                  </a:lnTo>
+                  <a:lnTo>
+                    <a:pt x="6571989" y="2075278"/>
+                  </a:lnTo>
+                  <a:lnTo>
+                    <a:pt x="6498229" y="2070622"/>
+                  </a:lnTo>
+                  <a:lnTo>
+                    <a:pt x="6424469" y="2065707"/>
+                  </a:lnTo>
+                  <a:lnTo>
+                    <a:pt x="6350709" y="2060517"/>
+                  </a:lnTo>
+                  <a:lnTo>
+                    <a:pt x="6276949" y="2055038"/>
+                  </a:lnTo>
+                  <a:lnTo>
+                    <a:pt x="6203189" y="2049254"/>
+                  </a:lnTo>
+                  <a:lnTo>
+                    <a:pt x="6129429" y="2043146"/>
+                  </a:lnTo>
+                  <a:lnTo>
+                    <a:pt x="6055669" y="2036698"/>
+                  </a:lnTo>
+                  <a:lnTo>
+                    <a:pt x="5981909" y="2029890"/>
+                  </a:lnTo>
+                  <a:lnTo>
+                    <a:pt x="5908149" y="2022703"/>
+                  </a:lnTo>
+                  <a:lnTo>
+                    <a:pt x="5834389" y="2015114"/>
+                  </a:lnTo>
+                  <a:lnTo>
+                    <a:pt x="5760629" y="2007102"/>
+                  </a:lnTo>
+                  <a:lnTo>
+                    <a:pt x="5686869" y="1998644"/>
+                  </a:lnTo>
+                  <a:lnTo>
+                    <a:pt x="5613109" y="1989713"/>
+                  </a:lnTo>
+                  <a:lnTo>
+                    <a:pt x="5539349" y="1980284"/>
+                  </a:lnTo>
+                  <a:lnTo>
+                    <a:pt x="5465589" y="1970329"/>
+                  </a:lnTo>
+                  <a:lnTo>
+                    <a:pt x="5391829" y="1959819"/>
+                  </a:lnTo>
+                  <a:lnTo>
+                    <a:pt x="5318069" y="1948723"/>
+                  </a:lnTo>
+                  <a:lnTo>
+                    <a:pt x="5244309" y="1937007"/>
+                  </a:lnTo>
+                  <a:lnTo>
+                    <a:pt x="5170549" y="1924638"/>
+                  </a:lnTo>
+                  <a:lnTo>
+                    <a:pt x="5096789" y="1911579"/>
+                  </a:lnTo>
+                  <a:lnTo>
+                    <a:pt x="5023029" y="1897792"/>
+                  </a:lnTo>
+                  <a:lnTo>
+                    <a:pt x="4949269" y="1883235"/>
+                  </a:lnTo>
+                  <a:lnTo>
+                    <a:pt x="4875509" y="1867866"/>
+                  </a:lnTo>
+                  <a:lnTo>
+                    <a:pt x="4801749" y="1851640"/>
+                  </a:lnTo>
+                  <a:lnTo>
+                    <a:pt x="4727989" y="1834509"/>
+                  </a:lnTo>
+                  <a:lnTo>
+                    <a:pt x="4654229" y="1816422"/>
+                  </a:lnTo>
+                  <a:lnTo>
+                    <a:pt x="4580469" y="1797327"/>
+                  </a:lnTo>
+                  <a:lnTo>
+                    <a:pt x="4506709" y="1777165"/>
+                  </a:lnTo>
+                  <a:lnTo>
+                    <a:pt x="4432949" y="1755880"/>
+                  </a:lnTo>
+                  <a:lnTo>
+                    <a:pt x="4359189" y="1733407"/>
+                  </a:lnTo>
+                  <a:lnTo>
+                    <a:pt x="4285429" y="1709680"/>
+                  </a:lnTo>
+                  <a:lnTo>
+                    <a:pt x="4211669" y="1684630"/>
+                  </a:lnTo>
+                  <a:lnTo>
+                    <a:pt x="4137909" y="1658182"/>
+                  </a:lnTo>
+                  <a:lnTo>
+                    <a:pt x="4064149" y="1630259"/>
+                  </a:lnTo>
+                  <a:lnTo>
+                    <a:pt x="3990388" y="1600778"/>
+                  </a:lnTo>
+                  <a:lnTo>
+                    <a:pt x="3916628" y="1569652"/>
+                  </a:lnTo>
+                  <a:lnTo>
+                    <a:pt x="3842868" y="1536791"/>
+                  </a:lnTo>
+                  <a:lnTo>
+                    <a:pt x="3769108" y="1502096"/>
+                  </a:lnTo>
+                  <a:lnTo>
+                    <a:pt x="3695348" y="1465465"/>
+                  </a:lnTo>
+                  <a:lnTo>
+                    <a:pt x="3621588" y="1426792"/>
+                  </a:lnTo>
+                  <a:lnTo>
+                    <a:pt x="3547828" y="1385960"/>
+                  </a:lnTo>
+                  <a:lnTo>
+                    <a:pt x="3474068" y="1342851"/>
+                  </a:lnTo>
+                  <a:lnTo>
+                    <a:pt x="3400308" y="1317389"/>
+                  </a:lnTo>
+                  <a:lnTo>
+                    <a:pt x="3326548" y="1300016"/>
+                  </a:lnTo>
+                  <a:lnTo>
+                    <a:pt x="3252788" y="1282283"/>
+                  </a:lnTo>
+                  <a:lnTo>
+                    <a:pt x="3179028" y="1264184"/>
+                  </a:lnTo>
+                  <a:lnTo>
+                    <a:pt x="3105268" y="1245712"/>
+                  </a:lnTo>
+                  <a:lnTo>
+                    <a:pt x="3031508" y="1226858"/>
+                  </a:lnTo>
+                  <a:lnTo>
+                    <a:pt x="2957748" y="1207615"/>
+                  </a:lnTo>
+                  <a:lnTo>
+                    <a:pt x="2883988" y="1187975"/>
+                  </a:lnTo>
+                  <a:lnTo>
+                    <a:pt x="2810228" y="1167928"/>
+                  </a:lnTo>
+                  <a:lnTo>
+                    <a:pt x="2736468" y="1147468"/>
+                  </a:lnTo>
+                  <a:lnTo>
+                    <a:pt x="2662708" y="1126586"/>
+                  </a:lnTo>
+                  <a:lnTo>
+                    <a:pt x="2588948" y="1105272"/>
+                  </a:lnTo>
+                  <a:lnTo>
+                    <a:pt x="2515188" y="1083518"/>
+                  </a:lnTo>
+                  <a:lnTo>
+                    <a:pt x="2441428" y="1061315"/>
+                  </a:lnTo>
+                  <a:lnTo>
+                    <a:pt x="2367668" y="1038654"/>
+                  </a:lnTo>
+                  <a:lnTo>
+                    <a:pt x="2293908" y="1015524"/>
+                  </a:lnTo>
+                  <a:lnTo>
+                    <a:pt x="2220148" y="991917"/>
+                  </a:lnTo>
+                  <a:lnTo>
+                    <a:pt x="2146388" y="967822"/>
+                  </a:lnTo>
+                  <a:lnTo>
+                    <a:pt x="2072628" y="943230"/>
+                  </a:lnTo>
+                  <a:lnTo>
+                    <a:pt x="1998868" y="918130"/>
+                  </a:lnTo>
+                  <a:lnTo>
+                    <a:pt x="1925108" y="892511"/>
+                  </a:lnTo>
+                  <a:lnTo>
+                    <a:pt x="1851348" y="866364"/>
+                  </a:lnTo>
+                  <a:lnTo>
+                    <a:pt x="1777588" y="839677"/>
+                  </a:lnTo>
+                  <a:lnTo>
+                    <a:pt x="1703828" y="812438"/>
+                  </a:lnTo>
+                  <a:lnTo>
+                    <a:pt x="1630068" y="784637"/>
+                  </a:lnTo>
+                  <a:lnTo>
+                    <a:pt x="1556308" y="756263"/>
+                  </a:lnTo>
+                  <a:lnTo>
+                    <a:pt x="1482548" y="727302"/>
+                  </a:lnTo>
+                  <a:lnTo>
+                    <a:pt x="1408788" y="697743"/>
+                  </a:lnTo>
+                  <a:lnTo>
+                    <a:pt x="1335028" y="667573"/>
+                  </a:lnTo>
+                  <a:lnTo>
+                    <a:pt x="1261268" y="636781"/>
+                  </a:lnTo>
+                  <a:lnTo>
+                    <a:pt x="1187508" y="605353"/>
+                  </a:lnTo>
+                  <a:lnTo>
+                    <a:pt x="1113747" y="573276"/>
+                  </a:lnTo>
+                  <a:lnTo>
+                    <a:pt x="1039987" y="540536"/>
+                  </a:lnTo>
+                  <a:lnTo>
+                    <a:pt x="966227" y="507120"/>
+                  </a:lnTo>
+                  <a:lnTo>
+                    <a:pt x="892467" y="473015"/>
+                  </a:lnTo>
+                  <a:lnTo>
+                    <a:pt x="818707" y="438205"/>
+                  </a:lnTo>
+                  <a:lnTo>
+                    <a:pt x="744947" y="402676"/>
+                  </a:lnTo>
+                  <a:lnTo>
+                    <a:pt x="671187" y="366414"/>
+                  </a:lnTo>
+                  <a:lnTo>
+                    <a:pt x="597427" y="329402"/>
+                  </a:lnTo>
+                  <a:lnTo>
+                    <a:pt x="523667" y="291627"/>
+                  </a:lnTo>
+                  <a:lnTo>
+                    <a:pt x="449907" y="253071"/>
+                  </a:lnTo>
+                  <a:lnTo>
+                    <a:pt x="376147" y="213720"/>
+                  </a:lnTo>
+                  <a:lnTo>
+                    <a:pt x="302387" y="173555"/>
+                  </a:lnTo>
+                  <a:lnTo>
+                    <a:pt x="228627" y="132562"/>
+                  </a:lnTo>
+                  <a:lnTo>
+                    <a:pt x="154867" y="90721"/>
+                  </a:lnTo>
+                  <a:lnTo>
+                    <a:pt x="81107" y="48017"/>
+                  </a:lnTo>
+                  <a:lnTo>
+                    <a:pt x="7347" y="4431"/>
                   </a:lnTo>
                   <a:lnTo>
                     <a:pt x="0" y="0"/>
@@ -4157,285 +4157,285 @@
           </p:nvSpPr>
           <p:spPr>
             <a:xfrm>
-              <a:off x="1436284" y="1896563"/>
-              <a:ext cx="6617063" cy="3524736"/>
+              <a:off x="1436284" y="2073503"/>
+              <a:ext cx="6617063" cy="3361753"/>
             </a:xfrm>
             <a:custGeom>
               <a:avLst/>
               <a:pathLst>
-                <a:path w="6617063" h="3524736">
+                <a:path w="6617063" h="3361753">
                   <a:moveTo>
                     <a:pt x="0" y="0"/>
                   </a:moveTo>
                   <a:lnTo>
-                    <a:pt x="52420" y="96219"/>
-                  </a:lnTo>
-                  <a:lnTo>
-                    <a:pt x="126180" y="226642"/>
-                  </a:lnTo>
-                  <a:lnTo>
-                    <a:pt x="199940" y="352282"/>
-                  </a:lnTo>
-                  <a:lnTo>
-                    <a:pt x="273701" y="473315"/>
-                  </a:lnTo>
-                  <a:lnTo>
-                    <a:pt x="347461" y="589909"/>
-                  </a:lnTo>
-                  <a:lnTo>
-                    <a:pt x="421221" y="702227"/>
-                  </a:lnTo>
-                  <a:lnTo>
-                    <a:pt x="494981" y="810426"/>
-                  </a:lnTo>
-                  <a:lnTo>
-                    <a:pt x="568741" y="914657"/>
-                  </a:lnTo>
-                  <a:lnTo>
-                    <a:pt x="642501" y="1015066"/>
-                  </a:lnTo>
-                  <a:lnTo>
-                    <a:pt x="716261" y="1111792"/>
-                  </a:lnTo>
-                  <a:lnTo>
-                    <a:pt x="790021" y="1204972"/>
-                  </a:lnTo>
-                  <a:lnTo>
-                    <a:pt x="863781" y="1294734"/>
-                  </a:lnTo>
-                  <a:lnTo>
-                    <a:pt x="937541" y="1381204"/>
-                  </a:lnTo>
-                  <a:lnTo>
-                    <a:pt x="1011301" y="1464504"/>
-                  </a:lnTo>
-                  <a:lnTo>
-                    <a:pt x="1085061" y="1544748"/>
-                  </a:lnTo>
-                  <a:lnTo>
-                    <a:pt x="1158821" y="1622050"/>
-                  </a:lnTo>
-                  <a:lnTo>
-                    <a:pt x="1232581" y="1696517"/>
-                  </a:lnTo>
-                  <a:lnTo>
-                    <a:pt x="1306341" y="1768253"/>
-                  </a:lnTo>
-                  <a:lnTo>
-                    <a:pt x="1380101" y="1837358"/>
-                  </a:lnTo>
-                  <a:lnTo>
-                    <a:pt x="1453861" y="1903929"/>
-                  </a:lnTo>
-                  <a:lnTo>
-                    <a:pt x="1527621" y="1968059"/>
-                  </a:lnTo>
-                  <a:lnTo>
-                    <a:pt x="1601381" y="2029837"/>
-                  </a:lnTo>
-                  <a:lnTo>
-                    <a:pt x="1675141" y="2089349"/>
-                  </a:lnTo>
-                  <a:lnTo>
-                    <a:pt x="1748901" y="2146679"/>
-                  </a:lnTo>
-                  <a:lnTo>
-                    <a:pt x="1822661" y="2201907"/>
-                  </a:lnTo>
-                  <a:lnTo>
-                    <a:pt x="1896421" y="2255109"/>
-                  </a:lnTo>
-                  <a:lnTo>
-                    <a:pt x="1970181" y="2306360"/>
-                  </a:lnTo>
-                  <a:lnTo>
-                    <a:pt x="2043941" y="2355731"/>
-                  </a:lnTo>
-                  <a:lnTo>
-                    <a:pt x="2117701" y="2403292"/>
-                  </a:lnTo>
-                  <a:lnTo>
-                    <a:pt x="2191461" y="2449109"/>
-                  </a:lnTo>
-                  <a:lnTo>
-                    <a:pt x="2265221" y="2493246"/>
-                  </a:lnTo>
-                  <a:lnTo>
-                    <a:pt x="2338981" y="2535764"/>
-                  </a:lnTo>
-                  <a:lnTo>
-                    <a:pt x="2412741" y="2576723"/>
-                  </a:lnTo>
-                  <a:lnTo>
-                    <a:pt x="2486501" y="2616179"/>
-                  </a:lnTo>
-                  <a:lnTo>
-                    <a:pt x="2560261" y="2654189"/>
-                  </a:lnTo>
-                  <a:lnTo>
-                    <a:pt x="2634021" y="2690805"/>
-                  </a:lnTo>
-                  <a:lnTo>
-                    <a:pt x="2707781" y="2726078"/>
-                  </a:lnTo>
-                  <a:lnTo>
-                    <a:pt x="2781541" y="2760057"/>
-                  </a:lnTo>
-                  <a:lnTo>
-                    <a:pt x="2855301" y="2792791"/>
-                  </a:lnTo>
-                  <a:lnTo>
-                    <a:pt x="2929061" y="2824324"/>
-                  </a:lnTo>
-                  <a:lnTo>
-                    <a:pt x="3002821" y="2854700"/>
-                  </a:lnTo>
-                  <a:lnTo>
-                    <a:pt x="3076581" y="2883963"/>
-                  </a:lnTo>
-                  <a:lnTo>
-                    <a:pt x="3150341" y="2912152"/>
-                  </a:lnTo>
-                  <a:lnTo>
-                    <a:pt x="3224102" y="2939308"/>
-                  </a:lnTo>
-                  <a:lnTo>
-                    <a:pt x="3297862" y="2965468"/>
-                  </a:lnTo>
-                  <a:lnTo>
-                    <a:pt x="3371622" y="2990668"/>
-                  </a:lnTo>
-                  <a:lnTo>
-                    <a:pt x="3445382" y="3014944"/>
-                  </a:lnTo>
-                  <a:lnTo>
-                    <a:pt x="3519142" y="3038330"/>
-                  </a:lnTo>
-                  <a:lnTo>
-                    <a:pt x="3592902" y="3060859"/>
-                  </a:lnTo>
-                  <a:lnTo>
-                    <a:pt x="3666662" y="3082561"/>
-                  </a:lnTo>
-                  <a:lnTo>
-                    <a:pt x="3740422" y="3103467"/>
-                  </a:lnTo>
-                  <a:lnTo>
-                    <a:pt x="3814182" y="3123607"/>
-                  </a:lnTo>
-                  <a:lnTo>
-                    <a:pt x="3887942" y="3143008"/>
-                  </a:lnTo>
-                  <a:lnTo>
-                    <a:pt x="3961702" y="3161698"/>
-                  </a:lnTo>
-                  <a:lnTo>
-                    <a:pt x="4035462" y="3179702"/>
-                  </a:lnTo>
-                  <a:lnTo>
-                    <a:pt x="4109222" y="3197046"/>
-                  </a:lnTo>
-                  <a:lnTo>
-                    <a:pt x="4182982" y="3213754"/>
-                  </a:lnTo>
-                  <a:lnTo>
-                    <a:pt x="4256742" y="3229849"/>
-                  </a:lnTo>
-                  <a:lnTo>
-                    <a:pt x="4330502" y="3245354"/>
-                  </a:lnTo>
-                  <a:lnTo>
-                    <a:pt x="4404262" y="3260290"/>
-                  </a:lnTo>
-                  <a:lnTo>
-                    <a:pt x="4478022" y="3274679"/>
-                  </a:lnTo>
-                  <a:lnTo>
-                    <a:pt x="4551782" y="3288540"/>
-                  </a:lnTo>
-                  <a:lnTo>
-                    <a:pt x="4625542" y="3301892"/>
-                  </a:lnTo>
-                  <a:lnTo>
-                    <a:pt x="4699302" y="3314755"/>
-                  </a:lnTo>
-                  <a:lnTo>
-                    <a:pt x="4773062" y="3327146"/>
-                  </a:lnTo>
-                  <a:lnTo>
-                    <a:pt x="4846822" y="3339083"/>
-                  </a:lnTo>
-                  <a:lnTo>
-                    <a:pt x="4920582" y="3350582"/>
-                  </a:lnTo>
-                  <a:lnTo>
-                    <a:pt x="4994342" y="3361659"/>
-                  </a:lnTo>
-                  <a:lnTo>
-                    <a:pt x="5068102" y="3372331"/>
-                  </a:lnTo>
-                  <a:lnTo>
-                    <a:pt x="5141862" y="3382610"/>
-                  </a:lnTo>
-                  <a:lnTo>
-                    <a:pt x="5215622" y="3392513"/>
-                  </a:lnTo>
-                  <a:lnTo>
-                    <a:pt x="5289382" y="3402053"/>
-                  </a:lnTo>
-                  <a:lnTo>
-                    <a:pt x="5363142" y="3411243"/>
-                  </a:lnTo>
-                  <a:lnTo>
-                    <a:pt x="5436902" y="3420095"/>
-                  </a:lnTo>
-                  <a:lnTo>
-                    <a:pt x="5510662" y="3428623"/>
-                  </a:lnTo>
-                  <a:lnTo>
-                    <a:pt x="5584422" y="3436839"/>
-                  </a:lnTo>
-                  <a:lnTo>
-                    <a:pt x="5658182" y="3444753"/>
-                  </a:lnTo>
-                  <a:lnTo>
-                    <a:pt x="5731942" y="3452377"/>
-                  </a:lnTo>
-                  <a:lnTo>
-                    <a:pt x="5805702" y="3459721"/>
-                  </a:lnTo>
-                  <a:lnTo>
-                    <a:pt x="5879462" y="3466796"/>
-                  </a:lnTo>
-                  <a:lnTo>
-                    <a:pt x="5953222" y="3473611"/>
-                  </a:lnTo>
-                  <a:lnTo>
-                    <a:pt x="6026982" y="3480177"/>
-                  </a:lnTo>
-                  <a:lnTo>
-                    <a:pt x="6100743" y="3486502"/>
-                  </a:lnTo>
-                  <a:lnTo>
-                    <a:pt x="6174503" y="3492595"/>
-                  </a:lnTo>
-                  <a:lnTo>
-                    <a:pt x="6248263" y="3498464"/>
-                  </a:lnTo>
-                  <a:lnTo>
-                    <a:pt x="6322023" y="3504118"/>
-                  </a:lnTo>
-                  <a:lnTo>
-                    <a:pt x="6395783" y="3509565"/>
-                  </a:lnTo>
-                  <a:lnTo>
-                    <a:pt x="6469543" y="3514812"/>
-                  </a:lnTo>
-                  <a:lnTo>
-                    <a:pt x="6543303" y="3519867"/>
-                  </a:lnTo>
-                  <a:lnTo>
-                    <a:pt x="6617063" y="3524736"/>
+                    <a:pt x="52420" y="91770"/>
+                  </a:lnTo>
+                  <a:lnTo>
+                    <a:pt x="126180" y="216162"/>
+                  </a:lnTo>
+                  <a:lnTo>
+                    <a:pt x="199940" y="335993"/>
+                  </a:lnTo>
+                  <a:lnTo>
+                    <a:pt x="273701" y="451429"/>
+                  </a:lnTo>
+                  <a:lnTo>
+                    <a:pt x="347461" y="562631"/>
+                  </a:lnTo>
+                  <a:lnTo>
+                    <a:pt x="421221" y="669756"/>
+                  </a:lnTo>
+                  <a:lnTo>
+                    <a:pt x="494981" y="772952"/>
+                  </a:lnTo>
+                  <a:lnTo>
+                    <a:pt x="568741" y="872364"/>
+                  </a:lnTo>
+                  <a:lnTo>
+                    <a:pt x="642501" y="968130"/>
+                  </a:lnTo>
+                  <a:lnTo>
+                    <a:pt x="716261" y="1060383"/>
+                  </a:lnTo>
+                  <a:lnTo>
+                    <a:pt x="790021" y="1149254"/>
+                  </a:lnTo>
+                  <a:lnTo>
+                    <a:pt x="863781" y="1234866"/>
+                  </a:lnTo>
+                  <a:lnTo>
+                    <a:pt x="937541" y="1317338"/>
+                  </a:lnTo>
+                  <a:lnTo>
+                    <a:pt x="1011301" y="1396786"/>
+                  </a:lnTo>
+                  <a:lnTo>
+                    <a:pt x="1085061" y="1473320"/>
+                  </a:lnTo>
+                  <a:lnTo>
+                    <a:pt x="1158821" y="1547047"/>
+                  </a:lnTo>
+                  <a:lnTo>
+                    <a:pt x="1232581" y="1618071"/>
+                  </a:lnTo>
+                  <a:lnTo>
+                    <a:pt x="1306341" y="1686490"/>
+                  </a:lnTo>
+                  <a:lnTo>
+                    <a:pt x="1380101" y="1752399"/>
+                  </a:lnTo>
+                  <a:lnTo>
+                    <a:pt x="1453861" y="1815892"/>
+                  </a:lnTo>
+                  <a:lnTo>
+                    <a:pt x="1527621" y="1877057"/>
+                  </a:lnTo>
+                  <a:lnTo>
+                    <a:pt x="1601381" y="1935978"/>
+                  </a:lnTo>
+                  <a:lnTo>
+                    <a:pt x="1675141" y="1992739"/>
+                  </a:lnTo>
+                  <a:lnTo>
+                    <a:pt x="1748901" y="2047418"/>
+                  </a:lnTo>
+                  <a:lnTo>
+                    <a:pt x="1822661" y="2100091"/>
+                  </a:lnTo>
+                  <a:lnTo>
+                    <a:pt x="1896421" y="2150833"/>
+                  </a:lnTo>
+                  <a:lnTo>
+                    <a:pt x="1970181" y="2199715"/>
+                  </a:lnTo>
+                  <a:lnTo>
+                    <a:pt x="2043941" y="2246803"/>
+                  </a:lnTo>
+                  <a:lnTo>
+                    <a:pt x="2117701" y="2292165"/>
+                  </a:lnTo>
+                  <a:lnTo>
+                    <a:pt x="2191461" y="2335863"/>
+                  </a:lnTo>
+                  <a:lnTo>
+                    <a:pt x="2265221" y="2377959"/>
+                  </a:lnTo>
+                  <a:lnTo>
+                    <a:pt x="2338981" y="2418511"/>
+                  </a:lnTo>
+                  <a:lnTo>
+                    <a:pt x="2412741" y="2457576"/>
+                  </a:lnTo>
+                  <a:lnTo>
+                    <a:pt x="2486501" y="2495208"/>
+                  </a:lnTo>
+                  <a:lnTo>
+                    <a:pt x="2560261" y="2531460"/>
+                  </a:lnTo>
+                  <a:lnTo>
+                    <a:pt x="2634021" y="2566383"/>
+                  </a:lnTo>
+                  <a:lnTo>
+                    <a:pt x="2707781" y="2600025"/>
+                  </a:lnTo>
+                  <a:lnTo>
+                    <a:pt x="2781541" y="2632433"/>
+                  </a:lnTo>
+                  <a:lnTo>
+                    <a:pt x="2855301" y="2663653"/>
+                  </a:lnTo>
+                  <a:lnTo>
+                    <a:pt x="2929061" y="2693728"/>
+                  </a:lnTo>
+                  <a:lnTo>
+                    <a:pt x="3002821" y="2722700"/>
+                  </a:lnTo>
+                  <a:lnTo>
+                    <a:pt x="3076581" y="2750609"/>
+                  </a:lnTo>
+                  <a:lnTo>
+                    <a:pt x="3150341" y="2777495"/>
+                  </a:lnTo>
+                  <a:lnTo>
+                    <a:pt x="3224102" y="2803395"/>
+                  </a:lnTo>
+                  <a:lnTo>
+                    <a:pt x="3297862" y="2828345"/>
+                  </a:lnTo>
+                  <a:lnTo>
+                    <a:pt x="3371622" y="2852381"/>
+                  </a:lnTo>
+                  <a:lnTo>
+                    <a:pt x="3445382" y="2875534"/>
+                  </a:lnTo>
+                  <a:lnTo>
+                    <a:pt x="3519142" y="2897839"/>
+                  </a:lnTo>
+                  <a:lnTo>
+                    <a:pt x="3592902" y="2919326"/>
+                  </a:lnTo>
+                  <a:lnTo>
+                    <a:pt x="3666662" y="2940024"/>
+                  </a:lnTo>
+                  <a:lnTo>
+                    <a:pt x="3740422" y="2959964"/>
+                  </a:lnTo>
+                  <a:lnTo>
+                    <a:pt x="3814182" y="2979173"/>
+                  </a:lnTo>
+                  <a:lnTo>
+                    <a:pt x="3887942" y="2997677"/>
+                  </a:lnTo>
+                  <a:lnTo>
+                    <a:pt x="3961702" y="3015502"/>
+                  </a:lnTo>
+                  <a:lnTo>
+                    <a:pt x="4035462" y="3032674"/>
+                  </a:lnTo>
+                  <a:lnTo>
+                    <a:pt x="4109222" y="3049216"/>
+                  </a:lnTo>
+                  <a:lnTo>
+                    <a:pt x="4182982" y="3065151"/>
+                  </a:lnTo>
+                  <a:lnTo>
+                    <a:pt x="4256742" y="3080502"/>
+                  </a:lnTo>
+                  <a:lnTo>
+                    <a:pt x="4330502" y="3095290"/>
+                  </a:lnTo>
+                  <a:lnTo>
+                    <a:pt x="4404262" y="3109536"/>
+                  </a:lnTo>
+                  <a:lnTo>
+                    <a:pt x="4478022" y="3123259"/>
+                  </a:lnTo>
+                  <a:lnTo>
+                    <a:pt x="4551782" y="3136479"/>
+                  </a:lnTo>
+                  <a:lnTo>
+                    <a:pt x="4625542" y="3149214"/>
+                  </a:lnTo>
+                  <a:lnTo>
+                    <a:pt x="4699302" y="3161482"/>
+                  </a:lnTo>
+                  <a:lnTo>
+                    <a:pt x="4773062" y="3173300"/>
+                  </a:lnTo>
+                  <a:lnTo>
+                    <a:pt x="4846822" y="3184685"/>
+                  </a:lnTo>
+                  <a:lnTo>
+                    <a:pt x="4920582" y="3195652"/>
+                  </a:lnTo>
+                  <a:lnTo>
+                    <a:pt x="4994342" y="3206218"/>
+                  </a:lnTo>
+                  <a:lnTo>
+                    <a:pt x="5068102" y="3216395"/>
+                  </a:lnTo>
+                  <a:lnTo>
+                    <a:pt x="5141862" y="3226200"/>
+                  </a:lnTo>
+                  <a:lnTo>
+                    <a:pt x="5215622" y="3235645"/>
+                  </a:lnTo>
+                  <a:lnTo>
+                    <a:pt x="5289382" y="3244743"/>
+                  </a:lnTo>
+                  <a:lnTo>
+                    <a:pt x="5363142" y="3253508"/>
+                  </a:lnTo>
+                  <a:lnTo>
+                    <a:pt x="5436902" y="3261951"/>
+                  </a:lnTo>
+                  <a:lnTo>
+                    <a:pt x="5510662" y="3270085"/>
+                  </a:lnTo>
+                  <a:lnTo>
+                    <a:pt x="5584422" y="3277921"/>
+                  </a:lnTo>
+                  <a:lnTo>
+                    <a:pt x="5658182" y="3285469"/>
+                  </a:lnTo>
+                  <a:lnTo>
+                    <a:pt x="5731942" y="3292740"/>
+                  </a:lnTo>
+                  <a:lnTo>
+                    <a:pt x="5805702" y="3299745"/>
+                  </a:lnTo>
+                  <a:lnTo>
+                    <a:pt x="5879462" y="3306493"/>
+                  </a:lnTo>
+                  <a:lnTo>
+                    <a:pt x="5953222" y="3312993"/>
+                  </a:lnTo>
+                  <a:lnTo>
+                    <a:pt x="6026982" y="3319255"/>
+                  </a:lnTo>
+                  <a:lnTo>
+                    <a:pt x="6100743" y="3325287"/>
+                  </a:lnTo>
+                  <a:lnTo>
+                    <a:pt x="6174503" y="3331098"/>
+                  </a:lnTo>
+                  <a:lnTo>
+                    <a:pt x="6248263" y="3336696"/>
+                  </a:lnTo>
+                  <a:lnTo>
+                    <a:pt x="6322023" y="3342089"/>
+                  </a:lnTo>
+                  <a:lnTo>
+                    <a:pt x="6395783" y="3347284"/>
+                  </a:lnTo>
+                  <a:lnTo>
+                    <a:pt x="6469543" y="3352288"/>
+                  </a:lnTo>
+                  <a:lnTo>
+                    <a:pt x="6543303" y="3357109"/>
+                  </a:lnTo>
+                  <a:lnTo>
+                    <a:pt x="6617063" y="3361753"/>
                   </a:lnTo>
                 </a:path>
               </a:pathLst>
@@ -4464,7 +4464,7 @@
           </p:nvSpPr>
           <p:spPr>
             <a:xfrm>
-              <a:off x="817517" y="4679530"/>
+              <a:off x="817517" y="4727786"/>
               <a:ext cx="7799693" cy="0"/>
             </a:xfrm>
             <a:custGeom>
@@ -4507,15 +4507,15 @@
           </p:nvSpPr>
           <p:spPr>
             <a:xfrm>
-              <a:off x="4269157" y="1896563"/>
-              <a:ext cx="0" cy="3826579"/>
+              <a:off x="4269157" y="2073503"/>
+              <a:ext cx="0" cy="3649639"/>
             </a:xfrm>
             <a:custGeom>
               <a:avLst/>
               <a:pathLst>
-                <a:path w="0" h="3826579">
+                <a:path w="0" h="3649639">
                   <a:moveTo>
-                    <a:pt x="0" y="3826579"/>
+                    <a:pt x="0" y="3649639"/>
                   </a:moveTo>
                   <a:lnTo>
                     <a:pt x="0" y="0"/>
@@ -4550,7 +4550,7 @@
           </p:nvSpPr>
           <p:spPr>
             <a:xfrm>
-              <a:off x="692708" y="5509156"/>
+              <a:off x="692708" y="5517199"/>
               <a:ext cx="62179" cy="80101"/>
             </a:xfrm>
             <a:prstGeom prst="rect">
@@ -4596,7 +4596,7 @@
           </p:nvSpPr>
           <p:spPr>
             <a:xfrm>
-              <a:off x="692708" y="4639479"/>
+              <a:off x="692708" y="4687735"/>
               <a:ext cx="62179" cy="80101"/>
             </a:xfrm>
             <a:prstGeom prst="rect">
@@ -4642,7 +4642,7 @@
           </p:nvSpPr>
           <p:spPr>
             <a:xfrm>
-              <a:off x="692708" y="3769802"/>
+              <a:off x="692708" y="3858272"/>
               <a:ext cx="62179" cy="80101"/>
             </a:xfrm>
             <a:prstGeom prst="rect">
@@ -4688,7 +4688,7 @@
           </p:nvSpPr>
           <p:spPr>
             <a:xfrm>
-              <a:off x="692708" y="2900125"/>
+              <a:off x="692708" y="3028808"/>
               <a:ext cx="62179" cy="80101"/>
             </a:xfrm>
             <a:prstGeom prst="rect">
@@ -4734,7 +4734,7 @@
           </p:nvSpPr>
           <p:spPr>
             <a:xfrm>
-              <a:off x="692708" y="2030448"/>
+              <a:off x="692708" y="2199345"/>
               <a:ext cx="62179" cy="80101"/>
             </a:xfrm>
             <a:prstGeom prst="rect">
@@ -5010,7 +5010,7 @@
           </p:nvSpPr>
           <p:spPr>
             <a:xfrm rot="-5400000">
-              <a:off x="68446" y="3759743"/>
+              <a:off x="68446" y="3848213"/>
               <a:ext cx="1016904" cy="100218"/>
             </a:xfrm>
             <a:prstGeom prst="rect">
@@ -5051,6 +5051,52 @@
         <p:sp>
           <p:nvSpPr>
             <p:cNvPr id="38" name="tx38"/>
+            <p:cNvSpPr/>
+            <p:nvPr/>
+          </p:nvSpPr>
+          <p:spPr>
+            <a:xfrm>
+              <a:off x="817517" y="1896563"/>
+              <a:ext cx="5626211" cy="82021"/>
+            </a:xfrm>
+            <a:prstGeom prst="rect">
+              <a:avLst/>
+            </a:prstGeom>
+            <a:noFill/>
+          </p:spPr>
+          <p:txBody>
+            <a:bodyPr lIns="0" rIns="0" tIns="0" bIns="0" anchorCtr="1" anchor="ctr" wrap="none"/>
+            <a:lstStyle/>
+            <a:p>
+              <a:pPr algn="l" marL="0" marR="0" indent="0">
+                <a:lnSpc>
+                  <a:spcPts val="900"/>
+                </a:lnSpc>
+                <a:spcBef>
+                  <a:spcPts val="0"/>
+                </a:spcBef>
+                <a:spcAft>
+                  <a:spcPts val="0"/>
+                </a:spcAft>
+              </a:pPr>
+              <a:r>
+                <a:rPr sz="900">
+                  <a:solidFill>
+                    <a:srgbClr val="404040">
+                      <a:alpha val="100000"/>
+                    </a:srgbClr>
+                  </a:solidFill>
+                  <a:latin typeface="Helvetica"/>
+                  <a:cs typeface="Helvetica"/>
+                </a:rPr>
+                <a:t>subHR per 0.1 ratio decline: 1.57 (1.28-1.92)  |  per IQR decline (Δ = 0.29): 3.72 (2.05-6.75)  |  IQR: [0.85, 1.15]</a:t>
+              </a:r>
+            </a:p>
+          </p:txBody>
+        </p:sp>
+        <p:sp>
+          <p:nvSpPr>
+            <p:cNvPr id="39" name="tx39"/>
             <p:cNvSpPr/>
             <p:nvPr/>
           </p:nvSpPr>

--- a/docs/pptx/whole/jx-linsubhr-ratio-throm3.pptx
+++ b/docs/pptx/whole/jx-linsubhr-ratio-throm3.pptx
@@ -5057,7 +5057,7 @@
           <p:spPr>
             <a:xfrm>
               <a:off x="817517" y="1896563"/>
-              <a:ext cx="5626211" cy="82021"/>
+              <a:ext cx="6236116" cy="82021"/>
             </a:xfrm>
             <a:prstGeom prst="rect">
               <a:avLst/>
@@ -5089,7 +5089,7 @@
                   <a:latin typeface="Helvetica"/>
                   <a:cs typeface="Helvetica"/>
                 </a:rPr>
-                <a:t>subHR per 0.1 ratio decline: 1.57 (1.28-1.92)  |  per IQR decline (Δ = 0.29): 3.72 (2.05-6.75)  |  IQR: [0.85, 1.15]</a:t>
+                <a:t>subHR per 0.1 ratio decline: 1.57 (1.28-1.92), p = &lt;0.001  |  per IQR decline (Δ = 0.29): 3.72 (2.05-6.75)  |  IQR: [0.85, 1.15]</a:t>
               </a:r>
             </a:p>
           </p:txBody>

--- a/docs/pptx/whole/jx-linsubhr-ratio-throm3.pptx
+++ b/docs/pptx/whole/jx-linsubhr-ratio-throm3.pptx
@@ -5057,7 +5057,7 @@
           <p:spPr>
             <a:xfrm>
               <a:off x="817517" y="1896563"/>
-              <a:ext cx="6236116" cy="82021"/>
+              <a:ext cx="6899879" cy="82021"/>
             </a:xfrm>
             <a:prstGeom prst="rect">
               <a:avLst/>
@@ -5089,7 +5089,7 @@
                   <a:latin typeface="Helvetica"/>
                   <a:cs typeface="Helvetica"/>
                 </a:rPr>
-                <a:t>subHR per 0.1 ratio decline: 1.57 (1.28-1.92), p = &lt;0.001  |  per IQR decline (Δ = 0.29): 3.72 (2.05-6.75)  |  IQR: [0.85, 1.15]</a:t>
+                <a:t>subHR per 0.1 ratio decline: 1.57 (1.28-1.92), p_Bonf = &lt;0.001 (n = 6)  |  per IQR decline (Δ = 0.29): 3.72 (2.05-6.75)  |  IQR: [0.85, 1.15]</a:t>
               </a:r>
             </a:p>
           </p:txBody>

--- a/docs/pptx/whole/jx-linsubhr-ratio-throm3.pptx
+++ b/docs/pptx/whole/jx-linsubhr-ratio-throm3.pptx
@@ -2443,7 +2443,7 @@
           </p:nvSpPr>
           <p:spPr>
             <a:xfrm>
-              <a:off x="1615213" y="2073503"/>
+              <a:off x="1365633" y="2073503"/>
               <a:ext cx="0" cy="3649639"/>
             </a:xfrm>
             <a:custGeom>
@@ -2486,7 +2486,7 @@
           </p:nvSpPr>
           <p:spPr>
             <a:xfrm>
-              <a:off x="3387871" y="2073503"/>
+              <a:off x="3517243" y="2073503"/>
               <a:ext cx="0" cy="3649639"/>
             </a:xfrm>
             <a:custGeom>
@@ -2529,7 +2529,7 @@
           </p:nvSpPr>
           <p:spPr>
             <a:xfrm>
-              <a:off x="5160528" y="2073503"/>
+              <a:off x="5668852" y="2073503"/>
               <a:ext cx="0" cy="3649639"/>
             </a:xfrm>
             <a:custGeom>
@@ -2572,7 +2572,7 @@
           </p:nvSpPr>
           <p:spPr>
             <a:xfrm>
-              <a:off x="6933186" y="2073503"/>
+              <a:off x="7820461" y="2073503"/>
               <a:ext cx="0" cy="3649639"/>
             </a:xfrm>
             <a:custGeom>
@@ -2830,7 +2830,7 @@
           </p:nvSpPr>
           <p:spPr>
             <a:xfrm>
-              <a:off x="2501542" y="2073503"/>
+              <a:off x="2441438" y="2073503"/>
               <a:ext cx="0" cy="3649639"/>
             </a:xfrm>
             <a:custGeom>
@@ -2873,7 +2873,7 @@
           </p:nvSpPr>
           <p:spPr>
             <a:xfrm>
-              <a:off x="4274200" y="2073503"/>
+              <a:off x="4593047" y="2073503"/>
               <a:ext cx="0" cy="3649639"/>
             </a:xfrm>
             <a:custGeom>
@@ -2916,7 +2916,7 @@
           </p:nvSpPr>
           <p:spPr>
             <a:xfrm>
-              <a:off x="6046857" y="2073503"/>
+              <a:off x="6744657" y="2073503"/>
               <a:ext cx="0" cy="3649639"/>
             </a:xfrm>
             <a:custGeom>
@@ -2953,598 +2953,555 @@
         </p:sp>
         <p:sp>
           <p:nvSpPr>
-            <p:cNvPr id="20" name="pl20"/>
+            <p:cNvPr id="20" name="pg20"/>
             <p:cNvSpPr/>
             <p:nvPr/>
           </p:nvSpPr>
           <p:spPr>
             <a:xfrm>
-              <a:off x="7819515" y="2073503"/>
-              <a:ext cx="0" cy="3649639"/>
+              <a:off x="1172049" y="2073503"/>
+              <a:ext cx="7090630" cy="3432544"/>
             </a:xfrm>
             <a:custGeom>
               <a:avLst/>
               <a:pathLst>
-                <a:path w="0" h="3649639">
+                <a:path w="7090630" h="3432544">
                   <a:moveTo>
-                    <a:pt x="0" y="3649639"/>
+                    <a:pt x="1523025" y="0"/>
                   </a:moveTo>
                   <a:lnTo>
-                    <a:pt x="0" y="0"/>
-                  </a:lnTo>
-                  <a:lnTo>
-                    <a:pt x="0" y="0"/>
-                  </a:lnTo>
-                </a:path>
-              </a:pathLst>
-            </a:custGeom>
-            <a:ln w="13550" cap="flat">
-              <a:solidFill>
-                <a:srgbClr val="EBEBEB">
-                  <a:alpha val="100000"/>
-                </a:srgbClr>
-              </a:solidFill>
-              <a:prstDash val="solid"/>
-              <a:round/>
-            </a:ln>
-          </p:spPr>
-          <p:txBody>
-            <a:bodyPr/>
-            <a:lstStyle/>
-            <a:p/>
-          </p:txBody>
-        </p:sp>
-        <p:sp>
-          <p:nvSpPr>
-            <p:cNvPr id="21" name="pg21"/>
-            <p:cNvSpPr/>
-            <p:nvPr/>
-          </p:nvSpPr>
-          <p:spPr>
-            <a:xfrm>
-              <a:off x="817517" y="2073503"/>
-              <a:ext cx="7235830" cy="3432544"/>
-            </a:xfrm>
-            <a:custGeom>
-              <a:avLst/>
-              <a:pathLst>
-                <a:path w="7235830" h="3432544">
-                  <a:moveTo>
-                    <a:pt x="1502065" y="0"/>
-                  </a:moveTo>
-                  <a:lnTo>
-                    <a:pt x="1556308" y="137283"/>
-                  </a:lnTo>
-                  <a:lnTo>
-                    <a:pt x="1630068" y="314100"/>
-                  </a:lnTo>
-                  <a:lnTo>
-                    <a:pt x="1703828" y="481575"/>
-                  </a:lnTo>
-                  <a:lnTo>
-                    <a:pt x="1777588" y="640201"/>
-                  </a:lnTo>
-                  <a:lnTo>
-                    <a:pt x="1851348" y="790445"/>
-                  </a:lnTo>
-                  <a:lnTo>
-                    <a:pt x="1925108" y="932751"/>
-                  </a:lnTo>
-                  <a:lnTo>
-                    <a:pt x="1998868" y="1067538"/>
-                  </a:lnTo>
-                  <a:lnTo>
-                    <a:pt x="2072628" y="1195203"/>
-                  </a:lnTo>
-                  <a:lnTo>
-                    <a:pt x="2146388" y="1316123"/>
-                  </a:lnTo>
-                  <a:lnTo>
-                    <a:pt x="2220148" y="1430654"/>
-                  </a:lnTo>
-                  <a:lnTo>
-                    <a:pt x="2293908" y="1539133"/>
-                  </a:lnTo>
-                  <a:lnTo>
-                    <a:pt x="2367668" y="1641881"/>
-                  </a:lnTo>
-                  <a:lnTo>
-                    <a:pt x="2441428" y="1739200"/>
-                  </a:lnTo>
-                  <a:lnTo>
-                    <a:pt x="2515188" y="1831376"/>
-                  </a:lnTo>
-                  <a:lnTo>
-                    <a:pt x="2588948" y="1918683"/>
-                  </a:lnTo>
-                  <a:lnTo>
-                    <a:pt x="2662708" y="2001376"/>
-                  </a:lnTo>
-                  <a:lnTo>
-                    <a:pt x="2736468" y="2079700"/>
-                  </a:lnTo>
-                  <a:lnTo>
-                    <a:pt x="2810228" y="2153886"/>
-                  </a:lnTo>
-                  <a:lnTo>
-                    <a:pt x="2883988" y="2224152"/>
-                  </a:lnTo>
-                  <a:lnTo>
-                    <a:pt x="2957748" y="2290705"/>
-                  </a:lnTo>
-                  <a:lnTo>
-                    <a:pt x="3031508" y="2353742"/>
-                  </a:lnTo>
-                  <a:lnTo>
-                    <a:pt x="3105268" y="2413448"/>
-                  </a:lnTo>
-                  <a:lnTo>
-                    <a:pt x="3179028" y="2469999"/>
-                  </a:lnTo>
-                  <a:lnTo>
-                    <a:pt x="3252788" y="2523563"/>
-                  </a:lnTo>
-                  <a:lnTo>
-                    <a:pt x="3326548" y="2574296"/>
-                  </a:lnTo>
-                  <a:lnTo>
-                    <a:pt x="3400308" y="2622348"/>
-                  </a:lnTo>
-                  <a:lnTo>
-                    <a:pt x="3474068" y="2659422"/>
-                  </a:lnTo>
-                  <a:lnTo>
-                    <a:pt x="3547828" y="2676100"/>
-                  </a:lnTo>
-                  <a:lnTo>
-                    <a:pt x="3621588" y="2692440"/>
-                  </a:lnTo>
-                  <a:lnTo>
-                    <a:pt x="3695348" y="2708450"/>
-                  </a:lnTo>
-                  <a:lnTo>
-                    <a:pt x="3769108" y="2724136"/>
-                  </a:lnTo>
-                  <a:lnTo>
-                    <a:pt x="3842868" y="2739505"/>
-                  </a:lnTo>
-                  <a:lnTo>
-                    <a:pt x="3916628" y="2754562"/>
-                  </a:lnTo>
-                  <a:lnTo>
-                    <a:pt x="3990388" y="2769315"/>
-                  </a:lnTo>
-                  <a:lnTo>
-                    <a:pt x="4064149" y="2783769"/>
-                  </a:lnTo>
-                  <a:lnTo>
-                    <a:pt x="4137909" y="2797931"/>
-                  </a:lnTo>
-                  <a:lnTo>
-                    <a:pt x="4211669" y="2811807"/>
-                  </a:lnTo>
-                  <a:lnTo>
-                    <a:pt x="4285429" y="2825402"/>
-                  </a:lnTo>
-                  <a:lnTo>
-                    <a:pt x="4359189" y="2838721"/>
-                  </a:lnTo>
-                  <a:lnTo>
-                    <a:pt x="4432949" y="2851772"/>
-                  </a:lnTo>
-                  <a:lnTo>
-                    <a:pt x="4506709" y="2864558"/>
-                  </a:lnTo>
-                  <a:lnTo>
-                    <a:pt x="4580469" y="2877085"/>
-                  </a:lnTo>
-                  <a:lnTo>
-                    <a:pt x="4654229" y="2889359"/>
-                  </a:lnTo>
-                  <a:lnTo>
-                    <a:pt x="4727989" y="2901385"/>
-                  </a:lnTo>
-                  <a:lnTo>
-                    <a:pt x="4801749" y="2913167"/>
-                  </a:lnTo>
-                  <a:lnTo>
-                    <a:pt x="4875509" y="2924711"/>
-                  </a:lnTo>
-                  <a:lnTo>
-                    <a:pt x="4949269" y="2936022"/>
-                  </a:lnTo>
-                  <a:lnTo>
-                    <a:pt x="5023029" y="2947103"/>
-                  </a:lnTo>
-                  <a:lnTo>
-                    <a:pt x="5096789" y="2957961"/>
-                  </a:lnTo>
-                  <a:lnTo>
-                    <a:pt x="5170549" y="2968599"/>
-                  </a:lnTo>
-                  <a:lnTo>
-                    <a:pt x="5244309" y="2979021"/>
-                  </a:lnTo>
-                  <a:lnTo>
-                    <a:pt x="5318069" y="2989233"/>
-                  </a:lnTo>
-                  <a:lnTo>
-                    <a:pt x="5391829" y="2999238"/>
-                  </a:lnTo>
-                  <a:lnTo>
-                    <a:pt x="5465589" y="3009040"/>
-                  </a:lnTo>
-                  <a:lnTo>
-                    <a:pt x="5539349" y="3018645"/>
-                  </a:lnTo>
-                  <a:lnTo>
-                    <a:pt x="5613109" y="3028055"/>
-                  </a:lnTo>
-                  <a:lnTo>
-                    <a:pt x="5686869" y="3037274"/>
-                  </a:lnTo>
-                  <a:lnTo>
-                    <a:pt x="5760629" y="3046307"/>
-                  </a:lnTo>
-                  <a:lnTo>
-                    <a:pt x="5834389" y="3055158"/>
-                  </a:lnTo>
-                  <a:lnTo>
-                    <a:pt x="5908149" y="3063829"/>
-                  </a:lnTo>
-                  <a:lnTo>
-                    <a:pt x="5981909" y="3072325"/>
-                  </a:lnTo>
-                  <a:lnTo>
-                    <a:pt x="6055669" y="3080649"/>
-                  </a:lnTo>
-                  <a:lnTo>
-                    <a:pt x="6129429" y="3088804"/>
-                  </a:lnTo>
-                  <a:lnTo>
-                    <a:pt x="6203189" y="3096795"/>
-                  </a:lnTo>
-                  <a:lnTo>
-                    <a:pt x="6276949" y="3104623"/>
-                  </a:lnTo>
-                  <a:lnTo>
-                    <a:pt x="6350709" y="3112294"/>
-                  </a:lnTo>
-                  <a:lnTo>
-                    <a:pt x="6424469" y="3119809"/>
-                  </a:lnTo>
-                  <a:lnTo>
-                    <a:pt x="6498229" y="3127172"/>
-                  </a:lnTo>
-                  <a:lnTo>
-                    <a:pt x="6571989" y="3134387"/>
-                  </a:lnTo>
-                  <a:lnTo>
-                    <a:pt x="6645749" y="3141455"/>
-                  </a:lnTo>
-                  <a:lnTo>
-                    <a:pt x="6719509" y="3148380"/>
-                  </a:lnTo>
-                  <a:lnTo>
-                    <a:pt x="6793269" y="3155165"/>
-                  </a:lnTo>
-                  <a:lnTo>
-                    <a:pt x="6867029" y="3161813"/>
-                  </a:lnTo>
-                  <a:lnTo>
-                    <a:pt x="6940789" y="3168327"/>
-                  </a:lnTo>
-                  <a:lnTo>
-                    <a:pt x="7014550" y="3174708"/>
-                  </a:lnTo>
-                  <a:lnTo>
-                    <a:pt x="7088310" y="3180961"/>
-                  </a:lnTo>
-                  <a:lnTo>
-                    <a:pt x="7162070" y="3187087"/>
-                  </a:lnTo>
-                  <a:lnTo>
-                    <a:pt x="7235830" y="3193089"/>
-                  </a:lnTo>
-                  <a:lnTo>
-                    <a:pt x="7235830" y="3432544"/>
-                  </a:lnTo>
-                  <a:lnTo>
-                    <a:pt x="7162070" y="3429688"/>
-                  </a:lnTo>
-                  <a:lnTo>
-                    <a:pt x="7088310" y="3426672"/>
-                  </a:lnTo>
-                  <a:lnTo>
-                    <a:pt x="7014550" y="3423488"/>
-                  </a:lnTo>
-                  <a:lnTo>
-                    <a:pt x="6940789" y="3420127"/>
-                  </a:lnTo>
-                  <a:lnTo>
-                    <a:pt x="6867029" y="3416578"/>
-                  </a:lnTo>
-                  <a:lnTo>
-                    <a:pt x="6793269" y="3412831"/>
-                  </a:lnTo>
-                  <a:lnTo>
-                    <a:pt x="6719509" y="3408875"/>
-                  </a:lnTo>
-                  <a:lnTo>
-                    <a:pt x="6645749" y="3404698"/>
-                  </a:lnTo>
-                  <a:lnTo>
-                    <a:pt x="6571989" y="3400289"/>
-                  </a:lnTo>
-                  <a:lnTo>
-                    <a:pt x="6498229" y="3395633"/>
-                  </a:lnTo>
-                  <a:lnTo>
-                    <a:pt x="6424469" y="3390718"/>
-                  </a:lnTo>
-                  <a:lnTo>
-                    <a:pt x="6350709" y="3385528"/>
-                  </a:lnTo>
-                  <a:lnTo>
-                    <a:pt x="6276949" y="3380049"/>
-                  </a:lnTo>
-                  <a:lnTo>
-                    <a:pt x="6203189" y="3374264"/>
-                  </a:lnTo>
-                  <a:lnTo>
-                    <a:pt x="6129429" y="3368157"/>
-                  </a:lnTo>
-                  <a:lnTo>
-                    <a:pt x="6055669" y="3361709"/>
-                  </a:lnTo>
-                  <a:lnTo>
-                    <a:pt x="5981909" y="3354901"/>
-                  </a:lnTo>
-                  <a:lnTo>
-                    <a:pt x="5908149" y="3347714"/>
-                  </a:lnTo>
-                  <a:lnTo>
-                    <a:pt x="5834389" y="3340125"/>
-                  </a:lnTo>
-                  <a:lnTo>
-                    <a:pt x="5760629" y="3332113"/>
-                  </a:lnTo>
-                  <a:lnTo>
-                    <a:pt x="5686869" y="3323654"/>
-                  </a:lnTo>
-                  <a:lnTo>
-                    <a:pt x="5613109" y="3314724"/>
-                  </a:lnTo>
-                  <a:lnTo>
-                    <a:pt x="5539349" y="3305295"/>
-                  </a:lnTo>
-                  <a:lnTo>
-                    <a:pt x="5465589" y="3295340"/>
-                  </a:lnTo>
-                  <a:lnTo>
-                    <a:pt x="5391829" y="3284830"/>
-                  </a:lnTo>
-                  <a:lnTo>
-                    <a:pt x="5318069" y="3273733"/>
-                  </a:lnTo>
-                  <a:lnTo>
-                    <a:pt x="5244309" y="3262018"/>
-                  </a:lnTo>
-                  <a:lnTo>
-                    <a:pt x="5170549" y="3249649"/>
-                  </a:lnTo>
-                  <a:lnTo>
-                    <a:pt x="5096789" y="3236590"/>
-                  </a:lnTo>
-                  <a:lnTo>
-                    <a:pt x="5023029" y="3222802"/>
-                  </a:lnTo>
-                  <a:lnTo>
-                    <a:pt x="4949269" y="3208246"/>
-                  </a:lnTo>
-                  <a:lnTo>
-                    <a:pt x="4875509" y="3192877"/>
-                  </a:lnTo>
-                  <a:lnTo>
-                    <a:pt x="4801749" y="3176651"/>
-                  </a:lnTo>
-                  <a:lnTo>
-                    <a:pt x="4727989" y="3159520"/>
-                  </a:lnTo>
-                  <a:lnTo>
-                    <a:pt x="4654229" y="3141433"/>
-                  </a:lnTo>
-                  <a:lnTo>
-                    <a:pt x="4580469" y="3122337"/>
-                  </a:lnTo>
-                  <a:lnTo>
-                    <a:pt x="4506709" y="3102176"/>
-                  </a:lnTo>
-                  <a:lnTo>
-                    <a:pt x="4432949" y="3080891"/>
-                  </a:lnTo>
-                  <a:lnTo>
-                    <a:pt x="4359189" y="3058417"/>
-                  </a:lnTo>
-                  <a:lnTo>
-                    <a:pt x="4285429" y="3034691"/>
-                  </a:lnTo>
-                  <a:lnTo>
-                    <a:pt x="4211669" y="3009640"/>
-                  </a:lnTo>
-                  <a:lnTo>
-                    <a:pt x="4137909" y="2983192"/>
-                  </a:lnTo>
-                  <a:lnTo>
-                    <a:pt x="4064149" y="2955269"/>
-                  </a:lnTo>
-                  <a:lnTo>
-                    <a:pt x="3990388" y="2925788"/>
-                  </a:lnTo>
-                  <a:lnTo>
-                    <a:pt x="3916628" y="2894663"/>
-                  </a:lnTo>
-                  <a:lnTo>
-                    <a:pt x="3842868" y="2861801"/>
-                  </a:lnTo>
-                  <a:lnTo>
-                    <a:pt x="3769108" y="2827106"/>
-                  </a:lnTo>
-                  <a:lnTo>
-                    <a:pt x="3695348" y="2790476"/>
-                  </a:lnTo>
-                  <a:lnTo>
-                    <a:pt x="3621588" y="2751802"/>
-                  </a:lnTo>
-                  <a:lnTo>
-                    <a:pt x="3547828" y="2710971"/>
-                  </a:lnTo>
-                  <a:lnTo>
-                    <a:pt x="3474068" y="2667862"/>
-                  </a:lnTo>
-                  <a:lnTo>
-                    <a:pt x="3400308" y="2642400"/>
-                  </a:lnTo>
-                  <a:lnTo>
-                    <a:pt x="3326548" y="2625026"/>
-                  </a:lnTo>
-                  <a:lnTo>
-                    <a:pt x="3252788" y="2607294"/>
-                  </a:lnTo>
-                  <a:lnTo>
-                    <a:pt x="3179028" y="2589195"/>
-                  </a:lnTo>
-                  <a:lnTo>
-                    <a:pt x="3105268" y="2570723"/>
-                  </a:lnTo>
-                  <a:lnTo>
-                    <a:pt x="3031508" y="2551869"/>
-                  </a:lnTo>
-                  <a:lnTo>
-                    <a:pt x="2957748" y="2532626"/>
-                  </a:lnTo>
-                  <a:lnTo>
-                    <a:pt x="2883988" y="2512985"/>
-                  </a:lnTo>
-                  <a:lnTo>
-                    <a:pt x="2810228" y="2492939"/>
-                  </a:lnTo>
-                  <a:lnTo>
-                    <a:pt x="2736468" y="2472479"/>
-                  </a:lnTo>
-                  <a:lnTo>
-                    <a:pt x="2662708" y="2451597"/>
-                  </a:lnTo>
-                  <a:lnTo>
-                    <a:pt x="2588948" y="2430283"/>
-                  </a:lnTo>
-                  <a:lnTo>
-                    <a:pt x="2515188" y="2408529"/>
-                  </a:lnTo>
-                  <a:lnTo>
-                    <a:pt x="2441428" y="2386326"/>
-                  </a:lnTo>
-                  <a:lnTo>
-                    <a:pt x="2367668" y="2363664"/>
-                  </a:lnTo>
-                  <a:lnTo>
-                    <a:pt x="2293908" y="2340535"/>
-                  </a:lnTo>
-                  <a:lnTo>
-                    <a:pt x="2220148" y="2316927"/>
-                  </a:lnTo>
-                  <a:lnTo>
-                    <a:pt x="2146388" y="2292833"/>
-                  </a:lnTo>
-                  <a:lnTo>
-                    <a:pt x="2072628" y="2268241"/>
-                  </a:lnTo>
-                  <a:lnTo>
-                    <a:pt x="1998868" y="2243141"/>
-                  </a:lnTo>
-                  <a:lnTo>
-                    <a:pt x="1925108" y="2217522"/>
-                  </a:lnTo>
-                  <a:lnTo>
-                    <a:pt x="1851348" y="2191375"/>
-                  </a:lnTo>
-                  <a:lnTo>
-                    <a:pt x="1777588" y="2164687"/>
-                  </a:lnTo>
-                  <a:lnTo>
-                    <a:pt x="1703828" y="2137449"/>
-                  </a:lnTo>
-                  <a:lnTo>
-                    <a:pt x="1630068" y="2109648"/>
-                  </a:lnTo>
-                  <a:lnTo>
-                    <a:pt x="1556308" y="2081273"/>
-                  </a:lnTo>
-                  <a:lnTo>
-                    <a:pt x="1482548" y="2052312"/>
-                  </a:lnTo>
-                  <a:lnTo>
-                    <a:pt x="1408788" y="2022753"/>
-                  </a:lnTo>
-                  <a:lnTo>
-                    <a:pt x="1335028" y="1992584"/>
-                  </a:lnTo>
-                  <a:lnTo>
-                    <a:pt x="1261268" y="1961792"/>
-                  </a:lnTo>
-                  <a:lnTo>
-                    <a:pt x="1187508" y="1930364"/>
-                  </a:lnTo>
-                  <a:lnTo>
-                    <a:pt x="1113747" y="1898286"/>
-                  </a:lnTo>
-                  <a:lnTo>
-                    <a:pt x="1039987" y="1865547"/>
-                  </a:lnTo>
-                  <a:lnTo>
-                    <a:pt x="966227" y="1832131"/>
-                  </a:lnTo>
-                  <a:lnTo>
-                    <a:pt x="892467" y="1798026"/>
-                  </a:lnTo>
-                  <a:lnTo>
-                    <a:pt x="818707" y="1763216"/>
-                  </a:lnTo>
-                  <a:lnTo>
-                    <a:pt x="744947" y="1727687"/>
-                  </a:lnTo>
-                  <a:lnTo>
-                    <a:pt x="671187" y="1691424"/>
-                  </a:lnTo>
-                  <a:lnTo>
-                    <a:pt x="597427" y="1654413"/>
-                  </a:lnTo>
-                  <a:lnTo>
-                    <a:pt x="523667" y="1616638"/>
-                  </a:lnTo>
-                  <a:lnTo>
-                    <a:pt x="449907" y="1578082"/>
-                  </a:lnTo>
-                  <a:lnTo>
-                    <a:pt x="376147" y="1538730"/>
-                  </a:lnTo>
-                  <a:lnTo>
-                    <a:pt x="302387" y="1498566"/>
-                  </a:lnTo>
-                  <a:lnTo>
-                    <a:pt x="228627" y="1457572"/>
-                  </a:lnTo>
-                  <a:lnTo>
-                    <a:pt x="154867" y="1415732"/>
-                  </a:lnTo>
-                  <a:lnTo>
-                    <a:pt x="81107" y="1373028"/>
-                  </a:lnTo>
-                  <a:lnTo>
-                    <a:pt x="7347" y="1329442"/>
-                  </a:lnTo>
-                  <a:lnTo>
-                    <a:pt x="0" y="1325010"/>
+                    <a:pt x="1575695" y="137283"/>
+                  </a:lnTo>
+                  <a:lnTo>
+                    <a:pt x="1647318" y="314100"/>
+                  </a:lnTo>
+                  <a:lnTo>
+                    <a:pt x="1718940" y="481575"/>
+                  </a:lnTo>
+                  <a:lnTo>
+                    <a:pt x="1790563" y="640201"/>
+                  </a:lnTo>
+                  <a:lnTo>
+                    <a:pt x="1862185" y="790445"/>
+                  </a:lnTo>
+                  <a:lnTo>
+                    <a:pt x="1933808" y="932751"/>
+                  </a:lnTo>
+                  <a:lnTo>
+                    <a:pt x="2005430" y="1067538"/>
+                  </a:lnTo>
+                  <a:lnTo>
+                    <a:pt x="2077053" y="1195203"/>
+                  </a:lnTo>
+                  <a:lnTo>
+                    <a:pt x="2148675" y="1316123"/>
+                  </a:lnTo>
+                  <a:lnTo>
+                    <a:pt x="2220298" y="1430654"/>
+                  </a:lnTo>
+                  <a:lnTo>
+                    <a:pt x="2291920" y="1539133"/>
+                  </a:lnTo>
+                  <a:lnTo>
+                    <a:pt x="2363543" y="1641881"/>
+                  </a:lnTo>
+                  <a:lnTo>
+                    <a:pt x="2435165" y="1739200"/>
+                  </a:lnTo>
+                  <a:lnTo>
+                    <a:pt x="2506788" y="1831376"/>
+                  </a:lnTo>
+                  <a:lnTo>
+                    <a:pt x="2578410" y="1918683"/>
+                  </a:lnTo>
+                  <a:lnTo>
+                    <a:pt x="2650033" y="2001376"/>
+                  </a:lnTo>
+                  <a:lnTo>
+                    <a:pt x="2721655" y="2079700"/>
+                  </a:lnTo>
+                  <a:lnTo>
+                    <a:pt x="2793278" y="2153886"/>
+                  </a:lnTo>
+                  <a:lnTo>
+                    <a:pt x="2864901" y="2224152"/>
+                  </a:lnTo>
+                  <a:lnTo>
+                    <a:pt x="2936523" y="2290705"/>
+                  </a:lnTo>
+                  <a:lnTo>
+                    <a:pt x="3008146" y="2353742"/>
+                  </a:lnTo>
+                  <a:lnTo>
+                    <a:pt x="3079768" y="2413448"/>
+                  </a:lnTo>
+                  <a:lnTo>
+                    <a:pt x="3151391" y="2469999"/>
+                  </a:lnTo>
+                  <a:lnTo>
+                    <a:pt x="3223013" y="2523563"/>
+                  </a:lnTo>
+                  <a:lnTo>
+                    <a:pt x="3294636" y="2574296"/>
+                  </a:lnTo>
+                  <a:lnTo>
+                    <a:pt x="3366258" y="2622348"/>
+                  </a:lnTo>
+                  <a:lnTo>
+                    <a:pt x="3437881" y="2659422"/>
+                  </a:lnTo>
+                  <a:lnTo>
+                    <a:pt x="3509503" y="2676100"/>
+                  </a:lnTo>
+                  <a:lnTo>
+                    <a:pt x="3581126" y="2692440"/>
+                  </a:lnTo>
+                  <a:lnTo>
+                    <a:pt x="3652748" y="2708450"/>
+                  </a:lnTo>
+                  <a:lnTo>
+                    <a:pt x="3724371" y="2724136"/>
+                  </a:lnTo>
+                  <a:lnTo>
+                    <a:pt x="3795993" y="2739505"/>
+                  </a:lnTo>
+                  <a:lnTo>
+                    <a:pt x="3867616" y="2754562"/>
+                  </a:lnTo>
+                  <a:lnTo>
+                    <a:pt x="3939238" y="2769315"/>
+                  </a:lnTo>
+                  <a:lnTo>
+                    <a:pt x="4010861" y="2783769"/>
+                  </a:lnTo>
+                  <a:lnTo>
+                    <a:pt x="4082483" y="2797931"/>
+                  </a:lnTo>
+                  <a:lnTo>
+                    <a:pt x="4154106" y="2811807"/>
+                  </a:lnTo>
+                  <a:lnTo>
+                    <a:pt x="4225729" y="2825402"/>
+                  </a:lnTo>
+                  <a:lnTo>
+                    <a:pt x="4297351" y="2838721"/>
+                  </a:lnTo>
+                  <a:lnTo>
+                    <a:pt x="4368974" y="2851772"/>
+                  </a:lnTo>
+                  <a:lnTo>
+                    <a:pt x="4440596" y="2864558"/>
+                  </a:lnTo>
+                  <a:lnTo>
+                    <a:pt x="4512219" y="2877085"/>
+                  </a:lnTo>
+                  <a:lnTo>
+                    <a:pt x="4583841" y="2889359"/>
+                  </a:lnTo>
+                  <a:lnTo>
+                    <a:pt x="4655464" y="2901385"/>
+                  </a:lnTo>
+                  <a:lnTo>
+                    <a:pt x="4727086" y="2913167"/>
+                  </a:lnTo>
+                  <a:lnTo>
+                    <a:pt x="4798709" y="2924711"/>
+                  </a:lnTo>
+                  <a:lnTo>
+                    <a:pt x="4870331" y="2936022"/>
+                  </a:lnTo>
+                  <a:lnTo>
+                    <a:pt x="4941954" y="2947103"/>
+                  </a:lnTo>
+                  <a:lnTo>
+                    <a:pt x="5013576" y="2957961"/>
+                  </a:lnTo>
+                  <a:lnTo>
+                    <a:pt x="5085199" y="2968599"/>
+                  </a:lnTo>
+                  <a:lnTo>
+                    <a:pt x="5156821" y="2979021"/>
+                  </a:lnTo>
+                  <a:lnTo>
+                    <a:pt x="5228444" y="2989233"/>
+                  </a:lnTo>
+                  <a:lnTo>
+                    <a:pt x="5300066" y="2999238"/>
+                  </a:lnTo>
+                  <a:lnTo>
+                    <a:pt x="5371689" y="3009040"/>
+                  </a:lnTo>
+                  <a:lnTo>
+                    <a:pt x="5443311" y="3018645"/>
+                  </a:lnTo>
+                  <a:lnTo>
+                    <a:pt x="5514934" y="3028055"/>
+                  </a:lnTo>
+                  <a:lnTo>
+                    <a:pt x="5586557" y="3037274"/>
+                  </a:lnTo>
+                  <a:lnTo>
+                    <a:pt x="5658179" y="3046307"/>
+                  </a:lnTo>
+                  <a:lnTo>
+                    <a:pt x="5729802" y="3055158"/>
+                  </a:lnTo>
+                  <a:lnTo>
+                    <a:pt x="5801424" y="3063829"/>
+                  </a:lnTo>
+                  <a:lnTo>
+                    <a:pt x="5873047" y="3072325"/>
+                  </a:lnTo>
+                  <a:lnTo>
+                    <a:pt x="5944669" y="3080649"/>
+                  </a:lnTo>
+                  <a:lnTo>
+                    <a:pt x="6016292" y="3088804"/>
+                  </a:lnTo>
+                  <a:lnTo>
+                    <a:pt x="6087914" y="3096795"/>
+                  </a:lnTo>
+                  <a:lnTo>
+                    <a:pt x="6159537" y="3104623"/>
+                  </a:lnTo>
+                  <a:lnTo>
+                    <a:pt x="6231159" y="3112294"/>
+                  </a:lnTo>
+                  <a:lnTo>
+                    <a:pt x="6302782" y="3119809"/>
+                  </a:lnTo>
+                  <a:lnTo>
+                    <a:pt x="6374404" y="3127172"/>
+                  </a:lnTo>
+                  <a:lnTo>
+                    <a:pt x="6446027" y="3134387"/>
+                  </a:lnTo>
+                  <a:lnTo>
+                    <a:pt x="6517649" y="3141455"/>
+                  </a:lnTo>
+                  <a:lnTo>
+                    <a:pt x="6589272" y="3148380"/>
+                  </a:lnTo>
+                  <a:lnTo>
+                    <a:pt x="6660894" y="3155165"/>
+                  </a:lnTo>
+                  <a:lnTo>
+                    <a:pt x="6732517" y="3161813"/>
+                  </a:lnTo>
+                  <a:lnTo>
+                    <a:pt x="6804139" y="3168327"/>
+                  </a:lnTo>
+                  <a:lnTo>
+                    <a:pt x="6875762" y="3174708"/>
+                  </a:lnTo>
+                  <a:lnTo>
+                    <a:pt x="6947385" y="3180961"/>
+                  </a:lnTo>
+                  <a:lnTo>
+                    <a:pt x="7019007" y="3187087"/>
+                  </a:lnTo>
+                  <a:lnTo>
+                    <a:pt x="7090630" y="3193089"/>
+                  </a:lnTo>
+                  <a:lnTo>
+                    <a:pt x="7090630" y="3432544"/>
+                  </a:lnTo>
+                  <a:lnTo>
+                    <a:pt x="7019007" y="3429688"/>
+                  </a:lnTo>
+                  <a:lnTo>
+                    <a:pt x="6947385" y="3426672"/>
+                  </a:lnTo>
+                  <a:lnTo>
+                    <a:pt x="6875762" y="3423488"/>
+                  </a:lnTo>
+                  <a:lnTo>
+                    <a:pt x="6804139" y="3420127"/>
+                  </a:lnTo>
+                  <a:lnTo>
+                    <a:pt x="6732517" y="3416578"/>
+                  </a:lnTo>
+                  <a:lnTo>
+                    <a:pt x="6660894" y="3412831"/>
+                  </a:lnTo>
+                  <a:lnTo>
+                    <a:pt x="6589272" y="3408875"/>
+                  </a:lnTo>
+                  <a:lnTo>
+                    <a:pt x="6517649" y="3404698"/>
+                  </a:lnTo>
+                  <a:lnTo>
+                    <a:pt x="6446027" y="3400289"/>
+                  </a:lnTo>
+                  <a:lnTo>
+                    <a:pt x="6374404" y="3395633"/>
+                  </a:lnTo>
+                  <a:lnTo>
+                    <a:pt x="6302782" y="3390718"/>
+                  </a:lnTo>
+                  <a:lnTo>
+                    <a:pt x="6231159" y="3385528"/>
+                  </a:lnTo>
+                  <a:lnTo>
+                    <a:pt x="6159537" y="3380049"/>
+                  </a:lnTo>
+                  <a:lnTo>
+                    <a:pt x="6087914" y="3374264"/>
+                  </a:lnTo>
+                  <a:lnTo>
+                    <a:pt x="6016292" y="3368157"/>
+                  </a:lnTo>
+                  <a:lnTo>
+                    <a:pt x="5944669" y="3361709"/>
+                  </a:lnTo>
+                  <a:lnTo>
+                    <a:pt x="5873047" y="3354901"/>
+                  </a:lnTo>
+                  <a:lnTo>
+                    <a:pt x="5801424" y="3347714"/>
+                  </a:lnTo>
+                  <a:lnTo>
+                    <a:pt x="5729802" y="3340125"/>
+                  </a:lnTo>
+                  <a:lnTo>
+                    <a:pt x="5658179" y="3332113"/>
+                  </a:lnTo>
+                  <a:lnTo>
+                    <a:pt x="5586557" y="3323654"/>
+                  </a:lnTo>
+                  <a:lnTo>
+                    <a:pt x="5514934" y="3314724"/>
+                  </a:lnTo>
+                  <a:lnTo>
+                    <a:pt x="5443311" y="3305295"/>
+                  </a:lnTo>
+                  <a:lnTo>
+                    <a:pt x="5371689" y="3295340"/>
+                  </a:lnTo>
+                  <a:lnTo>
+                    <a:pt x="5300066" y="3284830"/>
+                  </a:lnTo>
+                  <a:lnTo>
+                    <a:pt x="5228444" y="3273733"/>
+                  </a:lnTo>
+                  <a:lnTo>
+                    <a:pt x="5156821" y="3262018"/>
+                  </a:lnTo>
+                  <a:lnTo>
+                    <a:pt x="5085199" y="3249649"/>
+                  </a:lnTo>
+                  <a:lnTo>
+                    <a:pt x="5013576" y="3236590"/>
+                  </a:lnTo>
+                  <a:lnTo>
+                    <a:pt x="4941954" y="3222802"/>
+                  </a:lnTo>
+                  <a:lnTo>
+                    <a:pt x="4870331" y="3208246"/>
+                  </a:lnTo>
+                  <a:lnTo>
+                    <a:pt x="4798709" y="3192877"/>
+                  </a:lnTo>
+                  <a:lnTo>
+                    <a:pt x="4727086" y="3176651"/>
+                  </a:lnTo>
+                  <a:lnTo>
+                    <a:pt x="4655464" y="3159520"/>
+                  </a:lnTo>
+                  <a:lnTo>
+                    <a:pt x="4583841" y="3141433"/>
+                  </a:lnTo>
+                  <a:lnTo>
+                    <a:pt x="4512219" y="3122337"/>
+                  </a:lnTo>
+                  <a:lnTo>
+                    <a:pt x="4440596" y="3102176"/>
+                  </a:lnTo>
+                  <a:lnTo>
+                    <a:pt x="4368974" y="3080891"/>
+                  </a:lnTo>
+                  <a:lnTo>
+                    <a:pt x="4297351" y="3058417"/>
+                  </a:lnTo>
+                  <a:lnTo>
+                    <a:pt x="4225729" y="3034691"/>
+                  </a:lnTo>
+                  <a:lnTo>
+                    <a:pt x="4154106" y="3009640"/>
+                  </a:lnTo>
+                  <a:lnTo>
+                    <a:pt x="4082483" y="2983192"/>
+                  </a:lnTo>
+                  <a:lnTo>
+                    <a:pt x="4010861" y="2955269"/>
+                  </a:lnTo>
+                  <a:lnTo>
+                    <a:pt x="3939238" y="2925788"/>
+                  </a:lnTo>
+                  <a:lnTo>
+                    <a:pt x="3867616" y="2894663"/>
+                  </a:lnTo>
+                  <a:lnTo>
+                    <a:pt x="3795993" y="2861801"/>
+                  </a:lnTo>
+                  <a:lnTo>
+                    <a:pt x="3724371" y="2827106"/>
+                  </a:lnTo>
+                  <a:lnTo>
+                    <a:pt x="3652748" y="2790476"/>
+                  </a:lnTo>
+                  <a:lnTo>
+                    <a:pt x="3581126" y="2751802"/>
+                  </a:lnTo>
+                  <a:lnTo>
+                    <a:pt x="3509503" y="2710971"/>
+                  </a:lnTo>
+                  <a:lnTo>
+                    <a:pt x="3437881" y="2667862"/>
+                  </a:lnTo>
+                  <a:lnTo>
+                    <a:pt x="3366258" y="2642400"/>
+                  </a:lnTo>
+                  <a:lnTo>
+                    <a:pt x="3294636" y="2625026"/>
+                  </a:lnTo>
+                  <a:lnTo>
+                    <a:pt x="3223013" y="2607294"/>
+                  </a:lnTo>
+                  <a:lnTo>
+                    <a:pt x="3151391" y="2589195"/>
+                  </a:lnTo>
+                  <a:lnTo>
+                    <a:pt x="3079768" y="2570723"/>
+                  </a:lnTo>
+                  <a:lnTo>
+                    <a:pt x="3008146" y="2551869"/>
+                  </a:lnTo>
+                  <a:lnTo>
+                    <a:pt x="2936523" y="2532626"/>
+                  </a:lnTo>
+                  <a:lnTo>
+                    <a:pt x="2864901" y="2512985"/>
+                  </a:lnTo>
+                  <a:lnTo>
+                    <a:pt x="2793278" y="2492939"/>
+                  </a:lnTo>
+                  <a:lnTo>
+                    <a:pt x="2721655" y="2472479"/>
+                  </a:lnTo>
+                  <a:lnTo>
+                    <a:pt x="2650033" y="2451597"/>
+                  </a:lnTo>
+                  <a:lnTo>
+                    <a:pt x="2578410" y="2430283"/>
+                  </a:lnTo>
+                  <a:lnTo>
+                    <a:pt x="2506788" y="2408529"/>
+                  </a:lnTo>
+                  <a:lnTo>
+                    <a:pt x="2435165" y="2386326"/>
+                  </a:lnTo>
+                  <a:lnTo>
+                    <a:pt x="2363543" y="2363664"/>
+                  </a:lnTo>
+                  <a:lnTo>
+                    <a:pt x="2291920" y="2340535"/>
+                  </a:lnTo>
+                  <a:lnTo>
+                    <a:pt x="2220298" y="2316927"/>
+                  </a:lnTo>
+                  <a:lnTo>
+                    <a:pt x="2148675" y="2292833"/>
+                  </a:lnTo>
+                  <a:lnTo>
+                    <a:pt x="2077053" y="2268241"/>
+                  </a:lnTo>
+                  <a:lnTo>
+                    <a:pt x="2005430" y="2243141"/>
+                  </a:lnTo>
+                  <a:lnTo>
+                    <a:pt x="1933808" y="2217522"/>
+                  </a:lnTo>
+                  <a:lnTo>
+                    <a:pt x="1862185" y="2191375"/>
+                  </a:lnTo>
+                  <a:lnTo>
+                    <a:pt x="1790563" y="2164687"/>
+                  </a:lnTo>
+                  <a:lnTo>
+                    <a:pt x="1718940" y="2137449"/>
+                  </a:lnTo>
+                  <a:lnTo>
+                    <a:pt x="1647318" y="2109648"/>
+                  </a:lnTo>
+                  <a:lnTo>
+                    <a:pt x="1575695" y="2081273"/>
+                  </a:lnTo>
+                  <a:lnTo>
+                    <a:pt x="1504073" y="2052312"/>
+                  </a:lnTo>
+                  <a:lnTo>
+                    <a:pt x="1432450" y="2022753"/>
+                  </a:lnTo>
+                  <a:lnTo>
+                    <a:pt x="1360827" y="1992584"/>
+                  </a:lnTo>
+                  <a:lnTo>
+                    <a:pt x="1289205" y="1961792"/>
+                  </a:lnTo>
+                  <a:lnTo>
+                    <a:pt x="1217582" y="1930364"/>
+                  </a:lnTo>
+                  <a:lnTo>
+                    <a:pt x="1145960" y="1898286"/>
+                  </a:lnTo>
+                  <a:lnTo>
+                    <a:pt x="1074337" y="1865547"/>
+                  </a:lnTo>
+                  <a:lnTo>
+                    <a:pt x="1002715" y="1832131"/>
+                  </a:lnTo>
+                  <a:lnTo>
+                    <a:pt x="931092" y="1798026"/>
+                  </a:lnTo>
+                  <a:lnTo>
+                    <a:pt x="859470" y="1763216"/>
+                  </a:lnTo>
+                  <a:lnTo>
+                    <a:pt x="787847" y="1727687"/>
+                  </a:lnTo>
+                  <a:lnTo>
+                    <a:pt x="716225" y="1691424"/>
+                  </a:lnTo>
+                  <a:lnTo>
+                    <a:pt x="644602" y="1654413"/>
+                  </a:lnTo>
+                  <a:lnTo>
+                    <a:pt x="572980" y="1616638"/>
+                  </a:lnTo>
+                  <a:lnTo>
+                    <a:pt x="501357" y="1578082"/>
+                  </a:lnTo>
+                  <a:lnTo>
+                    <a:pt x="429735" y="1538730"/>
+                  </a:lnTo>
+                  <a:lnTo>
+                    <a:pt x="358112" y="1498566"/>
+                  </a:lnTo>
+                  <a:lnTo>
+                    <a:pt x="286490" y="1457572"/>
+                  </a:lnTo>
+                  <a:lnTo>
+                    <a:pt x="214867" y="1415732"/>
+                  </a:lnTo>
+                  <a:lnTo>
+                    <a:pt x="143245" y="1373028"/>
+                  </a:lnTo>
+                  <a:lnTo>
+                    <a:pt x="71622" y="1329442"/>
+                  </a:lnTo>
+                  <a:lnTo>
+                    <a:pt x="0" y="1284956"/>
                   </a:lnTo>
                   <a:close/>
                 </a:path>
@@ -3564,255 +3521,580 @@
         </p:sp>
         <p:sp>
           <p:nvSpPr>
+            <p:cNvPr id="21" name="pl21"/>
+            <p:cNvSpPr/>
+            <p:nvPr/>
+          </p:nvSpPr>
+          <p:spPr>
+            <a:xfrm>
+              <a:off x="2695074" y="2073503"/>
+              <a:ext cx="5567604" cy="3193089"/>
+            </a:xfrm>
+            <a:custGeom>
+              <a:avLst/>
+              <a:pathLst>
+                <a:path w="5567604" h="3193089">
+                  <a:moveTo>
+                    <a:pt x="0" y="0"/>
+                  </a:moveTo>
+                  <a:lnTo>
+                    <a:pt x="52670" y="137283"/>
+                  </a:lnTo>
+                  <a:lnTo>
+                    <a:pt x="124292" y="314100"/>
+                  </a:lnTo>
+                  <a:lnTo>
+                    <a:pt x="195915" y="481575"/>
+                  </a:lnTo>
+                  <a:lnTo>
+                    <a:pt x="267538" y="640201"/>
+                  </a:lnTo>
+                  <a:lnTo>
+                    <a:pt x="339160" y="790445"/>
+                  </a:lnTo>
+                  <a:lnTo>
+                    <a:pt x="410783" y="932751"/>
+                  </a:lnTo>
+                  <a:lnTo>
+                    <a:pt x="482405" y="1067538"/>
+                  </a:lnTo>
+                  <a:lnTo>
+                    <a:pt x="554028" y="1195203"/>
+                  </a:lnTo>
+                  <a:lnTo>
+                    <a:pt x="625650" y="1316123"/>
+                  </a:lnTo>
+                  <a:lnTo>
+                    <a:pt x="697273" y="1430654"/>
+                  </a:lnTo>
+                  <a:lnTo>
+                    <a:pt x="768895" y="1539133"/>
+                  </a:lnTo>
+                  <a:lnTo>
+                    <a:pt x="840518" y="1641881"/>
+                  </a:lnTo>
+                  <a:lnTo>
+                    <a:pt x="912140" y="1739200"/>
+                  </a:lnTo>
+                  <a:lnTo>
+                    <a:pt x="983763" y="1831376"/>
+                  </a:lnTo>
+                  <a:lnTo>
+                    <a:pt x="1055385" y="1918683"/>
+                  </a:lnTo>
+                  <a:lnTo>
+                    <a:pt x="1127008" y="2001376"/>
+                  </a:lnTo>
+                  <a:lnTo>
+                    <a:pt x="1198630" y="2079700"/>
+                  </a:lnTo>
+                  <a:lnTo>
+                    <a:pt x="1270253" y="2153886"/>
+                  </a:lnTo>
+                  <a:lnTo>
+                    <a:pt x="1341875" y="2224152"/>
+                  </a:lnTo>
+                  <a:lnTo>
+                    <a:pt x="1413498" y="2290705"/>
+                  </a:lnTo>
+                  <a:lnTo>
+                    <a:pt x="1485120" y="2353742"/>
+                  </a:lnTo>
+                  <a:lnTo>
+                    <a:pt x="1556743" y="2413448"/>
+                  </a:lnTo>
+                  <a:lnTo>
+                    <a:pt x="1628366" y="2469999"/>
+                  </a:lnTo>
+                  <a:lnTo>
+                    <a:pt x="1699988" y="2523563"/>
+                  </a:lnTo>
+                  <a:lnTo>
+                    <a:pt x="1771611" y="2574296"/>
+                  </a:lnTo>
+                  <a:lnTo>
+                    <a:pt x="1843233" y="2622348"/>
+                  </a:lnTo>
+                  <a:lnTo>
+                    <a:pt x="1914856" y="2659422"/>
+                  </a:lnTo>
+                  <a:lnTo>
+                    <a:pt x="1986478" y="2676100"/>
+                  </a:lnTo>
+                  <a:lnTo>
+                    <a:pt x="2058101" y="2692440"/>
+                  </a:lnTo>
+                  <a:lnTo>
+                    <a:pt x="2129723" y="2708450"/>
+                  </a:lnTo>
+                  <a:lnTo>
+                    <a:pt x="2201346" y="2724136"/>
+                  </a:lnTo>
+                  <a:lnTo>
+                    <a:pt x="2272968" y="2739505"/>
+                  </a:lnTo>
+                  <a:lnTo>
+                    <a:pt x="2344591" y="2754562"/>
+                  </a:lnTo>
+                  <a:lnTo>
+                    <a:pt x="2416213" y="2769315"/>
+                  </a:lnTo>
+                  <a:lnTo>
+                    <a:pt x="2487836" y="2783769"/>
+                  </a:lnTo>
+                  <a:lnTo>
+                    <a:pt x="2559458" y="2797931"/>
+                  </a:lnTo>
+                  <a:lnTo>
+                    <a:pt x="2631081" y="2811807"/>
+                  </a:lnTo>
+                  <a:lnTo>
+                    <a:pt x="2702703" y="2825402"/>
+                  </a:lnTo>
+                  <a:lnTo>
+                    <a:pt x="2774326" y="2838721"/>
+                  </a:lnTo>
+                  <a:lnTo>
+                    <a:pt x="2845948" y="2851772"/>
+                  </a:lnTo>
+                  <a:lnTo>
+                    <a:pt x="2917571" y="2864558"/>
+                  </a:lnTo>
+                  <a:lnTo>
+                    <a:pt x="2989194" y="2877085"/>
+                  </a:lnTo>
+                  <a:lnTo>
+                    <a:pt x="3060816" y="2889359"/>
+                  </a:lnTo>
+                  <a:lnTo>
+                    <a:pt x="3132439" y="2901385"/>
+                  </a:lnTo>
+                  <a:lnTo>
+                    <a:pt x="3204061" y="2913167"/>
+                  </a:lnTo>
+                  <a:lnTo>
+                    <a:pt x="3275684" y="2924711"/>
+                  </a:lnTo>
+                  <a:lnTo>
+                    <a:pt x="3347306" y="2936022"/>
+                  </a:lnTo>
+                  <a:lnTo>
+                    <a:pt x="3418929" y="2947103"/>
+                  </a:lnTo>
+                  <a:lnTo>
+                    <a:pt x="3490551" y="2957961"/>
+                  </a:lnTo>
+                  <a:lnTo>
+                    <a:pt x="3562174" y="2968599"/>
+                  </a:lnTo>
+                  <a:lnTo>
+                    <a:pt x="3633796" y="2979021"/>
+                  </a:lnTo>
+                  <a:lnTo>
+                    <a:pt x="3705419" y="2989233"/>
+                  </a:lnTo>
+                  <a:lnTo>
+                    <a:pt x="3777041" y="2999238"/>
+                  </a:lnTo>
+                  <a:lnTo>
+                    <a:pt x="3848664" y="3009040"/>
+                  </a:lnTo>
+                  <a:lnTo>
+                    <a:pt x="3920286" y="3018645"/>
+                  </a:lnTo>
+                  <a:lnTo>
+                    <a:pt x="3991909" y="3028055"/>
+                  </a:lnTo>
+                  <a:lnTo>
+                    <a:pt x="4063531" y="3037274"/>
+                  </a:lnTo>
+                  <a:lnTo>
+                    <a:pt x="4135154" y="3046307"/>
+                  </a:lnTo>
+                  <a:lnTo>
+                    <a:pt x="4206776" y="3055158"/>
+                  </a:lnTo>
+                  <a:lnTo>
+                    <a:pt x="4278399" y="3063829"/>
+                  </a:lnTo>
+                  <a:lnTo>
+                    <a:pt x="4350022" y="3072325"/>
+                  </a:lnTo>
+                  <a:lnTo>
+                    <a:pt x="4421644" y="3080649"/>
+                  </a:lnTo>
+                  <a:lnTo>
+                    <a:pt x="4493267" y="3088804"/>
+                  </a:lnTo>
+                  <a:lnTo>
+                    <a:pt x="4564889" y="3096795"/>
+                  </a:lnTo>
+                  <a:lnTo>
+                    <a:pt x="4636512" y="3104623"/>
+                  </a:lnTo>
+                  <a:lnTo>
+                    <a:pt x="4708134" y="3112294"/>
+                  </a:lnTo>
+                  <a:lnTo>
+                    <a:pt x="4779757" y="3119809"/>
+                  </a:lnTo>
+                  <a:lnTo>
+                    <a:pt x="4851379" y="3127172"/>
+                  </a:lnTo>
+                  <a:lnTo>
+                    <a:pt x="4923002" y="3134387"/>
+                  </a:lnTo>
+                  <a:lnTo>
+                    <a:pt x="4994624" y="3141455"/>
+                  </a:lnTo>
+                  <a:lnTo>
+                    <a:pt x="5066247" y="3148380"/>
+                  </a:lnTo>
+                  <a:lnTo>
+                    <a:pt x="5137869" y="3155165"/>
+                  </a:lnTo>
+                  <a:lnTo>
+                    <a:pt x="5209492" y="3161813"/>
+                  </a:lnTo>
+                  <a:lnTo>
+                    <a:pt x="5281114" y="3168327"/>
+                  </a:lnTo>
+                  <a:lnTo>
+                    <a:pt x="5352737" y="3174708"/>
+                  </a:lnTo>
+                  <a:lnTo>
+                    <a:pt x="5424359" y="3180961"/>
+                  </a:lnTo>
+                  <a:lnTo>
+                    <a:pt x="5495982" y="3187087"/>
+                  </a:lnTo>
+                  <a:lnTo>
+                    <a:pt x="5567604" y="3193089"/>
+                  </a:lnTo>
+                </a:path>
+              </a:pathLst>
+            </a:custGeom>
+          </p:spPr>
+          <p:txBody>
+            <a:bodyPr/>
+            <a:lstStyle/>
+            <a:p/>
+          </p:txBody>
+        </p:sp>
+        <p:sp>
+          <p:nvSpPr>
             <p:cNvPr id="22" name="pl22"/>
             <p:cNvSpPr/>
             <p:nvPr/>
           </p:nvSpPr>
           <p:spPr>
             <a:xfrm>
-              <a:off x="2319583" y="2073503"/>
-              <a:ext cx="5733764" cy="3193089"/>
+              <a:off x="1172049" y="3358459"/>
+              <a:ext cx="7090630" cy="2147588"/>
             </a:xfrm>
             <a:custGeom>
               <a:avLst/>
               <a:pathLst>
-                <a:path w="5733764" h="3193089">
+                <a:path w="7090630" h="2147588">
                   <a:moveTo>
+                    <a:pt x="7090630" y="2147588"/>
+                  </a:moveTo>
+                  <a:lnTo>
+                    <a:pt x="7019007" y="2144732"/>
+                  </a:lnTo>
+                  <a:lnTo>
+                    <a:pt x="6947385" y="2141716"/>
+                  </a:lnTo>
+                  <a:lnTo>
+                    <a:pt x="6875762" y="2138532"/>
+                  </a:lnTo>
+                  <a:lnTo>
+                    <a:pt x="6804139" y="2135171"/>
+                  </a:lnTo>
+                  <a:lnTo>
+                    <a:pt x="6732517" y="2131622"/>
+                  </a:lnTo>
+                  <a:lnTo>
+                    <a:pt x="6660894" y="2127875"/>
+                  </a:lnTo>
+                  <a:lnTo>
+                    <a:pt x="6589272" y="2123919"/>
+                  </a:lnTo>
+                  <a:lnTo>
+                    <a:pt x="6517649" y="2119742"/>
+                  </a:lnTo>
+                  <a:lnTo>
+                    <a:pt x="6446027" y="2115333"/>
+                  </a:lnTo>
+                  <a:lnTo>
+                    <a:pt x="6374404" y="2110677"/>
+                  </a:lnTo>
+                  <a:lnTo>
+                    <a:pt x="6302782" y="2105762"/>
+                  </a:lnTo>
+                  <a:lnTo>
+                    <a:pt x="6231159" y="2100572"/>
+                  </a:lnTo>
+                  <a:lnTo>
+                    <a:pt x="6159537" y="2095093"/>
+                  </a:lnTo>
+                  <a:lnTo>
+                    <a:pt x="6087914" y="2089308"/>
+                  </a:lnTo>
+                  <a:lnTo>
+                    <a:pt x="6016292" y="2083201"/>
+                  </a:lnTo>
+                  <a:lnTo>
+                    <a:pt x="5944669" y="2076753"/>
+                  </a:lnTo>
+                  <a:lnTo>
+                    <a:pt x="5873047" y="2069945"/>
+                  </a:lnTo>
+                  <a:lnTo>
+                    <a:pt x="5801424" y="2062757"/>
+                  </a:lnTo>
+                  <a:lnTo>
+                    <a:pt x="5729802" y="2055169"/>
+                  </a:lnTo>
+                  <a:lnTo>
+                    <a:pt x="5658179" y="2047157"/>
+                  </a:lnTo>
+                  <a:lnTo>
+                    <a:pt x="5586557" y="2038698"/>
+                  </a:lnTo>
+                  <a:lnTo>
+                    <a:pt x="5514934" y="2029768"/>
+                  </a:lnTo>
+                  <a:lnTo>
+                    <a:pt x="5443311" y="2020339"/>
+                  </a:lnTo>
+                  <a:lnTo>
+                    <a:pt x="5371689" y="2010384"/>
+                  </a:lnTo>
+                  <a:lnTo>
+                    <a:pt x="5300066" y="1999874"/>
+                  </a:lnTo>
+                  <a:lnTo>
+                    <a:pt x="5228444" y="1988777"/>
+                  </a:lnTo>
+                  <a:lnTo>
+                    <a:pt x="5156821" y="1977062"/>
+                  </a:lnTo>
+                  <a:lnTo>
+                    <a:pt x="5085199" y="1964693"/>
+                  </a:lnTo>
+                  <a:lnTo>
+                    <a:pt x="5013576" y="1951634"/>
+                  </a:lnTo>
+                  <a:lnTo>
+                    <a:pt x="4941954" y="1937846"/>
+                  </a:lnTo>
+                  <a:lnTo>
+                    <a:pt x="4870331" y="1923290"/>
+                  </a:lnTo>
+                  <a:lnTo>
+                    <a:pt x="4798709" y="1907921"/>
+                  </a:lnTo>
+                  <a:lnTo>
+                    <a:pt x="4727086" y="1891695"/>
+                  </a:lnTo>
+                  <a:lnTo>
+                    <a:pt x="4655464" y="1874564"/>
+                  </a:lnTo>
+                  <a:lnTo>
+                    <a:pt x="4583841" y="1856477"/>
+                  </a:lnTo>
+                  <a:lnTo>
+                    <a:pt x="4512219" y="1837381"/>
+                  </a:lnTo>
+                  <a:lnTo>
+                    <a:pt x="4440596" y="1817220"/>
+                  </a:lnTo>
+                  <a:lnTo>
+                    <a:pt x="4368974" y="1795934"/>
+                  </a:lnTo>
+                  <a:lnTo>
+                    <a:pt x="4297351" y="1773461"/>
+                  </a:lnTo>
+                  <a:lnTo>
+                    <a:pt x="4225729" y="1749735"/>
+                  </a:lnTo>
+                  <a:lnTo>
+                    <a:pt x="4154106" y="1724684"/>
+                  </a:lnTo>
+                  <a:lnTo>
+                    <a:pt x="4082483" y="1698236"/>
+                  </a:lnTo>
+                  <a:lnTo>
+                    <a:pt x="4010861" y="1670313"/>
+                  </a:lnTo>
+                  <a:lnTo>
+                    <a:pt x="3939238" y="1640832"/>
+                  </a:lnTo>
+                  <a:lnTo>
+                    <a:pt x="3867616" y="1609707"/>
+                  </a:lnTo>
+                  <a:lnTo>
+                    <a:pt x="3795993" y="1576845"/>
+                  </a:lnTo>
+                  <a:lnTo>
+                    <a:pt x="3724371" y="1542150"/>
+                  </a:lnTo>
+                  <a:lnTo>
+                    <a:pt x="3652748" y="1505520"/>
+                  </a:lnTo>
+                  <a:lnTo>
+                    <a:pt x="3581126" y="1466846"/>
+                  </a:lnTo>
+                  <a:lnTo>
+                    <a:pt x="3509503" y="1426015"/>
+                  </a:lnTo>
+                  <a:lnTo>
+                    <a:pt x="3437881" y="1382906"/>
+                  </a:lnTo>
+                  <a:lnTo>
+                    <a:pt x="3366258" y="1357444"/>
+                  </a:lnTo>
+                  <a:lnTo>
+                    <a:pt x="3294636" y="1340070"/>
+                  </a:lnTo>
+                  <a:lnTo>
+                    <a:pt x="3223013" y="1322338"/>
+                  </a:lnTo>
+                  <a:lnTo>
+                    <a:pt x="3151391" y="1304239"/>
+                  </a:lnTo>
+                  <a:lnTo>
+                    <a:pt x="3079768" y="1285767"/>
+                  </a:lnTo>
+                  <a:lnTo>
+                    <a:pt x="3008146" y="1266913"/>
+                  </a:lnTo>
+                  <a:lnTo>
+                    <a:pt x="2936523" y="1247670"/>
+                  </a:lnTo>
+                  <a:lnTo>
+                    <a:pt x="2864901" y="1228029"/>
+                  </a:lnTo>
+                  <a:lnTo>
+                    <a:pt x="2793278" y="1207983"/>
+                  </a:lnTo>
+                  <a:lnTo>
+                    <a:pt x="2721655" y="1187523"/>
+                  </a:lnTo>
+                  <a:lnTo>
+                    <a:pt x="2650033" y="1166641"/>
+                  </a:lnTo>
+                  <a:lnTo>
+                    <a:pt x="2578410" y="1145327"/>
+                  </a:lnTo>
+                  <a:lnTo>
+                    <a:pt x="2506788" y="1123573"/>
+                  </a:lnTo>
+                  <a:lnTo>
+                    <a:pt x="2435165" y="1101370"/>
+                  </a:lnTo>
+                  <a:lnTo>
+                    <a:pt x="2363543" y="1078708"/>
+                  </a:lnTo>
+                  <a:lnTo>
+                    <a:pt x="2291920" y="1055579"/>
+                  </a:lnTo>
+                  <a:lnTo>
+                    <a:pt x="2220298" y="1031971"/>
+                  </a:lnTo>
+                  <a:lnTo>
+                    <a:pt x="2148675" y="1007877"/>
+                  </a:lnTo>
+                  <a:lnTo>
+                    <a:pt x="2077053" y="983285"/>
+                  </a:lnTo>
+                  <a:lnTo>
+                    <a:pt x="2005430" y="958184"/>
+                  </a:lnTo>
+                  <a:lnTo>
+                    <a:pt x="1933808" y="932566"/>
+                  </a:lnTo>
+                  <a:lnTo>
+                    <a:pt x="1862185" y="906419"/>
+                  </a:lnTo>
+                  <a:lnTo>
+                    <a:pt x="1790563" y="879731"/>
+                  </a:lnTo>
+                  <a:lnTo>
+                    <a:pt x="1718940" y="852493"/>
+                  </a:lnTo>
+                  <a:lnTo>
+                    <a:pt x="1647318" y="824692"/>
+                  </a:lnTo>
+                  <a:lnTo>
+                    <a:pt x="1575695" y="796317"/>
+                  </a:lnTo>
+                  <a:lnTo>
+                    <a:pt x="1504073" y="767356"/>
+                  </a:lnTo>
+                  <a:lnTo>
+                    <a:pt x="1432450" y="737797"/>
+                  </a:lnTo>
+                  <a:lnTo>
+                    <a:pt x="1360827" y="707628"/>
+                  </a:lnTo>
+                  <a:lnTo>
+                    <a:pt x="1289205" y="676836"/>
+                  </a:lnTo>
+                  <a:lnTo>
+                    <a:pt x="1217582" y="645407"/>
+                  </a:lnTo>
+                  <a:lnTo>
+                    <a:pt x="1145960" y="613330"/>
+                  </a:lnTo>
+                  <a:lnTo>
+                    <a:pt x="1074337" y="580591"/>
+                  </a:lnTo>
+                  <a:lnTo>
+                    <a:pt x="1002715" y="547175"/>
+                  </a:lnTo>
+                  <a:lnTo>
+                    <a:pt x="931092" y="513069"/>
+                  </a:lnTo>
+                  <a:lnTo>
+                    <a:pt x="859470" y="478260"/>
+                  </a:lnTo>
+                  <a:lnTo>
+                    <a:pt x="787847" y="442731"/>
+                  </a:lnTo>
+                  <a:lnTo>
+                    <a:pt x="716225" y="406468"/>
+                  </a:lnTo>
+                  <a:lnTo>
+                    <a:pt x="644602" y="369457"/>
+                  </a:lnTo>
+                  <a:lnTo>
+                    <a:pt x="572980" y="331682"/>
+                  </a:lnTo>
+                  <a:lnTo>
+                    <a:pt x="501357" y="293126"/>
+                  </a:lnTo>
+                  <a:lnTo>
+                    <a:pt x="429735" y="253774"/>
+                  </a:lnTo>
+                  <a:lnTo>
+                    <a:pt x="358112" y="213610"/>
+                  </a:lnTo>
+                  <a:lnTo>
+                    <a:pt x="286490" y="172616"/>
+                  </a:lnTo>
+                  <a:lnTo>
+                    <a:pt x="214867" y="130776"/>
+                  </a:lnTo>
+                  <a:lnTo>
+                    <a:pt x="143245" y="88072"/>
+                  </a:lnTo>
+                  <a:lnTo>
+                    <a:pt x="71622" y="44486"/>
+                  </a:lnTo>
+                  <a:lnTo>
                     <a:pt x="0" y="0"/>
-                  </a:moveTo>
-                  <a:lnTo>
-                    <a:pt x="54242" y="137283"/>
-                  </a:lnTo>
-                  <a:lnTo>
-                    <a:pt x="128002" y="314100"/>
-                  </a:lnTo>
-                  <a:lnTo>
-                    <a:pt x="201762" y="481575"/>
-                  </a:lnTo>
-                  <a:lnTo>
-                    <a:pt x="275522" y="640201"/>
-                  </a:lnTo>
-                  <a:lnTo>
-                    <a:pt x="349282" y="790445"/>
-                  </a:lnTo>
-                  <a:lnTo>
-                    <a:pt x="423042" y="932751"/>
-                  </a:lnTo>
-                  <a:lnTo>
-                    <a:pt x="496802" y="1067538"/>
-                  </a:lnTo>
-                  <a:lnTo>
-                    <a:pt x="570562" y="1195203"/>
-                  </a:lnTo>
-                  <a:lnTo>
-                    <a:pt x="644322" y="1316123"/>
-                  </a:lnTo>
-                  <a:lnTo>
-                    <a:pt x="718082" y="1430654"/>
-                  </a:lnTo>
-                  <a:lnTo>
-                    <a:pt x="791842" y="1539133"/>
-                  </a:lnTo>
-                  <a:lnTo>
-                    <a:pt x="865602" y="1641881"/>
-                  </a:lnTo>
-                  <a:lnTo>
-                    <a:pt x="939362" y="1739200"/>
-                  </a:lnTo>
-                  <a:lnTo>
-                    <a:pt x="1013122" y="1831376"/>
-                  </a:lnTo>
-                  <a:lnTo>
-                    <a:pt x="1086882" y="1918683"/>
-                  </a:lnTo>
-                  <a:lnTo>
-                    <a:pt x="1160642" y="2001376"/>
-                  </a:lnTo>
-                  <a:lnTo>
-                    <a:pt x="1234402" y="2079700"/>
-                  </a:lnTo>
-                  <a:lnTo>
-                    <a:pt x="1308162" y="2153886"/>
-                  </a:lnTo>
-                  <a:lnTo>
-                    <a:pt x="1381922" y="2224152"/>
-                  </a:lnTo>
-                  <a:lnTo>
-                    <a:pt x="1455682" y="2290705"/>
-                  </a:lnTo>
-                  <a:lnTo>
-                    <a:pt x="1529442" y="2353742"/>
-                  </a:lnTo>
-                  <a:lnTo>
-                    <a:pt x="1603202" y="2413448"/>
-                  </a:lnTo>
-                  <a:lnTo>
-                    <a:pt x="1676962" y="2469999"/>
-                  </a:lnTo>
-                  <a:lnTo>
-                    <a:pt x="1750722" y="2523563"/>
-                  </a:lnTo>
-                  <a:lnTo>
-                    <a:pt x="1824482" y="2574296"/>
-                  </a:lnTo>
-                  <a:lnTo>
-                    <a:pt x="1898242" y="2622348"/>
-                  </a:lnTo>
-                  <a:lnTo>
-                    <a:pt x="1972003" y="2659422"/>
-                  </a:lnTo>
-                  <a:lnTo>
-                    <a:pt x="2045763" y="2676100"/>
-                  </a:lnTo>
-                  <a:lnTo>
-                    <a:pt x="2119523" y="2692440"/>
-                  </a:lnTo>
-                  <a:lnTo>
-                    <a:pt x="2193283" y="2708450"/>
-                  </a:lnTo>
-                  <a:lnTo>
-                    <a:pt x="2267043" y="2724136"/>
-                  </a:lnTo>
-                  <a:lnTo>
-                    <a:pt x="2340803" y="2739505"/>
-                  </a:lnTo>
-                  <a:lnTo>
-                    <a:pt x="2414563" y="2754562"/>
-                  </a:lnTo>
-                  <a:lnTo>
-                    <a:pt x="2488323" y="2769315"/>
-                  </a:lnTo>
-                  <a:lnTo>
-                    <a:pt x="2562083" y="2783769"/>
-                  </a:lnTo>
-                  <a:lnTo>
-                    <a:pt x="2635843" y="2797931"/>
-                  </a:lnTo>
-                  <a:lnTo>
-                    <a:pt x="2709603" y="2811807"/>
-                  </a:lnTo>
-                  <a:lnTo>
-                    <a:pt x="2783363" y="2825402"/>
-                  </a:lnTo>
-                  <a:lnTo>
-                    <a:pt x="2857123" y="2838721"/>
-                  </a:lnTo>
-                  <a:lnTo>
-                    <a:pt x="2930883" y="2851772"/>
-                  </a:lnTo>
-                  <a:lnTo>
-                    <a:pt x="3004643" y="2864558"/>
-                  </a:lnTo>
-                  <a:lnTo>
-                    <a:pt x="3078403" y="2877085"/>
-                  </a:lnTo>
-                  <a:lnTo>
-                    <a:pt x="3152163" y="2889359"/>
-                  </a:lnTo>
-                  <a:lnTo>
-                    <a:pt x="3225923" y="2901385"/>
-                  </a:lnTo>
-                  <a:lnTo>
-                    <a:pt x="3299683" y="2913167"/>
-                  </a:lnTo>
-                  <a:lnTo>
-                    <a:pt x="3373443" y="2924711"/>
-                  </a:lnTo>
-                  <a:lnTo>
-                    <a:pt x="3447203" y="2936022"/>
-                  </a:lnTo>
-                  <a:lnTo>
-                    <a:pt x="3520963" y="2947103"/>
-                  </a:lnTo>
-                  <a:lnTo>
-                    <a:pt x="3594723" y="2957961"/>
-                  </a:lnTo>
-                  <a:lnTo>
-                    <a:pt x="3668483" y="2968599"/>
-                  </a:lnTo>
-                  <a:lnTo>
-                    <a:pt x="3742243" y="2979021"/>
-                  </a:lnTo>
-                  <a:lnTo>
-                    <a:pt x="3816003" y="2989233"/>
-                  </a:lnTo>
-                  <a:lnTo>
-                    <a:pt x="3889763" y="2999238"/>
-                  </a:lnTo>
-                  <a:lnTo>
-                    <a:pt x="3963523" y="3009040"/>
-                  </a:lnTo>
-                  <a:lnTo>
-                    <a:pt x="4037283" y="3018645"/>
-                  </a:lnTo>
-                  <a:lnTo>
-                    <a:pt x="4111043" y="3028055"/>
-                  </a:lnTo>
-                  <a:lnTo>
-                    <a:pt x="4184803" y="3037274"/>
-                  </a:lnTo>
-                  <a:lnTo>
-                    <a:pt x="4258563" y="3046307"/>
-                  </a:lnTo>
-                  <a:lnTo>
-                    <a:pt x="4332323" y="3055158"/>
-                  </a:lnTo>
-                  <a:lnTo>
-                    <a:pt x="4406083" y="3063829"/>
-                  </a:lnTo>
-                  <a:lnTo>
-                    <a:pt x="4479843" y="3072325"/>
-                  </a:lnTo>
-                  <a:lnTo>
-                    <a:pt x="4553603" y="3080649"/>
-                  </a:lnTo>
-                  <a:lnTo>
-                    <a:pt x="4627363" y="3088804"/>
-                  </a:lnTo>
-                  <a:lnTo>
-                    <a:pt x="4701123" y="3096795"/>
-                  </a:lnTo>
-                  <a:lnTo>
-                    <a:pt x="4774883" y="3104623"/>
-                  </a:lnTo>
-                  <a:lnTo>
-                    <a:pt x="4848644" y="3112294"/>
-                  </a:lnTo>
-                  <a:lnTo>
-                    <a:pt x="4922404" y="3119809"/>
-                  </a:lnTo>
-                  <a:lnTo>
-                    <a:pt x="4996164" y="3127172"/>
-                  </a:lnTo>
-                  <a:lnTo>
-                    <a:pt x="5069924" y="3134387"/>
-                  </a:lnTo>
-                  <a:lnTo>
-                    <a:pt x="5143684" y="3141455"/>
-                  </a:lnTo>
-                  <a:lnTo>
-                    <a:pt x="5217444" y="3148380"/>
-                  </a:lnTo>
-                  <a:lnTo>
-                    <a:pt x="5291204" y="3155165"/>
-                  </a:lnTo>
-                  <a:lnTo>
-                    <a:pt x="5364964" y="3161813"/>
-                  </a:lnTo>
-                  <a:lnTo>
-                    <a:pt x="5438724" y="3168327"/>
-                  </a:lnTo>
-                  <a:lnTo>
-                    <a:pt x="5512484" y="3174708"/>
-                  </a:lnTo>
-                  <a:lnTo>
-                    <a:pt x="5586244" y="3180961"/>
-                  </a:lnTo>
-                  <a:lnTo>
-                    <a:pt x="5660004" y="3187087"/>
-                  </a:lnTo>
-                  <a:lnTo>
-                    <a:pt x="5733764" y="3193089"/>
                   </a:lnTo>
                 </a:path>
               </a:pathLst>
@@ -3832,610 +4114,285 @@
           </p:nvSpPr>
           <p:spPr>
             <a:xfrm>
-              <a:off x="817517" y="3398513"/>
-              <a:ext cx="7235830" cy="2107533"/>
+              <a:off x="1837372" y="2073503"/>
+              <a:ext cx="6425306" cy="3361753"/>
             </a:xfrm>
             <a:custGeom>
               <a:avLst/>
               <a:pathLst>
-                <a:path w="7235830" h="2107533">
-                  <a:moveTo>
-                    <a:pt x="7235830" y="2107533"/>
-                  </a:moveTo>
-                  <a:lnTo>
-                    <a:pt x="7162070" y="2104677"/>
-                  </a:lnTo>
-                  <a:lnTo>
-                    <a:pt x="7088310" y="2101662"/>
-                  </a:lnTo>
-                  <a:lnTo>
-                    <a:pt x="7014550" y="2098478"/>
-                  </a:lnTo>
-                  <a:lnTo>
-                    <a:pt x="6940789" y="2095116"/>
-                  </a:lnTo>
-                  <a:lnTo>
-                    <a:pt x="6867029" y="2091567"/>
-                  </a:lnTo>
-                  <a:lnTo>
-                    <a:pt x="6793269" y="2087820"/>
-                  </a:lnTo>
-                  <a:lnTo>
-                    <a:pt x="6719509" y="2083864"/>
-                  </a:lnTo>
-                  <a:lnTo>
-                    <a:pt x="6645749" y="2079688"/>
-                  </a:lnTo>
-                  <a:lnTo>
-                    <a:pt x="6571989" y="2075278"/>
-                  </a:lnTo>
-                  <a:lnTo>
-                    <a:pt x="6498229" y="2070622"/>
-                  </a:lnTo>
-                  <a:lnTo>
-                    <a:pt x="6424469" y="2065707"/>
-                  </a:lnTo>
-                  <a:lnTo>
-                    <a:pt x="6350709" y="2060517"/>
-                  </a:lnTo>
-                  <a:lnTo>
-                    <a:pt x="6276949" y="2055038"/>
-                  </a:lnTo>
-                  <a:lnTo>
-                    <a:pt x="6203189" y="2049254"/>
-                  </a:lnTo>
-                  <a:lnTo>
-                    <a:pt x="6129429" y="2043146"/>
-                  </a:lnTo>
-                  <a:lnTo>
-                    <a:pt x="6055669" y="2036698"/>
-                  </a:lnTo>
-                  <a:lnTo>
-                    <a:pt x="5981909" y="2029890"/>
-                  </a:lnTo>
-                  <a:lnTo>
-                    <a:pt x="5908149" y="2022703"/>
-                  </a:lnTo>
-                  <a:lnTo>
-                    <a:pt x="5834389" y="2015114"/>
-                  </a:lnTo>
-                  <a:lnTo>
-                    <a:pt x="5760629" y="2007102"/>
-                  </a:lnTo>
-                  <a:lnTo>
-                    <a:pt x="5686869" y="1998644"/>
-                  </a:lnTo>
-                  <a:lnTo>
-                    <a:pt x="5613109" y="1989713"/>
-                  </a:lnTo>
-                  <a:lnTo>
-                    <a:pt x="5539349" y="1980284"/>
-                  </a:lnTo>
-                  <a:lnTo>
-                    <a:pt x="5465589" y="1970329"/>
-                  </a:lnTo>
-                  <a:lnTo>
-                    <a:pt x="5391829" y="1959819"/>
-                  </a:lnTo>
-                  <a:lnTo>
-                    <a:pt x="5318069" y="1948723"/>
-                  </a:lnTo>
-                  <a:lnTo>
-                    <a:pt x="5244309" y="1937007"/>
-                  </a:lnTo>
-                  <a:lnTo>
-                    <a:pt x="5170549" y="1924638"/>
-                  </a:lnTo>
-                  <a:lnTo>
-                    <a:pt x="5096789" y="1911579"/>
-                  </a:lnTo>
-                  <a:lnTo>
-                    <a:pt x="5023029" y="1897792"/>
-                  </a:lnTo>
-                  <a:lnTo>
-                    <a:pt x="4949269" y="1883235"/>
-                  </a:lnTo>
-                  <a:lnTo>
-                    <a:pt x="4875509" y="1867866"/>
-                  </a:lnTo>
-                  <a:lnTo>
-                    <a:pt x="4801749" y="1851640"/>
-                  </a:lnTo>
-                  <a:lnTo>
-                    <a:pt x="4727989" y="1834509"/>
-                  </a:lnTo>
-                  <a:lnTo>
-                    <a:pt x="4654229" y="1816422"/>
-                  </a:lnTo>
-                  <a:lnTo>
-                    <a:pt x="4580469" y="1797327"/>
-                  </a:lnTo>
-                  <a:lnTo>
-                    <a:pt x="4506709" y="1777165"/>
-                  </a:lnTo>
-                  <a:lnTo>
-                    <a:pt x="4432949" y="1755880"/>
-                  </a:lnTo>
-                  <a:lnTo>
-                    <a:pt x="4359189" y="1733407"/>
-                  </a:lnTo>
-                  <a:lnTo>
-                    <a:pt x="4285429" y="1709680"/>
-                  </a:lnTo>
-                  <a:lnTo>
-                    <a:pt x="4211669" y="1684630"/>
-                  </a:lnTo>
-                  <a:lnTo>
-                    <a:pt x="4137909" y="1658182"/>
-                  </a:lnTo>
-                  <a:lnTo>
-                    <a:pt x="4064149" y="1630259"/>
-                  </a:lnTo>
-                  <a:lnTo>
-                    <a:pt x="3990388" y="1600778"/>
-                  </a:lnTo>
-                  <a:lnTo>
-                    <a:pt x="3916628" y="1569652"/>
-                  </a:lnTo>
-                  <a:lnTo>
-                    <a:pt x="3842868" y="1536791"/>
-                  </a:lnTo>
-                  <a:lnTo>
-                    <a:pt x="3769108" y="1502096"/>
-                  </a:lnTo>
-                  <a:lnTo>
-                    <a:pt x="3695348" y="1465465"/>
-                  </a:lnTo>
-                  <a:lnTo>
-                    <a:pt x="3621588" y="1426792"/>
-                  </a:lnTo>
-                  <a:lnTo>
-                    <a:pt x="3547828" y="1385960"/>
-                  </a:lnTo>
-                  <a:lnTo>
-                    <a:pt x="3474068" y="1342851"/>
-                  </a:lnTo>
-                  <a:lnTo>
-                    <a:pt x="3400308" y="1317389"/>
-                  </a:lnTo>
-                  <a:lnTo>
-                    <a:pt x="3326548" y="1300016"/>
-                  </a:lnTo>
-                  <a:lnTo>
-                    <a:pt x="3252788" y="1282283"/>
-                  </a:lnTo>
-                  <a:lnTo>
-                    <a:pt x="3179028" y="1264184"/>
-                  </a:lnTo>
-                  <a:lnTo>
-                    <a:pt x="3105268" y="1245712"/>
-                  </a:lnTo>
-                  <a:lnTo>
-                    <a:pt x="3031508" y="1226858"/>
-                  </a:lnTo>
-                  <a:lnTo>
-                    <a:pt x="2957748" y="1207615"/>
-                  </a:lnTo>
-                  <a:lnTo>
-                    <a:pt x="2883988" y="1187975"/>
-                  </a:lnTo>
-                  <a:lnTo>
-                    <a:pt x="2810228" y="1167928"/>
-                  </a:lnTo>
-                  <a:lnTo>
-                    <a:pt x="2736468" y="1147468"/>
-                  </a:lnTo>
-                  <a:lnTo>
-                    <a:pt x="2662708" y="1126586"/>
-                  </a:lnTo>
-                  <a:lnTo>
-                    <a:pt x="2588948" y="1105272"/>
-                  </a:lnTo>
-                  <a:lnTo>
-                    <a:pt x="2515188" y="1083518"/>
-                  </a:lnTo>
-                  <a:lnTo>
-                    <a:pt x="2441428" y="1061315"/>
-                  </a:lnTo>
-                  <a:lnTo>
-                    <a:pt x="2367668" y="1038654"/>
-                  </a:lnTo>
-                  <a:lnTo>
-                    <a:pt x="2293908" y="1015524"/>
-                  </a:lnTo>
-                  <a:lnTo>
-                    <a:pt x="2220148" y="991917"/>
-                  </a:lnTo>
-                  <a:lnTo>
-                    <a:pt x="2146388" y="967822"/>
-                  </a:lnTo>
-                  <a:lnTo>
-                    <a:pt x="2072628" y="943230"/>
-                  </a:lnTo>
-                  <a:lnTo>
-                    <a:pt x="1998868" y="918130"/>
-                  </a:lnTo>
-                  <a:lnTo>
-                    <a:pt x="1925108" y="892511"/>
-                  </a:lnTo>
-                  <a:lnTo>
-                    <a:pt x="1851348" y="866364"/>
-                  </a:lnTo>
-                  <a:lnTo>
-                    <a:pt x="1777588" y="839677"/>
-                  </a:lnTo>
-                  <a:lnTo>
-                    <a:pt x="1703828" y="812438"/>
-                  </a:lnTo>
-                  <a:lnTo>
-                    <a:pt x="1630068" y="784637"/>
-                  </a:lnTo>
-                  <a:lnTo>
-                    <a:pt x="1556308" y="756263"/>
-                  </a:lnTo>
-                  <a:lnTo>
-                    <a:pt x="1482548" y="727302"/>
-                  </a:lnTo>
-                  <a:lnTo>
-                    <a:pt x="1408788" y="697743"/>
-                  </a:lnTo>
-                  <a:lnTo>
-                    <a:pt x="1335028" y="667573"/>
-                  </a:lnTo>
-                  <a:lnTo>
-                    <a:pt x="1261268" y="636781"/>
-                  </a:lnTo>
-                  <a:lnTo>
-                    <a:pt x="1187508" y="605353"/>
-                  </a:lnTo>
-                  <a:lnTo>
-                    <a:pt x="1113747" y="573276"/>
-                  </a:lnTo>
-                  <a:lnTo>
-                    <a:pt x="1039987" y="540536"/>
-                  </a:lnTo>
-                  <a:lnTo>
-                    <a:pt x="966227" y="507120"/>
-                  </a:lnTo>
-                  <a:lnTo>
-                    <a:pt x="892467" y="473015"/>
-                  </a:lnTo>
-                  <a:lnTo>
-                    <a:pt x="818707" y="438205"/>
-                  </a:lnTo>
-                  <a:lnTo>
-                    <a:pt x="744947" y="402676"/>
-                  </a:lnTo>
-                  <a:lnTo>
-                    <a:pt x="671187" y="366414"/>
-                  </a:lnTo>
-                  <a:lnTo>
-                    <a:pt x="597427" y="329402"/>
-                  </a:lnTo>
-                  <a:lnTo>
-                    <a:pt x="523667" y="291627"/>
-                  </a:lnTo>
-                  <a:lnTo>
-                    <a:pt x="449907" y="253071"/>
-                  </a:lnTo>
-                  <a:lnTo>
-                    <a:pt x="376147" y="213720"/>
-                  </a:lnTo>
-                  <a:lnTo>
-                    <a:pt x="302387" y="173555"/>
-                  </a:lnTo>
-                  <a:lnTo>
-                    <a:pt x="228627" y="132562"/>
-                  </a:lnTo>
-                  <a:lnTo>
-                    <a:pt x="154867" y="90721"/>
-                  </a:lnTo>
-                  <a:lnTo>
-                    <a:pt x="81107" y="48017"/>
-                  </a:lnTo>
-                  <a:lnTo>
-                    <a:pt x="7347" y="4431"/>
-                  </a:lnTo>
-                  <a:lnTo>
-                    <a:pt x="0" y="0"/>
-                  </a:lnTo>
-                </a:path>
-              </a:pathLst>
-            </a:custGeom>
-          </p:spPr>
-          <p:txBody>
-            <a:bodyPr/>
-            <a:lstStyle/>
-            <a:p/>
-          </p:txBody>
-        </p:sp>
-        <p:sp>
-          <p:nvSpPr>
-            <p:cNvPr id="24" name="pl24"/>
-            <p:cNvSpPr/>
-            <p:nvPr/>
-          </p:nvSpPr>
-          <p:spPr>
-            <a:xfrm>
-              <a:off x="1436284" y="2073503"/>
-              <a:ext cx="6617063" cy="3361753"/>
-            </a:xfrm>
-            <a:custGeom>
-              <a:avLst/>
-              <a:pathLst>
-                <a:path w="6617063" h="3361753">
+                <a:path w="6425306" h="3361753">
                   <a:moveTo>
                     <a:pt x="0" y="0"/>
                   </a:moveTo>
                   <a:lnTo>
-                    <a:pt x="52420" y="91770"/>
-                  </a:lnTo>
-                  <a:lnTo>
-                    <a:pt x="126180" y="216162"/>
-                  </a:lnTo>
-                  <a:lnTo>
-                    <a:pt x="199940" y="335993"/>
-                  </a:lnTo>
-                  <a:lnTo>
-                    <a:pt x="273701" y="451429"/>
-                  </a:lnTo>
-                  <a:lnTo>
-                    <a:pt x="347461" y="562631"/>
-                  </a:lnTo>
-                  <a:lnTo>
-                    <a:pt x="421221" y="669756"/>
-                  </a:lnTo>
-                  <a:lnTo>
-                    <a:pt x="494981" y="772952"/>
-                  </a:lnTo>
-                  <a:lnTo>
-                    <a:pt x="568741" y="872364"/>
-                  </a:lnTo>
-                  <a:lnTo>
-                    <a:pt x="642501" y="968130"/>
-                  </a:lnTo>
-                  <a:lnTo>
-                    <a:pt x="716261" y="1060383"/>
-                  </a:lnTo>
-                  <a:lnTo>
-                    <a:pt x="790021" y="1149254"/>
-                  </a:lnTo>
-                  <a:lnTo>
-                    <a:pt x="863781" y="1234866"/>
-                  </a:lnTo>
-                  <a:lnTo>
-                    <a:pt x="937541" y="1317338"/>
-                  </a:lnTo>
-                  <a:lnTo>
-                    <a:pt x="1011301" y="1396786"/>
-                  </a:lnTo>
-                  <a:lnTo>
-                    <a:pt x="1085061" y="1473320"/>
-                  </a:lnTo>
-                  <a:lnTo>
-                    <a:pt x="1158821" y="1547047"/>
-                  </a:lnTo>
-                  <a:lnTo>
-                    <a:pt x="1232581" y="1618071"/>
-                  </a:lnTo>
-                  <a:lnTo>
-                    <a:pt x="1306341" y="1686490"/>
-                  </a:lnTo>
-                  <a:lnTo>
-                    <a:pt x="1380101" y="1752399"/>
-                  </a:lnTo>
-                  <a:lnTo>
-                    <a:pt x="1453861" y="1815892"/>
-                  </a:lnTo>
-                  <a:lnTo>
-                    <a:pt x="1527621" y="1877057"/>
-                  </a:lnTo>
-                  <a:lnTo>
-                    <a:pt x="1601381" y="1935978"/>
-                  </a:lnTo>
-                  <a:lnTo>
-                    <a:pt x="1675141" y="1992739"/>
-                  </a:lnTo>
-                  <a:lnTo>
-                    <a:pt x="1748901" y="2047418"/>
-                  </a:lnTo>
-                  <a:lnTo>
-                    <a:pt x="1822661" y="2100091"/>
-                  </a:lnTo>
-                  <a:lnTo>
-                    <a:pt x="1896421" y="2150833"/>
-                  </a:lnTo>
-                  <a:lnTo>
-                    <a:pt x="1970181" y="2199715"/>
-                  </a:lnTo>
-                  <a:lnTo>
-                    <a:pt x="2043941" y="2246803"/>
-                  </a:lnTo>
-                  <a:lnTo>
-                    <a:pt x="2117701" y="2292165"/>
-                  </a:lnTo>
-                  <a:lnTo>
-                    <a:pt x="2191461" y="2335863"/>
-                  </a:lnTo>
-                  <a:lnTo>
-                    <a:pt x="2265221" y="2377959"/>
-                  </a:lnTo>
-                  <a:lnTo>
-                    <a:pt x="2338981" y="2418511"/>
-                  </a:lnTo>
-                  <a:lnTo>
-                    <a:pt x="2412741" y="2457576"/>
-                  </a:lnTo>
-                  <a:lnTo>
-                    <a:pt x="2486501" y="2495208"/>
-                  </a:lnTo>
-                  <a:lnTo>
-                    <a:pt x="2560261" y="2531460"/>
-                  </a:lnTo>
-                  <a:lnTo>
-                    <a:pt x="2634021" y="2566383"/>
-                  </a:lnTo>
-                  <a:lnTo>
-                    <a:pt x="2707781" y="2600025"/>
-                  </a:lnTo>
-                  <a:lnTo>
-                    <a:pt x="2781541" y="2632433"/>
-                  </a:lnTo>
-                  <a:lnTo>
-                    <a:pt x="2855301" y="2663653"/>
-                  </a:lnTo>
-                  <a:lnTo>
-                    <a:pt x="2929061" y="2693728"/>
-                  </a:lnTo>
-                  <a:lnTo>
-                    <a:pt x="3002821" y="2722700"/>
-                  </a:lnTo>
-                  <a:lnTo>
-                    <a:pt x="3076581" y="2750609"/>
-                  </a:lnTo>
-                  <a:lnTo>
-                    <a:pt x="3150341" y="2777495"/>
-                  </a:lnTo>
-                  <a:lnTo>
-                    <a:pt x="3224102" y="2803395"/>
-                  </a:lnTo>
-                  <a:lnTo>
-                    <a:pt x="3297862" y="2828345"/>
-                  </a:lnTo>
-                  <a:lnTo>
-                    <a:pt x="3371622" y="2852381"/>
-                  </a:lnTo>
-                  <a:lnTo>
-                    <a:pt x="3445382" y="2875534"/>
-                  </a:lnTo>
-                  <a:lnTo>
-                    <a:pt x="3519142" y="2897839"/>
-                  </a:lnTo>
-                  <a:lnTo>
-                    <a:pt x="3592902" y="2919326"/>
-                  </a:lnTo>
-                  <a:lnTo>
-                    <a:pt x="3666662" y="2940024"/>
-                  </a:lnTo>
-                  <a:lnTo>
-                    <a:pt x="3740422" y="2959964"/>
-                  </a:lnTo>
-                  <a:lnTo>
-                    <a:pt x="3814182" y="2979173"/>
-                  </a:lnTo>
-                  <a:lnTo>
-                    <a:pt x="3887942" y="2997677"/>
-                  </a:lnTo>
-                  <a:lnTo>
-                    <a:pt x="3961702" y="3015502"/>
-                  </a:lnTo>
-                  <a:lnTo>
-                    <a:pt x="4035462" y="3032674"/>
-                  </a:lnTo>
-                  <a:lnTo>
-                    <a:pt x="4109222" y="3049216"/>
-                  </a:lnTo>
-                  <a:lnTo>
-                    <a:pt x="4182982" y="3065151"/>
-                  </a:lnTo>
-                  <a:lnTo>
-                    <a:pt x="4256742" y="3080502"/>
-                  </a:lnTo>
-                  <a:lnTo>
-                    <a:pt x="4330502" y="3095290"/>
-                  </a:lnTo>
-                  <a:lnTo>
-                    <a:pt x="4404262" y="3109536"/>
-                  </a:lnTo>
-                  <a:lnTo>
-                    <a:pt x="4478022" y="3123259"/>
-                  </a:lnTo>
-                  <a:lnTo>
-                    <a:pt x="4551782" y="3136479"/>
-                  </a:lnTo>
-                  <a:lnTo>
-                    <a:pt x="4625542" y="3149214"/>
-                  </a:lnTo>
-                  <a:lnTo>
-                    <a:pt x="4699302" y="3161482"/>
-                  </a:lnTo>
-                  <a:lnTo>
-                    <a:pt x="4773062" y="3173300"/>
-                  </a:lnTo>
-                  <a:lnTo>
-                    <a:pt x="4846822" y="3184685"/>
-                  </a:lnTo>
-                  <a:lnTo>
-                    <a:pt x="4920582" y="3195652"/>
-                  </a:lnTo>
-                  <a:lnTo>
-                    <a:pt x="4994342" y="3206218"/>
-                  </a:lnTo>
-                  <a:lnTo>
-                    <a:pt x="5068102" y="3216395"/>
-                  </a:lnTo>
-                  <a:lnTo>
-                    <a:pt x="5141862" y="3226200"/>
-                  </a:lnTo>
-                  <a:lnTo>
-                    <a:pt x="5215622" y="3235645"/>
-                  </a:lnTo>
-                  <a:lnTo>
-                    <a:pt x="5289382" y="3244743"/>
-                  </a:lnTo>
-                  <a:lnTo>
-                    <a:pt x="5363142" y="3253508"/>
-                  </a:lnTo>
-                  <a:lnTo>
-                    <a:pt x="5436902" y="3261951"/>
-                  </a:lnTo>
-                  <a:lnTo>
-                    <a:pt x="5510662" y="3270085"/>
-                  </a:lnTo>
-                  <a:lnTo>
-                    <a:pt x="5584422" y="3277921"/>
-                  </a:lnTo>
-                  <a:lnTo>
-                    <a:pt x="5658182" y="3285469"/>
-                  </a:lnTo>
-                  <a:lnTo>
-                    <a:pt x="5731942" y="3292740"/>
-                  </a:lnTo>
-                  <a:lnTo>
-                    <a:pt x="5805702" y="3299745"/>
-                  </a:lnTo>
-                  <a:lnTo>
-                    <a:pt x="5879462" y="3306493"/>
-                  </a:lnTo>
-                  <a:lnTo>
-                    <a:pt x="5953222" y="3312993"/>
-                  </a:lnTo>
-                  <a:lnTo>
-                    <a:pt x="6026982" y="3319255"/>
-                  </a:lnTo>
-                  <a:lnTo>
-                    <a:pt x="6100743" y="3325287"/>
-                  </a:lnTo>
-                  <a:lnTo>
-                    <a:pt x="6174503" y="3331098"/>
-                  </a:lnTo>
-                  <a:lnTo>
-                    <a:pt x="6248263" y="3336696"/>
-                  </a:lnTo>
-                  <a:lnTo>
-                    <a:pt x="6322023" y="3342089"/>
-                  </a:lnTo>
-                  <a:lnTo>
-                    <a:pt x="6395783" y="3347284"/>
-                  </a:lnTo>
-                  <a:lnTo>
-                    <a:pt x="6469543" y="3352288"/>
-                  </a:lnTo>
-                  <a:lnTo>
-                    <a:pt x="6543303" y="3357109"/>
-                  </a:lnTo>
-                  <a:lnTo>
-                    <a:pt x="6617063" y="3361753"/>
+                    <a:pt x="50901" y="91770"/>
+                  </a:lnTo>
+                  <a:lnTo>
+                    <a:pt x="122524" y="216162"/>
+                  </a:lnTo>
+                  <a:lnTo>
+                    <a:pt x="194146" y="335993"/>
+                  </a:lnTo>
+                  <a:lnTo>
+                    <a:pt x="265769" y="451429"/>
+                  </a:lnTo>
+                  <a:lnTo>
+                    <a:pt x="337391" y="562631"/>
+                  </a:lnTo>
+                  <a:lnTo>
+                    <a:pt x="409014" y="669756"/>
+                  </a:lnTo>
+                  <a:lnTo>
+                    <a:pt x="480636" y="772952"/>
+                  </a:lnTo>
+                  <a:lnTo>
+                    <a:pt x="552259" y="872364"/>
+                  </a:lnTo>
+                  <a:lnTo>
+                    <a:pt x="623882" y="968130"/>
+                  </a:lnTo>
+                  <a:lnTo>
+                    <a:pt x="695504" y="1060383"/>
+                  </a:lnTo>
+                  <a:lnTo>
+                    <a:pt x="767127" y="1149254"/>
+                  </a:lnTo>
+                  <a:lnTo>
+                    <a:pt x="838749" y="1234866"/>
+                  </a:lnTo>
+                  <a:lnTo>
+                    <a:pt x="910372" y="1317338"/>
+                  </a:lnTo>
+                  <a:lnTo>
+                    <a:pt x="981994" y="1396786"/>
+                  </a:lnTo>
+                  <a:lnTo>
+                    <a:pt x="1053617" y="1473320"/>
+                  </a:lnTo>
+                  <a:lnTo>
+                    <a:pt x="1125239" y="1547047"/>
+                  </a:lnTo>
+                  <a:lnTo>
+                    <a:pt x="1196862" y="1618071"/>
+                  </a:lnTo>
+                  <a:lnTo>
+                    <a:pt x="1268484" y="1686490"/>
+                  </a:lnTo>
+                  <a:lnTo>
+                    <a:pt x="1340107" y="1752399"/>
+                  </a:lnTo>
+                  <a:lnTo>
+                    <a:pt x="1411729" y="1815892"/>
+                  </a:lnTo>
+                  <a:lnTo>
+                    <a:pt x="1483352" y="1877057"/>
+                  </a:lnTo>
+                  <a:lnTo>
+                    <a:pt x="1554974" y="1935978"/>
+                  </a:lnTo>
+                  <a:lnTo>
+                    <a:pt x="1626597" y="1992739"/>
+                  </a:lnTo>
+                  <a:lnTo>
+                    <a:pt x="1698219" y="2047418"/>
+                  </a:lnTo>
+                  <a:lnTo>
+                    <a:pt x="1769842" y="2100091"/>
+                  </a:lnTo>
+                  <a:lnTo>
+                    <a:pt x="1841464" y="2150833"/>
+                  </a:lnTo>
+                  <a:lnTo>
+                    <a:pt x="1913087" y="2199715"/>
+                  </a:lnTo>
+                  <a:lnTo>
+                    <a:pt x="1984710" y="2246803"/>
+                  </a:lnTo>
+                  <a:lnTo>
+                    <a:pt x="2056332" y="2292165"/>
+                  </a:lnTo>
+                  <a:lnTo>
+                    <a:pt x="2127955" y="2335863"/>
+                  </a:lnTo>
+                  <a:lnTo>
+                    <a:pt x="2199577" y="2377959"/>
+                  </a:lnTo>
+                  <a:lnTo>
+                    <a:pt x="2271200" y="2418511"/>
+                  </a:lnTo>
+                  <a:lnTo>
+                    <a:pt x="2342822" y="2457576"/>
+                  </a:lnTo>
+                  <a:lnTo>
+                    <a:pt x="2414445" y="2495208"/>
+                  </a:lnTo>
+                  <a:lnTo>
+                    <a:pt x="2486067" y="2531460"/>
+                  </a:lnTo>
+                  <a:lnTo>
+                    <a:pt x="2557690" y="2566383"/>
+                  </a:lnTo>
+                  <a:lnTo>
+                    <a:pt x="2629312" y="2600025"/>
+                  </a:lnTo>
+                  <a:lnTo>
+                    <a:pt x="2700935" y="2632433"/>
+                  </a:lnTo>
+                  <a:lnTo>
+                    <a:pt x="2772557" y="2663653"/>
+                  </a:lnTo>
+                  <a:lnTo>
+                    <a:pt x="2844180" y="2693728"/>
+                  </a:lnTo>
+                  <a:lnTo>
+                    <a:pt x="2915802" y="2722700"/>
+                  </a:lnTo>
+                  <a:lnTo>
+                    <a:pt x="2987425" y="2750609"/>
+                  </a:lnTo>
+                  <a:lnTo>
+                    <a:pt x="3059047" y="2777495"/>
+                  </a:lnTo>
+                  <a:lnTo>
+                    <a:pt x="3130670" y="2803395"/>
+                  </a:lnTo>
+                  <a:lnTo>
+                    <a:pt x="3202292" y="2828345"/>
+                  </a:lnTo>
+                  <a:lnTo>
+                    <a:pt x="3273915" y="2852381"/>
+                  </a:lnTo>
+                  <a:lnTo>
+                    <a:pt x="3345538" y="2875534"/>
+                  </a:lnTo>
+                  <a:lnTo>
+                    <a:pt x="3417160" y="2897839"/>
+                  </a:lnTo>
+                  <a:lnTo>
+                    <a:pt x="3488783" y="2919326"/>
+                  </a:lnTo>
+                  <a:lnTo>
+                    <a:pt x="3560405" y="2940024"/>
+                  </a:lnTo>
+                  <a:lnTo>
+                    <a:pt x="3632028" y="2959964"/>
+                  </a:lnTo>
+                  <a:lnTo>
+                    <a:pt x="3703650" y="2979173"/>
+                  </a:lnTo>
+                  <a:lnTo>
+                    <a:pt x="3775273" y="2997677"/>
+                  </a:lnTo>
+                  <a:lnTo>
+                    <a:pt x="3846895" y="3015502"/>
+                  </a:lnTo>
+                  <a:lnTo>
+                    <a:pt x="3918518" y="3032674"/>
+                  </a:lnTo>
+                  <a:lnTo>
+                    <a:pt x="3990140" y="3049216"/>
+                  </a:lnTo>
+                  <a:lnTo>
+                    <a:pt x="4061763" y="3065151"/>
+                  </a:lnTo>
+                  <a:lnTo>
+                    <a:pt x="4133385" y="3080502"/>
+                  </a:lnTo>
+                  <a:lnTo>
+                    <a:pt x="4205008" y="3095290"/>
+                  </a:lnTo>
+                  <a:lnTo>
+                    <a:pt x="4276630" y="3109536"/>
+                  </a:lnTo>
+                  <a:lnTo>
+                    <a:pt x="4348253" y="3123259"/>
+                  </a:lnTo>
+                  <a:lnTo>
+                    <a:pt x="4419875" y="3136479"/>
+                  </a:lnTo>
+                  <a:lnTo>
+                    <a:pt x="4491498" y="3149214"/>
+                  </a:lnTo>
+                  <a:lnTo>
+                    <a:pt x="4563120" y="3161482"/>
+                  </a:lnTo>
+                  <a:lnTo>
+                    <a:pt x="4634743" y="3173300"/>
+                  </a:lnTo>
+                  <a:lnTo>
+                    <a:pt x="4706366" y="3184685"/>
+                  </a:lnTo>
+                  <a:lnTo>
+                    <a:pt x="4777988" y="3195652"/>
+                  </a:lnTo>
+                  <a:lnTo>
+                    <a:pt x="4849611" y="3206218"/>
+                  </a:lnTo>
+                  <a:lnTo>
+                    <a:pt x="4921233" y="3216395"/>
+                  </a:lnTo>
+                  <a:lnTo>
+                    <a:pt x="4992856" y="3226200"/>
+                  </a:lnTo>
+                  <a:lnTo>
+                    <a:pt x="5064478" y="3235645"/>
+                  </a:lnTo>
+                  <a:lnTo>
+                    <a:pt x="5136101" y="3244743"/>
+                  </a:lnTo>
+                  <a:lnTo>
+                    <a:pt x="5207723" y="3253508"/>
+                  </a:lnTo>
+                  <a:lnTo>
+                    <a:pt x="5279346" y="3261951"/>
+                  </a:lnTo>
+                  <a:lnTo>
+                    <a:pt x="5350968" y="3270085"/>
+                  </a:lnTo>
+                  <a:lnTo>
+                    <a:pt x="5422591" y="3277921"/>
+                  </a:lnTo>
+                  <a:lnTo>
+                    <a:pt x="5494213" y="3285469"/>
+                  </a:lnTo>
+                  <a:lnTo>
+                    <a:pt x="5565836" y="3292740"/>
+                  </a:lnTo>
+                  <a:lnTo>
+                    <a:pt x="5637458" y="3299745"/>
+                  </a:lnTo>
+                  <a:lnTo>
+                    <a:pt x="5709081" y="3306493"/>
+                  </a:lnTo>
+                  <a:lnTo>
+                    <a:pt x="5780703" y="3312993"/>
+                  </a:lnTo>
+                  <a:lnTo>
+                    <a:pt x="5852326" y="3319255"/>
+                  </a:lnTo>
+                  <a:lnTo>
+                    <a:pt x="5923948" y="3325287"/>
+                  </a:lnTo>
+                  <a:lnTo>
+                    <a:pt x="5995571" y="3331098"/>
+                  </a:lnTo>
+                  <a:lnTo>
+                    <a:pt x="6067194" y="3336696"/>
+                  </a:lnTo>
+                  <a:lnTo>
+                    <a:pt x="6138816" y="3342089"/>
+                  </a:lnTo>
+                  <a:lnTo>
+                    <a:pt x="6210439" y="3347284"/>
+                  </a:lnTo>
+                  <a:lnTo>
+                    <a:pt x="6282061" y="3352288"/>
+                  </a:lnTo>
+                  <a:lnTo>
+                    <a:pt x="6353684" y="3357109"/>
+                  </a:lnTo>
+                  <a:lnTo>
+                    <a:pt x="6425306" y="3361753"/>
                   </a:lnTo>
                 </a:path>
               </a:pathLst>
@@ -4458,7 +4415,7 @@
         </p:sp>
         <p:sp>
           <p:nvSpPr>
-            <p:cNvPr id="25" name="pl25"/>
+            <p:cNvPr id="24" name="pl24"/>
             <p:cNvSpPr/>
             <p:nvPr/>
           </p:nvSpPr>
@@ -4501,13 +4458,13 @@
         </p:sp>
         <p:sp>
           <p:nvSpPr>
-            <p:cNvPr id="26" name="pl26"/>
+            <p:cNvPr id="25" name="pl25"/>
             <p:cNvSpPr/>
             <p:nvPr/>
           </p:nvSpPr>
           <p:spPr>
             <a:xfrm>
-              <a:off x="4269157" y="2073503"/>
+              <a:off x="4588151" y="2073503"/>
               <a:ext cx="0" cy="3649639"/>
             </a:xfrm>
             <a:custGeom>
@@ -4544,7 +4501,7 @@
         </p:sp>
         <p:sp>
           <p:nvSpPr>
-            <p:cNvPr id="27" name="tx27"/>
+            <p:cNvPr id="26" name="tx26"/>
             <p:cNvSpPr/>
             <p:nvPr/>
           </p:nvSpPr>
@@ -4590,7 +4547,7 @@
         </p:sp>
         <p:sp>
           <p:nvSpPr>
-            <p:cNvPr id="28" name="tx28"/>
+            <p:cNvPr id="27" name="tx27"/>
             <p:cNvSpPr/>
             <p:nvPr/>
           </p:nvSpPr>
@@ -4636,7 +4593,7 @@
         </p:sp>
         <p:sp>
           <p:nvSpPr>
-            <p:cNvPr id="29" name="tx29"/>
+            <p:cNvPr id="28" name="tx28"/>
             <p:cNvSpPr/>
             <p:nvPr/>
           </p:nvSpPr>
@@ -4682,7 +4639,7 @@
         </p:sp>
         <p:sp>
           <p:nvSpPr>
-            <p:cNvPr id="30" name="tx30"/>
+            <p:cNvPr id="29" name="tx29"/>
             <p:cNvSpPr/>
             <p:nvPr/>
           </p:nvSpPr>
@@ -4728,7 +4685,7 @@
         </p:sp>
         <p:sp>
           <p:nvSpPr>
-            <p:cNvPr id="31" name="tx31"/>
+            <p:cNvPr id="30" name="tx30"/>
             <p:cNvSpPr/>
             <p:nvPr/>
           </p:nvSpPr>
@@ -4774,14 +4731,14 @@
         </p:sp>
         <p:sp>
           <p:nvSpPr>
-            <p:cNvPr id="32" name="tx32"/>
+            <p:cNvPr id="31" name="tx31"/>
             <p:cNvSpPr/>
             <p:nvPr/>
           </p:nvSpPr>
           <p:spPr>
             <a:xfrm>
-              <a:off x="2423864" y="5785772"/>
-              <a:ext cx="155356" cy="80101"/>
+              <a:off x="2360651" y="5785772"/>
+              <a:ext cx="161574" cy="80101"/>
             </a:xfrm>
             <a:prstGeom prst="rect">
               <a:avLst/>
@@ -4813,21 +4770,21 @@
                   <a:latin typeface="Helvetica"/>
                   <a:cs typeface="Helvetica"/>
                 </a:rPr>
-                <a:t>0.8</a:t>
+                <a:t>-25</a:t>
               </a:r>
             </a:p>
           </p:txBody>
         </p:sp>
         <p:sp>
           <p:nvSpPr>
-            <p:cNvPr id="33" name="tx33"/>
+            <p:cNvPr id="32" name="tx32"/>
             <p:cNvSpPr/>
             <p:nvPr/>
           </p:nvSpPr>
           <p:spPr>
             <a:xfrm>
-              <a:off x="4196521" y="5785772"/>
-              <a:ext cx="155356" cy="80101"/>
+              <a:off x="4561958" y="5785772"/>
+              <a:ext cx="62179" cy="80101"/>
             </a:xfrm>
             <a:prstGeom prst="rect">
               <a:avLst/>
@@ -4859,21 +4816,21 @@
                   <a:latin typeface="Helvetica"/>
                   <a:cs typeface="Helvetica"/>
                 </a:rPr>
-                <a:t>1.0</a:t>
+                <a:t>0</a:t>
               </a:r>
             </a:p>
           </p:txBody>
         </p:sp>
         <p:sp>
           <p:nvSpPr>
-            <p:cNvPr id="34" name="tx34"/>
+            <p:cNvPr id="33" name="tx33"/>
             <p:cNvSpPr/>
             <p:nvPr/>
           </p:nvSpPr>
           <p:spPr>
             <a:xfrm>
-              <a:off x="5969179" y="5785772"/>
-              <a:ext cx="155356" cy="80101"/>
+              <a:off x="6682478" y="5785772"/>
+              <a:ext cx="124358" cy="80101"/>
             </a:xfrm>
             <a:prstGeom prst="rect">
               <a:avLst/>
@@ -4905,67 +4862,21 @@
                   <a:latin typeface="Helvetica"/>
                   <a:cs typeface="Helvetica"/>
                 </a:rPr>
-                <a:t>1.2</a:t>
+                <a:t>25</a:t>
               </a:r>
             </a:p>
           </p:txBody>
         </p:sp>
         <p:sp>
           <p:nvSpPr>
-            <p:cNvPr id="35" name="tx35"/>
+            <p:cNvPr id="34" name="tx34"/>
             <p:cNvSpPr/>
             <p:nvPr/>
           </p:nvSpPr>
           <p:spPr>
             <a:xfrm>
-              <a:off x="7741836" y="5785772"/>
-              <a:ext cx="155356" cy="80101"/>
-            </a:xfrm>
-            <a:prstGeom prst="rect">
-              <a:avLst/>
-            </a:prstGeom>
-            <a:noFill/>
-          </p:spPr>
-          <p:txBody>
-            <a:bodyPr lIns="0" rIns="0" tIns="0" bIns="0" anchorCtr="1" anchor="ctr" wrap="none"/>
-            <a:lstStyle/>
-            <a:p>
-              <a:pPr algn="l" marL="0" marR="0" indent="0">
-                <a:lnSpc>
-                  <a:spcPts val="880"/>
-                </a:lnSpc>
-                <a:spcBef>
-                  <a:spcPts val="0"/>
-                </a:spcBef>
-                <a:spcAft>
-                  <a:spcPts val="0"/>
-                </a:spcAft>
-              </a:pPr>
-              <a:r>
-                <a:rPr sz="880">
-                  <a:solidFill>
-                    <a:srgbClr val="4D4D4D">
-                      <a:alpha val="100000"/>
-                    </a:srgbClr>
-                  </a:solidFill>
-                  <a:latin typeface="Helvetica"/>
-                  <a:cs typeface="Helvetica"/>
-                </a:rPr>
-                <a:t>1.4</a:t>
-              </a:r>
-            </a:p>
-          </p:txBody>
-        </p:sp>
-        <p:sp>
-          <p:nvSpPr>
-            <p:cNvPr id="36" name="tx36"/>
-            <p:cNvSpPr/>
-            <p:nvPr/>
-          </p:nvSpPr>
-          <p:spPr>
-            <a:xfrm>
-              <a:off x="3879271" y="5925448"/>
-              <a:ext cx="1676186" cy="100218"/>
+              <a:off x="2928340" y="5925448"/>
+              <a:ext cx="3578047" cy="100218"/>
             </a:xfrm>
             <a:prstGeom prst="rect">
               <a:avLst/>
@@ -4997,14 +4908,14 @@
                   <a:latin typeface="Helvetica"/>
                   <a:cs typeface="Helvetica"/>
                 </a:rPr>
-                <a:t>CKD-EPI Cr-Cys / CG ratio</a:t>
+                <a:t>eGFR difference (%): 100 × (CKD-EPI Cr-Cys − CG) / CG</a:t>
               </a:r>
             </a:p>
           </p:txBody>
         </p:sp>
         <p:sp>
           <p:nvSpPr>
-            <p:cNvPr id="37" name="tx37"/>
+            <p:cNvPr id="35" name="tx35"/>
             <p:cNvSpPr/>
             <p:nvPr/>
           </p:nvSpPr>
@@ -5050,14 +4961,14 @@
         </p:sp>
         <p:sp>
           <p:nvSpPr>
-            <p:cNvPr id="38" name="tx38"/>
+            <p:cNvPr id="36" name="tx36"/>
             <p:cNvSpPr/>
             <p:nvPr/>
           </p:nvSpPr>
           <p:spPr>
             <a:xfrm>
               <a:off x="817517" y="1896563"/>
-              <a:ext cx="6899879" cy="82021"/>
+              <a:ext cx="7052127" cy="82021"/>
             </a:xfrm>
             <a:prstGeom prst="rect">
               <a:avLst/>
@@ -5089,14 +5000,14 @@
                   <a:latin typeface="Helvetica"/>
                   <a:cs typeface="Helvetica"/>
                 </a:rPr>
-                <a:t>subHR per 0.1 ratio decline: 1.57 (1.28-1.92), p_Bonf = &lt;0.001 (n = 6)  |  per IQR decline (Δ = 0.29): 3.72 (2.05-6.75)  |  IQR: [0.85, 1.15]</a:t>
+                <a:t>subHR per 10 % decline: 1.57 (1.28-1.92), p_Bonf = &lt;0.001 (n = 6)  |  per IQR decline (Δ = 29.3 %): 3.72 (2.05-6.75)  |  IQR: [-14.6, 14.7] %</a:t>
               </a:r>
             </a:p>
           </p:txBody>
         </p:sp>
         <p:sp>
           <p:nvSpPr>
-            <p:cNvPr id="39" name="tx39"/>
+            <p:cNvPr id="37" name="tx37"/>
             <p:cNvSpPr/>
             <p:nvPr/>
           </p:nvSpPr>

--- a/docs/pptx/whole/jx-linsubhr-ratio-throm3.pptx
+++ b/docs/pptx/whole/jx-linsubhr-ratio-throm3.pptx
@@ -2265,34 +2265,26 @@
         </p:sp>
         <p:sp>
           <p:nvSpPr>
-            <p:cNvPr id="4" name="pl4"/>
+            <p:cNvPr id="4" name="rc4"/>
             <p:cNvSpPr/>
             <p:nvPr/>
           </p:nvSpPr>
           <p:spPr>
             <a:xfrm>
-              <a:off x="817517" y="5142518"/>
-              <a:ext cx="7799693" cy="0"/>
+              <a:off x="457200" y="1600200"/>
+              <a:ext cx="8229600" cy="4525962"/>
             </a:xfrm>
-            <a:custGeom>
+            <a:prstGeom prst="rect">
               <a:avLst/>
-              <a:pathLst>
-                <a:path w="7799693" h="0">
-                  <a:moveTo>
-                    <a:pt x="0" y="0"/>
-                  </a:moveTo>
-                  <a:lnTo>
-                    <a:pt x="7799693" y="0"/>
-                  </a:lnTo>
-                  <a:lnTo>
-                    <a:pt x="7799693" y="0"/>
-                  </a:lnTo>
-                </a:path>
-              </a:pathLst>
-            </a:custGeom>
-            <a:ln w="6775" cap="flat">
+            </a:prstGeom>
+            <a:solidFill>
+              <a:srgbClr val="FFFFFF">
+                <a:alpha val="100000"/>
+              </a:srgbClr>
+            </a:solidFill>
+            <a:ln w="13550" cap="rnd">
               <a:solidFill>
-                <a:srgbClr val="EBEBEB">
+                <a:srgbClr val="FFFFFF">
                   <a:alpha val="100000"/>
                 </a:srgbClr>
               </a:solidFill>
@@ -2314,21 +2306,21 @@
           </p:nvSpPr>
           <p:spPr>
             <a:xfrm>
-              <a:off x="817517" y="4313054"/>
-              <a:ext cx="7799693" cy="0"/>
+              <a:off x="887106" y="3250627"/>
+              <a:ext cx="7660515" cy="0"/>
             </a:xfrm>
             <a:custGeom>
               <a:avLst/>
               <a:pathLst>
-                <a:path w="7799693" h="0">
+                <a:path w="7660515" h="0">
                   <a:moveTo>
                     <a:pt x="0" y="0"/>
                   </a:moveTo>
                   <a:lnTo>
-                    <a:pt x="7799693" y="0"/>
-                  </a:lnTo>
-                  <a:lnTo>
-                    <a:pt x="7799693" y="0"/>
+                    <a:pt x="7660515" y="0"/>
+                  </a:lnTo>
+                  <a:lnTo>
+                    <a:pt x="7660515" y="0"/>
                   </a:lnTo>
                 </a:path>
               </a:pathLst>
@@ -2357,21 +2349,21 @@
           </p:nvSpPr>
           <p:spPr>
             <a:xfrm>
-              <a:off x="817517" y="3483591"/>
-              <a:ext cx="7799693" cy="0"/>
+              <a:off x="887106" y="2951293"/>
+              <a:ext cx="7660515" cy="0"/>
             </a:xfrm>
             <a:custGeom>
               <a:avLst/>
               <a:pathLst>
-                <a:path w="7799693" h="0">
+                <a:path w="7660515" h="0">
                   <a:moveTo>
                     <a:pt x="0" y="0"/>
                   </a:moveTo>
                   <a:lnTo>
-                    <a:pt x="7799693" y="0"/>
-                  </a:lnTo>
-                  <a:lnTo>
-                    <a:pt x="7799693" y="0"/>
+                    <a:pt x="7660515" y="0"/>
+                  </a:lnTo>
+                  <a:lnTo>
+                    <a:pt x="7660515" y="0"/>
                   </a:lnTo>
                 </a:path>
               </a:pathLst>
@@ -2400,21 +2392,21 @@
           </p:nvSpPr>
           <p:spPr>
             <a:xfrm>
-              <a:off x="817517" y="2654127"/>
-              <a:ext cx="7799693" cy="0"/>
+              <a:off x="887106" y="2651959"/>
+              <a:ext cx="7660515" cy="0"/>
             </a:xfrm>
             <a:custGeom>
               <a:avLst/>
               <a:pathLst>
-                <a:path w="7799693" h="0">
+                <a:path w="7660515" h="0">
                   <a:moveTo>
                     <a:pt x="0" y="0"/>
                   </a:moveTo>
                   <a:lnTo>
-                    <a:pt x="7799693" y="0"/>
-                  </a:lnTo>
-                  <a:lnTo>
-                    <a:pt x="7799693" y="0"/>
+                    <a:pt x="7660515" y="0"/>
+                  </a:lnTo>
+                  <a:lnTo>
+                    <a:pt x="7660515" y="0"/>
                   </a:lnTo>
                 </a:path>
               </a:pathLst>
@@ -2443,21 +2435,21 @@
           </p:nvSpPr>
           <p:spPr>
             <a:xfrm>
-              <a:off x="1365633" y="2073503"/>
-              <a:ext cx="0" cy="3649639"/>
+              <a:off x="887106" y="2352625"/>
+              <a:ext cx="7660515" cy="0"/>
             </a:xfrm>
             <a:custGeom>
               <a:avLst/>
               <a:pathLst>
-                <a:path w="0" h="3649639">
+                <a:path w="7660515" h="0">
                   <a:moveTo>
-                    <a:pt x="0" y="3649639"/>
+                    <a:pt x="0" y="0"/>
                   </a:moveTo>
                   <a:lnTo>
-                    <a:pt x="0" y="0"/>
-                  </a:lnTo>
-                  <a:lnTo>
-                    <a:pt x="0" y="0"/>
+                    <a:pt x="7660515" y="0"/>
+                  </a:lnTo>
+                  <a:lnTo>
+                    <a:pt x="7660515" y="0"/>
                   </a:lnTo>
                 </a:path>
               </a:pathLst>
@@ -2486,15 +2478,15 @@
           </p:nvSpPr>
           <p:spPr>
             <a:xfrm>
-              <a:off x="3517243" y="2073503"/>
-              <a:ext cx="0" cy="3649639"/>
+              <a:off x="1425442" y="2143092"/>
+              <a:ext cx="0" cy="1317069"/>
             </a:xfrm>
             <a:custGeom>
               <a:avLst/>
               <a:pathLst>
-                <a:path w="0" h="3649639">
+                <a:path w="0" h="1317069">
                   <a:moveTo>
-                    <a:pt x="0" y="3649639"/>
+                    <a:pt x="0" y="1317069"/>
                   </a:moveTo>
                   <a:lnTo>
                     <a:pt x="0" y="0"/>
@@ -2529,15 +2521,15 @@
           </p:nvSpPr>
           <p:spPr>
             <a:xfrm>
-              <a:off x="5668852" y="2073503"/>
-              <a:ext cx="0" cy="3649639"/>
+              <a:off x="3538658" y="2143092"/>
+              <a:ext cx="0" cy="1317069"/>
             </a:xfrm>
             <a:custGeom>
               <a:avLst/>
               <a:pathLst>
-                <a:path w="0" h="3649639">
+                <a:path w="0" h="1317069">
                   <a:moveTo>
-                    <a:pt x="0" y="3649639"/>
+                    <a:pt x="0" y="1317069"/>
                   </a:moveTo>
                   <a:lnTo>
                     <a:pt x="0" y="0"/>
@@ -2572,15 +2564,15 @@
           </p:nvSpPr>
           <p:spPr>
             <a:xfrm>
-              <a:off x="7820461" y="2073503"/>
-              <a:ext cx="0" cy="3649639"/>
+              <a:off x="5651874" y="2143092"/>
+              <a:ext cx="0" cy="1317069"/>
             </a:xfrm>
             <a:custGeom>
               <a:avLst/>
               <a:pathLst>
-                <a:path w="0" h="3649639">
+                <a:path w="0" h="1317069">
                   <a:moveTo>
-                    <a:pt x="0" y="3649639"/>
+                    <a:pt x="0" y="1317069"/>
                   </a:moveTo>
                   <a:lnTo>
                     <a:pt x="0" y="0"/>
@@ -2615,26 +2607,26 @@
           </p:nvSpPr>
           <p:spPr>
             <a:xfrm>
-              <a:off x="817517" y="5557249"/>
-              <a:ext cx="7799693" cy="0"/>
+              <a:off x="7765090" y="2143092"/>
+              <a:ext cx="0" cy="1317069"/>
             </a:xfrm>
             <a:custGeom>
               <a:avLst/>
               <a:pathLst>
-                <a:path w="7799693" h="0">
+                <a:path w="0" h="1317069">
                   <a:moveTo>
+                    <a:pt x="0" y="1317069"/>
+                  </a:moveTo>
+                  <a:lnTo>
                     <a:pt x="0" y="0"/>
-                  </a:moveTo>
-                  <a:lnTo>
-                    <a:pt x="7799693" y="0"/>
-                  </a:lnTo>
-                  <a:lnTo>
-                    <a:pt x="7799693" y="0"/>
+                  </a:lnTo>
+                  <a:lnTo>
+                    <a:pt x="0" y="0"/>
                   </a:lnTo>
                 </a:path>
               </a:pathLst>
             </a:custGeom>
-            <a:ln w="13550" cap="flat">
+            <a:ln w="6775" cap="flat">
               <a:solidFill>
                 <a:srgbClr val="EBEBEB">
                   <a:alpha val="100000"/>
@@ -2658,21 +2650,21 @@
           </p:nvSpPr>
           <p:spPr>
             <a:xfrm>
-              <a:off x="817517" y="4727786"/>
-              <a:ext cx="7799693" cy="0"/>
+              <a:off x="887106" y="3400294"/>
+              <a:ext cx="7660515" cy="0"/>
             </a:xfrm>
             <a:custGeom>
               <a:avLst/>
               <a:pathLst>
-                <a:path w="7799693" h="0">
+                <a:path w="7660515" h="0">
                   <a:moveTo>
                     <a:pt x="0" y="0"/>
                   </a:moveTo>
                   <a:lnTo>
-                    <a:pt x="7799693" y="0"/>
-                  </a:lnTo>
-                  <a:lnTo>
-                    <a:pt x="7799693" y="0"/>
+                    <a:pt x="7660515" y="0"/>
+                  </a:lnTo>
+                  <a:lnTo>
+                    <a:pt x="7660515" y="0"/>
                   </a:lnTo>
                 </a:path>
               </a:pathLst>
@@ -2701,21 +2693,21 @@
           </p:nvSpPr>
           <p:spPr>
             <a:xfrm>
-              <a:off x="817517" y="3898322"/>
-              <a:ext cx="7799693" cy="0"/>
+              <a:off x="887106" y="3100960"/>
+              <a:ext cx="7660515" cy="0"/>
             </a:xfrm>
             <a:custGeom>
               <a:avLst/>
               <a:pathLst>
-                <a:path w="7799693" h="0">
+                <a:path w="7660515" h="0">
                   <a:moveTo>
                     <a:pt x="0" y="0"/>
                   </a:moveTo>
                   <a:lnTo>
-                    <a:pt x="7799693" y="0"/>
-                  </a:lnTo>
-                  <a:lnTo>
-                    <a:pt x="7799693" y="0"/>
+                    <a:pt x="7660515" y="0"/>
+                  </a:lnTo>
+                  <a:lnTo>
+                    <a:pt x="7660515" y="0"/>
                   </a:lnTo>
                 </a:path>
               </a:pathLst>
@@ -2744,21 +2736,21 @@
           </p:nvSpPr>
           <p:spPr>
             <a:xfrm>
-              <a:off x="817517" y="3068859"/>
-              <a:ext cx="7799693" cy="0"/>
+              <a:off x="887106" y="2801626"/>
+              <a:ext cx="7660515" cy="0"/>
             </a:xfrm>
             <a:custGeom>
               <a:avLst/>
               <a:pathLst>
-                <a:path w="7799693" h="0">
+                <a:path w="7660515" h="0">
                   <a:moveTo>
                     <a:pt x="0" y="0"/>
                   </a:moveTo>
                   <a:lnTo>
-                    <a:pt x="7799693" y="0"/>
-                  </a:lnTo>
-                  <a:lnTo>
-                    <a:pt x="7799693" y="0"/>
+                    <a:pt x="7660515" y="0"/>
+                  </a:lnTo>
+                  <a:lnTo>
+                    <a:pt x="7660515" y="0"/>
                   </a:lnTo>
                 </a:path>
               </a:pathLst>
@@ -2787,21 +2779,21 @@
           </p:nvSpPr>
           <p:spPr>
             <a:xfrm>
-              <a:off x="817517" y="2239395"/>
-              <a:ext cx="7799693" cy="0"/>
+              <a:off x="887106" y="2502292"/>
+              <a:ext cx="7660515" cy="0"/>
             </a:xfrm>
             <a:custGeom>
               <a:avLst/>
               <a:pathLst>
-                <a:path w="7799693" h="0">
+                <a:path w="7660515" h="0">
                   <a:moveTo>
                     <a:pt x="0" y="0"/>
                   </a:moveTo>
                   <a:lnTo>
-                    <a:pt x="7799693" y="0"/>
-                  </a:lnTo>
-                  <a:lnTo>
-                    <a:pt x="7799693" y="0"/>
+                    <a:pt x="7660515" y="0"/>
+                  </a:lnTo>
+                  <a:lnTo>
+                    <a:pt x="7660515" y="0"/>
                   </a:lnTo>
                 </a:path>
               </a:pathLst>
@@ -2830,21 +2822,21 @@
           </p:nvSpPr>
           <p:spPr>
             <a:xfrm>
-              <a:off x="2441438" y="2073503"/>
-              <a:ext cx="0" cy="3649639"/>
+              <a:off x="887106" y="2202958"/>
+              <a:ext cx="7660515" cy="0"/>
             </a:xfrm>
             <a:custGeom>
               <a:avLst/>
               <a:pathLst>
-                <a:path w="0" h="3649639">
+                <a:path w="7660515" h="0">
                   <a:moveTo>
-                    <a:pt x="0" y="3649639"/>
+                    <a:pt x="0" y="0"/>
                   </a:moveTo>
                   <a:lnTo>
-                    <a:pt x="0" y="0"/>
-                  </a:lnTo>
-                  <a:lnTo>
-                    <a:pt x="0" y="0"/>
+                    <a:pt x="7660515" y="0"/>
+                  </a:lnTo>
+                  <a:lnTo>
+                    <a:pt x="7660515" y="0"/>
                   </a:lnTo>
                 </a:path>
               </a:pathLst>
@@ -2873,15 +2865,15 @@
           </p:nvSpPr>
           <p:spPr>
             <a:xfrm>
-              <a:off x="4593047" y="2073503"/>
-              <a:ext cx="0" cy="3649639"/>
+              <a:off x="2482050" y="2143092"/>
+              <a:ext cx="0" cy="1317069"/>
             </a:xfrm>
             <a:custGeom>
               <a:avLst/>
               <a:pathLst>
-                <a:path w="0" h="3649639">
+                <a:path w="0" h="1317069">
                   <a:moveTo>
-                    <a:pt x="0" y="3649639"/>
+                    <a:pt x="0" y="1317069"/>
                   </a:moveTo>
                   <a:lnTo>
                     <a:pt x="0" y="0"/>
@@ -2916,15 +2908,15 @@
           </p:nvSpPr>
           <p:spPr>
             <a:xfrm>
-              <a:off x="6744657" y="2073503"/>
-              <a:ext cx="0" cy="3649639"/>
+              <a:off x="4595266" y="2143092"/>
+              <a:ext cx="0" cy="1317069"/>
             </a:xfrm>
             <a:custGeom>
               <a:avLst/>
               <a:pathLst>
-                <a:path w="0" h="3649639">
+                <a:path w="0" h="1317069">
                   <a:moveTo>
-                    <a:pt x="0" y="3649639"/>
+                    <a:pt x="0" y="1317069"/>
                   </a:moveTo>
                   <a:lnTo>
                     <a:pt x="0" y="0"/>
@@ -2953,555 +2945,598 @@
         </p:sp>
         <p:sp>
           <p:nvSpPr>
-            <p:cNvPr id="20" name="pg20"/>
+            <p:cNvPr id="20" name="pl20"/>
             <p:cNvSpPr/>
             <p:nvPr/>
           </p:nvSpPr>
           <p:spPr>
             <a:xfrm>
-              <a:off x="1172049" y="2073503"/>
-              <a:ext cx="7090630" cy="3432544"/>
+              <a:off x="6708482" y="2143092"/>
+              <a:ext cx="0" cy="1317069"/>
             </a:xfrm>
             <a:custGeom>
               <a:avLst/>
               <a:pathLst>
-                <a:path w="7090630" h="3432544">
+                <a:path w="0" h="1317069">
                   <a:moveTo>
-                    <a:pt x="1523025" y="0"/>
+                    <a:pt x="0" y="1317069"/>
                   </a:moveTo>
                   <a:lnTo>
-                    <a:pt x="1575695" y="137283"/>
-                  </a:lnTo>
-                  <a:lnTo>
-                    <a:pt x="1647318" y="314100"/>
-                  </a:lnTo>
-                  <a:lnTo>
-                    <a:pt x="1718940" y="481575"/>
-                  </a:lnTo>
-                  <a:lnTo>
-                    <a:pt x="1790563" y="640201"/>
-                  </a:lnTo>
-                  <a:lnTo>
-                    <a:pt x="1862185" y="790445"/>
-                  </a:lnTo>
-                  <a:lnTo>
-                    <a:pt x="1933808" y="932751"/>
-                  </a:lnTo>
-                  <a:lnTo>
-                    <a:pt x="2005430" y="1067538"/>
-                  </a:lnTo>
-                  <a:lnTo>
-                    <a:pt x="2077053" y="1195203"/>
-                  </a:lnTo>
-                  <a:lnTo>
-                    <a:pt x="2148675" y="1316123"/>
-                  </a:lnTo>
-                  <a:lnTo>
-                    <a:pt x="2220298" y="1430654"/>
-                  </a:lnTo>
-                  <a:lnTo>
-                    <a:pt x="2291920" y="1539133"/>
-                  </a:lnTo>
-                  <a:lnTo>
-                    <a:pt x="2363543" y="1641881"/>
-                  </a:lnTo>
-                  <a:lnTo>
-                    <a:pt x="2435165" y="1739200"/>
-                  </a:lnTo>
-                  <a:lnTo>
-                    <a:pt x="2506788" y="1831376"/>
-                  </a:lnTo>
-                  <a:lnTo>
-                    <a:pt x="2578410" y="1918683"/>
-                  </a:lnTo>
-                  <a:lnTo>
-                    <a:pt x="2650033" y="2001376"/>
-                  </a:lnTo>
-                  <a:lnTo>
-                    <a:pt x="2721655" y="2079700"/>
-                  </a:lnTo>
-                  <a:lnTo>
-                    <a:pt x="2793278" y="2153886"/>
-                  </a:lnTo>
-                  <a:lnTo>
-                    <a:pt x="2864901" y="2224152"/>
-                  </a:lnTo>
-                  <a:lnTo>
-                    <a:pt x="2936523" y="2290705"/>
-                  </a:lnTo>
-                  <a:lnTo>
-                    <a:pt x="3008146" y="2353742"/>
-                  </a:lnTo>
-                  <a:lnTo>
-                    <a:pt x="3079768" y="2413448"/>
-                  </a:lnTo>
-                  <a:lnTo>
-                    <a:pt x="3151391" y="2469999"/>
-                  </a:lnTo>
-                  <a:lnTo>
-                    <a:pt x="3223013" y="2523563"/>
-                  </a:lnTo>
-                  <a:lnTo>
-                    <a:pt x="3294636" y="2574296"/>
-                  </a:lnTo>
-                  <a:lnTo>
-                    <a:pt x="3366258" y="2622348"/>
-                  </a:lnTo>
-                  <a:lnTo>
-                    <a:pt x="3437881" y="2659422"/>
-                  </a:lnTo>
-                  <a:lnTo>
-                    <a:pt x="3509503" y="2676100"/>
-                  </a:lnTo>
-                  <a:lnTo>
-                    <a:pt x="3581126" y="2692440"/>
-                  </a:lnTo>
-                  <a:lnTo>
-                    <a:pt x="3652748" y="2708450"/>
-                  </a:lnTo>
-                  <a:lnTo>
-                    <a:pt x="3724371" y="2724136"/>
-                  </a:lnTo>
-                  <a:lnTo>
-                    <a:pt x="3795993" y="2739505"/>
-                  </a:lnTo>
-                  <a:lnTo>
-                    <a:pt x="3867616" y="2754562"/>
-                  </a:lnTo>
-                  <a:lnTo>
-                    <a:pt x="3939238" y="2769315"/>
-                  </a:lnTo>
-                  <a:lnTo>
-                    <a:pt x="4010861" y="2783769"/>
-                  </a:lnTo>
-                  <a:lnTo>
-                    <a:pt x="4082483" y="2797931"/>
-                  </a:lnTo>
-                  <a:lnTo>
-                    <a:pt x="4154106" y="2811807"/>
-                  </a:lnTo>
-                  <a:lnTo>
-                    <a:pt x="4225729" y="2825402"/>
-                  </a:lnTo>
-                  <a:lnTo>
-                    <a:pt x="4297351" y="2838721"/>
-                  </a:lnTo>
-                  <a:lnTo>
-                    <a:pt x="4368974" y="2851772"/>
-                  </a:lnTo>
-                  <a:lnTo>
-                    <a:pt x="4440596" y="2864558"/>
-                  </a:lnTo>
-                  <a:lnTo>
-                    <a:pt x="4512219" y="2877085"/>
-                  </a:lnTo>
-                  <a:lnTo>
-                    <a:pt x="4583841" y="2889359"/>
-                  </a:lnTo>
-                  <a:lnTo>
-                    <a:pt x="4655464" y="2901385"/>
-                  </a:lnTo>
-                  <a:lnTo>
-                    <a:pt x="4727086" y="2913167"/>
-                  </a:lnTo>
-                  <a:lnTo>
-                    <a:pt x="4798709" y="2924711"/>
-                  </a:lnTo>
-                  <a:lnTo>
-                    <a:pt x="4870331" y="2936022"/>
-                  </a:lnTo>
-                  <a:lnTo>
-                    <a:pt x="4941954" y="2947103"/>
-                  </a:lnTo>
-                  <a:lnTo>
-                    <a:pt x="5013576" y="2957961"/>
-                  </a:lnTo>
-                  <a:lnTo>
-                    <a:pt x="5085199" y="2968599"/>
-                  </a:lnTo>
-                  <a:lnTo>
-                    <a:pt x="5156821" y="2979021"/>
-                  </a:lnTo>
-                  <a:lnTo>
-                    <a:pt x="5228444" y="2989233"/>
-                  </a:lnTo>
-                  <a:lnTo>
-                    <a:pt x="5300066" y="2999238"/>
-                  </a:lnTo>
-                  <a:lnTo>
-                    <a:pt x="5371689" y="3009040"/>
-                  </a:lnTo>
-                  <a:lnTo>
-                    <a:pt x="5443311" y="3018645"/>
-                  </a:lnTo>
-                  <a:lnTo>
-                    <a:pt x="5514934" y="3028055"/>
-                  </a:lnTo>
-                  <a:lnTo>
-                    <a:pt x="5586557" y="3037274"/>
-                  </a:lnTo>
-                  <a:lnTo>
-                    <a:pt x="5658179" y="3046307"/>
-                  </a:lnTo>
-                  <a:lnTo>
-                    <a:pt x="5729802" y="3055158"/>
-                  </a:lnTo>
-                  <a:lnTo>
-                    <a:pt x="5801424" y="3063829"/>
-                  </a:lnTo>
-                  <a:lnTo>
-                    <a:pt x="5873047" y="3072325"/>
-                  </a:lnTo>
-                  <a:lnTo>
-                    <a:pt x="5944669" y="3080649"/>
-                  </a:lnTo>
-                  <a:lnTo>
-                    <a:pt x="6016292" y="3088804"/>
-                  </a:lnTo>
-                  <a:lnTo>
-                    <a:pt x="6087914" y="3096795"/>
-                  </a:lnTo>
-                  <a:lnTo>
-                    <a:pt x="6159537" y="3104623"/>
-                  </a:lnTo>
-                  <a:lnTo>
-                    <a:pt x="6231159" y="3112294"/>
-                  </a:lnTo>
-                  <a:lnTo>
-                    <a:pt x="6302782" y="3119809"/>
-                  </a:lnTo>
-                  <a:lnTo>
-                    <a:pt x="6374404" y="3127172"/>
-                  </a:lnTo>
-                  <a:lnTo>
-                    <a:pt x="6446027" y="3134387"/>
-                  </a:lnTo>
-                  <a:lnTo>
-                    <a:pt x="6517649" y="3141455"/>
-                  </a:lnTo>
-                  <a:lnTo>
-                    <a:pt x="6589272" y="3148380"/>
-                  </a:lnTo>
-                  <a:lnTo>
-                    <a:pt x="6660894" y="3155165"/>
-                  </a:lnTo>
-                  <a:lnTo>
-                    <a:pt x="6732517" y="3161813"/>
-                  </a:lnTo>
-                  <a:lnTo>
-                    <a:pt x="6804139" y="3168327"/>
-                  </a:lnTo>
-                  <a:lnTo>
-                    <a:pt x="6875762" y="3174708"/>
-                  </a:lnTo>
-                  <a:lnTo>
-                    <a:pt x="6947385" y="3180961"/>
-                  </a:lnTo>
-                  <a:lnTo>
-                    <a:pt x="7019007" y="3187087"/>
-                  </a:lnTo>
-                  <a:lnTo>
-                    <a:pt x="7090630" y="3193089"/>
-                  </a:lnTo>
-                  <a:lnTo>
-                    <a:pt x="7090630" y="3432544"/>
-                  </a:lnTo>
-                  <a:lnTo>
-                    <a:pt x="7019007" y="3429688"/>
-                  </a:lnTo>
-                  <a:lnTo>
-                    <a:pt x="6947385" y="3426672"/>
-                  </a:lnTo>
-                  <a:lnTo>
-                    <a:pt x="6875762" y="3423488"/>
-                  </a:lnTo>
-                  <a:lnTo>
-                    <a:pt x="6804139" y="3420127"/>
-                  </a:lnTo>
-                  <a:lnTo>
-                    <a:pt x="6732517" y="3416578"/>
-                  </a:lnTo>
-                  <a:lnTo>
-                    <a:pt x="6660894" y="3412831"/>
-                  </a:lnTo>
-                  <a:lnTo>
-                    <a:pt x="6589272" y="3408875"/>
-                  </a:lnTo>
-                  <a:lnTo>
-                    <a:pt x="6517649" y="3404698"/>
-                  </a:lnTo>
-                  <a:lnTo>
-                    <a:pt x="6446027" y="3400289"/>
-                  </a:lnTo>
-                  <a:lnTo>
-                    <a:pt x="6374404" y="3395633"/>
-                  </a:lnTo>
-                  <a:lnTo>
-                    <a:pt x="6302782" y="3390718"/>
-                  </a:lnTo>
-                  <a:lnTo>
-                    <a:pt x="6231159" y="3385528"/>
-                  </a:lnTo>
-                  <a:lnTo>
-                    <a:pt x="6159537" y="3380049"/>
-                  </a:lnTo>
-                  <a:lnTo>
-                    <a:pt x="6087914" y="3374264"/>
-                  </a:lnTo>
-                  <a:lnTo>
-                    <a:pt x="6016292" y="3368157"/>
-                  </a:lnTo>
-                  <a:lnTo>
-                    <a:pt x="5944669" y="3361709"/>
-                  </a:lnTo>
-                  <a:lnTo>
-                    <a:pt x="5873047" y="3354901"/>
-                  </a:lnTo>
-                  <a:lnTo>
-                    <a:pt x="5801424" y="3347714"/>
-                  </a:lnTo>
-                  <a:lnTo>
-                    <a:pt x="5729802" y="3340125"/>
-                  </a:lnTo>
-                  <a:lnTo>
-                    <a:pt x="5658179" y="3332113"/>
-                  </a:lnTo>
-                  <a:lnTo>
-                    <a:pt x="5586557" y="3323654"/>
-                  </a:lnTo>
-                  <a:lnTo>
-                    <a:pt x="5514934" y="3314724"/>
-                  </a:lnTo>
-                  <a:lnTo>
-                    <a:pt x="5443311" y="3305295"/>
-                  </a:lnTo>
-                  <a:lnTo>
-                    <a:pt x="5371689" y="3295340"/>
-                  </a:lnTo>
-                  <a:lnTo>
-                    <a:pt x="5300066" y="3284830"/>
-                  </a:lnTo>
-                  <a:lnTo>
-                    <a:pt x="5228444" y="3273733"/>
-                  </a:lnTo>
-                  <a:lnTo>
-                    <a:pt x="5156821" y="3262018"/>
-                  </a:lnTo>
-                  <a:lnTo>
-                    <a:pt x="5085199" y="3249649"/>
-                  </a:lnTo>
-                  <a:lnTo>
-                    <a:pt x="5013576" y="3236590"/>
-                  </a:lnTo>
-                  <a:lnTo>
-                    <a:pt x="4941954" y="3222802"/>
-                  </a:lnTo>
-                  <a:lnTo>
-                    <a:pt x="4870331" y="3208246"/>
-                  </a:lnTo>
-                  <a:lnTo>
-                    <a:pt x="4798709" y="3192877"/>
-                  </a:lnTo>
-                  <a:lnTo>
-                    <a:pt x="4727086" y="3176651"/>
-                  </a:lnTo>
-                  <a:lnTo>
-                    <a:pt x="4655464" y="3159520"/>
-                  </a:lnTo>
-                  <a:lnTo>
-                    <a:pt x="4583841" y="3141433"/>
-                  </a:lnTo>
-                  <a:lnTo>
-                    <a:pt x="4512219" y="3122337"/>
-                  </a:lnTo>
-                  <a:lnTo>
-                    <a:pt x="4440596" y="3102176"/>
-                  </a:lnTo>
-                  <a:lnTo>
-                    <a:pt x="4368974" y="3080891"/>
-                  </a:lnTo>
-                  <a:lnTo>
-                    <a:pt x="4297351" y="3058417"/>
-                  </a:lnTo>
-                  <a:lnTo>
-                    <a:pt x="4225729" y="3034691"/>
-                  </a:lnTo>
-                  <a:lnTo>
-                    <a:pt x="4154106" y="3009640"/>
-                  </a:lnTo>
-                  <a:lnTo>
-                    <a:pt x="4082483" y="2983192"/>
-                  </a:lnTo>
-                  <a:lnTo>
-                    <a:pt x="4010861" y="2955269"/>
-                  </a:lnTo>
-                  <a:lnTo>
-                    <a:pt x="3939238" y="2925788"/>
-                  </a:lnTo>
-                  <a:lnTo>
-                    <a:pt x="3867616" y="2894663"/>
-                  </a:lnTo>
-                  <a:lnTo>
-                    <a:pt x="3795993" y="2861801"/>
-                  </a:lnTo>
-                  <a:lnTo>
-                    <a:pt x="3724371" y="2827106"/>
-                  </a:lnTo>
-                  <a:lnTo>
-                    <a:pt x="3652748" y="2790476"/>
-                  </a:lnTo>
-                  <a:lnTo>
-                    <a:pt x="3581126" y="2751802"/>
-                  </a:lnTo>
-                  <a:lnTo>
-                    <a:pt x="3509503" y="2710971"/>
-                  </a:lnTo>
-                  <a:lnTo>
-                    <a:pt x="3437881" y="2667862"/>
-                  </a:lnTo>
-                  <a:lnTo>
-                    <a:pt x="3366258" y="2642400"/>
-                  </a:lnTo>
-                  <a:lnTo>
-                    <a:pt x="3294636" y="2625026"/>
-                  </a:lnTo>
-                  <a:lnTo>
-                    <a:pt x="3223013" y="2607294"/>
-                  </a:lnTo>
-                  <a:lnTo>
-                    <a:pt x="3151391" y="2589195"/>
-                  </a:lnTo>
-                  <a:lnTo>
-                    <a:pt x="3079768" y="2570723"/>
-                  </a:lnTo>
-                  <a:lnTo>
-                    <a:pt x="3008146" y="2551869"/>
-                  </a:lnTo>
-                  <a:lnTo>
-                    <a:pt x="2936523" y="2532626"/>
-                  </a:lnTo>
-                  <a:lnTo>
-                    <a:pt x="2864901" y="2512985"/>
-                  </a:lnTo>
-                  <a:lnTo>
-                    <a:pt x="2793278" y="2492939"/>
-                  </a:lnTo>
-                  <a:lnTo>
-                    <a:pt x="2721655" y="2472479"/>
-                  </a:lnTo>
-                  <a:lnTo>
-                    <a:pt x="2650033" y="2451597"/>
-                  </a:lnTo>
-                  <a:lnTo>
-                    <a:pt x="2578410" y="2430283"/>
-                  </a:lnTo>
-                  <a:lnTo>
-                    <a:pt x="2506788" y="2408529"/>
-                  </a:lnTo>
-                  <a:lnTo>
-                    <a:pt x="2435165" y="2386326"/>
-                  </a:lnTo>
-                  <a:lnTo>
-                    <a:pt x="2363543" y="2363664"/>
-                  </a:lnTo>
-                  <a:lnTo>
-                    <a:pt x="2291920" y="2340535"/>
-                  </a:lnTo>
-                  <a:lnTo>
-                    <a:pt x="2220298" y="2316927"/>
-                  </a:lnTo>
-                  <a:lnTo>
-                    <a:pt x="2148675" y="2292833"/>
-                  </a:lnTo>
-                  <a:lnTo>
-                    <a:pt x="2077053" y="2268241"/>
-                  </a:lnTo>
-                  <a:lnTo>
-                    <a:pt x="2005430" y="2243141"/>
-                  </a:lnTo>
-                  <a:lnTo>
-                    <a:pt x="1933808" y="2217522"/>
-                  </a:lnTo>
-                  <a:lnTo>
-                    <a:pt x="1862185" y="2191375"/>
-                  </a:lnTo>
-                  <a:lnTo>
-                    <a:pt x="1790563" y="2164687"/>
-                  </a:lnTo>
-                  <a:lnTo>
-                    <a:pt x="1718940" y="2137449"/>
-                  </a:lnTo>
-                  <a:lnTo>
-                    <a:pt x="1647318" y="2109648"/>
-                  </a:lnTo>
-                  <a:lnTo>
-                    <a:pt x="1575695" y="2081273"/>
-                  </a:lnTo>
-                  <a:lnTo>
-                    <a:pt x="1504073" y="2052312"/>
-                  </a:lnTo>
-                  <a:lnTo>
-                    <a:pt x="1432450" y="2022753"/>
-                  </a:lnTo>
-                  <a:lnTo>
-                    <a:pt x="1360827" y="1992584"/>
-                  </a:lnTo>
-                  <a:lnTo>
-                    <a:pt x="1289205" y="1961792"/>
-                  </a:lnTo>
-                  <a:lnTo>
-                    <a:pt x="1217582" y="1930364"/>
-                  </a:lnTo>
-                  <a:lnTo>
-                    <a:pt x="1145960" y="1898286"/>
-                  </a:lnTo>
-                  <a:lnTo>
-                    <a:pt x="1074337" y="1865547"/>
-                  </a:lnTo>
-                  <a:lnTo>
-                    <a:pt x="1002715" y="1832131"/>
-                  </a:lnTo>
-                  <a:lnTo>
-                    <a:pt x="931092" y="1798026"/>
-                  </a:lnTo>
-                  <a:lnTo>
-                    <a:pt x="859470" y="1763216"/>
-                  </a:lnTo>
-                  <a:lnTo>
-                    <a:pt x="787847" y="1727687"/>
-                  </a:lnTo>
-                  <a:lnTo>
-                    <a:pt x="716225" y="1691424"/>
-                  </a:lnTo>
-                  <a:lnTo>
-                    <a:pt x="644602" y="1654413"/>
-                  </a:lnTo>
-                  <a:lnTo>
-                    <a:pt x="572980" y="1616638"/>
-                  </a:lnTo>
-                  <a:lnTo>
-                    <a:pt x="501357" y="1578082"/>
-                  </a:lnTo>
-                  <a:lnTo>
-                    <a:pt x="429735" y="1538730"/>
-                  </a:lnTo>
-                  <a:lnTo>
-                    <a:pt x="358112" y="1498566"/>
-                  </a:lnTo>
-                  <a:lnTo>
-                    <a:pt x="286490" y="1457572"/>
-                  </a:lnTo>
-                  <a:lnTo>
-                    <a:pt x="214867" y="1415732"/>
-                  </a:lnTo>
-                  <a:lnTo>
-                    <a:pt x="143245" y="1373028"/>
-                  </a:lnTo>
-                  <a:lnTo>
-                    <a:pt x="71622" y="1329442"/>
-                  </a:lnTo>
-                  <a:lnTo>
-                    <a:pt x="0" y="1284956"/>
+                    <a:pt x="0" y="0"/>
+                  </a:lnTo>
+                  <a:lnTo>
+                    <a:pt x="0" y="0"/>
+                  </a:lnTo>
+                </a:path>
+              </a:pathLst>
+            </a:custGeom>
+            <a:ln w="13550" cap="flat">
+              <a:solidFill>
+                <a:srgbClr val="EBEBEB">
+                  <a:alpha val="100000"/>
+                </a:srgbClr>
+              </a:solidFill>
+              <a:prstDash val="solid"/>
+              <a:round/>
+            </a:ln>
+          </p:spPr>
+          <p:txBody>
+            <a:bodyPr/>
+            <a:lstStyle/>
+            <a:p/>
+          </p:txBody>
+        </p:sp>
+        <p:sp>
+          <p:nvSpPr>
+            <p:cNvPr id="21" name="pg21"/>
+            <p:cNvSpPr/>
+            <p:nvPr/>
+          </p:nvSpPr>
+          <p:spPr>
+            <a:xfrm>
+              <a:off x="1235312" y="2143092"/>
+              <a:ext cx="6964104" cy="1238724"/>
+            </a:xfrm>
+            <a:custGeom>
+              <a:avLst/>
+              <a:pathLst>
+                <a:path w="6964104" h="1238724">
+                  <a:moveTo>
+                    <a:pt x="1495848" y="0"/>
+                  </a:moveTo>
+                  <a:lnTo>
+                    <a:pt x="1547578" y="49542"/>
+                  </a:lnTo>
+                  <a:lnTo>
+                    <a:pt x="1617923" y="113351"/>
+                  </a:lnTo>
+                  <a:lnTo>
+                    <a:pt x="1688267" y="173789"/>
+                  </a:lnTo>
+                  <a:lnTo>
+                    <a:pt x="1758612" y="231033"/>
+                  </a:lnTo>
+                  <a:lnTo>
+                    <a:pt x="1828956" y="285253"/>
+                  </a:lnTo>
+                  <a:lnTo>
+                    <a:pt x="1899301" y="336608"/>
+                  </a:lnTo>
+                  <a:lnTo>
+                    <a:pt x="1969645" y="385249"/>
+                  </a:lnTo>
+                  <a:lnTo>
+                    <a:pt x="2039990" y="431320"/>
+                  </a:lnTo>
+                  <a:lnTo>
+                    <a:pt x="2110334" y="474958"/>
+                  </a:lnTo>
+                  <a:lnTo>
+                    <a:pt x="2180679" y="516289"/>
+                  </a:lnTo>
+                  <a:lnTo>
+                    <a:pt x="2251023" y="555437"/>
+                  </a:lnTo>
+                  <a:lnTo>
+                    <a:pt x="2321368" y="592516"/>
+                  </a:lnTo>
+                  <a:lnTo>
+                    <a:pt x="2391712" y="627636"/>
+                  </a:lnTo>
+                  <a:lnTo>
+                    <a:pt x="2462057" y="660900"/>
+                  </a:lnTo>
+                  <a:lnTo>
+                    <a:pt x="2532401" y="692407"/>
+                  </a:lnTo>
+                  <a:lnTo>
+                    <a:pt x="2602746" y="722249"/>
+                  </a:lnTo>
+                  <a:lnTo>
+                    <a:pt x="2673090" y="750515"/>
+                  </a:lnTo>
+                  <a:lnTo>
+                    <a:pt x="2743435" y="777286"/>
+                  </a:lnTo>
+                  <a:lnTo>
+                    <a:pt x="2813779" y="802644"/>
+                  </a:lnTo>
+                  <a:lnTo>
+                    <a:pt x="2884124" y="826661"/>
+                  </a:lnTo>
+                  <a:lnTo>
+                    <a:pt x="2954468" y="849410"/>
+                  </a:lnTo>
+                  <a:lnTo>
+                    <a:pt x="3024813" y="870956"/>
+                  </a:lnTo>
+                  <a:lnTo>
+                    <a:pt x="3095157" y="891364"/>
+                  </a:lnTo>
+                  <a:lnTo>
+                    <a:pt x="3165502" y="910694"/>
+                  </a:lnTo>
+                  <a:lnTo>
+                    <a:pt x="3235846" y="929002"/>
+                  </a:lnTo>
+                  <a:lnTo>
+                    <a:pt x="3306191" y="946344"/>
+                  </a:lnTo>
+                  <a:lnTo>
+                    <a:pt x="3376535" y="959723"/>
+                  </a:lnTo>
+                  <a:lnTo>
+                    <a:pt x="3446880" y="965741"/>
+                  </a:lnTo>
+                  <a:lnTo>
+                    <a:pt x="3517224" y="971638"/>
+                  </a:lnTo>
+                  <a:lnTo>
+                    <a:pt x="3587569" y="977416"/>
+                  </a:lnTo>
+                  <a:lnTo>
+                    <a:pt x="3657913" y="983076"/>
+                  </a:lnTo>
+                  <a:lnTo>
+                    <a:pt x="3728257" y="988622"/>
+                  </a:lnTo>
+                  <a:lnTo>
+                    <a:pt x="3798602" y="994056"/>
+                  </a:lnTo>
+                  <a:lnTo>
+                    <a:pt x="3868946" y="999380"/>
+                  </a:lnTo>
+                  <a:lnTo>
+                    <a:pt x="3939291" y="1004597"/>
+                  </a:lnTo>
+                  <a:lnTo>
+                    <a:pt x="4009635" y="1009707"/>
+                  </a:lnTo>
+                  <a:lnTo>
+                    <a:pt x="4079980" y="1014715"/>
+                  </a:lnTo>
+                  <a:lnTo>
+                    <a:pt x="4150324" y="1019621"/>
+                  </a:lnTo>
+                  <a:lnTo>
+                    <a:pt x="4220669" y="1024427"/>
+                  </a:lnTo>
+                  <a:lnTo>
+                    <a:pt x="4291013" y="1029137"/>
+                  </a:lnTo>
+                  <a:lnTo>
+                    <a:pt x="4361358" y="1033751"/>
+                  </a:lnTo>
+                  <a:lnTo>
+                    <a:pt x="4431702" y="1038272"/>
+                  </a:lnTo>
+                  <a:lnTo>
+                    <a:pt x="4502047" y="1042701"/>
+                  </a:lnTo>
+                  <a:lnTo>
+                    <a:pt x="4572391" y="1047041"/>
+                  </a:lnTo>
+                  <a:lnTo>
+                    <a:pt x="4642736" y="1051293"/>
+                  </a:lnTo>
+                  <a:lnTo>
+                    <a:pt x="4713080" y="1055459"/>
+                  </a:lnTo>
+                  <a:lnTo>
+                    <a:pt x="4783425" y="1059541"/>
+                  </a:lnTo>
+                  <a:lnTo>
+                    <a:pt x="4853769" y="1063540"/>
+                  </a:lnTo>
+                  <a:lnTo>
+                    <a:pt x="4924114" y="1067458"/>
+                  </a:lnTo>
+                  <a:lnTo>
+                    <a:pt x="4994458" y="1071297"/>
+                  </a:lnTo>
+                  <a:lnTo>
+                    <a:pt x="5064803" y="1075058"/>
+                  </a:lnTo>
+                  <a:lnTo>
+                    <a:pt x="5135147" y="1078743"/>
+                  </a:lnTo>
+                  <a:lnTo>
+                    <a:pt x="5205492" y="1082354"/>
+                  </a:lnTo>
+                  <a:lnTo>
+                    <a:pt x="5275836" y="1085892"/>
+                  </a:lnTo>
+                  <a:lnTo>
+                    <a:pt x="5346181" y="1089358"/>
+                  </a:lnTo>
+                  <a:lnTo>
+                    <a:pt x="5416525" y="1092753"/>
+                  </a:lnTo>
+                  <a:lnTo>
+                    <a:pt x="5486870" y="1096081"/>
+                  </a:lnTo>
+                  <a:lnTo>
+                    <a:pt x="5557214" y="1099340"/>
+                  </a:lnTo>
+                  <a:lnTo>
+                    <a:pt x="5627559" y="1102534"/>
+                  </a:lnTo>
+                  <a:lnTo>
+                    <a:pt x="5697903" y="1105663"/>
+                  </a:lnTo>
+                  <a:lnTo>
+                    <a:pt x="5768248" y="1108729"/>
+                  </a:lnTo>
+                  <a:lnTo>
+                    <a:pt x="5838592" y="1111733"/>
+                  </a:lnTo>
+                  <a:lnTo>
+                    <a:pt x="5908937" y="1114676"/>
+                  </a:lnTo>
+                  <a:lnTo>
+                    <a:pt x="5979281" y="1117560"/>
+                  </a:lnTo>
+                  <a:lnTo>
+                    <a:pt x="6049626" y="1120385"/>
+                  </a:lnTo>
+                  <a:lnTo>
+                    <a:pt x="6119970" y="1123153"/>
+                  </a:lnTo>
+                  <a:lnTo>
+                    <a:pt x="6190315" y="1125865"/>
+                  </a:lnTo>
+                  <a:lnTo>
+                    <a:pt x="6260659" y="1128523"/>
+                  </a:lnTo>
+                  <a:lnTo>
+                    <a:pt x="6331004" y="1131126"/>
+                  </a:lnTo>
+                  <a:lnTo>
+                    <a:pt x="6401348" y="1133677"/>
+                  </a:lnTo>
+                  <a:lnTo>
+                    <a:pt x="6471693" y="1136176"/>
+                  </a:lnTo>
+                  <a:lnTo>
+                    <a:pt x="6542037" y="1138625"/>
+                  </a:lnTo>
+                  <a:lnTo>
+                    <a:pt x="6612382" y="1141024"/>
+                  </a:lnTo>
+                  <a:lnTo>
+                    <a:pt x="6682726" y="1143374"/>
+                  </a:lnTo>
+                  <a:lnTo>
+                    <a:pt x="6753071" y="1145677"/>
+                  </a:lnTo>
+                  <a:lnTo>
+                    <a:pt x="6823415" y="1147934"/>
+                  </a:lnTo>
+                  <a:lnTo>
+                    <a:pt x="6893760" y="1150144"/>
+                  </a:lnTo>
+                  <a:lnTo>
+                    <a:pt x="6964104" y="1152310"/>
+                  </a:lnTo>
+                  <a:lnTo>
+                    <a:pt x="6964104" y="1238724"/>
+                  </a:lnTo>
+                  <a:lnTo>
+                    <a:pt x="6893760" y="1237693"/>
+                  </a:lnTo>
+                  <a:lnTo>
+                    <a:pt x="6823415" y="1236605"/>
+                  </a:lnTo>
+                  <a:lnTo>
+                    <a:pt x="6753071" y="1235456"/>
+                  </a:lnTo>
+                  <a:lnTo>
+                    <a:pt x="6682726" y="1234243"/>
+                  </a:lnTo>
+                  <a:lnTo>
+                    <a:pt x="6612382" y="1232962"/>
+                  </a:lnTo>
+                  <a:lnTo>
+                    <a:pt x="6542037" y="1231610"/>
+                  </a:lnTo>
+                  <a:lnTo>
+                    <a:pt x="6471693" y="1230182"/>
+                  </a:lnTo>
+                  <a:lnTo>
+                    <a:pt x="6401348" y="1228675"/>
+                  </a:lnTo>
+                  <a:lnTo>
+                    <a:pt x="6331004" y="1227084"/>
+                  </a:lnTo>
+                  <a:lnTo>
+                    <a:pt x="6260659" y="1225404"/>
+                  </a:lnTo>
+                  <a:lnTo>
+                    <a:pt x="6190315" y="1223630"/>
+                  </a:lnTo>
+                  <a:lnTo>
+                    <a:pt x="6119970" y="1221757"/>
+                  </a:lnTo>
+                  <a:lnTo>
+                    <a:pt x="6049626" y="1219780"/>
+                  </a:lnTo>
+                  <a:lnTo>
+                    <a:pt x="5979281" y="1217692"/>
+                  </a:lnTo>
+                  <a:lnTo>
+                    <a:pt x="5908937" y="1215488"/>
+                  </a:lnTo>
+                  <a:lnTo>
+                    <a:pt x="5838592" y="1213161"/>
+                  </a:lnTo>
+                  <a:lnTo>
+                    <a:pt x="5768248" y="1210705"/>
+                  </a:lnTo>
+                  <a:lnTo>
+                    <a:pt x="5697903" y="1208111"/>
+                  </a:lnTo>
+                  <a:lnTo>
+                    <a:pt x="5627559" y="1205372"/>
+                  </a:lnTo>
+                  <a:lnTo>
+                    <a:pt x="5557214" y="1202481"/>
+                  </a:lnTo>
+                  <a:lnTo>
+                    <a:pt x="5486870" y="1199428"/>
+                  </a:lnTo>
+                  <a:lnTo>
+                    <a:pt x="5416525" y="1196205"/>
+                  </a:lnTo>
+                  <a:lnTo>
+                    <a:pt x="5346181" y="1192803"/>
+                  </a:lnTo>
+                  <a:lnTo>
+                    <a:pt x="5275836" y="1189210"/>
+                  </a:lnTo>
+                  <a:lnTo>
+                    <a:pt x="5205492" y="1185417"/>
+                  </a:lnTo>
+                  <a:lnTo>
+                    <a:pt x="5135147" y="1181413"/>
+                  </a:lnTo>
+                  <a:lnTo>
+                    <a:pt x="5064803" y="1177185"/>
+                  </a:lnTo>
+                  <a:lnTo>
+                    <a:pt x="4994458" y="1172722"/>
+                  </a:lnTo>
+                  <a:lnTo>
+                    <a:pt x="4924114" y="1168009"/>
+                  </a:lnTo>
+                  <a:lnTo>
+                    <a:pt x="4853769" y="1163033"/>
+                  </a:lnTo>
+                  <a:lnTo>
+                    <a:pt x="4783425" y="1157780"/>
+                  </a:lnTo>
+                  <a:lnTo>
+                    <a:pt x="4713080" y="1152234"/>
+                  </a:lnTo>
+                  <a:lnTo>
+                    <a:pt x="4642736" y="1146378"/>
+                  </a:lnTo>
+                  <a:lnTo>
+                    <a:pt x="4572391" y="1140196"/>
+                  </a:lnTo>
+                  <a:lnTo>
+                    <a:pt x="4502047" y="1133669"/>
+                  </a:lnTo>
+                  <a:lnTo>
+                    <a:pt x="4431702" y="1126778"/>
+                  </a:lnTo>
+                  <a:lnTo>
+                    <a:pt x="4361358" y="1119502"/>
+                  </a:lnTo>
+                  <a:lnTo>
+                    <a:pt x="4291013" y="1111821"/>
+                  </a:lnTo>
+                  <a:lnTo>
+                    <a:pt x="4220669" y="1103711"/>
+                  </a:lnTo>
+                  <a:lnTo>
+                    <a:pt x="4150324" y="1095148"/>
+                  </a:lnTo>
+                  <a:lnTo>
+                    <a:pt x="4079980" y="1086108"/>
+                  </a:lnTo>
+                  <a:lnTo>
+                    <a:pt x="4009635" y="1076564"/>
+                  </a:lnTo>
+                  <a:lnTo>
+                    <a:pt x="3939291" y="1066487"/>
+                  </a:lnTo>
+                  <a:lnTo>
+                    <a:pt x="3868946" y="1055848"/>
+                  </a:lnTo>
+                  <a:lnTo>
+                    <a:pt x="3798602" y="1044615"/>
+                  </a:lnTo>
+                  <a:lnTo>
+                    <a:pt x="3728257" y="1032756"/>
+                  </a:lnTo>
+                  <a:lnTo>
+                    <a:pt x="3657913" y="1020236"/>
+                  </a:lnTo>
+                  <a:lnTo>
+                    <a:pt x="3587569" y="1007017"/>
+                  </a:lnTo>
+                  <a:lnTo>
+                    <a:pt x="3517224" y="993060"/>
+                  </a:lnTo>
+                  <a:lnTo>
+                    <a:pt x="3446880" y="978325"/>
+                  </a:lnTo>
+                  <a:lnTo>
+                    <a:pt x="3376535" y="962768"/>
+                  </a:lnTo>
+                  <a:lnTo>
+                    <a:pt x="3306191" y="953580"/>
+                  </a:lnTo>
+                  <a:lnTo>
+                    <a:pt x="3235846" y="947310"/>
+                  </a:lnTo>
+                  <a:lnTo>
+                    <a:pt x="3165502" y="940911"/>
+                  </a:lnTo>
+                  <a:lnTo>
+                    <a:pt x="3095157" y="934379"/>
+                  </a:lnTo>
+                  <a:lnTo>
+                    <a:pt x="3024813" y="927713"/>
+                  </a:lnTo>
+                  <a:lnTo>
+                    <a:pt x="2954468" y="920909"/>
+                  </a:lnTo>
+                  <a:lnTo>
+                    <a:pt x="2884124" y="913965"/>
+                  </a:lnTo>
+                  <a:lnTo>
+                    <a:pt x="2813779" y="906877"/>
+                  </a:lnTo>
+                  <a:lnTo>
+                    <a:pt x="2743435" y="899643"/>
+                  </a:lnTo>
+                  <a:lnTo>
+                    <a:pt x="2673090" y="892259"/>
+                  </a:lnTo>
+                  <a:lnTo>
+                    <a:pt x="2602746" y="884723"/>
+                  </a:lnTo>
+                  <a:lnTo>
+                    <a:pt x="2532401" y="877032"/>
+                  </a:lnTo>
+                  <a:lnTo>
+                    <a:pt x="2462057" y="869181"/>
+                  </a:lnTo>
+                  <a:lnTo>
+                    <a:pt x="2391712" y="861169"/>
+                  </a:lnTo>
+                  <a:lnTo>
+                    <a:pt x="2321368" y="852990"/>
+                  </a:lnTo>
+                  <a:lnTo>
+                    <a:pt x="2251023" y="844644"/>
+                  </a:lnTo>
+                  <a:lnTo>
+                    <a:pt x="2180679" y="836124"/>
+                  </a:lnTo>
+                  <a:lnTo>
+                    <a:pt x="2110334" y="827429"/>
+                  </a:lnTo>
+                  <a:lnTo>
+                    <a:pt x="2039990" y="818554"/>
+                  </a:lnTo>
+                  <a:lnTo>
+                    <a:pt x="1969645" y="809496"/>
+                  </a:lnTo>
+                  <a:lnTo>
+                    <a:pt x="1899301" y="800251"/>
+                  </a:lnTo>
+                  <a:lnTo>
+                    <a:pt x="1828956" y="790815"/>
+                  </a:lnTo>
+                  <a:lnTo>
+                    <a:pt x="1758612" y="781184"/>
+                  </a:lnTo>
+                  <a:lnTo>
+                    <a:pt x="1688267" y="771355"/>
+                  </a:lnTo>
+                  <a:lnTo>
+                    <a:pt x="1617923" y="761322"/>
+                  </a:lnTo>
+                  <a:lnTo>
+                    <a:pt x="1547578" y="751082"/>
+                  </a:lnTo>
+                  <a:lnTo>
+                    <a:pt x="1477234" y="740631"/>
+                  </a:lnTo>
+                  <a:lnTo>
+                    <a:pt x="1406889" y="729964"/>
+                  </a:lnTo>
+                  <a:lnTo>
+                    <a:pt x="1336545" y="719076"/>
+                  </a:lnTo>
+                  <a:lnTo>
+                    <a:pt x="1266200" y="707964"/>
+                  </a:lnTo>
+                  <a:lnTo>
+                    <a:pt x="1195856" y="696622"/>
+                  </a:lnTo>
+                  <a:lnTo>
+                    <a:pt x="1125511" y="685047"/>
+                  </a:lnTo>
+                  <a:lnTo>
+                    <a:pt x="1055167" y="673232"/>
+                  </a:lnTo>
+                  <a:lnTo>
+                    <a:pt x="984822" y="661173"/>
+                  </a:lnTo>
+                  <a:lnTo>
+                    <a:pt x="914478" y="648865"/>
+                  </a:lnTo>
+                  <a:lnTo>
+                    <a:pt x="844133" y="636303"/>
+                  </a:lnTo>
+                  <a:lnTo>
+                    <a:pt x="773789" y="623481"/>
+                  </a:lnTo>
+                  <a:lnTo>
+                    <a:pt x="703444" y="610395"/>
+                  </a:lnTo>
+                  <a:lnTo>
+                    <a:pt x="633100" y="597038"/>
+                  </a:lnTo>
+                  <a:lnTo>
+                    <a:pt x="562755" y="583406"/>
+                  </a:lnTo>
+                  <a:lnTo>
+                    <a:pt x="492411" y="569492"/>
+                  </a:lnTo>
+                  <a:lnTo>
+                    <a:pt x="422066" y="555291"/>
+                  </a:lnTo>
+                  <a:lnTo>
+                    <a:pt x="351722" y="540797"/>
+                  </a:lnTo>
+                  <a:lnTo>
+                    <a:pt x="281377" y="526003"/>
+                  </a:lnTo>
+                  <a:lnTo>
+                    <a:pt x="211033" y="510904"/>
+                  </a:lnTo>
+                  <a:lnTo>
+                    <a:pt x="140688" y="495493"/>
+                  </a:lnTo>
+                  <a:lnTo>
+                    <a:pt x="70344" y="479764"/>
+                  </a:lnTo>
+                  <a:lnTo>
+                    <a:pt x="0" y="463710"/>
                   </a:lnTo>
                   <a:close/>
                 </a:path>
@@ -3521,580 +3556,255 @@
         </p:sp>
         <p:sp>
           <p:nvSpPr>
-            <p:cNvPr id="21" name="pl21"/>
-            <p:cNvSpPr/>
-            <p:nvPr/>
-          </p:nvSpPr>
-          <p:spPr>
-            <a:xfrm>
-              <a:off x="2695074" y="2073503"/>
-              <a:ext cx="5567604" cy="3193089"/>
-            </a:xfrm>
-            <a:custGeom>
-              <a:avLst/>
-              <a:pathLst>
-                <a:path w="5567604" h="3193089">
-                  <a:moveTo>
-                    <a:pt x="0" y="0"/>
-                  </a:moveTo>
-                  <a:lnTo>
-                    <a:pt x="52670" y="137283"/>
-                  </a:lnTo>
-                  <a:lnTo>
-                    <a:pt x="124292" y="314100"/>
-                  </a:lnTo>
-                  <a:lnTo>
-                    <a:pt x="195915" y="481575"/>
-                  </a:lnTo>
-                  <a:lnTo>
-                    <a:pt x="267538" y="640201"/>
-                  </a:lnTo>
-                  <a:lnTo>
-                    <a:pt x="339160" y="790445"/>
-                  </a:lnTo>
-                  <a:lnTo>
-                    <a:pt x="410783" y="932751"/>
-                  </a:lnTo>
-                  <a:lnTo>
-                    <a:pt x="482405" y="1067538"/>
-                  </a:lnTo>
-                  <a:lnTo>
-                    <a:pt x="554028" y="1195203"/>
-                  </a:lnTo>
-                  <a:lnTo>
-                    <a:pt x="625650" y="1316123"/>
-                  </a:lnTo>
-                  <a:lnTo>
-                    <a:pt x="697273" y="1430654"/>
-                  </a:lnTo>
-                  <a:lnTo>
-                    <a:pt x="768895" y="1539133"/>
-                  </a:lnTo>
-                  <a:lnTo>
-                    <a:pt x="840518" y="1641881"/>
-                  </a:lnTo>
-                  <a:lnTo>
-                    <a:pt x="912140" y="1739200"/>
-                  </a:lnTo>
-                  <a:lnTo>
-                    <a:pt x="983763" y="1831376"/>
-                  </a:lnTo>
-                  <a:lnTo>
-                    <a:pt x="1055385" y="1918683"/>
-                  </a:lnTo>
-                  <a:lnTo>
-                    <a:pt x="1127008" y="2001376"/>
-                  </a:lnTo>
-                  <a:lnTo>
-                    <a:pt x="1198630" y="2079700"/>
-                  </a:lnTo>
-                  <a:lnTo>
-                    <a:pt x="1270253" y="2153886"/>
-                  </a:lnTo>
-                  <a:lnTo>
-                    <a:pt x="1341875" y="2224152"/>
-                  </a:lnTo>
-                  <a:lnTo>
-                    <a:pt x="1413498" y="2290705"/>
-                  </a:lnTo>
-                  <a:lnTo>
-                    <a:pt x="1485120" y="2353742"/>
-                  </a:lnTo>
-                  <a:lnTo>
-                    <a:pt x="1556743" y="2413448"/>
-                  </a:lnTo>
-                  <a:lnTo>
-                    <a:pt x="1628366" y="2469999"/>
-                  </a:lnTo>
-                  <a:lnTo>
-                    <a:pt x="1699988" y="2523563"/>
-                  </a:lnTo>
-                  <a:lnTo>
-                    <a:pt x="1771611" y="2574296"/>
-                  </a:lnTo>
-                  <a:lnTo>
-                    <a:pt x="1843233" y="2622348"/>
-                  </a:lnTo>
-                  <a:lnTo>
-                    <a:pt x="1914856" y="2659422"/>
-                  </a:lnTo>
-                  <a:lnTo>
-                    <a:pt x="1986478" y="2676100"/>
-                  </a:lnTo>
-                  <a:lnTo>
-                    <a:pt x="2058101" y="2692440"/>
-                  </a:lnTo>
-                  <a:lnTo>
-                    <a:pt x="2129723" y="2708450"/>
-                  </a:lnTo>
-                  <a:lnTo>
-                    <a:pt x="2201346" y="2724136"/>
-                  </a:lnTo>
-                  <a:lnTo>
-                    <a:pt x="2272968" y="2739505"/>
-                  </a:lnTo>
-                  <a:lnTo>
-                    <a:pt x="2344591" y="2754562"/>
-                  </a:lnTo>
-                  <a:lnTo>
-                    <a:pt x="2416213" y="2769315"/>
-                  </a:lnTo>
-                  <a:lnTo>
-                    <a:pt x="2487836" y="2783769"/>
-                  </a:lnTo>
-                  <a:lnTo>
-                    <a:pt x="2559458" y="2797931"/>
-                  </a:lnTo>
-                  <a:lnTo>
-                    <a:pt x="2631081" y="2811807"/>
-                  </a:lnTo>
-                  <a:lnTo>
-                    <a:pt x="2702703" y="2825402"/>
-                  </a:lnTo>
-                  <a:lnTo>
-                    <a:pt x="2774326" y="2838721"/>
-                  </a:lnTo>
-                  <a:lnTo>
-                    <a:pt x="2845948" y="2851772"/>
-                  </a:lnTo>
-                  <a:lnTo>
-                    <a:pt x="2917571" y="2864558"/>
-                  </a:lnTo>
-                  <a:lnTo>
-                    <a:pt x="2989194" y="2877085"/>
-                  </a:lnTo>
-                  <a:lnTo>
-                    <a:pt x="3060816" y="2889359"/>
-                  </a:lnTo>
-                  <a:lnTo>
-                    <a:pt x="3132439" y="2901385"/>
-                  </a:lnTo>
-                  <a:lnTo>
-                    <a:pt x="3204061" y="2913167"/>
-                  </a:lnTo>
-                  <a:lnTo>
-                    <a:pt x="3275684" y="2924711"/>
-                  </a:lnTo>
-                  <a:lnTo>
-                    <a:pt x="3347306" y="2936022"/>
-                  </a:lnTo>
-                  <a:lnTo>
-                    <a:pt x="3418929" y="2947103"/>
-                  </a:lnTo>
-                  <a:lnTo>
-                    <a:pt x="3490551" y="2957961"/>
-                  </a:lnTo>
-                  <a:lnTo>
-                    <a:pt x="3562174" y="2968599"/>
-                  </a:lnTo>
-                  <a:lnTo>
-                    <a:pt x="3633796" y="2979021"/>
-                  </a:lnTo>
-                  <a:lnTo>
-                    <a:pt x="3705419" y="2989233"/>
-                  </a:lnTo>
-                  <a:lnTo>
-                    <a:pt x="3777041" y="2999238"/>
-                  </a:lnTo>
-                  <a:lnTo>
-                    <a:pt x="3848664" y="3009040"/>
-                  </a:lnTo>
-                  <a:lnTo>
-                    <a:pt x="3920286" y="3018645"/>
-                  </a:lnTo>
-                  <a:lnTo>
-                    <a:pt x="3991909" y="3028055"/>
-                  </a:lnTo>
-                  <a:lnTo>
-                    <a:pt x="4063531" y="3037274"/>
-                  </a:lnTo>
-                  <a:lnTo>
-                    <a:pt x="4135154" y="3046307"/>
-                  </a:lnTo>
-                  <a:lnTo>
-                    <a:pt x="4206776" y="3055158"/>
-                  </a:lnTo>
-                  <a:lnTo>
-                    <a:pt x="4278399" y="3063829"/>
-                  </a:lnTo>
-                  <a:lnTo>
-                    <a:pt x="4350022" y="3072325"/>
-                  </a:lnTo>
-                  <a:lnTo>
-                    <a:pt x="4421644" y="3080649"/>
-                  </a:lnTo>
-                  <a:lnTo>
-                    <a:pt x="4493267" y="3088804"/>
-                  </a:lnTo>
-                  <a:lnTo>
-                    <a:pt x="4564889" y="3096795"/>
-                  </a:lnTo>
-                  <a:lnTo>
-                    <a:pt x="4636512" y="3104623"/>
-                  </a:lnTo>
-                  <a:lnTo>
-                    <a:pt x="4708134" y="3112294"/>
-                  </a:lnTo>
-                  <a:lnTo>
-                    <a:pt x="4779757" y="3119809"/>
-                  </a:lnTo>
-                  <a:lnTo>
-                    <a:pt x="4851379" y="3127172"/>
-                  </a:lnTo>
-                  <a:lnTo>
-                    <a:pt x="4923002" y="3134387"/>
-                  </a:lnTo>
-                  <a:lnTo>
-                    <a:pt x="4994624" y="3141455"/>
-                  </a:lnTo>
-                  <a:lnTo>
-                    <a:pt x="5066247" y="3148380"/>
-                  </a:lnTo>
-                  <a:lnTo>
-                    <a:pt x="5137869" y="3155165"/>
-                  </a:lnTo>
-                  <a:lnTo>
-                    <a:pt x="5209492" y="3161813"/>
-                  </a:lnTo>
-                  <a:lnTo>
-                    <a:pt x="5281114" y="3168327"/>
-                  </a:lnTo>
-                  <a:lnTo>
-                    <a:pt x="5352737" y="3174708"/>
-                  </a:lnTo>
-                  <a:lnTo>
-                    <a:pt x="5424359" y="3180961"/>
-                  </a:lnTo>
-                  <a:lnTo>
-                    <a:pt x="5495982" y="3187087"/>
-                  </a:lnTo>
-                  <a:lnTo>
-                    <a:pt x="5567604" y="3193089"/>
-                  </a:lnTo>
-                </a:path>
-              </a:pathLst>
-            </a:custGeom>
-          </p:spPr>
-          <p:txBody>
-            <a:bodyPr/>
-            <a:lstStyle/>
-            <a:p/>
-          </p:txBody>
-        </p:sp>
-        <p:sp>
-          <p:nvSpPr>
             <p:cNvPr id="22" name="pl22"/>
             <p:cNvSpPr/>
             <p:nvPr/>
           </p:nvSpPr>
           <p:spPr>
             <a:xfrm>
-              <a:off x="1172049" y="3358459"/>
-              <a:ext cx="7090630" cy="2147588"/>
+              <a:off x="2731160" y="2143092"/>
+              <a:ext cx="5468256" cy="1152310"/>
             </a:xfrm>
             <a:custGeom>
               <a:avLst/>
               <a:pathLst>
-                <a:path w="7090630" h="2147588">
+                <a:path w="5468256" h="1152310">
                   <a:moveTo>
-                    <a:pt x="7090630" y="2147588"/>
+                    <a:pt x="0" y="0"/>
                   </a:moveTo>
                   <a:lnTo>
-                    <a:pt x="7019007" y="2144732"/>
-                  </a:lnTo>
-                  <a:lnTo>
-                    <a:pt x="6947385" y="2141716"/>
-                  </a:lnTo>
-                  <a:lnTo>
-                    <a:pt x="6875762" y="2138532"/>
-                  </a:lnTo>
-                  <a:lnTo>
-                    <a:pt x="6804139" y="2135171"/>
-                  </a:lnTo>
-                  <a:lnTo>
-                    <a:pt x="6732517" y="2131622"/>
-                  </a:lnTo>
-                  <a:lnTo>
-                    <a:pt x="6660894" y="2127875"/>
-                  </a:lnTo>
-                  <a:lnTo>
-                    <a:pt x="6589272" y="2123919"/>
-                  </a:lnTo>
-                  <a:lnTo>
-                    <a:pt x="6517649" y="2119742"/>
-                  </a:lnTo>
-                  <a:lnTo>
-                    <a:pt x="6446027" y="2115333"/>
-                  </a:lnTo>
-                  <a:lnTo>
-                    <a:pt x="6374404" y="2110677"/>
-                  </a:lnTo>
-                  <a:lnTo>
-                    <a:pt x="6302782" y="2105762"/>
-                  </a:lnTo>
-                  <a:lnTo>
-                    <a:pt x="6231159" y="2100572"/>
-                  </a:lnTo>
-                  <a:lnTo>
-                    <a:pt x="6159537" y="2095093"/>
-                  </a:lnTo>
-                  <a:lnTo>
-                    <a:pt x="6087914" y="2089308"/>
-                  </a:lnTo>
-                  <a:lnTo>
-                    <a:pt x="6016292" y="2083201"/>
-                  </a:lnTo>
-                  <a:lnTo>
-                    <a:pt x="5944669" y="2076753"/>
-                  </a:lnTo>
-                  <a:lnTo>
-                    <a:pt x="5873047" y="2069945"/>
-                  </a:lnTo>
-                  <a:lnTo>
-                    <a:pt x="5801424" y="2062757"/>
-                  </a:lnTo>
-                  <a:lnTo>
-                    <a:pt x="5729802" y="2055169"/>
-                  </a:lnTo>
-                  <a:lnTo>
-                    <a:pt x="5658179" y="2047157"/>
-                  </a:lnTo>
-                  <a:lnTo>
-                    <a:pt x="5586557" y="2038698"/>
-                  </a:lnTo>
-                  <a:lnTo>
-                    <a:pt x="5514934" y="2029768"/>
-                  </a:lnTo>
-                  <a:lnTo>
-                    <a:pt x="5443311" y="2020339"/>
-                  </a:lnTo>
-                  <a:lnTo>
-                    <a:pt x="5371689" y="2010384"/>
-                  </a:lnTo>
-                  <a:lnTo>
-                    <a:pt x="5300066" y="1999874"/>
-                  </a:lnTo>
-                  <a:lnTo>
-                    <a:pt x="5228444" y="1988777"/>
-                  </a:lnTo>
-                  <a:lnTo>
-                    <a:pt x="5156821" y="1977062"/>
-                  </a:lnTo>
-                  <a:lnTo>
-                    <a:pt x="5085199" y="1964693"/>
-                  </a:lnTo>
-                  <a:lnTo>
-                    <a:pt x="5013576" y="1951634"/>
-                  </a:lnTo>
-                  <a:lnTo>
-                    <a:pt x="4941954" y="1937846"/>
-                  </a:lnTo>
-                  <a:lnTo>
-                    <a:pt x="4870331" y="1923290"/>
-                  </a:lnTo>
-                  <a:lnTo>
-                    <a:pt x="4798709" y="1907921"/>
-                  </a:lnTo>
-                  <a:lnTo>
-                    <a:pt x="4727086" y="1891695"/>
-                  </a:lnTo>
-                  <a:lnTo>
-                    <a:pt x="4655464" y="1874564"/>
-                  </a:lnTo>
-                  <a:lnTo>
-                    <a:pt x="4583841" y="1856477"/>
-                  </a:lnTo>
-                  <a:lnTo>
-                    <a:pt x="4512219" y="1837381"/>
-                  </a:lnTo>
-                  <a:lnTo>
-                    <a:pt x="4440596" y="1817220"/>
-                  </a:lnTo>
-                  <a:lnTo>
-                    <a:pt x="4368974" y="1795934"/>
-                  </a:lnTo>
-                  <a:lnTo>
-                    <a:pt x="4297351" y="1773461"/>
-                  </a:lnTo>
-                  <a:lnTo>
-                    <a:pt x="4225729" y="1749735"/>
-                  </a:lnTo>
-                  <a:lnTo>
-                    <a:pt x="4154106" y="1724684"/>
-                  </a:lnTo>
-                  <a:lnTo>
-                    <a:pt x="4082483" y="1698236"/>
-                  </a:lnTo>
-                  <a:lnTo>
-                    <a:pt x="4010861" y="1670313"/>
-                  </a:lnTo>
-                  <a:lnTo>
-                    <a:pt x="3939238" y="1640832"/>
-                  </a:lnTo>
-                  <a:lnTo>
-                    <a:pt x="3867616" y="1609707"/>
-                  </a:lnTo>
-                  <a:lnTo>
-                    <a:pt x="3795993" y="1576845"/>
-                  </a:lnTo>
-                  <a:lnTo>
-                    <a:pt x="3724371" y="1542150"/>
-                  </a:lnTo>
-                  <a:lnTo>
-                    <a:pt x="3652748" y="1505520"/>
-                  </a:lnTo>
-                  <a:lnTo>
-                    <a:pt x="3581126" y="1466846"/>
-                  </a:lnTo>
-                  <a:lnTo>
-                    <a:pt x="3509503" y="1426015"/>
-                  </a:lnTo>
-                  <a:lnTo>
-                    <a:pt x="3437881" y="1382906"/>
-                  </a:lnTo>
-                  <a:lnTo>
-                    <a:pt x="3366258" y="1357444"/>
-                  </a:lnTo>
-                  <a:lnTo>
-                    <a:pt x="3294636" y="1340070"/>
-                  </a:lnTo>
-                  <a:lnTo>
-                    <a:pt x="3223013" y="1322338"/>
-                  </a:lnTo>
-                  <a:lnTo>
-                    <a:pt x="3151391" y="1304239"/>
-                  </a:lnTo>
-                  <a:lnTo>
-                    <a:pt x="3079768" y="1285767"/>
-                  </a:lnTo>
-                  <a:lnTo>
-                    <a:pt x="3008146" y="1266913"/>
-                  </a:lnTo>
-                  <a:lnTo>
-                    <a:pt x="2936523" y="1247670"/>
-                  </a:lnTo>
-                  <a:lnTo>
-                    <a:pt x="2864901" y="1228029"/>
-                  </a:lnTo>
-                  <a:lnTo>
-                    <a:pt x="2793278" y="1207983"/>
-                  </a:lnTo>
-                  <a:lnTo>
-                    <a:pt x="2721655" y="1187523"/>
-                  </a:lnTo>
-                  <a:lnTo>
-                    <a:pt x="2650033" y="1166641"/>
-                  </a:lnTo>
-                  <a:lnTo>
-                    <a:pt x="2578410" y="1145327"/>
-                  </a:lnTo>
-                  <a:lnTo>
-                    <a:pt x="2506788" y="1123573"/>
-                  </a:lnTo>
-                  <a:lnTo>
-                    <a:pt x="2435165" y="1101370"/>
-                  </a:lnTo>
-                  <a:lnTo>
-                    <a:pt x="2363543" y="1078708"/>
-                  </a:lnTo>
-                  <a:lnTo>
-                    <a:pt x="2291920" y="1055579"/>
-                  </a:lnTo>
-                  <a:lnTo>
-                    <a:pt x="2220298" y="1031971"/>
-                  </a:lnTo>
-                  <a:lnTo>
-                    <a:pt x="2148675" y="1007877"/>
-                  </a:lnTo>
-                  <a:lnTo>
-                    <a:pt x="2077053" y="983285"/>
-                  </a:lnTo>
-                  <a:lnTo>
-                    <a:pt x="2005430" y="958184"/>
-                  </a:lnTo>
-                  <a:lnTo>
-                    <a:pt x="1933808" y="932566"/>
-                  </a:lnTo>
-                  <a:lnTo>
-                    <a:pt x="1862185" y="906419"/>
-                  </a:lnTo>
-                  <a:lnTo>
-                    <a:pt x="1790563" y="879731"/>
-                  </a:lnTo>
-                  <a:lnTo>
-                    <a:pt x="1718940" y="852493"/>
-                  </a:lnTo>
-                  <a:lnTo>
-                    <a:pt x="1647318" y="824692"/>
-                  </a:lnTo>
-                  <a:lnTo>
-                    <a:pt x="1575695" y="796317"/>
-                  </a:lnTo>
-                  <a:lnTo>
-                    <a:pt x="1504073" y="767356"/>
-                  </a:lnTo>
-                  <a:lnTo>
-                    <a:pt x="1432450" y="737797"/>
-                  </a:lnTo>
-                  <a:lnTo>
-                    <a:pt x="1360827" y="707628"/>
-                  </a:lnTo>
-                  <a:lnTo>
-                    <a:pt x="1289205" y="676836"/>
-                  </a:lnTo>
-                  <a:lnTo>
-                    <a:pt x="1217582" y="645407"/>
-                  </a:lnTo>
-                  <a:lnTo>
-                    <a:pt x="1145960" y="613330"/>
-                  </a:lnTo>
-                  <a:lnTo>
-                    <a:pt x="1074337" y="580591"/>
-                  </a:lnTo>
-                  <a:lnTo>
-                    <a:pt x="1002715" y="547175"/>
-                  </a:lnTo>
-                  <a:lnTo>
-                    <a:pt x="931092" y="513069"/>
-                  </a:lnTo>
-                  <a:lnTo>
-                    <a:pt x="859470" y="478260"/>
-                  </a:lnTo>
-                  <a:lnTo>
-                    <a:pt x="787847" y="442731"/>
-                  </a:lnTo>
-                  <a:lnTo>
-                    <a:pt x="716225" y="406468"/>
-                  </a:lnTo>
-                  <a:lnTo>
-                    <a:pt x="644602" y="369457"/>
-                  </a:lnTo>
-                  <a:lnTo>
-                    <a:pt x="572980" y="331682"/>
-                  </a:lnTo>
-                  <a:lnTo>
-                    <a:pt x="501357" y="293126"/>
-                  </a:lnTo>
-                  <a:lnTo>
-                    <a:pt x="429735" y="253774"/>
-                  </a:lnTo>
-                  <a:lnTo>
-                    <a:pt x="358112" y="213610"/>
-                  </a:lnTo>
-                  <a:lnTo>
-                    <a:pt x="286490" y="172616"/>
-                  </a:lnTo>
-                  <a:lnTo>
-                    <a:pt x="214867" y="130776"/>
-                  </a:lnTo>
-                  <a:lnTo>
-                    <a:pt x="143245" y="88072"/>
-                  </a:lnTo>
-                  <a:lnTo>
-                    <a:pt x="71622" y="44486"/>
-                  </a:lnTo>
-                  <a:lnTo>
-                    <a:pt x="0" y="0"/>
+                    <a:pt x="51730" y="49542"/>
+                  </a:lnTo>
+                  <a:lnTo>
+                    <a:pt x="122075" y="113351"/>
+                  </a:lnTo>
+                  <a:lnTo>
+                    <a:pt x="192419" y="173789"/>
+                  </a:lnTo>
+                  <a:lnTo>
+                    <a:pt x="262764" y="231033"/>
+                  </a:lnTo>
+                  <a:lnTo>
+                    <a:pt x="333108" y="285253"/>
+                  </a:lnTo>
+                  <a:lnTo>
+                    <a:pt x="403453" y="336608"/>
+                  </a:lnTo>
+                  <a:lnTo>
+                    <a:pt x="473797" y="385249"/>
+                  </a:lnTo>
+                  <a:lnTo>
+                    <a:pt x="544142" y="431320"/>
+                  </a:lnTo>
+                  <a:lnTo>
+                    <a:pt x="614486" y="474958"/>
+                  </a:lnTo>
+                  <a:lnTo>
+                    <a:pt x="684831" y="516289"/>
+                  </a:lnTo>
+                  <a:lnTo>
+                    <a:pt x="755175" y="555437"/>
+                  </a:lnTo>
+                  <a:lnTo>
+                    <a:pt x="825520" y="592516"/>
+                  </a:lnTo>
+                  <a:lnTo>
+                    <a:pt x="895864" y="627636"/>
+                  </a:lnTo>
+                  <a:lnTo>
+                    <a:pt x="966208" y="660900"/>
+                  </a:lnTo>
+                  <a:lnTo>
+                    <a:pt x="1036553" y="692407"/>
+                  </a:lnTo>
+                  <a:lnTo>
+                    <a:pt x="1106897" y="722249"/>
+                  </a:lnTo>
+                  <a:lnTo>
+                    <a:pt x="1177242" y="750515"/>
+                  </a:lnTo>
+                  <a:lnTo>
+                    <a:pt x="1247586" y="777286"/>
+                  </a:lnTo>
+                  <a:lnTo>
+                    <a:pt x="1317931" y="802644"/>
+                  </a:lnTo>
+                  <a:lnTo>
+                    <a:pt x="1388275" y="826661"/>
+                  </a:lnTo>
+                  <a:lnTo>
+                    <a:pt x="1458620" y="849410"/>
+                  </a:lnTo>
+                  <a:lnTo>
+                    <a:pt x="1528964" y="870956"/>
+                  </a:lnTo>
+                  <a:lnTo>
+                    <a:pt x="1599309" y="891364"/>
+                  </a:lnTo>
+                  <a:lnTo>
+                    <a:pt x="1669653" y="910694"/>
+                  </a:lnTo>
+                  <a:lnTo>
+                    <a:pt x="1739998" y="929002"/>
+                  </a:lnTo>
+                  <a:lnTo>
+                    <a:pt x="1810342" y="946344"/>
+                  </a:lnTo>
+                  <a:lnTo>
+                    <a:pt x="1880687" y="959723"/>
+                  </a:lnTo>
+                  <a:lnTo>
+                    <a:pt x="1951031" y="965741"/>
+                  </a:lnTo>
+                  <a:lnTo>
+                    <a:pt x="2021376" y="971638"/>
+                  </a:lnTo>
+                  <a:lnTo>
+                    <a:pt x="2091720" y="977416"/>
+                  </a:lnTo>
+                  <a:lnTo>
+                    <a:pt x="2162065" y="983076"/>
+                  </a:lnTo>
+                  <a:lnTo>
+                    <a:pt x="2232409" y="988622"/>
+                  </a:lnTo>
+                  <a:lnTo>
+                    <a:pt x="2302754" y="994056"/>
+                  </a:lnTo>
+                  <a:lnTo>
+                    <a:pt x="2373098" y="999380"/>
+                  </a:lnTo>
+                  <a:lnTo>
+                    <a:pt x="2443443" y="1004597"/>
+                  </a:lnTo>
+                  <a:lnTo>
+                    <a:pt x="2513787" y="1009707"/>
+                  </a:lnTo>
+                  <a:lnTo>
+                    <a:pt x="2584132" y="1014715"/>
+                  </a:lnTo>
+                  <a:lnTo>
+                    <a:pt x="2654476" y="1019621"/>
+                  </a:lnTo>
+                  <a:lnTo>
+                    <a:pt x="2724821" y="1024427"/>
+                  </a:lnTo>
+                  <a:lnTo>
+                    <a:pt x="2795165" y="1029137"/>
+                  </a:lnTo>
+                  <a:lnTo>
+                    <a:pt x="2865510" y="1033751"/>
+                  </a:lnTo>
+                  <a:lnTo>
+                    <a:pt x="2935854" y="1038272"/>
+                  </a:lnTo>
+                  <a:lnTo>
+                    <a:pt x="3006199" y="1042701"/>
+                  </a:lnTo>
+                  <a:lnTo>
+                    <a:pt x="3076543" y="1047041"/>
+                  </a:lnTo>
+                  <a:lnTo>
+                    <a:pt x="3146888" y="1051293"/>
+                  </a:lnTo>
+                  <a:lnTo>
+                    <a:pt x="3217232" y="1055459"/>
+                  </a:lnTo>
+                  <a:lnTo>
+                    <a:pt x="3287577" y="1059541"/>
+                  </a:lnTo>
+                  <a:lnTo>
+                    <a:pt x="3357921" y="1063540"/>
+                  </a:lnTo>
+                  <a:lnTo>
+                    <a:pt x="3428266" y="1067458"/>
+                  </a:lnTo>
+                  <a:lnTo>
+                    <a:pt x="3498610" y="1071297"/>
+                  </a:lnTo>
+                  <a:lnTo>
+                    <a:pt x="3568955" y="1075058"/>
+                  </a:lnTo>
+                  <a:lnTo>
+                    <a:pt x="3639299" y="1078743"/>
+                  </a:lnTo>
+                  <a:lnTo>
+                    <a:pt x="3709644" y="1082354"/>
+                  </a:lnTo>
+                  <a:lnTo>
+                    <a:pt x="3779988" y="1085892"/>
+                  </a:lnTo>
+                  <a:lnTo>
+                    <a:pt x="3850333" y="1089358"/>
+                  </a:lnTo>
+                  <a:lnTo>
+                    <a:pt x="3920677" y="1092753"/>
+                  </a:lnTo>
+                  <a:lnTo>
+                    <a:pt x="3991022" y="1096081"/>
+                  </a:lnTo>
+                  <a:lnTo>
+                    <a:pt x="4061366" y="1099340"/>
+                  </a:lnTo>
+                  <a:lnTo>
+                    <a:pt x="4131711" y="1102534"/>
+                  </a:lnTo>
+                  <a:lnTo>
+                    <a:pt x="4202055" y="1105663"/>
+                  </a:lnTo>
+                  <a:lnTo>
+                    <a:pt x="4272400" y="1108729"/>
+                  </a:lnTo>
+                  <a:lnTo>
+                    <a:pt x="4342744" y="1111733"/>
+                  </a:lnTo>
+                  <a:lnTo>
+                    <a:pt x="4413089" y="1114676"/>
+                  </a:lnTo>
+                  <a:lnTo>
+                    <a:pt x="4483433" y="1117560"/>
+                  </a:lnTo>
+                  <a:lnTo>
+                    <a:pt x="4553778" y="1120385"/>
+                  </a:lnTo>
+                  <a:lnTo>
+                    <a:pt x="4624122" y="1123153"/>
+                  </a:lnTo>
+                  <a:lnTo>
+                    <a:pt x="4694466" y="1125865"/>
+                  </a:lnTo>
+                  <a:lnTo>
+                    <a:pt x="4764811" y="1128523"/>
+                  </a:lnTo>
+                  <a:lnTo>
+                    <a:pt x="4835155" y="1131126"/>
+                  </a:lnTo>
+                  <a:lnTo>
+                    <a:pt x="4905500" y="1133677"/>
+                  </a:lnTo>
+                  <a:lnTo>
+                    <a:pt x="4975844" y="1136176"/>
+                  </a:lnTo>
+                  <a:lnTo>
+                    <a:pt x="5046189" y="1138625"/>
+                  </a:lnTo>
+                  <a:lnTo>
+                    <a:pt x="5116533" y="1141024"/>
+                  </a:lnTo>
+                  <a:lnTo>
+                    <a:pt x="5186878" y="1143374"/>
+                  </a:lnTo>
+                  <a:lnTo>
+                    <a:pt x="5257222" y="1145677"/>
+                  </a:lnTo>
+                  <a:lnTo>
+                    <a:pt x="5327567" y="1147934"/>
+                  </a:lnTo>
+                  <a:lnTo>
+                    <a:pt x="5397911" y="1150144"/>
+                  </a:lnTo>
+                  <a:lnTo>
+                    <a:pt x="5468256" y="1152310"/>
                   </a:lnTo>
                 </a:path>
               </a:pathLst>
@@ -4114,285 +3824,610 @@
           </p:nvSpPr>
           <p:spPr>
             <a:xfrm>
-              <a:off x="1837372" y="2073503"/>
-              <a:ext cx="6425306" cy="3361753"/>
+              <a:off x="1235312" y="2606802"/>
+              <a:ext cx="6964104" cy="775014"/>
             </a:xfrm>
             <a:custGeom>
               <a:avLst/>
               <a:pathLst>
-                <a:path w="6425306" h="3361753">
+                <a:path w="6964104" h="775014">
+                  <a:moveTo>
+                    <a:pt x="6964104" y="775014"/>
+                  </a:moveTo>
+                  <a:lnTo>
+                    <a:pt x="6893760" y="773983"/>
+                  </a:lnTo>
+                  <a:lnTo>
+                    <a:pt x="6823415" y="772895"/>
+                  </a:lnTo>
+                  <a:lnTo>
+                    <a:pt x="6753071" y="771746"/>
+                  </a:lnTo>
+                  <a:lnTo>
+                    <a:pt x="6682726" y="770533"/>
+                  </a:lnTo>
+                  <a:lnTo>
+                    <a:pt x="6612382" y="769252"/>
+                  </a:lnTo>
+                  <a:lnTo>
+                    <a:pt x="6542037" y="767900"/>
+                  </a:lnTo>
+                  <a:lnTo>
+                    <a:pt x="6471693" y="766472"/>
+                  </a:lnTo>
+                  <a:lnTo>
+                    <a:pt x="6401348" y="764965"/>
+                  </a:lnTo>
+                  <a:lnTo>
+                    <a:pt x="6331004" y="763373"/>
+                  </a:lnTo>
+                  <a:lnTo>
+                    <a:pt x="6260659" y="761693"/>
+                  </a:lnTo>
+                  <a:lnTo>
+                    <a:pt x="6190315" y="759920"/>
+                  </a:lnTo>
+                  <a:lnTo>
+                    <a:pt x="6119970" y="758047"/>
+                  </a:lnTo>
+                  <a:lnTo>
+                    <a:pt x="6049626" y="756069"/>
+                  </a:lnTo>
+                  <a:lnTo>
+                    <a:pt x="5979281" y="753982"/>
+                  </a:lnTo>
+                  <a:lnTo>
+                    <a:pt x="5908937" y="751778"/>
+                  </a:lnTo>
+                  <a:lnTo>
+                    <a:pt x="5838592" y="749451"/>
+                  </a:lnTo>
+                  <a:lnTo>
+                    <a:pt x="5768248" y="746994"/>
+                  </a:lnTo>
+                  <a:lnTo>
+                    <a:pt x="5697903" y="744400"/>
+                  </a:lnTo>
+                  <a:lnTo>
+                    <a:pt x="5627559" y="741662"/>
+                  </a:lnTo>
+                  <a:lnTo>
+                    <a:pt x="5557214" y="738771"/>
+                  </a:lnTo>
+                  <a:lnTo>
+                    <a:pt x="5486870" y="735718"/>
+                  </a:lnTo>
+                  <a:lnTo>
+                    <a:pt x="5416525" y="732495"/>
+                  </a:lnTo>
+                  <a:lnTo>
+                    <a:pt x="5346181" y="729092"/>
+                  </a:lnTo>
+                  <a:lnTo>
+                    <a:pt x="5275836" y="725500"/>
+                  </a:lnTo>
+                  <a:lnTo>
+                    <a:pt x="5205492" y="721707"/>
+                  </a:lnTo>
+                  <a:lnTo>
+                    <a:pt x="5135147" y="717703"/>
+                  </a:lnTo>
+                  <a:lnTo>
+                    <a:pt x="5064803" y="713475"/>
+                  </a:lnTo>
+                  <a:lnTo>
+                    <a:pt x="4994458" y="709011"/>
+                  </a:lnTo>
+                  <a:lnTo>
+                    <a:pt x="4924114" y="704298"/>
+                  </a:lnTo>
+                  <a:lnTo>
+                    <a:pt x="4853769" y="699323"/>
+                  </a:lnTo>
+                  <a:lnTo>
+                    <a:pt x="4783425" y="694070"/>
+                  </a:lnTo>
+                  <a:lnTo>
+                    <a:pt x="4713080" y="688523"/>
+                  </a:lnTo>
+                  <a:lnTo>
+                    <a:pt x="4642736" y="682668"/>
+                  </a:lnTo>
+                  <a:lnTo>
+                    <a:pt x="4572391" y="676486"/>
+                  </a:lnTo>
+                  <a:lnTo>
+                    <a:pt x="4502047" y="669959"/>
+                  </a:lnTo>
+                  <a:lnTo>
+                    <a:pt x="4431702" y="663067"/>
+                  </a:lnTo>
+                  <a:lnTo>
+                    <a:pt x="4361358" y="655792"/>
+                  </a:lnTo>
+                  <a:lnTo>
+                    <a:pt x="4291013" y="648110"/>
+                  </a:lnTo>
+                  <a:lnTo>
+                    <a:pt x="4220669" y="640000"/>
+                  </a:lnTo>
+                  <a:lnTo>
+                    <a:pt x="4150324" y="631438"/>
+                  </a:lnTo>
+                  <a:lnTo>
+                    <a:pt x="4079980" y="622398"/>
+                  </a:lnTo>
+                  <a:lnTo>
+                    <a:pt x="4009635" y="612853"/>
+                  </a:lnTo>
+                  <a:lnTo>
+                    <a:pt x="3939291" y="602776"/>
+                  </a:lnTo>
+                  <a:lnTo>
+                    <a:pt x="3868946" y="592137"/>
+                  </a:lnTo>
+                  <a:lnTo>
+                    <a:pt x="3798602" y="580905"/>
+                  </a:lnTo>
+                  <a:lnTo>
+                    <a:pt x="3728257" y="569046"/>
+                  </a:lnTo>
+                  <a:lnTo>
+                    <a:pt x="3657913" y="556525"/>
+                  </a:lnTo>
+                  <a:lnTo>
+                    <a:pt x="3587569" y="543306"/>
+                  </a:lnTo>
+                  <a:lnTo>
+                    <a:pt x="3517224" y="529350"/>
+                  </a:lnTo>
+                  <a:lnTo>
+                    <a:pt x="3446880" y="514615"/>
+                  </a:lnTo>
+                  <a:lnTo>
+                    <a:pt x="3376535" y="499058"/>
+                  </a:lnTo>
+                  <a:lnTo>
+                    <a:pt x="3306191" y="489869"/>
+                  </a:lnTo>
+                  <a:lnTo>
+                    <a:pt x="3235846" y="483599"/>
+                  </a:lnTo>
+                  <a:lnTo>
+                    <a:pt x="3165502" y="477200"/>
+                  </a:lnTo>
+                  <a:lnTo>
+                    <a:pt x="3095157" y="470669"/>
+                  </a:lnTo>
+                  <a:lnTo>
+                    <a:pt x="3024813" y="464003"/>
+                  </a:lnTo>
+                  <a:lnTo>
+                    <a:pt x="2954468" y="457199"/>
+                  </a:lnTo>
+                  <a:lnTo>
+                    <a:pt x="2884124" y="450254"/>
+                  </a:lnTo>
+                  <a:lnTo>
+                    <a:pt x="2813779" y="443167"/>
+                  </a:lnTo>
+                  <a:lnTo>
+                    <a:pt x="2743435" y="435932"/>
+                  </a:lnTo>
+                  <a:lnTo>
+                    <a:pt x="2673090" y="428549"/>
+                  </a:lnTo>
+                  <a:lnTo>
+                    <a:pt x="2602746" y="421013"/>
+                  </a:lnTo>
+                  <a:lnTo>
+                    <a:pt x="2532401" y="413321"/>
+                  </a:lnTo>
+                  <a:lnTo>
+                    <a:pt x="2462057" y="405471"/>
+                  </a:lnTo>
+                  <a:lnTo>
+                    <a:pt x="2391712" y="397458"/>
+                  </a:lnTo>
+                  <a:lnTo>
+                    <a:pt x="2321368" y="389280"/>
+                  </a:lnTo>
+                  <a:lnTo>
+                    <a:pt x="2251023" y="380933"/>
+                  </a:lnTo>
+                  <a:lnTo>
+                    <a:pt x="2180679" y="372414"/>
+                  </a:lnTo>
+                  <a:lnTo>
+                    <a:pt x="2110334" y="363719"/>
+                  </a:lnTo>
+                  <a:lnTo>
+                    <a:pt x="2039990" y="354844"/>
+                  </a:lnTo>
+                  <a:lnTo>
+                    <a:pt x="1969645" y="345786"/>
+                  </a:lnTo>
+                  <a:lnTo>
+                    <a:pt x="1899301" y="336541"/>
+                  </a:lnTo>
+                  <a:lnTo>
+                    <a:pt x="1828956" y="327105"/>
+                  </a:lnTo>
+                  <a:lnTo>
+                    <a:pt x="1758612" y="317474"/>
+                  </a:lnTo>
+                  <a:lnTo>
+                    <a:pt x="1688267" y="307644"/>
+                  </a:lnTo>
+                  <a:lnTo>
+                    <a:pt x="1617923" y="297612"/>
+                  </a:lnTo>
+                  <a:lnTo>
+                    <a:pt x="1547578" y="287372"/>
+                  </a:lnTo>
+                  <a:lnTo>
+                    <a:pt x="1477234" y="276921"/>
+                  </a:lnTo>
+                  <a:lnTo>
+                    <a:pt x="1406889" y="266253"/>
+                  </a:lnTo>
+                  <a:lnTo>
+                    <a:pt x="1336545" y="255366"/>
+                  </a:lnTo>
+                  <a:lnTo>
+                    <a:pt x="1266200" y="244254"/>
+                  </a:lnTo>
+                  <a:lnTo>
+                    <a:pt x="1195856" y="232912"/>
+                  </a:lnTo>
+                  <a:lnTo>
+                    <a:pt x="1125511" y="221336"/>
+                  </a:lnTo>
+                  <a:lnTo>
+                    <a:pt x="1055167" y="209521"/>
+                  </a:lnTo>
+                  <a:lnTo>
+                    <a:pt x="984822" y="197462"/>
+                  </a:lnTo>
+                  <a:lnTo>
+                    <a:pt x="914478" y="185154"/>
+                  </a:lnTo>
+                  <a:lnTo>
+                    <a:pt x="844133" y="172592"/>
+                  </a:lnTo>
+                  <a:lnTo>
+                    <a:pt x="773789" y="159771"/>
+                  </a:lnTo>
+                  <a:lnTo>
+                    <a:pt x="703444" y="146685"/>
+                  </a:lnTo>
+                  <a:lnTo>
+                    <a:pt x="633100" y="133328"/>
+                  </a:lnTo>
+                  <a:lnTo>
+                    <a:pt x="562755" y="119696"/>
+                  </a:lnTo>
+                  <a:lnTo>
+                    <a:pt x="492411" y="105782"/>
+                  </a:lnTo>
+                  <a:lnTo>
+                    <a:pt x="422066" y="91581"/>
+                  </a:lnTo>
+                  <a:lnTo>
+                    <a:pt x="351722" y="77086"/>
+                  </a:lnTo>
+                  <a:lnTo>
+                    <a:pt x="281377" y="62293"/>
+                  </a:lnTo>
+                  <a:lnTo>
+                    <a:pt x="211033" y="47194"/>
+                  </a:lnTo>
+                  <a:lnTo>
+                    <a:pt x="140688" y="31783"/>
+                  </a:lnTo>
+                  <a:lnTo>
+                    <a:pt x="70344" y="16053"/>
+                  </a:lnTo>
+                  <a:lnTo>
+                    <a:pt x="0" y="0"/>
+                  </a:lnTo>
+                </a:path>
+              </a:pathLst>
+            </a:custGeom>
+          </p:spPr>
+          <p:txBody>
+            <a:bodyPr/>
+            <a:lstStyle/>
+            <a:p/>
+          </p:txBody>
+        </p:sp>
+        <p:sp>
+          <p:nvSpPr>
+            <p:cNvPr id="24" name="pl24"/>
+            <p:cNvSpPr/>
+            <p:nvPr/>
+          </p:nvSpPr>
+          <p:spPr>
+            <a:xfrm>
+              <a:off x="1888763" y="2143092"/>
+              <a:ext cx="6310653" cy="1213177"/>
+            </a:xfrm>
+            <a:custGeom>
+              <a:avLst/>
+              <a:pathLst>
+                <a:path w="6310653" h="1213177">
                   <a:moveTo>
                     <a:pt x="0" y="0"/>
                   </a:moveTo>
                   <a:lnTo>
-                    <a:pt x="50901" y="91770"/>
-                  </a:lnTo>
-                  <a:lnTo>
-                    <a:pt x="122524" y="216162"/>
-                  </a:lnTo>
-                  <a:lnTo>
-                    <a:pt x="194146" y="335993"/>
-                  </a:lnTo>
-                  <a:lnTo>
-                    <a:pt x="265769" y="451429"/>
-                  </a:lnTo>
-                  <a:lnTo>
-                    <a:pt x="337391" y="562631"/>
-                  </a:lnTo>
-                  <a:lnTo>
-                    <a:pt x="409014" y="669756"/>
-                  </a:lnTo>
-                  <a:lnTo>
-                    <a:pt x="480636" y="772952"/>
-                  </a:lnTo>
-                  <a:lnTo>
-                    <a:pt x="552259" y="872364"/>
-                  </a:lnTo>
-                  <a:lnTo>
-                    <a:pt x="623882" y="968130"/>
-                  </a:lnTo>
-                  <a:lnTo>
-                    <a:pt x="695504" y="1060383"/>
-                  </a:lnTo>
-                  <a:lnTo>
-                    <a:pt x="767127" y="1149254"/>
-                  </a:lnTo>
-                  <a:lnTo>
-                    <a:pt x="838749" y="1234866"/>
-                  </a:lnTo>
-                  <a:lnTo>
-                    <a:pt x="910372" y="1317338"/>
-                  </a:lnTo>
-                  <a:lnTo>
-                    <a:pt x="981994" y="1396786"/>
-                  </a:lnTo>
-                  <a:lnTo>
-                    <a:pt x="1053617" y="1473320"/>
-                  </a:lnTo>
-                  <a:lnTo>
-                    <a:pt x="1125239" y="1547047"/>
-                  </a:lnTo>
-                  <a:lnTo>
-                    <a:pt x="1196862" y="1618071"/>
-                  </a:lnTo>
-                  <a:lnTo>
-                    <a:pt x="1268484" y="1686490"/>
-                  </a:lnTo>
-                  <a:lnTo>
-                    <a:pt x="1340107" y="1752399"/>
-                  </a:lnTo>
-                  <a:lnTo>
-                    <a:pt x="1411729" y="1815892"/>
-                  </a:lnTo>
-                  <a:lnTo>
-                    <a:pt x="1483352" y="1877057"/>
-                  </a:lnTo>
-                  <a:lnTo>
-                    <a:pt x="1554974" y="1935978"/>
-                  </a:lnTo>
-                  <a:lnTo>
-                    <a:pt x="1626597" y="1992739"/>
-                  </a:lnTo>
-                  <a:lnTo>
-                    <a:pt x="1698219" y="2047418"/>
-                  </a:lnTo>
-                  <a:lnTo>
-                    <a:pt x="1769842" y="2100091"/>
-                  </a:lnTo>
-                  <a:lnTo>
-                    <a:pt x="1841464" y="2150833"/>
-                  </a:lnTo>
-                  <a:lnTo>
-                    <a:pt x="1913087" y="2199715"/>
-                  </a:lnTo>
-                  <a:lnTo>
-                    <a:pt x="1984710" y="2246803"/>
-                  </a:lnTo>
-                  <a:lnTo>
-                    <a:pt x="2056332" y="2292165"/>
-                  </a:lnTo>
-                  <a:lnTo>
-                    <a:pt x="2127955" y="2335863"/>
-                  </a:lnTo>
-                  <a:lnTo>
-                    <a:pt x="2199577" y="2377959"/>
-                  </a:lnTo>
-                  <a:lnTo>
-                    <a:pt x="2271200" y="2418511"/>
-                  </a:lnTo>
-                  <a:lnTo>
-                    <a:pt x="2342822" y="2457576"/>
-                  </a:lnTo>
-                  <a:lnTo>
-                    <a:pt x="2414445" y="2495208"/>
-                  </a:lnTo>
-                  <a:lnTo>
-                    <a:pt x="2486067" y="2531460"/>
-                  </a:lnTo>
-                  <a:lnTo>
-                    <a:pt x="2557690" y="2566383"/>
-                  </a:lnTo>
-                  <a:lnTo>
-                    <a:pt x="2629312" y="2600025"/>
-                  </a:lnTo>
-                  <a:lnTo>
-                    <a:pt x="2700935" y="2632433"/>
-                  </a:lnTo>
-                  <a:lnTo>
-                    <a:pt x="2772557" y="2663653"/>
-                  </a:lnTo>
-                  <a:lnTo>
-                    <a:pt x="2844180" y="2693728"/>
-                  </a:lnTo>
-                  <a:lnTo>
-                    <a:pt x="2915802" y="2722700"/>
-                  </a:lnTo>
-                  <a:lnTo>
-                    <a:pt x="2987425" y="2750609"/>
-                  </a:lnTo>
-                  <a:lnTo>
-                    <a:pt x="3059047" y="2777495"/>
-                  </a:lnTo>
-                  <a:lnTo>
-                    <a:pt x="3130670" y="2803395"/>
-                  </a:lnTo>
-                  <a:lnTo>
-                    <a:pt x="3202292" y="2828345"/>
-                  </a:lnTo>
-                  <a:lnTo>
-                    <a:pt x="3273915" y="2852381"/>
-                  </a:lnTo>
-                  <a:lnTo>
-                    <a:pt x="3345538" y="2875534"/>
-                  </a:lnTo>
-                  <a:lnTo>
-                    <a:pt x="3417160" y="2897839"/>
-                  </a:lnTo>
-                  <a:lnTo>
-                    <a:pt x="3488783" y="2919326"/>
-                  </a:lnTo>
-                  <a:lnTo>
-                    <a:pt x="3560405" y="2940024"/>
-                  </a:lnTo>
-                  <a:lnTo>
-                    <a:pt x="3632028" y="2959964"/>
-                  </a:lnTo>
-                  <a:lnTo>
-                    <a:pt x="3703650" y="2979173"/>
-                  </a:lnTo>
-                  <a:lnTo>
-                    <a:pt x="3775273" y="2997677"/>
-                  </a:lnTo>
-                  <a:lnTo>
-                    <a:pt x="3846895" y="3015502"/>
-                  </a:lnTo>
-                  <a:lnTo>
-                    <a:pt x="3918518" y="3032674"/>
-                  </a:lnTo>
-                  <a:lnTo>
-                    <a:pt x="3990140" y="3049216"/>
-                  </a:lnTo>
-                  <a:lnTo>
-                    <a:pt x="4061763" y="3065151"/>
-                  </a:lnTo>
-                  <a:lnTo>
-                    <a:pt x="4133385" y="3080502"/>
-                  </a:lnTo>
-                  <a:lnTo>
-                    <a:pt x="4205008" y="3095290"/>
-                  </a:lnTo>
-                  <a:lnTo>
-                    <a:pt x="4276630" y="3109536"/>
-                  </a:lnTo>
-                  <a:lnTo>
-                    <a:pt x="4348253" y="3123259"/>
-                  </a:lnTo>
-                  <a:lnTo>
-                    <a:pt x="4419875" y="3136479"/>
-                  </a:lnTo>
-                  <a:lnTo>
-                    <a:pt x="4491498" y="3149214"/>
-                  </a:lnTo>
-                  <a:lnTo>
-                    <a:pt x="4563120" y="3161482"/>
-                  </a:lnTo>
-                  <a:lnTo>
-                    <a:pt x="4634743" y="3173300"/>
-                  </a:lnTo>
-                  <a:lnTo>
-                    <a:pt x="4706366" y="3184685"/>
-                  </a:lnTo>
-                  <a:lnTo>
-                    <a:pt x="4777988" y="3195652"/>
-                  </a:lnTo>
-                  <a:lnTo>
-                    <a:pt x="4849611" y="3206218"/>
-                  </a:lnTo>
-                  <a:lnTo>
-                    <a:pt x="4921233" y="3216395"/>
-                  </a:lnTo>
-                  <a:lnTo>
-                    <a:pt x="4992856" y="3226200"/>
-                  </a:lnTo>
-                  <a:lnTo>
-                    <a:pt x="5064478" y="3235645"/>
-                  </a:lnTo>
-                  <a:lnTo>
-                    <a:pt x="5136101" y="3244743"/>
-                  </a:lnTo>
-                  <a:lnTo>
-                    <a:pt x="5207723" y="3253508"/>
-                  </a:lnTo>
-                  <a:lnTo>
-                    <a:pt x="5279346" y="3261951"/>
-                  </a:lnTo>
-                  <a:lnTo>
-                    <a:pt x="5350968" y="3270085"/>
-                  </a:lnTo>
-                  <a:lnTo>
-                    <a:pt x="5422591" y="3277921"/>
-                  </a:lnTo>
-                  <a:lnTo>
-                    <a:pt x="5494213" y="3285469"/>
-                  </a:lnTo>
-                  <a:lnTo>
-                    <a:pt x="5565836" y="3292740"/>
-                  </a:lnTo>
-                  <a:lnTo>
-                    <a:pt x="5637458" y="3299745"/>
-                  </a:lnTo>
-                  <a:lnTo>
-                    <a:pt x="5709081" y="3306493"/>
-                  </a:lnTo>
-                  <a:lnTo>
-                    <a:pt x="5780703" y="3312993"/>
-                  </a:lnTo>
-                  <a:lnTo>
-                    <a:pt x="5852326" y="3319255"/>
-                  </a:lnTo>
-                  <a:lnTo>
-                    <a:pt x="5923948" y="3325287"/>
-                  </a:lnTo>
-                  <a:lnTo>
-                    <a:pt x="5995571" y="3331098"/>
-                  </a:lnTo>
-                  <a:lnTo>
-                    <a:pt x="6067194" y="3336696"/>
-                  </a:lnTo>
-                  <a:lnTo>
-                    <a:pt x="6138816" y="3342089"/>
-                  </a:lnTo>
-                  <a:lnTo>
-                    <a:pt x="6210439" y="3347284"/>
-                  </a:lnTo>
-                  <a:lnTo>
-                    <a:pt x="6282061" y="3352288"/>
-                  </a:lnTo>
-                  <a:lnTo>
-                    <a:pt x="6353684" y="3357109"/>
-                  </a:lnTo>
-                  <a:lnTo>
-                    <a:pt x="6425306" y="3361753"/>
+                    <a:pt x="49993" y="33117"/>
+                  </a:lnTo>
+                  <a:lnTo>
+                    <a:pt x="120338" y="78008"/>
+                  </a:lnTo>
+                  <a:lnTo>
+                    <a:pt x="190682" y="121252"/>
+                  </a:lnTo>
+                  <a:lnTo>
+                    <a:pt x="261026" y="162910"/>
+                  </a:lnTo>
+                  <a:lnTo>
+                    <a:pt x="331371" y="203040"/>
+                  </a:lnTo>
+                  <a:lnTo>
+                    <a:pt x="401715" y="241699"/>
+                  </a:lnTo>
+                  <a:lnTo>
+                    <a:pt x="472060" y="278940"/>
+                  </a:lnTo>
+                  <a:lnTo>
+                    <a:pt x="542404" y="314815"/>
+                  </a:lnTo>
+                  <a:lnTo>
+                    <a:pt x="612749" y="349375"/>
+                  </a:lnTo>
+                  <a:lnTo>
+                    <a:pt x="683093" y="382667"/>
+                  </a:lnTo>
+                  <a:lnTo>
+                    <a:pt x="753438" y="414738"/>
+                  </a:lnTo>
+                  <a:lnTo>
+                    <a:pt x="823782" y="445634"/>
+                  </a:lnTo>
+                  <a:lnTo>
+                    <a:pt x="894127" y="475396"/>
+                  </a:lnTo>
+                  <a:lnTo>
+                    <a:pt x="964471" y="504067"/>
+                  </a:lnTo>
+                  <a:lnTo>
+                    <a:pt x="1034816" y="531686"/>
+                  </a:lnTo>
+                  <a:lnTo>
+                    <a:pt x="1105160" y="558293"/>
+                  </a:lnTo>
+                  <a:lnTo>
+                    <a:pt x="1175505" y="583923"/>
+                  </a:lnTo>
+                  <a:lnTo>
+                    <a:pt x="1245849" y="608614"/>
+                  </a:lnTo>
+                  <a:lnTo>
+                    <a:pt x="1316194" y="632399"/>
+                  </a:lnTo>
+                  <a:lnTo>
+                    <a:pt x="1386538" y="655312"/>
+                  </a:lnTo>
+                  <a:lnTo>
+                    <a:pt x="1456883" y="677385"/>
+                  </a:lnTo>
+                  <a:lnTo>
+                    <a:pt x="1527227" y="698649"/>
+                  </a:lnTo>
+                  <a:lnTo>
+                    <a:pt x="1597572" y="719132"/>
+                  </a:lnTo>
+                  <a:lnTo>
+                    <a:pt x="1667916" y="738864"/>
+                  </a:lnTo>
+                  <a:lnTo>
+                    <a:pt x="1738261" y="757873"/>
+                  </a:lnTo>
+                  <a:lnTo>
+                    <a:pt x="1808605" y="776185"/>
+                  </a:lnTo>
+                  <a:lnTo>
+                    <a:pt x="1878950" y="793825"/>
+                  </a:lnTo>
+                  <a:lnTo>
+                    <a:pt x="1949294" y="810818"/>
+                  </a:lnTo>
+                  <a:lnTo>
+                    <a:pt x="2019639" y="827188"/>
+                  </a:lnTo>
+                  <a:lnTo>
+                    <a:pt x="2089983" y="842958"/>
+                  </a:lnTo>
+                  <a:lnTo>
+                    <a:pt x="2160328" y="858149"/>
+                  </a:lnTo>
+                  <a:lnTo>
+                    <a:pt x="2230672" y="872783"/>
+                  </a:lnTo>
+                  <a:lnTo>
+                    <a:pt x="2301017" y="886881"/>
+                  </a:lnTo>
+                  <a:lnTo>
+                    <a:pt x="2371361" y="900462"/>
+                  </a:lnTo>
+                  <a:lnTo>
+                    <a:pt x="2441706" y="913544"/>
+                  </a:lnTo>
+                  <a:lnTo>
+                    <a:pt x="2512050" y="926147"/>
+                  </a:lnTo>
+                  <a:lnTo>
+                    <a:pt x="2582395" y="938288"/>
+                  </a:lnTo>
+                  <a:lnTo>
+                    <a:pt x="2652739" y="949983"/>
+                  </a:lnTo>
+                  <a:lnTo>
+                    <a:pt x="2723084" y="961249"/>
+                  </a:lnTo>
+                  <a:lnTo>
+                    <a:pt x="2793428" y="972103"/>
+                  </a:lnTo>
+                  <a:lnTo>
+                    <a:pt x="2863773" y="982558"/>
+                  </a:lnTo>
+                  <a:lnTo>
+                    <a:pt x="2934117" y="992630"/>
+                  </a:lnTo>
+                  <a:lnTo>
+                    <a:pt x="3004462" y="1002332"/>
+                  </a:lnTo>
+                  <a:lnTo>
+                    <a:pt x="3074806" y="1011679"/>
+                  </a:lnTo>
+                  <a:lnTo>
+                    <a:pt x="3145151" y="1020683"/>
+                  </a:lnTo>
+                  <a:lnTo>
+                    <a:pt x="3215495" y="1029357"/>
+                  </a:lnTo>
+                  <a:lnTo>
+                    <a:pt x="3285840" y="1037712"/>
+                  </a:lnTo>
+                  <a:lnTo>
+                    <a:pt x="3356184" y="1045762"/>
+                  </a:lnTo>
+                  <a:lnTo>
+                    <a:pt x="3426529" y="1053516"/>
+                  </a:lnTo>
+                  <a:lnTo>
+                    <a:pt x="3496873" y="1060985"/>
+                  </a:lnTo>
+                  <a:lnTo>
+                    <a:pt x="3567218" y="1068181"/>
+                  </a:lnTo>
+                  <a:lnTo>
+                    <a:pt x="3637562" y="1075113"/>
+                  </a:lnTo>
+                  <a:lnTo>
+                    <a:pt x="3707907" y="1081791"/>
+                  </a:lnTo>
+                  <a:lnTo>
+                    <a:pt x="3778251" y="1088223"/>
+                  </a:lnTo>
+                  <a:lnTo>
+                    <a:pt x="3848596" y="1094420"/>
+                  </a:lnTo>
+                  <a:lnTo>
+                    <a:pt x="3918940" y="1100390"/>
+                  </a:lnTo>
+                  <a:lnTo>
+                    <a:pt x="3989284" y="1106141"/>
+                  </a:lnTo>
+                  <a:lnTo>
+                    <a:pt x="4059629" y="1111680"/>
+                  </a:lnTo>
+                  <a:lnTo>
+                    <a:pt x="4129973" y="1117017"/>
+                  </a:lnTo>
+                  <a:lnTo>
+                    <a:pt x="4200318" y="1122158"/>
+                  </a:lnTo>
+                  <a:lnTo>
+                    <a:pt x="4270662" y="1127110"/>
+                  </a:lnTo>
+                  <a:lnTo>
+                    <a:pt x="4341007" y="1131881"/>
+                  </a:lnTo>
+                  <a:lnTo>
+                    <a:pt x="4411351" y="1136477"/>
+                  </a:lnTo>
+                  <a:lnTo>
+                    <a:pt x="4481696" y="1140904"/>
+                  </a:lnTo>
+                  <a:lnTo>
+                    <a:pt x="4552040" y="1145169"/>
+                  </a:lnTo>
+                  <a:lnTo>
+                    <a:pt x="4622385" y="1149278"/>
+                  </a:lnTo>
+                  <a:lnTo>
+                    <a:pt x="4692729" y="1153235"/>
+                  </a:lnTo>
+                  <a:lnTo>
+                    <a:pt x="4763074" y="1157048"/>
+                  </a:lnTo>
+                  <a:lnTo>
+                    <a:pt x="4833418" y="1160721"/>
+                  </a:lnTo>
+                  <a:lnTo>
+                    <a:pt x="4903763" y="1164259"/>
+                  </a:lnTo>
+                  <a:lnTo>
+                    <a:pt x="4974107" y="1167668"/>
+                  </a:lnTo>
+                  <a:lnTo>
+                    <a:pt x="5044452" y="1170951"/>
+                  </a:lnTo>
+                  <a:lnTo>
+                    <a:pt x="5114796" y="1174114"/>
+                  </a:lnTo>
+                  <a:lnTo>
+                    <a:pt x="5185141" y="1177161"/>
+                  </a:lnTo>
+                  <a:lnTo>
+                    <a:pt x="5255485" y="1180096"/>
+                  </a:lnTo>
+                  <a:lnTo>
+                    <a:pt x="5325830" y="1182924"/>
+                  </a:lnTo>
+                  <a:lnTo>
+                    <a:pt x="5396174" y="1185648"/>
+                  </a:lnTo>
+                  <a:lnTo>
+                    <a:pt x="5466519" y="1188272"/>
+                  </a:lnTo>
+                  <a:lnTo>
+                    <a:pt x="5536863" y="1190800"/>
+                  </a:lnTo>
+                  <a:lnTo>
+                    <a:pt x="5607208" y="1193235"/>
+                  </a:lnTo>
+                  <a:lnTo>
+                    <a:pt x="5677552" y="1195581"/>
+                  </a:lnTo>
+                  <a:lnTo>
+                    <a:pt x="5747897" y="1197841"/>
+                  </a:lnTo>
+                  <a:lnTo>
+                    <a:pt x="5818241" y="1200018"/>
+                  </a:lnTo>
+                  <a:lnTo>
+                    <a:pt x="5888586" y="1202115"/>
+                  </a:lnTo>
+                  <a:lnTo>
+                    <a:pt x="5958930" y="1204135"/>
+                  </a:lnTo>
+                  <a:lnTo>
+                    <a:pt x="6029275" y="1206081"/>
+                  </a:lnTo>
+                  <a:lnTo>
+                    <a:pt x="6099619" y="1207956"/>
+                  </a:lnTo>
+                  <a:lnTo>
+                    <a:pt x="6169964" y="1209762"/>
+                  </a:lnTo>
+                  <a:lnTo>
+                    <a:pt x="6240308" y="1211501"/>
+                  </a:lnTo>
+                  <a:lnTo>
+                    <a:pt x="6310653" y="1213177"/>
                   </a:lnTo>
                 </a:path>
               </a:pathLst>
@@ -4415,27 +4450,27 @@
         </p:sp>
         <p:sp>
           <p:nvSpPr>
-            <p:cNvPr id="24" name="pl24"/>
+            <p:cNvPr id="25" name="pl25"/>
             <p:cNvSpPr/>
             <p:nvPr/>
           </p:nvSpPr>
           <p:spPr>
             <a:xfrm>
-              <a:off x="817517" y="4727786"/>
-              <a:ext cx="7799693" cy="0"/>
+              <a:off x="887106" y="3100960"/>
+              <a:ext cx="7660515" cy="0"/>
             </a:xfrm>
             <a:custGeom>
               <a:avLst/>
               <a:pathLst>
-                <a:path w="7799693" h="0">
+                <a:path w="7660515" h="0">
                   <a:moveTo>
                     <a:pt x="0" y="0"/>
                   </a:moveTo>
                   <a:lnTo>
-                    <a:pt x="7799693" y="0"/>
-                  </a:lnTo>
-                  <a:lnTo>
-                    <a:pt x="7799693" y="0"/>
+                    <a:pt x="7660515" y="0"/>
+                  </a:lnTo>
+                  <a:lnTo>
+                    <a:pt x="7660515" y="0"/>
                   </a:lnTo>
                 </a:path>
               </a:pathLst>
@@ -4458,21 +4493,21 @@
         </p:sp>
         <p:sp>
           <p:nvSpPr>
-            <p:cNvPr id="25" name="pl25"/>
+            <p:cNvPr id="26" name="pl26"/>
             <p:cNvSpPr/>
             <p:nvPr/>
           </p:nvSpPr>
           <p:spPr>
             <a:xfrm>
-              <a:off x="4588151" y="2073503"/>
-              <a:ext cx="0" cy="3649639"/>
+              <a:off x="4590457" y="2143092"/>
+              <a:ext cx="0" cy="1317069"/>
             </a:xfrm>
             <a:custGeom>
               <a:avLst/>
               <a:pathLst>
-                <a:path w="0" h="3649639">
+                <a:path w="0" h="1317069">
                   <a:moveTo>
-                    <a:pt x="0" y="3649639"/>
+                    <a:pt x="0" y="1317069"/>
                   </a:moveTo>
                   <a:lnTo>
                     <a:pt x="0" y="0"/>
@@ -4501,13 +4536,13 @@
         </p:sp>
         <p:sp>
           <p:nvSpPr>
-            <p:cNvPr id="26" name="tx26"/>
+            <p:cNvPr id="27" name="tx27"/>
             <p:cNvSpPr/>
             <p:nvPr/>
           </p:nvSpPr>
           <p:spPr>
             <a:xfrm>
-              <a:off x="692708" y="5517199"/>
+              <a:off x="762297" y="3360243"/>
               <a:ext cx="62179" cy="80101"/>
             </a:xfrm>
             <a:prstGeom prst="rect">
@@ -4547,13 +4582,13 @@
         </p:sp>
         <p:sp>
           <p:nvSpPr>
-            <p:cNvPr id="27" name="tx27"/>
+            <p:cNvPr id="28" name="tx28"/>
             <p:cNvSpPr/>
             <p:nvPr/>
           </p:nvSpPr>
           <p:spPr>
             <a:xfrm>
-              <a:off x="692708" y="4687735"/>
+              <a:off x="762297" y="3060909"/>
               <a:ext cx="62179" cy="80101"/>
             </a:xfrm>
             <a:prstGeom prst="rect">
@@ -4593,13 +4628,13 @@
         </p:sp>
         <p:sp>
           <p:nvSpPr>
-            <p:cNvPr id="28" name="tx28"/>
+            <p:cNvPr id="29" name="tx29"/>
             <p:cNvSpPr/>
             <p:nvPr/>
           </p:nvSpPr>
           <p:spPr>
             <a:xfrm>
-              <a:off x="692708" y="3858272"/>
+              <a:off x="762297" y="2761575"/>
               <a:ext cx="62179" cy="80101"/>
             </a:xfrm>
             <a:prstGeom prst="rect">
@@ -4639,13 +4674,13 @@
         </p:sp>
         <p:sp>
           <p:nvSpPr>
-            <p:cNvPr id="29" name="tx29"/>
+            <p:cNvPr id="30" name="tx30"/>
             <p:cNvSpPr/>
             <p:nvPr/>
           </p:nvSpPr>
           <p:spPr>
             <a:xfrm>
-              <a:off x="692708" y="3028808"/>
+              <a:off x="762297" y="2462242"/>
               <a:ext cx="62179" cy="80101"/>
             </a:xfrm>
             <a:prstGeom prst="rect">
@@ -4685,13 +4720,13 @@
         </p:sp>
         <p:sp>
           <p:nvSpPr>
-            <p:cNvPr id="30" name="tx30"/>
+            <p:cNvPr id="31" name="tx31"/>
             <p:cNvSpPr/>
             <p:nvPr/>
           </p:nvSpPr>
           <p:spPr>
             <a:xfrm>
-              <a:off x="692708" y="2199345"/>
+              <a:off x="762297" y="2162908"/>
               <a:ext cx="62179" cy="80101"/>
             </a:xfrm>
             <a:prstGeom prst="rect">
@@ -4731,13 +4766,13 @@
         </p:sp>
         <p:sp>
           <p:nvSpPr>
-            <p:cNvPr id="31" name="tx31"/>
+            <p:cNvPr id="32" name="tx32"/>
             <p:cNvSpPr/>
             <p:nvPr/>
           </p:nvSpPr>
           <p:spPr>
             <a:xfrm>
-              <a:off x="2360651" y="5785772"/>
+              <a:off x="2401262" y="3522791"/>
               <a:ext cx="161574" cy="80101"/>
             </a:xfrm>
             <a:prstGeom prst="rect">
@@ -4777,13 +4812,13 @@
         </p:sp>
         <p:sp>
           <p:nvSpPr>
-            <p:cNvPr id="32" name="tx32"/>
+            <p:cNvPr id="33" name="tx33"/>
             <p:cNvSpPr/>
             <p:nvPr/>
           </p:nvSpPr>
           <p:spPr>
             <a:xfrm>
-              <a:off x="4561958" y="5785772"/>
+              <a:off x="4564176" y="3522791"/>
               <a:ext cx="62179" cy="80101"/>
             </a:xfrm>
             <a:prstGeom prst="rect">
@@ -4823,13 +4858,13 @@
         </p:sp>
         <p:sp>
           <p:nvSpPr>
-            <p:cNvPr id="33" name="tx33"/>
+            <p:cNvPr id="34" name="tx34"/>
             <p:cNvSpPr/>
             <p:nvPr/>
           </p:nvSpPr>
           <p:spPr>
             <a:xfrm>
-              <a:off x="6682478" y="5785772"/>
+              <a:off x="6646302" y="3522791"/>
               <a:ext cx="124358" cy="80101"/>
             </a:xfrm>
             <a:prstGeom prst="rect">
@@ -4869,13 +4904,13 @@
         </p:sp>
         <p:sp>
           <p:nvSpPr>
-            <p:cNvPr id="34" name="tx34"/>
+            <p:cNvPr id="35" name="tx35"/>
             <p:cNvSpPr/>
             <p:nvPr/>
           </p:nvSpPr>
           <p:spPr>
             <a:xfrm>
-              <a:off x="2928340" y="5925448"/>
+              <a:off x="2928340" y="3662467"/>
               <a:ext cx="3578047" cy="100218"/>
             </a:xfrm>
             <a:prstGeom prst="rect">
@@ -4915,13 +4950,13 @@
         </p:sp>
         <p:sp>
           <p:nvSpPr>
-            <p:cNvPr id="35" name="tx35"/>
+            <p:cNvPr id="36" name="tx36"/>
             <p:cNvSpPr/>
             <p:nvPr/>
           </p:nvSpPr>
           <p:spPr>
             <a:xfrm rot="-5400000">
-              <a:off x="68446" y="3848213"/>
+              <a:off x="138035" y="2751517"/>
               <a:ext cx="1016904" cy="100218"/>
             </a:xfrm>
             <a:prstGeom prst="rect">
@@ -4961,13 +4996,13 @@
         </p:sp>
         <p:sp>
           <p:nvSpPr>
-            <p:cNvPr id="36" name="tx36"/>
+            <p:cNvPr id="37" name="tx37"/>
             <p:cNvSpPr/>
             <p:nvPr/>
           </p:nvSpPr>
           <p:spPr>
             <a:xfrm>
-              <a:off x="817517" y="1896563"/>
+              <a:off x="887106" y="1966152"/>
               <a:ext cx="7052127" cy="82021"/>
             </a:xfrm>
             <a:prstGeom prst="rect">
@@ -5007,13 +5042,3550 @@
         </p:sp>
         <p:sp>
           <p:nvSpPr>
-            <p:cNvPr id="37" name="tx37"/>
+            <p:cNvPr id="38" name="tx38"/>
             <p:cNvSpPr/>
             <p:nvPr/>
           </p:nvSpPr>
           <p:spPr>
             <a:xfrm>
-              <a:off x="817517" y="1669789"/>
+              <a:off x="887106" y="1739378"/>
+              <a:ext cx="2039386" cy="120152"/>
+            </a:xfrm>
+            <a:prstGeom prst="rect">
+              <a:avLst/>
+            </a:prstGeom>
+            <a:noFill/>
+          </p:spPr>
+          <p:txBody>
+            <a:bodyPr lIns="0" rIns="0" tIns="0" bIns="0" anchorCtr="1" anchor="ctr" wrap="none"/>
+            <a:lstStyle/>
+            <a:p>
+              <a:pPr algn="l" marL="0" marR="0" indent="0">
+                <a:lnSpc>
+                  <a:spcPts val="1320"/>
+                </a:lnSpc>
+                <a:spcBef>
+                  <a:spcPts val="0"/>
+                </a:spcBef>
+                <a:spcAft>
+                  <a:spcPts val="0"/>
+                </a:spcAft>
+              </a:pPr>
+              <a:r>
+                <a:rPr sz="1320">
+                  <a:solidFill>
+                    <a:srgbClr val="000000">
+                      <a:alpha val="100000"/>
+                    </a:srgbClr>
+                  </a:solidFill>
+                  <a:latin typeface="Helvetica"/>
+                  <a:cs typeface="Helvetica"/>
+                </a:rPr>
+                <a:t>Thrombocytopenia Grade 3</a:t>
+              </a:r>
+            </a:p>
+          </p:txBody>
+        </p:sp>
+        <p:sp>
+          <p:nvSpPr>
+            <p:cNvPr id="39" name="pl39"/>
+            <p:cNvSpPr/>
+            <p:nvPr/>
+          </p:nvSpPr>
+          <p:spPr>
+            <a:xfrm>
+              <a:off x="887106" y="5444019"/>
+              <a:ext cx="7660515" cy="0"/>
+            </a:xfrm>
+            <a:custGeom>
+              <a:avLst/>
+              <a:pathLst>
+                <a:path w="7660515" h="0">
+                  <a:moveTo>
+                    <a:pt x="0" y="0"/>
+                  </a:moveTo>
+                  <a:lnTo>
+                    <a:pt x="7660515" y="0"/>
+                  </a:lnTo>
+                  <a:lnTo>
+                    <a:pt x="7660515" y="0"/>
+                  </a:lnTo>
+                </a:path>
+              </a:pathLst>
+            </a:custGeom>
+            <a:ln w="6775" cap="flat">
+              <a:solidFill>
+                <a:srgbClr val="EBEBEB">
+                  <a:alpha val="100000"/>
+                </a:srgbClr>
+              </a:solidFill>
+              <a:prstDash val="solid"/>
+              <a:round/>
+            </a:ln>
+          </p:spPr>
+          <p:txBody>
+            <a:bodyPr/>
+            <a:lstStyle/>
+            <a:p/>
+          </p:txBody>
+        </p:sp>
+        <p:sp>
+          <p:nvSpPr>
+            <p:cNvPr id="40" name="pl40"/>
+            <p:cNvSpPr/>
+            <p:nvPr/>
+          </p:nvSpPr>
+          <p:spPr>
+            <a:xfrm>
+              <a:off x="887106" y="5144686"/>
+              <a:ext cx="7660515" cy="0"/>
+            </a:xfrm>
+            <a:custGeom>
+              <a:avLst/>
+              <a:pathLst>
+                <a:path w="7660515" h="0">
+                  <a:moveTo>
+                    <a:pt x="0" y="0"/>
+                  </a:moveTo>
+                  <a:lnTo>
+                    <a:pt x="7660515" y="0"/>
+                  </a:lnTo>
+                  <a:lnTo>
+                    <a:pt x="7660515" y="0"/>
+                  </a:lnTo>
+                </a:path>
+              </a:pathLst>
+            </a:custGeom>
+            <a:ln w="6775" cap="flat">
+              <a:solidFill>
+                <a:srgbClr val="EBEBEB">
+                  <a:alpha val="100000"/>
+                </a:srgbClr>
+              </a:solidFill>
+              <a:prstDash val="solid"/>
+              <a:round/>
+            </a:ln>
+          </p:spPr>
+          <p:txBody>
+            <a:bodyPr/>
+            <a:lstStyle/>
+            <a:p/>
+          </p:txBody>
+        </p:sp>
+        <p:sp>
+          <p:nvSpPr>
+            <p:cNvPr id="41" name="pl41"/>
+            <p:cNvSpPr/>
+            <p:nvPr/>
+          </p:nvSpPr>
+          <p:spPr>
+            <a:xfrm>
+              <a:off x="887106" y="4845352"/>
+              <a:ext cx="7660515" cy="0"/>
+            </a:xfrm>
+            <a:custGeom>
+              <a:avLst/>
+              <a:pathLst>
+                <a:path w="7660515" h="0">
+                  <a:moveTo>
+                    <a:pt x="0" y="0"/>
+                  </a:moveTo>
+                  <a:lnTo>
+                    <a:pt x="7660515" y="0"/>
+                  </a:lnTo>
+                  <a:lnTo>
+                    <a:pt x="7660515" y="0"/>
+                  </a:lnTo>
+                </a:path>
+              </a:pathLst>
+            </a:custGeom>
+            <a:ln w="6775" cap="flat">
+              <a:solidFill>
+                <a:srgbClr val="EBEBEB">
+                  <a:alpha val="100000"/>
+                </a:srgbClr>
+              </a:solidFill>
+              <a:prstDash val="solid"/>
+              <a:round/>
+            </a:ln>
+          </p:spPr>
+          <p:txBody>
+            <a:bodyPr/>
+            <a:lstStyle/>
+            <a:p/>
+          </p:txBody>
+        </p:sp>
+        <p:sp>
+          <p:nvSpPr>
+            <p:cNvPr id="42" name="pl42"/>
+            <p:cNvSpPr/>
+            <p:nvPr/>
+          </p:nvSpPr>
+          <p:spPr>
+            <a:xfrm>
+              <a:off x="887106" y="4546018"/>
+              <a:ext cx="7660515" cy="0"/>
+            </a:xfrm>
+            <a:custGeom>
+              <a:avLst/>
+              <a:pathLst>
+                <a:path w="7660515" h="0">
+                  <a:moveTo>
+                    <a:pt x="0" y="0"/>
+                  </a:moveTo>
+                  <a:lnTo>
+                    <a:pt x="7660515" y="0"/>
+                  </a:lnTo>
+                  <a:lnTo>
+                    <a:pt x="7660515" y="0"/>
+                  </a:lnTo>
+                </a:path>
+              </a:pathLst>
+            </a:custGeom>
+            <a:ln w="6775" cap="flat">
+              <a:solidFill>
+                <a:srgbClr val="EBEBEB">
+                  <a:alpha val="100000"/>
+                </a:srgbClr>
+              </a:solidFill>
+              <a:prstDash val="solid"/>
+              <a:round/>
+            </a:ln>
+          </p:spPr>
+          <p:txBody>
+            <a:bodyPr/>
+            <a:lstStyle/>
+            <a:p/>
+          </p:txBody>
+        </p:sp>
+        <p:sp>
+          <p:nvSpPr>
+            <p:cNvPr id="43" name="pl43"/>
+            <p:cNvSpPr/>
+            <p:nvPr/>
+          </p:nvSpPr>
+          <p:spPr>
+            <a:xfrm>
+              <a:off x="1636763" y="4336484"/>
+              <a:ext cx="0" cy="1317069"/>
+            </a:xfrm>
+            <a:custGeom>
+              <a:avLst/>
+              <a:pathLst>
+                <a:path w="0" h="1317069">
+                  <a:moveTo>
+                    <a:pt x="0" y="1317069"/>
+                  </a:moveTo>
+                  <a:lnTo>
+                    <a:pt x="0" y="0"/>
+                  </a:lnTo>
+                  <a:lnTo>
+                    <a:pt x="0" y="0"/>
+                  </a:lnTo>
+                </a:path>
+              </a:pathLst>
+            </a:custGeom>
+            <a:ln w="6775" cap="flat">
+              <a:solidFill>
+                <a:srgbClr val="EBEBEB">
+                  <a:alpha val="100000"/>
+                </a:srgbClr>
+              </a:solidFill>
+              <a:prstDash val="solid"/>
+              <a:round/>
+            </a:ln>
+          </p:spPr>
+          <p:txBody>
+            <a:bodyPr/>
+            <a:lstStyle/>
+            <a:p/>
+          </p:txBody>
+        </p:sp>
+        <p:sp>
+          <p:nvSpPr>
+            <p:cNvPr id="44" name="pl44"/>
+            <p:cNvSpPr/>
+            <p:nvPr/>
+          </p:nvSpPr>
+          <p:spPr>
+            <a:xfrm>
+              <a:off x="2482050" y="4336484"/>
+              <a:ext cx="0" cy="1317069"/>
+            </a:xfrm>
+            <a:custGeom>
+              <a:avLst/>
+              <a:pathLst>
+                <a:path w="0" h="1317069">
+                  <a:moveTo>
+                    <a:pt x="0" y="1317069"/>
+                  </a:moveTo>
+                  <a:lnTo>
+                    <a:pt x="0" y="0"/>
+                  </a:lnTo>
+                  <a:lnTo>
+                    <a:pt x="0" y="0"/>
+                  </a:lnTo>
+                </a:path>
+              </a:pathLst>
+            </a:custGeom>
+            <a:ln w="6775" cap="flat">
+              <a:solidFill>
+                <a:srgbClr val="EBEBEB">
+                  <a:alpha val="100000"/>
+                </a:srgbClr>
+              </a:solidFill>
+              <a:prstDash val="solid"/>
+              <a:round/>
+            </a:ln>
+          </p:spPr>
+          <p:txBody>
+            <a:bodyPr/>
+            <a:lstStyle/>
+            <a:p/>
+          </p:txBody>
+        </p:sp>
+        <p:sp>
+          <p:nvSpPr>
+            <p:cNvPr id="45" name="pl45"/>
+            <p:cNvSpPr/>
+            <p:nvPr/>
+          </p:nvSpPr>
+          <p:spPr>
+            <a:xfrm>
+              <a:off x="3327336" y="4336484"/>
+              <a:ext cx="0" cy="1317069"/>
+            </a:xfrm>
+            <a:custGeom>
+              <a:avLst/>
+              <a:pathLst>
+                <a:path w="0" h="1317069">
+                  <a:moveTo>
+                    <a:pt x="0" y="1317069"/>
+                  </a:moveTo>
+                  <a:lnTo>
+                    <a:pt x="0" y="0"/>
+                  </a:lnTo>
+                  <a:lnTo>
+                    <a:pt x="0" y="0"/>
+                  </a:lnTo>
+                </a:path>
+              </a:pathLst>
+            </a:custGeom>
+            <a:ln w="6775" cap="flat">
+              <a:solidFill>
+                <a:srgbClr val="EBEBEB">
+                  <a:alpha val="100000"/>
+                </a:srgbClr>
+              </a:solidFill>
+              <a:prstDash val="solid"/>
+              <a:round/>
+            </a:ln>
+          </p:spPr>
+          <p:txBody>
+            <a:bodyPr/>
+            <a:lstStyle/>
+            <a:p/>
+          </p:txBody>
+        </p:sp>
+        <p:sp>
+          <p:nvSpPr>
+            <p:cNvPr id="46" name="pl46"/>
+            <p:cNvSpPr/>
+            <p:nvPr/>
+          </p:nvSpPr>
+          <p:spPr>
+            <a:xfrm>
+              <a:off x="4172622" y="4336484"/>
+              <a:ext cx="0" cy="1317069"/>
+            </a:xfrm>
+            <a:custGeom>
+              <a:avLst/>
+              <a:pathLst>
+                <a:path w="0" h="1317069">
+                  <a:moveTo>
+                    <a:pt x="0" y="1317069"/>
+                  </a:moveTo>
+                  <a:lnTo>
+                    <a:pt x="0" y="0"/>
+                  </a:lnTo>
+                  <a:lnTo>
+                    <a:pt x="0" y="0"/>
+                  </a:lnTo>
+                </a:path>
+              </a:pathLst>
+            </a:custGeom>
+            <a:ln w="6775" cap="flat">
+              <a:solidFill>
+                <a:srgbClr val="EBEBEB">
+                  <a:alpha val="100000"/>
+                </a:srgbClr>
+              </a:solidFill>
+              <a:prstDash val="solid"/>
+              <a:round/>
+            </a:ln>
+          </p:spPr>
+          <p:txBody>
+            <a:bodyPr/>
+            <a:lstStyle/>
+            <a:p/>
+          </p:txBody>
+        </p:sp>
+        <p:sp>
+          <p:nvSpPr>
+            <p:cNvPr id="47" name="pl47"/>
+            <p:cNvSpPr/>
+            <p:nvPr/>
+          </p:nvSpPr>
+          <p:spPr>
+            <a:xfrm>
+              <a:off x="5017909" y="4336484"/>
+              <a:ext cx="0" cy="1317069"/>
+            </a:xfrm>
+            <a:custGeom>
+              <a:avLst/>
+              <a:pathLst>
+                <a:path w="0" h="1317069">
+                  <a:moveTo>
+                    <a:pt x="0" y="1317069"/>
+                  </a:moveTo>
+                  <a:lnTo>
+                    <a:pt x="0" y="0"/>
+                  </a:lnTo>
+                  <a:lnTo>
+                    <a:pt x="0" y="0"/>
+                  </a:lnTo>
+                </a:path>
+              </a:pathLst>
+            </a:custGeom>
+            <a:ln w="6775" cap="flat">
+              <a:solidFill>
+                <a:srgbClr val="EBEBEB">
+                  <a:alpha val="100000"/>
+                </a:srgbClr>
+              </a:solidFill>
+              <a:prstDash val="solid"/>
+              <a:round/>
+            </a:ln>
+          </p:spPr>
+          <p:txBody>
+            <a:bodyPr/>
+            <a:lstStyle/>
+            <a:p/>
+          </p:txBody>
+        </p:sp>
+        <p:sp>
+          <p:nvSpPr>
+            <p:cNvPr id="48" name="pl48"/>
+            <p:cNvSpPr/>
+            <p:nvPr/>
+          </p:nvSpPr>
+          <p:spPr>
+            <a:xfrm>
+              <a:off x="5863195" y="4336484"/>
+              <a:ext cx="0" cy="1317069"/>
+            </a:xfrm>
+            <a:custGeom>
+              <a:avLst/>
+              <a:pathLst>
+                <a:path w="0" h="1317069">
+                  <a:moveTo>
+                    <a:pt x="0" y="1317069"/>
+                  </a:moveTo>
+                  <a:lnTo>
+                    <a:pt x="0" y="0"/>
+                  </a:lnTo>
+                  <a:lnTo>
+                    <a:pt x="0" y="0"/>
+                  </a:lnTo>
+                </a:path>
+              </a:pathLst>
+            </a:custGeom>
+            <a:ln w="6775" cap="flat">
+              <a:solidFill>
+                <a:srgbClr val="EBEBEB">
+                  <a:alpha val="100000"/>
+                </a:srgbClr>
+              </a:solidFill>
+              <a:prstDash val="solid"/>
+              <a:round/>
+            </a:ln>
+          </p:spPr>
+          <p:txBody>
+            <a:bodyPr/>
+            <a:lstStyle/>
+            <a:p/>
+          </p:txBody>
+        </p:sp>
+        <p:sp>
+          <p:nvSpPr>
+            <p:cNvPr id="49" name="pl49"/>
+            <p:cNvSpPr/>
+            <p:nvPr/>
+          </p:nvSpPr>
+          <p:spPr>
+            <a:xfrm>
+              <a:off x="6708482" y="4336484"/>
+              <a:ext cx="0" cy="1317069"/>
+            </a:xfrm>
+            <a:custGeom>
+              <a:avLst/>
+              <a:pathLst>
+                <a:path w="0" h="1317069">
+                  <a:moveTo>
+                    <a:pt x="0" y="1317069"/>
+                  </a:moveTo>
+                  <a:lnTo>
+                    <a:pt x="0" y="0"/>
+                  </a:lnTo>
+                  <a:lnTo>
+                    <a:pt x="0" y="0"/>
+                  </a:lnTo>
+                </a:path>
+              </a:pathLst>
+            </a:custGeom>
+            <a:ln w="6775" cap="flat">
+              <a:solidFill>
+                <a:srgbClr val="EBEBEB">
+                  <a:alpha val="100000"/>
+                </a:srgbClr>
+              </a:solidFill>
+              <a:prstDash val="solid"/>
+              <a:round/>
+            </a:ln>
+          </p:spPr>
+          <p:txBody>
+            <a:bodyPr/>
+            <a:lstStyle/>
+            <a:p/>
+          </p:txBody>
+        </p:sp>
+        <p:sp>
+          <p:nvSpPr>
+            <p:cNvPr id="50" name="pl50"/>
+            <p:cNvSpPr/>
+            <p:nvPr/>
+          </p:nvSpPr>
+          <p:spPr>
+            <a:xfrm>
+              <a:off x="7553768" y="4336484"/>
+              <a:ext cx="0" cy="1317069"/>
+            </a:xfrm>
+            <a:custGeom>
+              <a:avLst/>
+              <a:pathLst>
+                <a:path w="0" h="1317069">
+                  <a:moveTo>
+                    <a:pt x="0" y="1317069"/>
+                  </a:moveTo>
+                  <a:lnTo>
+                    <a:pt x="0" y="0"/>
+                  </a:lnTo>
+                  <a:lnTo>
+                    <a:pt x="0" y="0"/>
+                  </a:lnTo>
+                </a:path>
+              </a:pathLst>
+            </a:custGeom>
+            <a:ln w="6775" cap="flat">
+              <a:solidFill>
+                <a:srgbClr val="EBEBEB">
+                  <a:alpha val="100000"/>
+                </a:srgbClr>
+              </a:solidFill>
+              <a:prstDash val="solid"/>
+              <a:round/>
+            </a:ln>
+          </p:spPr>
+          <p:txBody>
+            <a:bodyPr/>
+            <a:lstStyle/>
+            <a:p/>
+          </p:txBody>
+        </p:sp>
+        <p:sp>
+          <p:nvSpPr>
+            <p:cNvPr id="51" name="pl51"/>
+            <p:cNvSpPr/>
+            <p:nvPr/>
+          </p:nvSpPr>
+          <p:spPr>
+            <a:xfrm>
+              <a:off x="8399054" y="4336484"/>
+              <a:ext cx="0" cy="1317069"/>
+            </a:xfrm>
+            <a:custGeom>
+              <a:avLst/>
+              <a:pathLst>
+                <a:path w="0" h="1317069">
+                  <a:moveTo>
+                    <a:pt x="0" y="1317069"/>
+                  </a:moveTo>
+                  <a:lnTo>
+                    <a:pt x="0" y="0"/>
+                  </a:lnTo>
+                  <a:lnTo>
+                    <a:pt x="0" y="0"/>
+                  </a:lnTo>
+                </a:path>
+              </a:pathLst>
+            </a:custGeom>
+            <a:ln w="6775" cap="flat">
+              <a:solidFill>
+                <a:srgbClr val="EBEBEB">
+                  <a:alpha val="100000"/>
+                </a:srgbClr>
+              </a:solidFill>
+              <a:prstDash val="solid"/>
+              <a:round/>
+            </a:ln>
+          </p:spPr>
+          <p:txBody>
+            <a:bodyPr/>
+            <a:lstStyle/>
+            <a:p/>
+          </p:txBody>
+        </p:sp>
+        <p:sp>
+          <p:nvSpPr>
+            <p:cNvPr id="52" name="pl52"/>
+            <p:cNvSpPr/>
+            <p:nvPr/>
+          </p:nvSpPr>
+          <p:spPr>
+            <a:xfrm>
+              <a:off x="887106" y="5593686"/>
+              <a:ext cx="7660515" cy="0"/>
+            </a:xfrm>
+            <a:custGeom>
+              <a:avLst/>
+              <a:pathLst>
+                <a:path w="7660515" h="0">
+                  <a:moveTo>
+                    <a:pt x="0" y="0"/>
+                  </a:moveTo>
+                  <a:lnTo>
+                    <a:pt x="7660515" y="0"/>
+                  </a:lnTo>
+                  <a:lnTo>
+                    <a:pt x="7660515" y="0"/>
+                  </a:lnTo>
+                </a:path>
+              </a:pathLst>
+            </a:custGeom>
+            <a:ln w="13550" cap="flat">
+              <a:solidFill>
+                <a:srgbClr val="EBEBEB">
+                  <a:alpha val="100000"/>
+                </a:srgbClr>
+              </a:solidFill>
+              <a:prstDash val="solid"/>
+              <a:round/>
+            </a:ln>
+          </p:spPr>
+          <p:txBody>
+            <a:bodyPr/>
+            <a:lstStyle/>
+            <a:p/>
+          </p:txBody>
+        </p:sp>
+        <p:sp>
+          <p:nvSpPr>
+            <p:cNvPr id="53" name="pl53"/>
+            <p:cNvSpPr/>
+            <p:nvPr/>
+          </p:nvSpPr>
+          <p:spPr>
+            <a:xfrm>
+              <a:off x="887106" y="5294352"/>
+              <a:ext cx="7660515" cy="0"/>
+            </a:xfrm>
+            <a:custGeom>
+              <a:avLst/>
+              <a:pathLst>
+                <a:path w="7660515" h="0">
+                  <a:moveTo>
+                    <a:pt x="0" y="0"/>
+                  </a:moveTo>
+                  <a:lnTo>
+                    <a:pt x="7660515" y="0"/>
+                  </a:lnTo>
+                  <a:lnTo>
+                    <a:pt x="7660515" y="0"/>
+                  </a:lnTo>
+                </a:path>
+              </a:pathLst>
+            </a:custGeom>
+            <a:ln w="13550" cap="flat">
+              <a:solidFill>
+                <a:srgbClr val="EBEBEB">
+                  <a:alpha val="100000"/>
+                </a:srgbClr>
+              </a:solidFill>
+              <a:prstDash val="solid"/>
+              <a:round/>
+            </a:ln>
+          </p:spPr>
+          <p:txBody>
+            <a:bodyPr/>
+            <a:lstStyle/>
+            <a:p/>
+          </p:txBody>
+        </p:sp>
+        <p:sp>
+          <p:nvSpPr>
+            <p:cNvPr id="54" name="pl54"/>
+            <p:cNvSpPr/>
+            <p:nvPr/>
+          </p:nvSpPr>
+          <p:spPr>
+            <a:xfrm>
+              <a:off x="887106" y="4995019"/>
+              <a:ext cx="7660515" cy="0"/>
+            </a:xfrm>
+            <a:custGeom>
+              <a:avLst/>
+              <a:pathLst>
+                <a:path w="7660515" h="0">
+                  <a:moveTo>
+                    <a:pt x="0" y="0"/>
+                  </a:moveTo>
+                  <a:lnTo>
+                    <a:pt x="7660515" y="0"/>
+                  </a:lnTo>
+                  <a:lnTo>
+                    <a:pt x="7660515" y="0"/>
+                  </a:lnTo>
+                </a:path>
+              </a:pathLst>
+            </a:custGeom>
+            <a:ln w="13550" cap="flat">
+              <a:solidFill>
+                <a:srgbClr val="EBEBEB">
+                  <a:alpha val="100000"/>
+                </a:srgbClr>
+              </a:solidFill>
+              <a:prstDash val="solid"/>
+              <a:round/>
+            </a:ln>
+          </p:spPr>
+          <p:txBody>
+            <a:bodyPr/>
+            <a:lstStyle/>
+            <a:p/>
+          </p:txBody>
+        </p:sp>
+        <p:sp>
+          <p:nvSpPr>
+            <p:cNvPr id="55" name="pl55"/>
+            <p:cNvSpPr/>
+            <p:nvPr/>
+          </p:nvSpPr>
+          <p:spPr>
+            <a:xfrm>
+              <a:off x="887106" y="4695685"/>
+              <a:ext cx="7660515" cy="0"/>
+            </a:xfrm>
+            <a:custGeom>
+              <a:avLst/>
+              <a:pathLst>
+                <a:path w="7660515" h="0">
+                  <a:moveTo>
+                    <a:pt x="0" y="0"/>
+                  </a:moveTo>
+                  <a:lnTo>
+                    <a:pt x="7660515" y="0"/>
+                  </a:lnTo>
+                  <a:lnTo>
+                    <a:pt x="7660515" y="0"/>
+                  </a:lnTo>
+                </a:path>
+              </a:pathLst>
+            </a:custGeom>
+            <a:ln w="13550" cap="flat">
+              <a:solidFill>
+                <a:srgbClr val="EBEBEB">
+                  <a:alpha val="100000"/>
+                </a:srgbClr>
+              </a:solidFill>
+              <a:prstDash val="solid"/>
+              <a:round/>
+            </a:ln>
+          </p:spPr>
+          <p:txBody>
+            <a:bodyPr/>
+            <a:lstStyle/>
+            <a:p/>
+          </p:txBody>
+        </p:sp>
+        <p:sp>
+          <p:nvSpPr>
+            <p:cNvPr id="56" name="pl56"/>
+            <p:cNvSpPr/>
+            <p:nvPr/>
+          </p:nvSpPr>
+          <p:spPr>
+            <a:xfrm>
+              <a:off x="887106" y="4396351"/>
+              <a:ext cx="7660515" cy="0"/>
+            </a:xfrm>
+            <a:custGeom>
+              <a:avLst/>
+              <a:pathLst>
+                <a:path w="7660515" h="0">
+                  <a:moveTo>
+                    <a:pt x="0" y="0"/>
+                  </a:moveTo>
+                  <a:lnTo>
+                    <a:pt x="7660515" y="0"/>
+                  </a:lnTo>
+                  <a:lnTo>
+                    <a:pt x="7660515" y="0"/>
+                  </a:lnTo>
+                </a:path>
+              </a:pathLst>
+            </a:custGeom>
+            <a:ln w="13550" cap="flat">
+              <a:solidFill>
+                <a:srgbClr val="EBEBEB">
+                  <a:alpha val="100000"/>
+                </a:srgbClr>
+              </a:solidFill>
+              <a:prstDash val="solid"/>
+              <a:round/>
+            </a:ln>
+          </p:spPr>
+          <p:txBody>
+            <a:bodyPr/>
+            <a:lstStyle/>
+            <a:p/>
+          </p:txBody>
+        </p:sp>
+        <p:sp>
+          <p:nvSpPr>
+            <p:cNvPr id="57" name="pl57"/>
+            <p:cNvSpPr/>
+            <p:nvPr/>
+          </p:nvSpPr>
+          <p:spPr>
+            <a:xfrm>
+              <a:off x="1214120" y="4336484"/>
+              <a:ext cx="0" cy="1317069"/>
+            </a:xfrm>
+            <a:custGeom>
+              <a:avLst/>
+              <a:pathLst>
+                <a:path w="0" h="1317069">
+                  <a:moveTo>
+                    <a:pt x="0" y="1317069"/>
+                  </a:moveTo>
+                  <a:lnTo>
+                    <a:pt x="0" y="0"/>
+                  </a:lnTo>
+                  <a:lnTo>
+                    <a:pt x="0" y="0"/>
+                  </a:lnTo>
+                </a:path>
+              </a:pathLst>
+            </a:custGeom>
+            <a:ln w="13550" cap="flat">
+              <a:solidFill>
+                <a:srgbClr val="EBEBEB">
+                  <a:alpha val="100000"/>
+                </a:srgbClr>
+              </a:solidFill>
+              <a:prstDash val="solid"/>
+              <a:round/>
+            </a:ln>
+          </p:spPr>
+          <p:txBody>
+            <a:bodyPr/>
+            <a:lstStyle/>
+            <a:p/>
+          </p:txBody>
+        </p:sp>
+        <p:sp>
+          <p:nvSpPr>
+            <p:cNvPr id="58" name="pl58"/>
+            <p:cNvSpPr/>
+            <p:nvPr/>
+          </p:nvSpPr>
+          <p:spPr>
+            <a:xfrm>
+              <a:off x="2059406" y="4336484"/>
+              <a:ext cx="0" cy="1317069"/>
+            </a:xfrm>
+            <a:custGeom>
+              <a:avLst/>
+              <a:pathLst>
+                <a:path w="0" h="1317069">
+                  <a:moveTo>
+                    <a:pt x="0" y="1317069"/>
+                  </a:moveTo>
+                  <a:lnTo>
+                    <a:pt x="0" y="0"/>
+                  </a:lnTo>
+                  <a:lnTo>
+                    <a:pt x="0" y="0"/>
+                  </a:lnTo>
+                </a:path>
+              </a:pathLst>
+            </a:custGeom>
+            <a:ln w="13550" cap="flat">
+              <a:solidFill>
+                <a:srgbClr val="EBEBEB">
+                  <a:alpha val="100000"/>
+                </a:srgbClr>
+              </a:solidFill>
+              <a:prstDash val="solid"/>
+              <a:round/>
+            </a:ln>
+          </p:spPr>
+          <p:txBody>
+            <a:bodyPr/>
+            <a:lstStyle/>
+            <a:p/>
+          </p:txBody>
+        </p:sp>
+        <p:sp>
+          <p:nvSpPr>
+            <p:cNvPr id="59" name="pl59"/>
+            <p:cNvSpPr/>
+            <p:nvPr/>
+          </p:nvSpPr>
+          <p:spPr>
+            <a:xfrm>
+              <a:off x="2904693" y="4336484"/>
+              <a:ext cx="0" cy="1317069"/>
+            </a:xfrm>
+            <a:custGeom>
+              <a:avLst/>
+              <a:pathLst>
+                <a:path w="0" h="1317069">
+                  <a:moveTo>
+                    <a:pt x="0" y="1317069"/>
+                  </a:moveTo>
+                  <a:lnTo>
+                    <a:pt x="0" y="0"/>
+                  </a:lnTo>
+                  <a:lnTo>
+                    <a:pt x="0" y="0"/>
+                  </a:lnTo>
+                </a:path>
+              </a:pathLst>
+            </a:custGeom>
+            <a:ln w="13550" cap="flat">
+              <a:solidFill>
+                <a:srgbClr val="EBEBEB">
+                  <a:alpha val="100000"/>
+                </a:srgbClr>
+              </a:solidFill>
+              <a:prstDash val="solid"/>
+              <a:round/>
+            </a:ln>
+          </p:spPr>
+          <p:txBody>
+            <a:bodyPr/>
+            <a:lstStyle/>
+            <a:p/>
+          </p:txBody>
+        </p:sp>
+        <p:sp>
+          <p:nvSpPr>
+            <p:cNvPr id="60" name="pl60"/>
+            <p:cNvSpPr/>
+            <p:nvPr/>
+          </p:nvSpPr>
+          <p:spPr>
+            <a:xfrm>
+              <a:off x="3749979" y="4336484"/>
+              <a:ext cx="0" cy="1317069"/>
+            </a:xfrm>
+            <a:custGeom>
+              <a:avLst/>
+              <a:pathLst>
+                <a:path w="0" h="1317069">
+                  <a:moveTo>
+                    <a:pt x="0" y="1317069"/>
+                  </a:moveTo>
+                  <a:lnTo>
+                    <a:pt x="0" y="0"/>
+                  </a:lnTo>
+                  <a:lnTo>
+                    <a:pt x="0" y="0"/>
+                  </a:lnTo>
+                </a:path>
+              </a:pathLst>
+            </a:custGeom>
+            <a:ln w="13550" cap="flat">
+              <a:solidFill>
+                <a:srgbClr val="EBEBEB">
+                  <a:alpha val="100000"/>
+                </a:srgbClr>
+              </a:solidFill>
+              <a:prstDash val="solid"/>
+              <a:round/>
+            </a:ln>
+          </p:spPr>
+          <p:txBody>
+            <a:bodyPr/>
+            <a:lstStyle/>
+            <a:p/>
+          </p:txBody>
+        </p:sp>
+        <p:sp>
+          <p:nvSpPr>
+            <p:cNvPr id="61" name="pl61"/>
+            <p:cNvSpPr/>
+            <p:nvPr/>
+          </p:nvSpPr>
+          <p:spPr>
+            <a:xfrm>
+              <a:off x="4595266" y="4336484"/>
+              <a:ext cx="0" cy="1317069"/>
+            </a:xfrm>
+            <a:custGeom>
+              <a:avLst/>
+              <a:pathLst>
+                <a:path w="0" h="1317069">
+                  <a:moveTo>
+                    <a:pt x="0" y="1317069"/>
+                  </a:moveTo>
+                  <a:lnTo>
+                    <a:pt x="0" y="0"/>
+                  </a:lnTo>
+                  <a:lnTo>
+                    <a:pt x="0" y="0"/>
+                  </a:lnTo>
+                </a:path>
+              </a:pathLst>
+            </a:custGeom>
+            <a:ln w="13550" cap="flat">
+              <a:solidFill>
+                <a:srgbClr val="EBEBEB">
+                  <a:alpha val="100000"/>
+                </a:srgbClr>
+              </a:solidFill>
+              <a:prstDash val="solid"/>
+              <a:round/>
+            </a:ln>
+          </p:spPr>
+          <p:txBody>
+            <a:bodyPr/>
+            <a:lstStyle/>
+            <a:p/>
+          </p:txBody>
+        </p:sp>
+        <p:sp>
+          <p:nvSpPr>
+            <p:cNvPr id="62" name="pl62"/>
+            <p:cNvSpPr/>
+            <p:nvPr/>
+          </p:nvSpPr>
+          <p:spPr>
+            <a:xfrm>
+              <a:off x="5440552" y="4336484"/>
+              <a:ext cx="0" cy="1317069"/>
+            </a:xfrm>
+            <a:custGeom>
+              <a:avLst/>
+              <a:pathLst>
+                <a:path w="0" h="1317069">
+                  <a:moveTo>
+                    <a:pt x="0" y="1317069"/>
+                  </a:moveTo>
+                  <a:lnTo>
+                    <a:pt x="0" y="0"/>
+                  </a:lnTo>
+                  <a:lnTo>
+                    <a:pt x="0" y="0"/>
+                  </a:lnTo>
+                </a:path>
+              </a:pathLst>
+            </a:custGeom>
+            <a:ln w="13550" cap="flat">
+              <a:solidFill>
+                <a:srgbClr val="EBEBEB">
+                  <a:alpha val="100000"/>
+                </a:srgbClr>
+              </a:solidFill>
+              <a:prstDash val="solid"/>
+              <a:round/>
+            </a:ln>
+          </p:spPr>
+          <p:txBody>
+            <a:bodyPr/>
+            <a:lstStyle/>
+            <a:p/>
+          </p:txBody>
+        </p:sp>
+        <p:sp>
+          <p:nvSpPr>
+            <p:cNvPr id="63" name="pl63"/>
+            <p:cNvSpPr/>
+            <p:nvPr/>
+          </p:nvSpPr>
+          <p:spPr>
+            <a:xfrm>
+              <a:off x="6285838" y="4336484"/>
+              <a:ext cx="0" cy="1317069"/>
+            </a:xfrm>
+            <a:custGeom>
+              <a:avLst/>
+              <a:pathLst>
+                <a:path w="0" h="1317069">
+                  <a:moveTo>
+                    <a:pt x="0" y="1317069"/>
+                  </a:moveTo>
+                  <a:lnTo>
+                    <a:pt x="0" y="0"/>
+                  </a:lnTo>
+                  <a:lnTo>
+                    <a:pt x="0" y="0"/>
+                  </a:lnTo>
+                </a:path>
+              </a:pathLst>
+            </a:custGeom>
+            <a:ln w="13550" cap="flat">
+              <a:solidFill>
+                <a:srgbClr val="EBEBEB">
+                  <a:alpha val="100000"/>
+                </a:srgbClr>
+              </a:solidFill>
+              <a:prstDash val="solid"/>
+              <a:round/>
+            </a:ln>
+          </p:spPr>
+          <p:txBody>
+            <a:bodyPr/>
+            <a:lstStyle/>
+            <a:p/>
+          </p:txBody>
+        </p:sp>
+        <p:sp>
+          <p:nvSpPr>
+            <p:cNvPr id="64" name="pl64"/>
+            <p:cNvSpPr/>
+            <p:nvPr/>
+          </p:nvSpPr>
+          <p:spPr>
+            <a:xfrm>
+              <a:off x="7131125" y="4336484"/>
+              <a:ext cx="0" cy="1317069"/>
+            </a:xfrm>
+            <a:custGeom>
+              <a:avLst/>
+              <a:pathLst>
+                <a:path w="0" h="1317069">
+                  <a:moveTo>
+                    <a:pt x="0" y="1317069"/>
+                  </a:moveTo>
+                  <a:lnTo>
+                    <a:pt x="0" y="0"/>
+                  </a:lnTo>
+                  <a:lnTo>
+                    <a:pt x="0" y="0"/>
+                  </a:lnTo>
+                </a:path>
+              </a:pathLst>
+            </a:custGeom>
+            <a:ln w="13550" cap="flat">
+              <a:solidFill>
+                <a:srgbClr val="EBEBEB">
+                  <a:alpha val="100000"/>
+                </a:srgbClr>
+              </a:solidFill>
+              <a:prstDash val="solid"/>
+              <a:round/>
+            </a:ln>
+          </p:spPr>
+          <p:txBody>
+            <a:bodyPr/>
+            <a:lstStyle/>
+            <a:p/>
+          </p:txBody>
+        </p:sp>
+        <p:sp>
+          <p:nvSpPr>
+            <p:cNvPr id="65" name="pl65"/>
+            <p:cNvSpPr/>
+            <p:nvPr/>
+          </p:nvSpPr>
+          <p:spPr>
+            <a:xfrm>
+              <a:off x="7976411" y="4336484"/>
+              <a:ext cx="0" cy="1317069"/>
+            </a:xfrm>
+            <a:custGeom>
+              <a:avLst/>
+              <a:pathLst>
+                <a:path w="0" h="1317069">
+                  <a:moveTo>
+                    <a:pt x="0" y="1317069"/>
+                  </a:moveTo>
+                  <a:lnTo>
+                    <a:pt x="0" y="0"/>
+                  </a:lnTo>
+                  <a:lnTo>
+                    <a:pt x="0" y="0"/>
+                  </a:lnTo>
+                </a:path>
+              </a:pathLst>
+            </a:custGeom>
+            <a:ln w="13550" cap="flat">
+              <a:solidFill>
+                <a:srgbClr val="EBEBEB">
+                  <a:alpha val="100000"/>
+                </a:srgbClr>
+              </a:solidFill>
+              <a:prstDash val="solid"/>
+              <a:round/>
+            </a:ln>
+          </p:spPr>
+          <p:txBody>
+            <a:bodyPr/>
+            <a:lstStyle/>
+            <a:p/>
+          </p:txBody>
+        </p:sp>
+        <p:sp>
+          <p:nvSpPr>
+            <p:cNvPr id="66" name="pg66"/>
+            <p:cNvSpPr/>
+            <p:nvPr/>
+          </p:nvSpPr>
+          <p:spPr>
+            <a:xfrm>
+              <a:off x="1235312" y="4336484"/>
+              <a:ext cx="6964104" cy="1238724"/>
+            </a:xfrm>
+            <a:custGeom>
+              <a:avLst/>
+              <a:pathLst>
+                <a:path w="6964104" h="1238724">
+                  <a:moveTo>
+                    <a:pt x="1495848" y="0"/>
+                  </a:moveTo>
+                  <a:lnTo>
+                    <a:pt x="1547578" y="49542"/>
+                  </a:lnTo>
+                  <a:lnTo>
+                    <a:pt x="1617923" y="113351"/>
+                  </a:lnTo>
+                  <a:lnTo>
+                    <a:pt x="1688267" y="173789"/>
+                  </a:lnTo>
+                  <a:lnTo>
+                    <a:pt x="1758612" y="231033"/>
+                  </a:lnTo>
+                  <a:lnTo>
+                    <a:pt x="1828956" y="285253"/>
+                  </a:lnTo>
+                  <a:lnTo>
+                    <a:pt x="1899301" y="336608"/>
+                  </a:lnTo>
+                  <a:lnTo>
+                    <a:pt x="1969645" y="385249"/>
+                  </a:lnTo>
+                  <a:lnTo>
+                    <a:pt x="2039990" y="431320"/>
+                  </a:lnTo>
+                  <a:lnTo>
+                    <a:pt x="2110334" y="474958"/>
+                  </a:lnTo>
+                  <a:lnTo>
+                    <a:pt x="2180679" y="516289"/>
+                  </a:lnTo>
+                  <a:lnTo>
+                    <a:pt x="2251023" y="555437"/>
+                  </a:lnTo>
+                  <a:lnTo>
+                    <a:pt x="2321368" y="592516"/>
+                  </a:lnTo>
+                  <a:lnTo>
+                    <a:pt x="2391712" y="627636"/>
+                  </a:lnTo>
+                  <a:lnTo>
+                    <a:pt x="2462057" y="660900"/>
+                  </a:lnTo>
+                  <a:lnTo>
+                    <a:pt x="2532401" y="692407"/>
+                  </a:lnTo>
+                  <a:lnTo>
+                    <a:pt x="2602746" y="722249"/>
+                  </a:lnTo>
+                  <a:lnTo>
+                    <a:pt x="2673090" y="750515"/>
+                  </a:lnTo>
+                  <a:lnTo>
+                    <a:pt x="2743435" y="777286"/>
+                  </a:lnTo>
+                  <a:lnTo>
+                    <a:pt x="2813779" y="802644"/>
+                  </a:lnTo>
+                  <a:lnTo>
+                    <a:pt x="2884124" y="826661"/>
+                  </a:lnTo>
+                  <a:lnTo>
+                    <a:pt x="2954468" y="849410"/>
+                  </a:lnTo>
+                  <a:lnTo>
+                    <a:pt x="3024813" y="870956"/>
+                  </a:lnTo>
+                  <a:lnTo>
+                    <a:pt x="3095157" y="891364"/>
+                  </a:lnTo>
+                  <a:lnTo>
+                    <a:pt x="3165502" y="910694"/>
+                  </a:lnTo>
+                  <a:lnTo>
+                    <a:pt x="3235846" y="929002"/>
+                  </a:lnTo>
+                  <a:lnTo>
+                    <a:pt x="3306191" y="946344"/>
+                  </a:lnTo>
+                  <a:lnTo>
+                    <a:pt x="3376535" y="959723"/>
+                  </a:lnTo>
+                  <a:lnTo>
+                    <a:pt x="3446880" y="965741"/>
+                  </a:lnTo>
+                  <a:lnTo>
+                    <a:pt x="3517224" y="971638"/>
+                  </a:lnTo>
+                  <a:lnTo>
+                    <a:pt x="3587569" y="977416"/>
+                  </a:lnTo>
+                  <a:lnTo>
+                    <a:pt x="3657913" y="983076"/>
+                  </a:lnTo>
+                  <a:lnTo>
+                    <a:pt x="3728257" y="988622"/>
+                  </a:lnTo>
+                  <a:lnTo>
+                    <a:pt x="3798602" y="994056"/>
+                  </a:lnTo>
+                  <a:lnTo>
+                    <a:pt x="3868946" y="999380"/>
+                  </a:lnTo>
+                  <a:lnTo>
+                    <a:pt x="3939291" y="1004597"/>
+                  </a:lnTo>
+                  <a:lnTo>
+                    <a:pt x="4009635" y="1009707"/>
+                  </a:lnTo>
+                  <a:lnTo>
+                    <a:pt x="4079980" y="1014715"/>
+                  </a:lnTo>
+                  <a:lnTo>
+                    <a:pt x="4150324" y="1019621"/>
+                  </a:lnTo>
+                  <a:lnTo>
+                    <a:pt x="4220669" y="1024427"/>
+                  </a:lnTo>
+                  <a:lnTo>
+                    <a:pt x="4291013" y="1029137"/>
+                  </a:lnTo>
+                  <a:lnTo>
+                    <a:pt x="4361358" y="1033751"/>
+                  </a:lnTo>
+                  <a:lnTo>
+                    <a:pt x="4431702" y="1038272"/>
+                  </a:lnTo>
+                  <a:lnTo>
+                    <a:pt x="4502047" y="1042701"/>
+                  </a:lnTo>
+                  <a:lnTo>
+                    <a:pt x="4572391" y="1047041"/>
+                  </a:lnTo>
+                  <a:lnTo>
+                    <a:pt x="4642736" y="1051293"/>
+                  </a:lnTo>
+                  <a:lnTo>
+                    <a:pt x="4713080" y="1055459"/>
+                  </a:lnTo>
+                  <a:lnTo>
+                    <a:pt x="4783425" y="1059541"/>
+                  </a:lnTo>
+                  <a:lnTo>
+                    <a:pt x="4853769" y="1063540"/>
+                  </a:lnTo>
+                  <a:lnTo>
+                    <a:pt x="4924114" y="1067458"/>
+                  </a:lnTo>
+                  <a:lnTo>
+                    <a:pt x="4994458" y="1071297"/>
+                  </a:lnTo>
+                  <a:lnTo>
+                    <a:pt x="5064803" y="1075058"/>
+                  </a:lnTo>
+                  <a:lnTo>
+                    <a:pt x="5135147" y="1078743"/>
+                  </a:lnTo>
+                  <a:lnTo>
+                    <a:pt x="5205492" y="1082354"/>
+                  </a:lnTo>
+                  <a:lnTo>
+                    <a:pt x="5275836" y="1085892"/>
+                  </a:lnTo>
+                  <a:lnTo>
+                    <a:pt x="5346181" y="1089358"/>
+                  </a:lnTo>
+                  <a:lnTo>
+                    <a:pt x="5416525" y="1092753"/>
+                  </a:lnTo>
+                  <a:lnTo>
+                    <a:pt x="5486870" y="1096081"/>
+                  </a:lnTo>
+                  <a:lnTo>
+                    <a:pt x="5557214" y="1099340"/>
+                  </a:lnTo>
+                  <a:lnTo>
+                    <a:pt x="5627559" y="1102534"/>
+                  </a:lnTo>
+                  <a:lnTo>
+                    <a:pt x="5697903" y="1105663"/>
+                  </a:lnTo>
+                  <a:lnTo>
+                    <a:pt x="5768248" y="1108729"/>
+                  </a:lnTo>
+                  <a:lnTo>
+                    <a:pt x="5838592" y="1111733"/>
+                  </a:lnTo>
+                  <a:lnTo>
+                    <a:pt x="5908937" y="1114676"/>
+                  </a:lnTo>
+                  <a:lnTo>
+                    <a:pt x="5979281" y="1117560"/>
+                  </a:lnTo>
+                  <a:lnTo>
+                    <a:pt x="6049626" y="1120385"/>
+                  </a:lnTo>
+                  <a:lnTo>
+                    <a:pt x="6119970" y="1123153"/>
+                  </a:lnTo>
+                  <a:lnTo>
+                    <a:pt x="6190315" y="1125865"/>
+                  </a:lnTo>
+                  <a:lnTo>
+                    <a:pt x="6260659" y="1128523"/>
+                  </a:lnTo>
+                  <a:lnTo>
+                    <a:pt x="6331004" y="1131126"/>
+                  </a:lnTo>
+                  <a:lnTo>
+                    <a:pt x="6401348" y="1133677"/>
+                  </a:lnTo>
+                  <a:lnTo>
+                    <a:pt x="6471693" y="1136176"/>
+                  </a:lnTo>
+                  <a:lnTo>
+                    <a:pt x="6542037" y="1138625"/>
+                  </a:lnTo>
+                  <a:lnTo>
+                    <a:pt x="6612382" y="1141024"/>
+                  </a:lnTo>
+                  <a:lnTo>
+                    <a:pt x="6682726" y="1143374"/>
+                  </a:lnTo>
+                  <a:lnTo>
+                    <a:pt x="6753071" y="1145677"/>
+                  </a:lnTo>
+                  <a:lnTo>
+                    <a:pt x="6823415" y="1147934"/>
+                  </a:lnTo>
+                  <a:lnTo>
+                    <a:pt x="6893760" y="1150144"/>
+                  </a:lnTo>
+                  <a:lnTo>
+                    <a:pt x="6964104" y="1152310"/>
+                  </a:lnTo>
+                  <a:lnTo>
+                    <a:pt x="6964104" y="1238724"/>
+                  </a:lnTo>
+                  <a:lnTo>
+                    <a:pt x="6893760" y="1237693"/>
+                  </a:lnTo>
+                  <a:lnTo>
+                    <a:pt x="6823415" y="1236605"/>
+                  </a:lnTo>
+                  <a:lnTo>
+                    <a:pt x="6753071" y="1235456"/>
+                  </a:lnTo>
+                  <a:lnTo>
+                    <a:pt x="6682726" y="1234243"/>
+                  </a:lnTo>
+                  <a:lnTo>
+                    <a:pt x="6612382" y="1232962"/>
+                  </a:lnTo>
+                  <a:lnTo>
+                    <a:pt x="6542037" y="1231610"/>
+                  </a:lnTo>
+                  <a:lnTo>
+                    <a:pt x="6471693" y="1230182"/>
+                  </a:lnTo>
+                  <a:lnTo>
+                    <a:pt x="6401348" y="1228675"/>
+                  </a:lnTo>
+                  <a:lnTo>
+                    <a:pt x="6331004" y="1227084"/>
+                  </a:lnTo>
+                  <a:lnTo>
+                    <a:pt x="6260659" y="1225404"/>
+                  </a:lnTo>
+                  <a:lnTo>
+                    <a:pt x="6190315" y="1223630"/>
+                  </a:lnTo>
+                  <a:lnTo>
+                    <a:pt x="6119970" y="1221757"/>
+                  </a:lnTo>
+                  <a:lnTo>
+                    <a:pt x="6049626" y="1219780"/>
+                  </a:lnTo>
+                  <a:lnTo>
+                    <a:pt x="5979281" y="1217692"/>
+                  </a:lnTo>
+                  <a:lnTo>
+                    <a:pt x="5908937" y="1215488"/>
+                  </a:lnTo>
+                  <a:lnTo>
+                    <a:pt x="5838592" y="1213161"/>
+                  </a:lnTo>
+                  <a:lnTo>
+                    <a:pt x="5768248" y="1210705"/>
+                  </a:lnTo>
+                  <a:lnTo>
+                    <a:pt x="5697903" y="1208111"/>
+                  </a:lnTo>
+                  <a:lnTo>
+                    <a:pt x="5627559" y="1205372"/>
+                  </a:lnTo>
+                  <a:lnTo>
+                    <a:pt x="5557214" y="1202481"/>
+                  </a:lnTo>
+                  <a:lnTo>
+                    <a:pt x="5486870" y="1199428"/>
+                  </a:lnTo>
+                  <a:lnTo>
+                    <a:pt x="5416525" y="1196205"/>
+                  </a:lnTo>
+                  <a:lnTo>
+                    <a:pt x="5346181" y="1192803"/>
+                  </a:lnTo>
+                  <a:lnTo>
+                    <a:pt x="5275836" y="1189210"/>
+                  </a:lnTo>
+                  <a:lnTo>
+                    <a:pt x="5205492" y="1185417"/>
+                  </a:lnTo>
+                  <a:lnTo>
+                    <a:pt x="5135147" y="1181413"/>
+                  </a:lnTo>
+                  <a:lnTo>
+                    <a:pt x="5064803" y="1177185"/>
+                  </a:lnTo>
+                  <a:lnTo>
+                    <a:pt x="4994458" y="1172722"/>
+                  </a:lnTo>
+                  <a:lnTo>
+                    <a:pt x="4924114" y="1168009"/>
+                  </a:lnTo>
+                  <a:lnTo>
+                    <a:pt x="4853769" y="1163033"/>
+                  </a:lnTo>
+                  <a:lnTo>
+                    <a:pt x="4783425" y="1157780"/>
+                  </a:lnTo>
+                  <a:lnTo>
+                    <a:pt x="4713080" y="1152234"/>
+                  </a:lnTo>
+                  <a:lnTo>
+                    <a:pt x="4642736" y="1146378"/>
+                  </a:lnTo>
+                  <a:lnTo>
+                    <a:pt x="4572391" y="1140196"/>
+                  </a:lnTo>
+                  <a:lnTo>
+                    <a:pt x="4502047" y="1133669"/>
+                  </a:lnTo>
+                  <a:lnTo>
+                    <a:pt x="4431702" y="1126778"/>
+                  </a:lnTo>
+                  <a:lnTo>
+                    <a:pt x="4361358" y="1119502"/>
+                  </a:lnTo>
+                  <a:lnTo>
+                    <a:pt x="4291013" y="1111821"/>
+                  </a:lnTo>
+                  <a:lnTo>
+                    <a:pt x="4220669" y="1103711"/>
+                  </a:lnTo>
+                  <a:lnTo>
+                    <a:pt x="4150324" y="1095148"/>
+                  </a:lnTo>
+                  <a:lnTo>
+                    <a:pt x="4079980" y="1086108"/>
+                  </a:lnTo>
+                  <a:lnTo>
+                    <a:pt x="4009635" y="1076564"/>
+                  </a:lnTo>
+                  <a:lnTo>
+                    <a:pt x="3939291" y="1066487"/>
+                  </a:lnTo>
+                  <a:lnTo>
+                    <a:pt x="3868946" y="1055848"/>
+                  </a:lnTo>
+                  <a:lnTo>
+                    <a:pt x="3798602" y="1044615"/>
+                  </a:lnTo>
+                  <a:lnTo>
+                    <a:pt x="3728257" y="1032756"/>
+                  </a:lnTo>
+                  <a:lnTo>
+                    <a:pt x="3657913" y="1020236"/>
+                  </a:lnTo>
+                  <a:lnTo>
+                    <a:pt x="3587569" y="1007017"/>
+                  </a:lnTo>
+                  <a:lnTo>
+                    <a:pt x="3517224" y="993060"/>
+                  </a:lnTo>
+                  <a:lnTo>
+                    <a:pt x="3446880" y="978325"/>
+                  </a:lnTo>
+                  <a:lnTo>
+                    <a:pt x="3376535" y="962768"/>
+                  </a:lnTo>
+                  <a:lnTo>
+                    <a:pt x="3306191" y="953580"/>
+                  </a:lnTo>
+                  <a:lnTo>
+                    <a:pt x="3235846" y="947310"/>
+                  </a:lnTo>
+                  <a:lnTo>
+                    <a:pt x="3165502" y="940911"/>
+                  </a:lnTo>
+                  <a:lnTo>
+                    <a:pt x="3095157" y="934379"/>
+                  </a:lnTo>
+                  <a:lnTo>
+                    <a:pt x="3024813" y="927713"/>
+                  </a:lnTo>
+                  <a:lnTo>
+                    <a:pt x="2954468" y="920909"/>
+                  </a:lnTo>
+                  <a:lnTo>
+                    <a:pt x="2884124" y="913965"/>
+                  </a:lnTo>
+                  <a:lnTo>
+                    <a:pt x="2813779" y="906877"/>
+                  </a:lnTo>
+                  <a:lnTo>
+                    <a:pt x="2743435" y="899643"/>
+                  </a:lnTo>
+                  <a:lnTo>
+                    <a:pt x="2673090" y="892259"/>
+                  </a:lnTo>
+                  <a:lnTo>
+                    <a:pt x="2602746" y="884723"/>
+                  </a:lnTo>
+                  <a:lnTo>
+                    <a:pt x="2532401" y="877032"/>
+                  </a:lnTo>
+                  <a:lnTo>
+                    <a:pt x="2462057" y="869181"/>
+                  </a:lnTo>
+                  <a:lnTo>
+                    <a:pt x="2391712" y="861169"/>
+                  </a:lnTo>
+                  <a:lnTo>
+                    <a:pt x="2321368" y="852990"/>
+                  </a:lnTo>
+                  <a:lnTo>
+                    <a:pt x="2251023" y="844644"/>
+                  </a:lnTo>
+                  <a:lnTo>
+                    <a:pt x="2180679" y="836124"/>
+                  </a:lnTo>
+                  <a:lnTo>
+                    <a:pt x="2110334" y="827429"/>
+                  </a:lnTo>
+                  <a:lnTo>
+                    <a:pt x="2039990" y="818554"/>
+                  </a:lnTo>
+                  <a:lnTo>
+                    <a:pt x="1969645" y="809496"/>
+                  </a:lnTo>
+                  <a:lnTo>
+                    <a:pt x="1899301" y="800251"/>
+                  </a:lnTo>
+                  <a:lnTo>
+                    <a:pt x="1828956" y="790815"/>
+                  </a:lnTo>
+                  <a:lnTo>
+                    <a:pt x="1758612" y="781184"/>
+                  </a:lnTo>
+                  <a:lnTo>
+                    <a:pt x="1688267" y="771355"/>
+                  </a:lnTo>
+                  <a:lnTo>
+                    <a:pt x="1617923" y="761322"/>
+                  </a:lnTo>
+                  <a:lnTo>
+                    <a:pt x="1547578" y="751082"/>
+                  </a:lnTo>
+                  <a:lnTo>
+                    <a:pt x="1477234" y="740631"/>
+                  </a:lnTo>
+                  <a:lnTo>
+                    <a:pt x="1406889" y="729964"/>
+                  </a:lnTo>
+                  <a:lnTo>
+                    <a:pt x="1336545" y="719076"/>
+                  </a:lnTo>
+                  <a:lnTo>
+                    <a:pt x="1266200" y="707964"/>
+                  </a:lnTo>
+                  <a:lnTo>
+                    <a:pt x="1195856" y="696622"/>
+                  </a:lnTo>
+                  <a:lnTo>
+                    <a:pt x="1125511" y="685047"/>
+                  </a:lnTo>
+                  <a:lnTo>
+                    <a:pt x="1055167" y="673232"/>
+                  </a:lnTo>
+                  <a:lnTo>
+                    <a:pt x="984822" y="661173"/>
+                  </a:lnTo>
+                  <a:lnTo>
+                    <a:pt x="914478" y="648865"/>
+                  </a:lnTo>
+                  <a:lnTo>
+                    <a:pt x="844133" y="636303"/>
+                  </a:lnTo>
+                  <a:lnTo>
+                    <a:pt x="773789" y="623481"/>
+                  </a:lnTo>
+                  <a:lnTo>
+                    <a:pt x="703444" y="610395"/>
+                  </a:lnTo>
+                  <a:lnTo>
+                    <a:pt x="633100" y="597038"/>
+                  </a:lnTo>
+                  <a:lnTo>
+                    <a:pt x="562755" y="583406"/>
+                  </a:lnTo>
+                  <a:lnTo>
+                    <a:pt x="492411" y="569492"/>
+                  </a:lnTo>
+                  <a:lnTo>
+                    <a:pt x="422066" y="555291"/>
+                  </a:lnTo>
+                  <a:lnTo>
+                    <a:pt x="351722" y="540797"/>
+                  </a:lnTo>
+                  <a:lnTo>
+                    <a:pt x="281377" y="526003"/>
+                  </a:lnTo>
+                  <a:lnTo>
+                    <a:pt x="211033" y="510904"/>
+                  </a:lnTo>
+                  <a:lnTo>
+                    <a:pt x="140688" y="495493"/>
+                  </a:lnTo>
+                  <a:lnTo>
+                    <a:pt x="70344" y="479764"/>
+                  </a:lnTo>
+                  <a:lnTo>
+                    <a:pt x="0" y="463710"/>
+                  </a:lnTo>
+                  <a:close/>
+                </a:path>
+              </a:pathLst>
+            </a:custGeom>
+            <a:solidFill>
+              <a:srgbClr val="FF8C00">
+                <a:alpha val="20000"/>
+              </a:srgbClr>
+            </a:solidFill>
+          </p:spPr>
+          <p:txBody>
+            <a:bodyPr/>
+            <a:lstStyle/>
+            <a:p/>
+          </p:txBody>
+        </p:sp>
+        <p:sp>
+          <p:nvSpPr>
+            <p:cNvPr id="67" name="pl67"/>
+            <p:cNvSpPr/>
+            <p:nvPr/>
+          </p:nvSpPr>
+          <p:spPr>
+            <a:xfrm>
+              <a:off x="2731160" y="4336484"/>
+              <a:ext cx="5468256" cy="1152310"/>
+            </a:xfrm>
+            <a:custGeom>
+              <a:avLst/>
+              <a:pathLst>
+                <a:path w="5468256" h="1152310">
+                  <a:moveTo>
+                    <a:pt x="0" y="0"/>
+                  </a:moveTo>
+                  <a:lnTo>
+                    <a:pt x="51730" y="49542"/>
+                  </a:lnTo>
+                  <a:lnTo>
+                    <a:pt x="122075" y="113351"/>
+                  </a:lnTo>
+                  <a:lnTo>
+                    <a:pt x="192419" y="173789"/>
+                  </a:lnTo>
+                  <a:lnTo>
+                    <a:pt x="262764" y="231033"/>
+                  </a:lnTo>
+                  <a:lnTo>
+                    <a:pt x="333108" y="285253"/>
+                  </a:lnTo>
+                  <a:lnTo>
+                    <a:pt x="403453" y="336608"/>
+                  </a:lnTo>
+                  <a:lnTo>
+                    <a:pt x="473797" y="385249"/>
+                  </a:lnTo>
+                  <a:lnTo>
+                    <a:pt x="544142" y="431320"/>
+                  </a:lnTo>
+                  <a:lnTo>
+                    <a:pt x="614486" y="474958"/>
+                  </a:lnTo>
+                  <a:lnTo>
+                    <a:pt x="684831" y="516289"/>
+                  </a:lnTo>
+                  <a:lnTo>
+                    <a:pt x="755175" y="555437"/>
+                  </a:lnTo>
+                  <a:lnTo>
+                    <a:pt x="825520" y="592516"/>
+                  </a:lnTo>
+                  <a:lnTo>
+                    <a:pt x="895864" y="627636"/>
+                  </a:lnTo>
+                  <a:lnTo>
+                    <a:pt x="966208" y="660900"/>
+                  </a:lnTo>
+                  <a:lnTo>
+                    <a:pt x="1036553" y="692407"/>
+                  </a:lnTo>
+                  <a:lnTo>
+                    <a:pt x="1106897" y="722249"/>
+                  </a:lnTo>
+                  <a:lnTo>
+                    <a:pt x="1177242" y="750515"/>
+                  </a:lnTo>
+                  <a:lnTo>
+                    <a:pt x="1247586" y="777286"/>
+                  </a:lnTo>
+                  <a:lnTo>
+                    <a:pt x="1317931" y="802644"/>
+                  </a:lnTo>
+                  <a:lnTo>
+                    <a:pt x="1388275" y="826661"/>
+                  </a:lnTo>
+                  <a:lnTo>
+                    <a:pt x="1458620" y="849410"/>
+                  </a:lnTo>
+                  <a:lnTo>
+                    <a:pt x="1528964" y="870956"/>
+                  </a:lnTo>
+                  <a:lnTo>
+                    <a:pt x="1599309" y="891364"/>
+                  </a:lnTo>
+                  <a:lnTo>
+                    <a:pt x="1669653" y="910694"/>
+                  </a:lnTo>
+                  <a:lnTo>
+                    <a:pt x="1739998" y="929002"/>
+                  </a:lnTo>
+                  <a:lnTo>
+                    <a:pt x="1810342" y="946344"/>
+                  </a:lnTo>
+                  <a:lnTo>
+                    <a:pt x="1880687" y="959723"/>
+                  </a:lnTo>
+                  <a:lnTo>
+                    <a:pt x="1951031" y="965741"/>
+                  </a:lnTo>
+                  <a:lnTo>
+                    <a:pt x="2021376" y="971638"/>
+                  </a:lnTo>
+                  <a:lnTo>
+                    <a:pt x="2091720" y="977416"/>
+                  </a:lnTo>
+                  <a:lnTo>
+                    <a:pt x="2162065" y="983076"/>
+                  </a:lnTo>
+                  <a:lnTo>
+                    <a:pt x="2232409" y="988622"/>
+                  </a:lnTo>
+                  <a:lnTo>
+                    <a:pt x="2302754" y="994056"/>
+                  </a:lnTo>
+                  <a:lnTo>
+                    <a:pt x="2373098" y="999380"/>
+                  </a:lnTo>
+                  <a:lnTo>
+                    <a:pt x="2443443" y="1004597"/>
+                  </a:lnTo>
+                  <a:lnTo>
+                    <a:pt x="2513787" y="1009707"/>
+                  </a:lnTo>
+                  <a:lnTo>
+                    <a:pt x="2584132" y="1014715"/>
+                  </a:lnTo>
+                  <a:lnTo>
+                    <a:pt x="2654476" y="1019621"/>
+                  </a:lnTo>
+                  <a:lnTo>
+                    <a:pt x="2724821" y="1024427"/>
+                  </a:lnTo>
+                  <a:lnTo>
+                    <a:pt x="2795165" y="1029137"/>
+                  </a:lnTo>
+                  <a:lnTo>
+                    <a:pt x="2865510" y="1033751"/>
+                  </a:lnTo>
+                  <a:lnTo>
+                    <a:pt x="2935854" y="1038272"/>
+                  </a:lnTo>
+                  <a:lnTo>
+                    <a:pt x="3006199" y="1042701"/>
+                  </a:lnTo>
+                  <a:lnTo>
+                    <a:pt x="3076543" y="1047041"/>
+                  </a:lnTo>
+                  <a:lnTo>
+                    <a:pt x="3146888" y="1051293"/>
+                  </a:lnTo>
+                  <a:lnTo>
+                    <a:pt x="3217232" y="1055459"/>
+                  </a:lnTo>
+                  <a:lnTo>
+                    <a:pt x="3287577" y="1059541"/>
+                  </a:lnTo>
+                  <a:lnTo>
+                    <a:pt x="3357921" y="1063540"/>
+                  </a:lnTo>
+                  <a:lnTo>
+                    <a:pt x="3428266" y="1067458"/>
+                  </a:lnTo>
+                  <a:lnTo>
+                    <a:pt x="3498610" y="1071297"/>
+                  </a:lnTo>
+                  <a:lnTo>
+                    <a:pt x="3568955" y="1075058"/>
+                  </a:lnTo>
+                  <a:lnTo>
+                    <a:pt x="3639299" y="1078743"/>
+                  </a:lnTo>
+                  <a:lnTo>
+                    <a:pt x="3709644" y="1082354"/>
+                  </a:lnTo>
+                  <a:lnTo>
+                    <a:pt x="3779988" y="1085892"/>
+                  </a:lnTo>
+                  <a:lnTo>
+                    <a:pt x="3850333" y="1089358"/>
+                  </a:lnTo>
+                  <a:lnTo>
+                    <a:pt x="3920677" y="1092753"/>
+                  </a:lnTo>
+                  <a:lnTo>
+                    <a:pt x="3991022" y="1096081"/>
+                  </a:lnTo>
+                  <a:lnTo>
+                    <a:pt x="4061366" y="1099340"/>
+                  </a:lnTo>
+                  <a:lnTo>
+                    <a:pt x="4131711" y="1102534"/>
+                  </a:lnTo>
+                  <a:lnTo>
+                    <a:pt x="4202055" y="1105663"/>
+                  </a:lnTo>
+                  <a:lnTo>
+                    <a:pt x="4272400" y="1108729"/>
+                  </a:lnTo>
+                  <a:lnTo>
+                    <a:pt x="4342744" y="1111733"/>
+                  </a:lnTo>
+                  <a:lnTo>
+                    <a:pt x="4413089" y="1114676"/>
+                  </a:lnTo>
+                  <a:lnTo>
+                    <a:pt x="4483433" y="1117560"/>
+                  </a:lnTo>
+                  <a:lnTo>
+                    <a:pt x="4553778" y="1120385"/>
+                  </a:lnTo>
+                  <a:lnTo>
+                    <a:pt x="4624122" y="1123153"/>
+                  </a:lnTo>
+                  <a:lnTo>
+                    <a:pt x="4694466" y="1125865"/>
+                  </a:lnTo>
+                  <a:lnTo>
+                    <a:pt x="4764811" y="1128523"/>
+                  </a:lnTo>
+                  <a:lnTo>
+                    <a:pt x="4835155" y="1131126"/>
+                  </a:lnTo>
+                  <a:lnTo>
+                    <a:pt x="4905500" y="1133677"/>
+                  </a:lnTo>
+                  <a:lnTo>
+                    <a:pt x="4975844" y="1136176"/>
+                  </a:lnTo>
+                  <a:lnTo>
+                    <a:pt x="5046189" y="1138625"/>
+                  </a:lnTo>
+                  <a:lnTo>
+                    <a:pt x="5116533" y="1141024"/>
+                  </a:lnTo>
+                  <a:lnTo>
+                    <a:pt x="5186878" y="1143374"/>
+                  </a:lnTo>
+                  <a:lnTo>
+                    <a:pt x="5257222" y="1145677"/>
+                  </a:lnTo>
+                  <a:lnTo>
+                    <a:pt x="5327567" y="1147934"/>
+                  </a:lnTo>
+                  <a:lnTo>
+                    <a:pt x="5397911" y="1150144"/>
+                  </a:lnTo>
+                  <a:lnTo>
+                    <a:pt x="5468256" y="1152310"/>
+                  </a:lnTo>
+                </a:path>
+              </a:pathLst>
+            </a:custGeom>
+          </p:spPr>
+          <p:txBody>
+            <a:bodyPr/>
+            <a:lstStyle/>
+            <a:p/>
+          </p:txBody>
+        </p:sp>
+        <p:sp>
+          <p:nvSpPr>
+            <p:cNvPr id="68" name="pl68"/>
+            <p:cNvSpPr/>
+            <p:nvPr/>
+          </p:nvSpPr>
+          <p:spPr>
+            <a:xfrm>
+              <a:off x="1235312" y="4800194"/>
+              <a:ext cx="6964104" cy="775014"/>
+            </a:xfrm>
+            <a:custGeom>
+              <a:avLst/>
+              <a:pathLst>
+                <a:path w="6964104" h="775014">
+                  <a:moveTo>
+                    <a:pt x="6964104" y="775014"/>
+                  </a:moveTo>
+                  <a:lnTo>
+                    <a:pt x="6893760" y="773983"/>
+                  </a:lnTo>
+                  <a:lnTo>
+                    <a:pt x="6823415" y="772895"/>
+                  </a:lnTo>
+                  <a:lnTo>
+                    <a:pt x="6753071" y="771746"/>
+                  </a:lnTo>
+                  <a:lnTo>
+                    <a:pt x="6682726" y="770533"/>
+                  </a:lnTo>
+                  <a:lnTo>
+                    <a:pt x="6612382" y="769252"/>
+                  </a:lnTo>
+                  <a:lnTo>
+                    <a:pt x="6542037" y="767900"/>
+                  </a:lnTo>
+                  <a:lnTo>
+                    <a:pt x="6471693" y="766472"/>
+                  </a:lnTo>
+                  <a:lnTo>
+                    <a:pt x="6401348" y="764965"/>
+                  </a:lnTo>
+                  <a:lnTo>
+                    <a:pt x="6331004" y="763373"/>
+                  </a:lnTo>
+                  <a:lnTo>
+                    <a:pt x="6260659" y="761693"/>
+                  </a:lnTo>
+                  <a:lnTo>
+                    <a:pt x="6190315" y="759920"/>
+                  </a:lnTo>
+                  <a:lnTo>
+                    <a:pt x="6119970" y="758047"/>
+                  </a:lnTo>
+                  <a:lnTo>
+                    <a:pt x="6049626" y="756069"/>
+                  </a:lnTo>
+                  <a:lnTo>
+                    <a:pt x="5979281" y="753982"/>
+                  </a:lnTo>
+                  <a:lnTo>
+                    <a:pt x="5908937" y="751778"/>
+                  </a:lnTo>
+                  <a:lnTo>
+                    <a:pt x="5838592" y="749451"/>
+                  </a:lnTo>
+                  <a:lnTo>
+                    <a:pt x="5768248" y="746994"/>
+                  </a:lnTo>
+                  <a:lnTo>
+                    <a:pt x="5697903" y="744400"/>
+                  </a:lnTo>
+                  <a:lnTo>
+                    <a:pt x="5627559" y="741662"/>
+                  </a:lnTo>
+                  <a:lnTo>
+                    <a:pt x="5557214" y="738771"/>
+                  </a:lnTo>
+                  <a:lnTo>
+                    <a:pt x="5486870" y="735718"/>
+                  </a:lnTo>
+                  <a:lnTo>
+                    <a:pt x="5416525" y="732495"/>
+                  </a:lnTo>
+                  <a:lnTo>
+                    <a:pt x="5346181" y="729092"/>
+                  </a:lnTo>
+                  <a:lnTo>
+                    <a:pt x="5275836" y="725500"/>
+                  </a:lnTo>
+                  <a:lnTo>
+                    <a:pt x="5205492" y="721707"/>
+                  </a:lnTo>
+                  <a:lnTo>
+                    <a:pt x="5135147" y="717703"/>
+                  </a:lnTo>
+                  <a:lnTo>
+                    <a:pt x="5064803" y="713475"/>
+                  </a:lnTo>
+                  <a:lnTo>
+                    <a:pt x="4994458" y="709011"/>
+                  </a:lnTo>
+                  <a:lnTo>
+                    <a:pt x="4924114" y="704298"/>
+                  </a:lnTo>
+                  <a:lnTo>
+                    <a:pt x="4853769" y="699323"/>
+                  </a:lnTo>
+                  <a:lnTo>
+                    <a:pt x="4783425" y="694070"/>
+                  </a:lnTo>
+                  <a:lnTo>
+                    <a:pt x="4713080" y="688523"/>
+                  </a:lnTo>
+                  <a:lnTo>
+                    <a:pt x="4642736" y="682668"/>
+                  </a:lnTo>
+                  <a:lnTo>
+                    <a:pt x="4572391" y="676486"/>
+                  </a:lnTo>
+                  <a:lnTo>
+                    <a:pt x="4502047" y="669959"/>
+                  </a:lnTo>
+                  <a:lnTo>
+                    <a:pt x="4431702" y="663067"/>
+                  </a:lnTo>
+                  <a:lnTo>
+                    <a:pt x="4361358" y="655792"/>
+                  </a:lnTo>
+                  <a:lnTo>
+                    <a:pt x="4291013" y="648110"/>
+                  </a:lnTo>
+                  <a:lnTo>
+                    <a:pt x="4220669" y="640000"/>
+                  </a:lnTo>
+                  <a:lnTo>
+                    <a:pt x="4150324" y="631438"/>
+                  </a:lnTo>
+                  <a:lnTo>
+                    <a:pt x="4079980" y="622398"/>
+                  </a:lnTo>
+                  <a:lnTo>
+                    <a:pt x="4009635" y="612853"/>
+                  </a:lnTo>
+                  <a:lnTo>
+                    <a:pt x="3939291" y="602776"/>
+                  </a:lnTo>
+                  <a:lnTo>
+                    <a:pt x="3868946" y="592137"/>
+                  </a:lnTo>
+                  <a:lnTo>
+                    <a:pt x="3798602" y="580905"/>
+                  </a:lnTo>
+                  <a:lnTo>
+                    <a:pt x="3728257" y="569046"/>
+                  </a:lnTo>
+                  <a:lnTo>
+                    <a:pt x="3657913" y="556525"/>
+                  </a:lnTo>
+                  <a:lnTo>
+                    <a:pt x="3587569" y="543306"/>
+                  </a:lnTo>
+                  <a:lnTo>
+                    <a:pt x="3517224" y="529350"/>
+                  </a:lnTo>
+                  <a:lnTo>
+                    <a:pt x="3446880" y="514615"/>
+                  </a:lnTo>
+                  <a:lnTo>
+                    <a:pt x="3376535" y="499058"/>
+                  </a:lnTo>
+                  <a:lnTo>
+                    <a:pt x="3306191" y="489869"/>
+                  </a:lnTo>
+                  <a:lnTo>
+                    <a:pt x="3235846" y="483599"/>
+                  </a:lnTo>
+                  <a:lnTo>
+                    <a:pt x="3165502" y="477200"/>
+                  </a:lnTo>
+                  <a:lnTo>
+                    <a:pt x="3095157" y="470669"/>
+                  </a:lnTo>
+                  <a:lnTo>
+                    <a:pt x="3024813" y="464003"/>
+                  </a:lnTo>
+                  <a:lnTo>
+                    <a:pt x="2954468" y="457199"/>
+                  </a:lnTo>
+                  <a:lnTo>
+                    <a:pt x="2884124" y="450254"/>
+                  </a:lnTo>
+                  <a:lnTo>
+                    <a:pt x="2813779" y="443167"/>
+                  </a:lnTo>
+                  <a:lnTo>
+                    <a:pt x="2743435" y="435932"/>
+                  </a:lnTo>
+                  <a:lnTo>
+                    <a:pt x="2673090" y="428549"/>
+                  </a:lnTo>
+                  <a:lnTo>
+                    <a:pt x="2602746" y="421013"/>
+                  </a:lnTo>
+                  <a:lnTo>
+                    <a:pt x="2532401" y="413321"/>
+                  </a:lnTo>
+                  <a:lnTo>
+                    <a:pt x="2462057" y="405471"/>
+                  </a:lnTo>
+                  <a:lnTo>
+                    <a:pt x="2391712" y="397458"/>
+                  </a:lnTo>
+                  <a:lnTo>
+                    <a:pt x="2321368" y="389280"/>
+                  </a:lnTo>
+                  <a:lnTo>
+                    <a:pt x="2251023" y="380933"/>
+                  </a:lnTo>
+                  <a:lnTo>
+                    <a:pt x="2180679" y="372414"/>
+                  </a:lnTo>
+                  <a:lnTo>
+                    <a:pt x="2110334" y="363719"/>
+                  </a:lnTo>
+                  <a:lnTo>
+                    <a:pt x="2039990" y="354844"/>
+                  </a:lnTo>
+                  <a:lnTo>
+                    <a:pt x="1969645" y="345786"/>
+                  </a:lnTo>
+                  <a:lnTo>
+                    <a:pt x="1899301" y="336541"/>
+                  </a:lnTo>
+                  <a:lnTo>
+                    <a:pt x="1828956" y="327105"/>
+                  </a:lnTo>
+                  <a:lnTo>
+                    <a:pt x="1758612" y="317474"/>
+                  </a:lnTo>
+                  <a:lnTo>
+                    <a:pt x="1688267" y="307644"/>
+                  </a:lnTo>
+                  <a:lnTo>
+                    <a:pt x="1617923" y="297612"/>
+                  </a:lnTo>
+                  <a:lnTo>
+                    <a:pt x="1547578" y="287372"/>
+                  </a:lnTo>
+                  <a:lnTo>
+                    <a:pt x="1477234" y="276921"/>
+                  </a:lnTo>
+                  <a:lnTo>
+                    <a:pt x="1406889" y="266253"/>
+                  </a:lnTo>
+                  <a:lnTo>
+                    <a:pt x="1336545" y="255366"/>
+                  </a:lnTo>
+                  <a:lnTo>
+                    <a:pt x="1266200" y="244254"/>
+                  </a:lnTo>
+                  <a:lnTo>
+                    <a:pt x="1195856" y="232912"/>
+                  </a:lnTo>
+                  <a:lnTo>
+                    <a:pt x="1125511" y="221336"/>
+                  </a:lnTo>
+                  <a:lnTo>
+                    <a:pt x="1055167" y="209521"/>
+                  </a:lnTo>
+                  <a:lnTo>
+                    <a:pt x="984822" y="197462"/>
+                  </a:lnTo>
+                  <a:lnTo>
+                    <a:pt x="914478" y="185154"/>
+                  </a:lnTo>
+                  <a:lnTo>
+                    <a:pt x="844133" y="172592"/>
+                  </a:lnTo>
+                  <a:lnTo>
+                    <a:pt x="773789" y="159771"/>
+                  </a:lnTo>
+                  <a:lnTo>
+                    <a:pt x="703444" y="146685"/>
+                  </a:lnTo>
+                  <a:lnTo>
+                    <a:pt x="633100" y="133328"/>
+                  </a:lnTo>
+                  <a:lnTo>
+                    <a:pt x="562755" y="119696"/>
+                  </a:lnTo>
+                  <a:lnTo>
+                    <a:pt x="492411" y="105782"/>
+                  </a:lnTo>
+                  <a:lnTo>
+                    <a:pt x="422066" y="91581"/>
+                  </a:lnTo>
+                  <a:lnTo>
+                    <a:pt x="351722" y="77086"/>
+                  </a:lnTo>
+                  <a:lnTo>
+                    <a:pt x="281377" y="62293"/>
+                  </a:lnTo>
+                  <a:lnTo>
+                    <a:pt x="211033" y="47194"/>
+                  </a:lnTo>
+                  <a:lnTo>
+                    <a:pt x="140688" y="31783"/>
+                  </a:lnTo>
+                  <a:lnTo>
+                    <a:pt x="70344" y="16053"/>
+                  </a:lnTo>
+                  <a:lnTo>
+                    <a:pt x="0" y="0"/>
+                  </a:lnTo>
+                </a:path>
+              </a:pathLst>
+            </a:custGeom>
+          </p:spPr>
+          <p:txBody>
+            <a:bodyPr/>
+            <a:lstStyle/>
+            <a:p/>
+          </p:txBody>
+        </p:sp>
+        <p:sp>
+          <p:nvSpPr>
+            <p:cNvPr id="69" name="pl69"/>
+            <p:cNvSpPr/>
+            <p:nvPr/>
+          </p:nvSpPr>
+          <p:spPr>
+            <a:xfrm>
+              <a:off x="1888763" y="4336484"/>
+              <a:ext cx="6310653" cy="1213177"/>
+            </a:xfrm>
+            <a:custGeom>
+              <a:avLst/>
+              <a:pathLst>
+                <a:path w="6310653" h="1213177">
+                  <a:moveTo>
+                    <a:pt x="0" y="0"/>
+                  </a:moveTo>
+                  <a:lnTo>
+                    <a:pt x="49993" y="33117"/>
+                  </a:lnTo>
+                  <a:lnTo>
+                    <a:pt x="120338" y="78008"/>
+                  </a:lnTo>
+                  <a:lnTo>
+                    <a:pt x="190682" y="121252"/>
+                  </a:lnTo>
+                  <a:lnTo>
+                    <a:pt x="261026" y="162910"/>
+                  </a:lnTo>
+                  <a:lnTo>
+                    <a:pt x="331371" y="203040"/>
+                  </a:lnTo>
+                  <a:lnTo>
+                    <a:pt x="401715" y="241699"/>
+                  </a:lnTo>
+                  <a:lnTo>
+                    <a:pt x="472060" y="278940"/>
+                  </a:lnTo>
+                  <a:lnTo>
+                    <a:pt x="542404" y="314815"/>
+                  </a:lnTo>
+                  <a:lnTo>
+                    <a:pt x="612749" y="349375"/>
+                  </a:lnTo>
+                  <a:lnTo>
+                    <a:pt x="683093" y="382667"/>
+                  </a:lnTo>
+                  <a:lnTo>
+                    <a:pt x="753438" y="414738"/>
+                  </a:lnTo>
+                  <a:lnTo>
+                    <a:pt x="823782" y="445634"/>
+                  </a:lnTo>
+                  <a:lnTo>
+                    <a:pt x="894127" y="475396"/>
+                  </a:lnTo>
+                  <a:lnTo>
+                    <a:pt x="964471" y="504067"/>
+                  </a:lnTo>
+                  <a:lnTo>
+                    <a:pt x="1034816" y="531686"/>
+                  </a:lnTo>
+                  <a:lnTo>
+                    <a:pt x="1105160" y="558293"/>
+                  </a:lnTo>
+                  <a:lnTo>
+                    <a:pt x="1175505" y="583923"/>
+                  </a:lnTo>
+                  <a:lnTo>
+                    <a:pt x="1245849" y="608614"/>
+                  </a:lnTo>
+                  <a:lnTo>
+                    <a:pt x="1316194" y="632399"/>
+                  </a:lnTo>
+                  <a:lnTo>
+                    <a:pt x="1386538" y="655312"/>
+                  </a:lnTo>
+                  <a:lnTo>
+                    <a:pt x="1456883" y="677385"/>
+                  </a:lnTo>
+                  <a:lnTo>
+                    <a:pt x="1527227" y="698649"/>
+                  </a:lnTo>
+                  <a:lnTo>
+                    <a:pt x="1597572" y="719132"/>
+                  </a:lnTo>
+                  <a:lnTo>
+                    <a:pt x="1667916" y="738864"/>
+                  </a:lnTo>
+                  <a:lnTo>
+                    <a:pt x="1738261" y="757873"/>
+                  </a:lnTo>
+                  <a:lnTo>
+                    <a:pt x="1808605" y="776185"/>
+                  </a:lnTo>
+                  <a:lnTo>
+                    <a:pt x="1878950" y="793825"/>
+                  </a:lnTo>
+                  <a:lnTo>
+                    <a:pt x="1949294" y="810818"/>
+                  </a:lnTo>
+                  <a:lnTo>
+                    <a:pt x="2019639" y="827188"/>
+                  </a:lnTo>
+                  <a:lnTo>
+                    <a:pt x="2089983" y="842958"/>
+                  </a:lnTo>
+                  <a:lnTo>
+                    <a:pt x="2160328" y="858149"/>
+                  </a:lnTo>
+                  <a:lnTo>
+                    <a:pt x="2230672" y="872783"/>
+                  </a:lnTo>
+                  <a:lnTo>
+                    <a:pt x="2301017" y="886881"/>
+                  </a:lnTo>
+                  <a:lnTo>
+                    <a:pt x="2371361" y="900462"/>
+                  </a:lnTo>
+                  <a:lnTo>
+                    <a:pt x="2441706" y="913544"/>
+                  </a:lnTo>
+                  <a:lnTo>
+                    <a:pt x="2512050" y="926147"/>
+                  </a:lnTo>
+                  <a:lnTo>
+                    <a:pt x="2582395" y="938288"/>
+                  </a:lnTo>
+                  <a:lnTo>
+                    <a:pt x="2652739" y="949983"/>
+                  </a:lnTo>
+                  <a:lnTo>
+                    <a:pt x="2723084" y="961249"/>
+                  </a:lnTo>
+                  <a:lnTo>
+                    <a:pt x="2793428" y="972103"/>
+                  </a:lnTo>
+                  <a:lnTo>
+                    <a:pt x="2863773" y="982558"/>
+                  </a:lnTo>
+                  <a:lnTo>
+                    <a:pt x="2934117" y="992630"/>
+                  </a:lnTo>
+                  <a:lnTo>
+                    <a:pt x="3004462" y="1002332"/>
+                  </a:lnTo>
+                  <a:lnTo>
+                    <a:pt x="3074806" y="1011679"/>
+                  </a:lnTo>
+                  <a:lnTo>
+                    <a:pt x="3145151" y="1020683"/>
+                  </a:lnTo>
+                  <a:lnTo>
+                    <a:pt x="3215495" y="1029357"/>
+                  </a:lnTo>
+                  <a:lnTo>
+                    <a:pt x="3285840" y="1037712"/>
+                  </a:lnTo>
+                  <a:lnTo>
+                    <a:pt x="3356184" y="1045762"/>
+                  </a:lnTo>
+                  <a:lnTo>
+                    <a:pt x="3426529" y="1053516"/>
+                  </a:lnTo>
+                  <a:lnTo>
+                    <a:pt x="3496873" y="1060985"/>
+                  </a:lnTo>
+                  <a:lnTo>
+                    <a:pt x="3567218" y="1068181"/>
+                  </a:lnTo>
+                  <a:lnTo>
+                    <a:pt x="3637562" y="1075113"/>
+                  </a:lnTo>
+                  <a:lnTo>
+                    <a:pt x="3707907" y="1081791"/>
+                  </a:lnTo>
+                  <a:lnTo>
+                    <a:pt x="3778251" y="1088223"/>
+                  </a:lnTo>
+                  <a:lnTo>
+                    <a:pt x="3848596" y="1094420"/>
+                  </a:lnTo>
+                  <a:lnTo>
+                    <a:pt x="3918940" y="1100390"/>
+                  </a:lnTo>
+                  <a:lnTo>
+                    <a:pt x="3989284" y="1106141"/>
+                  </a:lnTo>
+                  <a:lnTo>
+                    <a:pt x="4059629" y="1111680"/>
+                  </a:lnTo>
+                  <a:lnTo>
+                    <a:pt x="4129973" y="1117017"/>
+                  </a:lnTo>
+                  <a:lnTo>
+                    <a:pt x="4200318" y="1122158"/>
+                  </a:lnTo>
+                  <a:lnTo>
+                    <a:pt x="4270662" y="1127110"/>
+                  </a:lnTo>
+                  <a:lnTo>
+                    <a:pt x="4341007" y="1131881"/>
+                  </a:lnTo>
+                  <a:lnTo>
+                    <a:pt x="4411351" y="1136477"/>
+                  </a:lnTo>
+                  <a:lnTo>
+                    <a:pt x="4481696" y="1140904"/>
+                  </a:lnTo>
+                  <a:lnTo>
+                    <a:pt x="4552040" y="1145169"/>
+                  </a:lnTo>
+                  <a:lnTo>
+                    <a:pt x="4622385" y="1149278"/>
+                  </a:lnTo>
+                  <a:lnTo>
+                    <a:pt x="4692729" y="1153235"/>
+                  </a:lnTo>
+                  <a:lnTo>
+                    <a:pt x="4763074" y="1157048"/>
+                  </a:lnTo>
+                  <a:lnTo>
+                    <a:pt x="4833418" y="1160721"/>
+                  </a:lnTo>
+                  <a:lnTo>
+                    <a:pt x="4903763" y="1164259"/>
+                  </a:lnTo>
+                  <a:lnTo>
+                    <a:pt x="4974107" y="1167668"/>
+                  </a:lnTo>
+                  <a:lnTo>
+                    <a:pt x="5044452" y="1170951"/>
+                  </a:lnTo>
+                  <a:lnTo>
+                    <a:pt x="5114796" y="1174114"/>
+                  </a:lnTo>
+                  <a:lnTo>
+                    <a:pt x="5185141" y="1177161"/>
+                  </a:lnTo>
+                  <a:lnTo>
+                    <a:pt x="5255485" y="1180096"/>
+                  </a:lnTo>
+                  <a:lnTo>
+                    <a:pt x="5325830" y="1182924"/>
+                  </a:lnTo>
+                  <a:lnTo>
+                    <a:pt x="5396174" y="1185648"/>
+                  </a:lnTo>
+                  <a:lnTo>
+                    <a:pt x="5466519" y="1188272"/>
+                  </a:lnTo>
+                  <a:lnTo>
+                    <a:pt x="5536863" y="1190800"/>
+                  </a:lnTo>
+                  <a:lnTo>
+                    <a:pt x="5607208" y="1193235"/>
+                  </a:lnTo>
+                  <a:lnTo>
+                    <a:pt x="5677552" y="1195581"/>
+                  </a:lnTo>
+                  <a:lnTo>
+                    <a:pt x="5747897" y="1197841"/>
+                  </a:lnTo>
+                  <a:lnTo>
+                    <a:pt x="5818241" y="1200018"/>
+                  </a:lnTo>
+                  <a:lnTo>
+                    <a:pt x="5888586" y="1202115"/>
+                  </a:lnTo>
+                  <a:lnTo>
+                    <a:pt x="5958930" y="1204135"/>
+                  </a:lnTo>
+                  <a:lnTo>
+                    <a:pt x="6029275" y="1206081"/>
+                  </a:lnTo>
+                  <a:lnTo>
+                    <a:pt x="6099619" y="1207956"/>
+                  </a:lnTo>
+                  <a:lnTo>
+                    <a:pt x="6169964" y="1209762"/>
+                  </a:lnTo>
+                  <a:lnTo>
+                    <a:pt x="6240308" y="1211501"/>
+                  </a:lnTo>
+                  <a:lnTo>
+                    <a:pt x="6310653" y="1213177"/>
+                  </a:lnTo>
+                </a:path>
+              </a:pathLst>
+            </a:custGeom>
+            <a:ln w="27101" cap="flat">
+              <a:solidFill>
+                <a:srgbClr val="FF8C00">
+                  <a:alpha val="100000"/>
+                </a:srgbClr>
+              </a:solidFill>
+              <a:prstDash val="solid"/>
+              <a:round/>
+            </a:ln>
+          </p:spPr>
+          <p:txBody>
+            <a:bodyPr/>
+            <a:lstStyle/>
+            <a:p/>
+          </p:txBody>
+        </p:sp>
+        <p:sp>
+          <p:nvSpPr>
+            <p:cNvPr id="70" name="pl70"/>
+            <p:cNvSpPr/>
+            <p:nvPr/>
+          </p:nvSpPr>
+          <p:spPr>
+            <a:xfrm>
+              <a:off x="887106" y="5294352"/>
+              <a:ext cx="7660515" cy="0"/>
+            </a:xfrm>
+            <a:custGeom>
+              <a:avLst/>
+              <a:pathLst>
+                <a:path w="7660515" h="0">
+                  <a:moveTo>
+                    <a:pt x="0" y="0"/>
+                  </a:moveTo>
+                  <a:lnTo>
+                    <a:pt x="7660515" y="0"/>
+                  </a:lnTo>
+                  <a:lnTo>
+                    <a:pt x="7660515" y="0"/>
+                  </a:lnTo>
+                </a:path>
+              </a:pathLst>
+            </a:custGeom>
+            <a:ln w="13550" cap="flat">
+              <a:solidFill>
+                <a:srgbClr val="7F7F7F">
+                  <a:alpha val="100000"/>
+                </a:srgbClr>
+              </a:solidFill>
+              <a:prstDash val="dash"/>
+              <a:round/>
+            </a:ln>
+          </p:spPr>
+          <p:txBody>
+            <a:bodyPr/>
+            <a:lstStyle/>
+            <a:p/>
+          </p:txBody>
+        </p:sp>
+        <p:sp>
+          <p:nvSpPr>
+            <p:cNvPr id="71" name="pl71"/>
+            <p:cNvSpPr/>
+            <p:nvPr/>
+          </p:nvSpPr>
+          <p:spPr>
+            <a:xfrm>
+              <a:off x="4590457" y="4336484"/>
+              <a:ext cx="0" cy="1317069"/>
+            </a:xfrm>
+            <a:custGeom>
+              <a:avLst/>
+              <a:pathLst>
+                <a:path w="0" h="1317069">
+                  <a:moveTo>
+                    <a:pt x="0" y="1317069"/>
+                  </a:moveTo>
+                  <a:lnTo>
+                    <a:pt x="0" y="0"/>
+                  </a:lnTo>
+                  <a:lnTo>
+                    <a:pt x="0" y="0"/>
+                  </a:lnTo>
+                </a:path>
+              </a:pathLst>
+            </a:custGeom>
+            <a:ln w="13550" cap="flat">
+              <a:solidFill>
+                <a:srgbClr val="666666">
+                  <a:alpha val="100000"/>
+                </a:srgbClr>
+              </a:solidFill>
+              <a:prstDash val="dot"/>
+              <a:round/>
+            </a:ln>
+          </p:spPr>
+          <p:txBody>
+            <a:bodyPr/>
+            <a:lstStyle/>
+            <a:p/>
+          </p:txBody>
+        </p:sp>
+        <p:sp>
+          <p:nvSpPr>
+            <p:cNvPr id="72" name="tx72"/>
+            <p:cNvSpPr/>
+            <p:nvPr/>
+          </p:nvSpPr>
+          <p:spPr>
+            <a:xfrm>
+              <a:off x="762297" y="5553636"/>
+              <a:ext cx="62179" cy="80101"/>
+            </a:xfrm>
+            <a:prstGeom prst="rect">
+              <a:avLst/>
+            </a:prstGeom>
+            <a:noFill/>
+          </p:spPr>
+          <p:txBody>
+            <a:bodyPr lIns="0" rIns="0" tIns="0" bIns="0" anchorCtr="1" anchor="ctr" wrap="none"/>
+            <a:lstStyle/>
+            <a:p>
+              <a:pPr algn="l" marL="0" marR="0" indent="0">
+                <a:lnSpc>
+                  <a:spcPts val="880"/>
+                </a:lnSpc>
+                <a:spcBef>
+                  <a:spcPts val="0"/>
+                </a:spcBef>
+                <a:spcAft>
+                  <a:spcPts val="0"/>
+                </a:spcAft>
+              </a:pPr>
+              <a:r>
+                <a:rPr sz="880">
+                  <a:solidFill>
+                    <a:srgbClr val="4D4D4D">
+                      <a:alpha val="100000"/>
+                    </a:srgbClr>
+                  </a:solidFill>
+                  <a:latin typeface="Helvetica"/>
+                  <a:cs typeface="Helvetica"/>
+                </a:rPr>
+                <a:t>0</a:t>
+              </a:r>
+            </a:p>
+          </p:txBody>
+        </p:sp>
+        <p:sp>
+          <p:nvSpPr>
+            <p:cNvPr id="73" name="tx73"/>
+            <p:cNvSpPr/>
+            <p:nvPr/>
+          </p:nvSpPr>
+          <p:spPr>
+            <a:xfrm>
+              <a:off x="762297" y="5254302"/>
+              <a:ext cx="62179" cy="80101"/>
+            </a:xfrm>
+            <a:prstGeom prst="rect">
+              <a:avLst/>
+            </a:prstGeom>
+            <a:noFill/>
+          </p:spPr>
+          <p:txBody>
+            <a:bodyPr lIns="0" rIns="0" tIns="0" bIns="0" anchorCtr="1" anchor="ctr" wrap="none"/>
+            <a:lstStyle/>
+            <a:p>
+              <a:pPr algn="l" marL="0" marR="0" indent="0">
+                <a:lnSpc>
+                  <a:spcPts val="880"/>
+                </a:lnSpc>
+                <a:spcBef>
+                  <a:spcPts val="0"/>
+                </a:spcBef>
+                <a:spcAft>
+                  <a:spcPts val="0"/>
+                </a:spcAft>
+              </a:pPr>
+              <a:r>
+                <a:rPr sz="880">
+                  <a:solidFill>
+                    <a:srgbClr val="4D4D4D">
+                      <a:alpha val="100000"/>
+                    </a:srgbClr>
+                  </a:solidFill>
+                  <a:latin typeface="Helvetica"/>
+                  <a:cs typeface="Helvetica"/>
+                </a:rPr>
+                <a:t>1</a:t>
+              </a:r>
+            </a:p>
+          </p:txBody>
+        </p:sp>
+        <p:sp>
+          <p:nvSpPr>
+            <p:cNvPr id="74" name="tx74"/>
+            <p:cNvSpPr/>
+            <p:nvPr/>
+          </p:nvSpPr>
+          <p:spPr>
+            <a:xfrm>
+              <a:off x="762297" y="4954968"/>
+              <a:ext cx="62179" cy="80101"/>
+            </a:xfrm>
+            <a:prstGeom prst="rect">
+              <a:avLst/>
+            </a:prstGeom>
+            <a:noFill/>
+          </p:spPr>
+          <p:txBody>
+            <a:bodyPr lIns="0" rIns="0" tIns="0" bIns="0" anchorCtr="1" anchor="ctr" wrap="none"/>
+            <a:lstStyle/>
+            <a:p>
+              <a:pPr algn="l" marL="0" marR="0" indent="0">
+                <a:lnSpc>
+                  <a:spcPts val="880"/>
+                </a:lnSpc>
+                <a:spcBef>
+                  <a:spcPts val="0"/>
+                </a:spcBef>
+                <a:spcAft>
+                  <a:spcPts val="0"/>
+                </a:spcAft>
+              </a:pPr>
+              <a:r>
+                <a:rPr sz="880">
+                  <a:solidFill>
+                    <a:srgbClr val="4D4D4D">
+                      <a:alpha val="100000"/>
+                    </a:srgbClr>
+                  </a:solidFill>
+                  <a:latin typeface="Helvetica"/>
+                  <a:cs typeface="Helvetica"/>
+                </a:rPr>
+                <a:t>2</a:t>
+              </a:r>
+            </a:p>
+          </p:txBody>
+        </p:sp>
+        <p:sp>
+          <p:nvSpPr>
+            <p:cNvPr id="75" name="tx75"/>
+            <p:cNvSpPr/>
+            <p:nvPr/>
+          </p:nvSpPr>
+          <p:spPr>
+            <a:xfrm>
+              <a:off x="762297" y="4655634"/>
+              <a:ext cx="62179" cy="80101"/>
+            </a:xfrm>
+            <a:prstGeom prst="rect">
+              <a:avLst/>
+            </a:prstGeom>
+            <a:noFill/>
+          </p:spPr>
+          <p:txBody>
+            <a:bodyPr lIns="0" rIns="0" tIns="0" bIns="0" anchorCtr="1" anchor="ctr" wrap="none"/>
+            <a:lstStyle/>
+            <a:p>
+              <a:pPr algn="l" marL="0" marR="0" indent="0">
+                <a:lnSpc>
+                  <a:spcPts val="880"/>
+                </a:lnSpc>
+                <a:spcBef>
+                  <a:spcPts val="0"/>
+                </a:spcBef>
+                <a:spcAft>
+                  <a:spcPts val="0"/>
+                </a:spcAft>
+              </a:pPr>
+              <a:r>
+                <a:rPr sz="880">
+                  <a:solidFill>
+                    <a:srgbClr val="4D4D4D">
+                      <a:alpha val="100000"/>
+                    </a:srgbClr>
+                  </a:solidFill>
+                  <a:latin typeface="Helvetica"/>
+                  <a:cs typeface="Helvetica"/>
+                </a:rPr>
+                <a:t>3</a:t>
+              </a:r>
+            </a:p>
+          </p:txBody>
+        </p:sp>
+        <p:sp>
+          <p:nvSpPr>
+            <p:cNvPr id="76" name="tx76"/>
+            <p:cNvSpPr/>
+            <p:nvPr/>
+          </p:nvSpPr>
+          <p:spPr>
+            <a:xfrm>
+              <a:off x="762297" y="4356300"/>
+              <a:ext cx="62179" cy="80101"/>
+            </a:xfrm>
+            <a:prstGeom prst="rect">
+              <a:avLst/>
+            </a:prstGeom>
+            <a:noFill/>
+          </p:spPr>
+          <p:txBody>
+            <a:bodyPr lIns="0" rIns="0" tIns="0" bIns="0" anchorCtr="1" anchor="ctr" wrap="none"/>
+            <a:lstStyle/>
+            <a:p>
+              <a:pPr algn="l" marL="0" marR="0" indent="0">
+                <a:lnSpc>
+                  <a:spcPts val="880"/>
+                </a:lnSpc>
+                <a:spcBef>
+                  <a:spcPts val="0"/>
+                </a:spcBef>
+                <a:spcAft>
+                  <a:spcPts val="0"/>
+                </a:spcAft>
+              </a:pPr>
+              <a:r>
+                <a:rPr sz="880">
+                  <a:solidFill>
+                    <a:srgbClr val="4D4D4D">
+                      <a:alpha val="100000"/>
+                    </a:srgbClr>
+                  </a:solidFill>
+                  <a:latin typeface="Helvetica"/>
+                  <a:cs typeface="Helvetica"/>
+                </a:rPr>
+                <a:t>4</a:t>
+              </a:r>
+            </a:p>
+          </p:txBody>
+        </p:sp>
+        <p:sp>
+          <p:nvSpPr>
+            <p:cNvPr id="77" name="tx77"/>
+            <p:cNvSpPr/>
+            <p:nvPr/>
+          </p:nvSpPr>
+          <p:spPr>
+            <a:xfrm>
+              <a:off x="1133333" y="5716183"/>
+              <a:ext cx="161574" cy="80101"/>
+            </a:xfrm>
+            <a:prstGeom prst="rect">
+              <a:avLst/>
+            </a:prstGeom>
+            <a:noFill/>
+          </p:spPr>
+          <p:txBody>
+            <a:bodyPr lIns="0" rIns="0" tIns="0" bIns="0" anchorCtr="1" anchor="ctr" wrap="none"/>
+            <a:lstStyle/>
+            <a:p>
+              <a:pPr algn="l" marL="0" marR="0" indent="0">
+                <a:lnSpc>
+                  <a:spcPts val="880"/>
+                </a:lnSpc>
+                <a:spcBef>
+                  <a:spcPts val="0"/>
+                </a:spcBef>
+                <a:spcAft>
+                  <a:spcPts val="0"/>
+                </a:spcAft>
+              </a:pPr>
+              <a:r>
+                <a:rPr sz="880">
+                  <a:solidFill>
+                    <a:srgbClr val="4D4D4D">
+                      <a:alpha val="100000"/>
+                    </a:srgbClr>
+                  </a:solidFill>
+                  <a:latin typeface="Helvetica"/>
+                  <a:cs typeface="Helvetica"/>
+                </a:rPr>
+                <a:t>-40</a:t>
+              </a:r>
+            </a:p>
+          </p:txBody>
+        </p:sp>
+        <p:sp>
+          <p:nvSpPr>
+            <p:cNvPr id="78" name="tx78"/>
+            <p:cNvSpPr/>
+            <p:nvPr/>
+          </p:nvSpPr>
+          <p:spPr>
+            <a:xfrm>
+              <a:off x="1978619" y="5716183"/>
+              <a:ext cx="161574" cy="80101"/>
+            </a:xfrm>
+            <a:prstGeom prst="rect">
+              <a:avLst/>
+            </a:prstGeom>
+            <a:noFill/>
+          </p:spPr>
+          <p:txBody>
+            <a:bodyPr lIns="0" rIns="0" tIns="0" bIns="0" anchorCtr="1" anchor="ctr" wrap="none"/>
+            <a:lstStyle/>
+            <a:p>
+              <a:pPr algn="l" marL="0" marR="0" indent="0">
+                <a:lnSpc>
+                  <a:spcPts val="880"/>
+                </a:lnSpc>
+                <a:spcBef>
+                  <a:spcPts val="0"/>
+                </a:spcBef>
+                <a:spcAft>
+                  <a:spcPts val="0"/>
+                </a:spcAft>
+              </a:pPr>
+              <a:r>
+                <a:rPr sz="880">
+                  <a:solidFill>
+                    <a:srgbClr val="4D4D4D">
+                      <a:alpha val="100000"/>
+                    </a:srgbClr>
+                  </a:solidFill>
+                  <a:latin typeface="Helvetica"/>
+                  <a:cs typeface="Helvetica"/>
+                </a:rPr>
+                <a:t>-30</a:t>
+              </a:r>
+            </a:p>
+          </p:txBody>
+        </p:sp>
+        <p:sp>
+          <p:nvSpPr>
+            <p:cNvPr id="79" name="tx79"/>
+            <p:cNvSpPr/>
+            <p:nvPr/>
+          </p:nvSpPr>
+          <p:spPr>
+            <a:xfrm>
+              <a:off x="2823906" y="5716183"/>
+              <a:ext cx="161574" cy="80101"/>
+            </a:xfrm>
+            <a:prstGeom prst="rect">
+              <a:avLst/>
+            </a:prstGeom>
+            <a:noFill/>
+          </p:spPr>
+          <p:txBody>
+            <a:bodyPr lIns="0" rIns="0" tIns="0" bIns="0" anchorCtr="1" anchor="ctr" wrap="none"/>
+            <a:lstStyle/>
+            <a:p>
+              <a:pPr algn="l" marL="0" marR="0" indent="0">
+                <a:lnSpc>
+                  <a:spcPts val="880"/>
+                </a:lnSpc>
+                <a:spcBef>
+                  <a:spcPts val="0"/>
+                </a:spcBef>
+                <a:spcAft>
+                  <a:spcPts val="0"/>
+                </a:spcAft>
+              </a:pPr>
+              <a:r>
+                <a:rPr sz="880">
+                  <a:solidFill>
+                    <a:srgbClr val="4D4D4D">
+                      <a:alpha val="100000"/>
+                    </a:srgbClr>
+                  </a:solidFill>
+                  <a:latin typeface="Helvetica"/>
+                  <a:cs typeface="Helvetica"/>
+                </a:rPr>
+                <a:t>-20</a:t>
+              </a:r>
+            </a:p>
+          </p:txBody>
+        </p:sp>
+        <p:sp>
+          <p:nvSpPr>
+            <p:cNvPr id="80" name="tx80"/>
+            <p:cNvSpPr/>
+            <p:nvPr/>
+          </p:nvSpPr>
+          <p:spPr>
+            <a:xfrm>
+              <a:off x="3669192" y="5716183"/>
+              <a:ext cx="161574" cy="80101"/>
+            </a:xfrm>
+            <a:prstGeom prst="rect">
+              <a:avLst/>
+            </a:prstGeom>
+            <a:noFill/>
+          </p:spPr>
+          <p:txBody>
+            <a:bodyPr lIns="0" rIns="0" tIns="0" bIns="0" anchorCtr="1" anchor="ctr" wrap="none"/>
+            <a:lstStyle/>
+            <a:p>
+              <a:pPr algn="l" marL="0" marR="0" indent="0">
+                <a:lnSpc>
+                  <a:spcPts val="880"/>
+                </a:lnSpc>
+                <a:spcBef>
+                  <a:spcPts val="0"/>
+                </a:spcBef>
+                <a:spcAft>
+                  <a:spcPts val="0"/>
+                </a:spcAft>
+              </a:pPr>
+              <a:r>
+                <a:rPr sz="880">
+                  <a:solidFill>
+                    <a:srgbClr val="4D4D4D">
+                      <a:alpha val="100000"/>
+                    </a:srgbClr>
+                  </a:solidFill>
+                  <a:latin typeface="Helvetica"/>
+                  <a:cs typeface="Helvetica"/>
+                </a:rPr>
+                <a:t>-10</a:t>
+              </a:r>
+            </a:p>
+          </p:txBody>
+        </p:sp>
+        <p:sp>
+          <p:nvSpPr>
+            <p:cNvPr id="81" name="tx81"/>
+            <p:cNvSpPr/>
+            <p:nvPr/>
+          </p:nvSpPr>
+          <p:spPr>
+            <a:xfrm>
+              <a:off x="4564176" y="5716183"/>
+              <a:ext cx="62179" cy="80101"/>
+            </a:xfrm>
+            <a:prstGeom prst="rect">
+              <a:avLst/>
+            </a:prstGeom>
+            <a:noFill/>
+          </p:spPr>
+          <p:txBody>
+            <a:bodyPr lIns="0" rIns="0" tIns="0" bIns="0" anchorCtr="1" anchor="ctr" wrap="none"/>
+            <a:lstStyle/>
+            <a:p>
+              <a:pPr algn="l" marL="0" marR="0" indent="0">
+                <a:lnSpc>
+                  <a:spcPts val="880"/>
+                </a:lnSpc>
+                <a:spcBef>
+                  <a:spcPts val="0"/>
+                </a:spcBef>
+                <a:spcAft>
+                  <a:spcPts val="0"/>
+                </a:spcAft>
+              </a:pPr>
+              <a:r>
+                <a:rPr sz="880">
+                  <a:solidFill>
+                    <a:srgbClr val="4D4D4D">
+                      <a:alpha val="100000"/>
+                    </a:srgbClr>
+                  </a:solidFill>
+                  <a:latin typeface="Helvetica"/>
+                  <a:cs typeface="Helvetica"/>
+                </a:rPr>
+                <a:t>0</a:t>
+              </a:r>
+            </a:p>
+          </p:txBody>
+        </p:sp>
+        <p:sp>
+          <p:nvSpPr>
+            <p:cNvPr id="82" name="tx82"/>
+            <p:cNvSpPr/>
+            <p:nvPr/>
+          </p:nvSpPr>
+          <p:spPr>
+            <a:xfrm>
+              <a:off x="5378373" y="5716183"/>
+              <a:ext cx="124358" cy="80101"/>
+            </a:xfrm>
+            <a:prstGeom prst="rect">
+              <a:avLst/>
+            </a:prstGeom>
+            <a:noFill/>
+          </p:spPr>
+          <p:txBody>
+            <a:bodyPr lIns="0" rIns="0" tIns="0" bIns="0" anchorCtr="1" anchor="ctr" wrap="none"/>
+            <a:lstStyle/>
+            <a:p>
+              <a:pPr algn="l" marL="0" marR="0" indent="0">
+                <a:lnSpc>
+                  <a:spcPts val="880"/>
+                </a:lnSpc>
+                <a:spcBef>
+                  <a:spcPts val="0"/>
+                </a:spcBef>
+                <a:spcAft>
+                  <a:spcPts val="0"/>
+                </a:spcAft>
+              </a:pPr>
+              <a:r>
+                <a:rPr sz="880">
+                  <a:solidFill>
+                    <a:srgbClr val="4D4D4D">
+                      <a:alpha val="100000"/>
+                    </a:srgbClr>
+                  </a:solidFill>
+                  <a:latin typeface="Helvetica"/>
+                  <a:cs typeface="Helvetica"/>
+                </a:rPr>
+                <a:t>10</a:t>
+              </a:r>
+            </a:p>
+          </p:txBody>
+        </p:sp>
+        <p:sp>
+          <p:nvSpPr>
+            <p:cNvPr id="83" name="tx83"/>
+            <p:cNvSpPr/>
+            <p:nvPr/>
+          </p:nvSpPr>
+          <p:spPr>
+            <a:xfrm>
+              <a:off x="6223659" y="5716183"/>
+              <a:ext cx="124358" cy="80101"/>
+            </a:xfrm>
+            <a:prstGeom prst="rect">
+              <a:avLst/>
+            </a:prstGeom>
+            <a:noFill/>
+          </p:spPr>
+          <p:txBody>
+            <a:bodyPr lIns="0" rIns="0" tIns="0" bIns="0" anchorCtr="1" anchor="ctr" wrap="none"/>
+            <a:lstStyle/>
+            <a:p>
+              <a:pPr algn="l" marL="0" marR="0" indent="0">
+                <a:lnSpc>
+                  <a:spcPts val="880"/>
+                </a:lnSpc>
+                <a:spcBef>
+                  <a:spcPts val="0"/>
+                </a:spcBef>
+                <a:spcAft>
+                  <a:spcPts val="0"/>
+                </a:spcAft>
+              </a:pPr>
+              <a:r>
+                <a:rPr sz="880">
+                  <a:solidFill>
+                    <a:srgbClr val="4D4D4D">
+                      <a:alpha val="100000"/>
+                    </a:srgbClr>
+                  </a:solidFill>
+                  <a:latin typeface="Helvetica"/>
+                  <a:cs typeface="Helvetica"/>
+                </a:rPr>
+                <a:t>20</a:t>
+              </a:r>
+            </a:p>
+          </p:txBody>
+        </p:sp>
+        <p:sp>
+          <p:nvSpPr>
+            <p:cNvPr id="84" name="tx84"/>
+            <p:cNvSpPr/>
+            <p:nvPr/>
+          </p:nvSpPr>
+          <p:spPr>
+            <a:xfrm>
+              <a:off x="7068946" y="5716183"/>
+              <a:ext cx="124358" cy="80101"/>
+            </a:xfrm>
+            <a:prstGeom prst="rect">
+              <a:avLst/>
+            </a:prstGeom>
+            <a:noFill/>
+          </p:spPr>
+          <p:txBody>
+            <a:bodyPr lIns="0" rIns="0" tIns="0" bIns="0" anchorCtr="1" anchor="ctr" wrap="none"/>
+            <a:lstStyle/>
+            <a:p>
+              <a:pPr algn="l" marL="0" marR="0" indent="0">
+                <a:lnSpc>
+                  <a:spcPts val="880"/>
+                </a:lnSpc>
+                <a:spcBef>
+                  <a:spcPts val="0"/>
+                </a:spcBef>
+                <a:spcAft>
+                  <a:spcPts val="0"/>
+                </a:spcAft>
+              </a:pPr>
+              <a:r>
+                <a:rPr sz="880">
+                  <a:solidFill>
+                    <a:srgbClr val="4D4D4D">
+                      <a:alpha val="100000"/>
+                    </a:srgbClr>
+                  </a:solidFill>
+                  <a:latin typeface="Helvetica"/>
+                  <a:cs typeface="Helvetica"/>
+                </a:rPr>
+                <a:t>30</a:t>
+              </a:r>
+            </a:p>
+          </p:txBody>
+        </p:sp>
+        <p:sp>
+          <p:nvSpPr>
+            <p:cNvPr id="85" name="tx85"/>
+            <p:cNvSpPr/>
+            <p:nvPr/>
+          </p:nvSpPr>
+          <p:spPr>
+            <a:xfrm>
+              <a:off x="7914232" y="5716183"/>
+              <a:ext cx="124358" cy="80101"/>
+            </a:xfrm>
+            <a:prstGeom prst="rect">
+              <a:avLst/>
+            </a:prstGeom>
+            <a:noFill/>
+          </p:spPr>
+          <p:txBody>
+            <a:bodyPr lIns="0" rIns="0" tIns="0" bIns="0" anchorCtr="1" anchor="ctr" wrap="none"/>
+            <a:lstStyle/>
+            <a:p>
+              <a:pPr algn="l" marL="0" marR="0" indent="0">
+                <a:lnSpc>
+                  <a:spcPts val="880"/>
+                </a:lnSpc>
+                <a:spcBef>
+                  <a:spcPts val="0"/>
+                </a:spcBef>
+                <a:spcAft>
+                  <a:spcPts val="0"/>
+                </a:spcAft>
+              </a:pPr>
+              <a:r>
+                <a:rPr sz="880">
+                  <a:solidFill>
+                    <a:srgbClr val="4D4D4D">
+                      <a:alpha val="100000"/>
+                    </a:srgbClr>
+                  </a:solidFill>
+                  <a:latin typeface="Helvetica"/>
+                  <a:cs typeface="Helvetica"/>
+                </a:rPr>
+                <a:t>40</a:t>
+              </a:r>
+            </a:p>
+          </p:txBody>
+        </p:sp>
+        <p:sp>
+          <p:nvSpPr>
+            <p:cNvPr id="86" name="tx86"/>
+            <p:cNvSpPr/>
+            <p:nvPr/>
+          </p:nvSpPr>
+          <p:spPr>
+            <a:xfrm>
+              <a:off x="2928340" y="5855859"/>
+              <a:ext cx="3578047" cy="100218"/>
+            </a:xfrm>
+            <a:prstGeom prst="rect">
+              <a:avLst/>
+            </a:prstGeom>
+            <a:noFill/>
+          </p:spPr>
+          <p:txBody>
+            <a:bodyPr lIns="0" rIns="0" tIns="0" bIns="0" anchorCtr="1" anchor="ctr" wrap="none"/>
+            <a:lstStyle/>
+            <a:p>
+              <a:pPr algn="l" marL="0" marR="0" indent="0">
+                <a:lnSpc>
+                  <a:spcPts val="1100"/>
+                </a:lnSpc>
+                <a:spcBef>
+                  <a:spcPts val="0"/>
+                </a:spcBef>
+                <a:spcAft>
+                  <a:spcPts val="0"/>
+                </a:spcAft>
+              </a:pPr>
+              <a:r>
+                <a:rPr sz="1100">
+                  <a:solidFill>
+                    <a:srgbClr val="000000">
+                      <a:alpha val="100000"/>
+                    </a:srgbClr>
+                  </a:solidFill>
+                  <a:latin typeface="Helvetica"/>
+                  <a:cs typeface="Helvetica"/>
+                </a:rPr>
+                <a:t>eGFR difference (%): 100 × (CKD-EPI Cr-Cys − CG) / CG</a:t>
+              </a:r>
+            </a:p>
+          </p:txBody>
+        </p:sp>
+        <p:sp>
+          <p:nvSpPr>
+            <p:cNvPr id="87" name="tx87"/>
+            <p:cNvSpPr/>
+            <p:nvPr/>
+          </p:nvSpPr>
+          <p:spPr>
+            <a:xfrm rot="-5400000">
+              <a:off x="138035" y="4944909"/>
+              <a:ext cx="1016904" cy="100218"/>
+            </a:xfrm>
+            <a:prstGeom prst="rect">
+              <a:avLst/>
+            </a:prstGeom>
+            <a:noFill/>
+          </p:spPr>
+          <p:txBody>
+            <a:bodyPr lIns="0" rIns="0" tIns="0" bIns="0" anchorCtr="1" anchor="ctr" wrap="none"/>
+            <a:lstStyle/>
+            <a:p>
+              <a:pPr algn="l" marL="0" marR="0" indent="0">
+                <a:lnSpc>
+                  <a:spcPts val="1100"/>
+                </a:lnSpc>
+                <a:spcBef>
+                  <a:spcPts val="0"/>
+                </a:spcBef>
+                <a:spcAft>
+                  <a:spcPts val="0"/>
+                </a:spcAft>
+              </a:pPr>
+              <a:r>
+                <a:rPr sz="1100">
+                  <a:solidFill>
+                    <a:srgbClr val="000000">
+                      <a:alpha val="100000"/>
+                    </a:srgbClr>
+                  </a:solidFill>
+                  <a:latin typeface="Helvetica"/>
+                  <a:cs typeface="Helvetica"/>
+                </a:rPr>
+                <a:t>subHR (95% CI)</a:t>
+              </a:r>
+            </a:p>
+          </p:txBody>
+        </p:sp>
+        <p:sp>
+          <p:nvSpPr>
+            <p:cNvPr id="88" name="tx88"/>
+            <p:cNvSpPr/>
+            <p:nvPr/>
+          </p:nvSpPr>
+          <p:spPr>
+            <a:xfrm>
+              <a:off x="887106" y="4159544"/>
+              <a:ext cx="7052127" cy="82021"/>
+            </a:xfrm>
+            <a:prstGeom prst="rect">
+              <a:avLst/>
+            </a:prstGeom>
+            <a:noFill/>
+          </p:spPr>
+          <p:txBody>
+            <a:bodyPr lIns="0" rIns="0" tIns="0" bIns="0" anchorCtr="1" anchor="ctr" wrap="none"/>
+            <a:lstStyle/>
+            <a:p>
+              <a:pPr algn="l" marL="0" marR="0" indent="0">
+                <a:lnSpc>
+                  <a:spcPts val="900"/>
+                </a:lnSpc>
+                <a:spcBef>
+                  <a:spcPts val="0"/>
+                </a:spcBef>
+                <a:spcAft>
+                  <a:spcPts val="0"/>
+                </a:spcAft>
+              </a:pPr>
+              <a:r>
+                <a:rPr sz="900">
+                  <a:solidFill>
+                    <a:srgbClr val="404040">
+                      <a:alpha val="100000"/>
+                    </a:srgbClr>
+                  </a:solidFill>
+                  <a:latin typeface="Helvetica"/>
+                  <a:cs typeface="Helvetica"/>
+                </a:rPr>
+                <a:t>subHR per 10 % decline: 1.57 (1.28-1.92), p_Bonf = &lt;0.001 (n = 6)  |  per IQR decline (Δ = 29.3 %): 3.72 (2.05-6.75)  |  IQR: [-14.6, 14.7] %</a:t>
+              </a:r>
+            </a:p>
+          </p:txBody>
+        </p:sp>
+        <p:sp>
+          <p:nvSpPr>
+            <p:cNvPr id="89" name="tx89"/>
+            <p:cNvSpPr/>
+            <p:nvPr/>
+          </p:nvSpPr>
+          <p:spPr>
+            <a:xfrm>
+              <a:off x="887106" y="3932770"/>
               <a:ext cx="2039386" cy="120152"/>
             </a:xfrm>
             <a:prstGeom prst="rect">
